--- a/fig/class_diagram.pptx
+++ b/fig/class_diagram.pptx
@@ -2,19 +2,19 @@
 <file path=ppt/presentation.xml><?xml version="1.0" encoding="utf-8"?>
 <p:presentation xmlns:a="http://schemas.openxmlformats.org/drawingml/2006/main" xmlns:r="http://schemas.openxmlformats.org/officeDocument/2006/relationships" xmlns:p="http://schemas.openxmlformats.org/presentationml/2006/main" saveSubsetFonts="1">
   <p:sldMasterIdLst>
-    <p:sldMasterId id="2147483648" r:id="rId1"/>
+    <p:sldMasterId id="2147483660" r:id="rId1"/>
   </p:sldMasterIdLst>
   <p:sldIdLst>
     <p:sldId id="256" r:id="rId2"/>
   </p:sldIdLst>
-  <p:sldSz cx="12192000" cy="6858000"/>
+  <p:sldSz cx="18000663" cy="6858000"/>
   <p:notesSz cx="6858000" cy="9144000"/>
   <p:defaultTextStyle>
     <a:defPPr>
-      <a:defRPr lang="ja-JP"/>
+      <a:defRPr lang="en-US"/>
     </a:defPPr>
-    <a:lvl1pPr marL="0" algn="l" defTabSz="914400" rtl="0" eaLnBrk="1" latinLnBrk="0" hangingPunct="1">
-      <a:defRPr kumimoji="1" sz="1800" kern="1200">
+    <a:lvl1pPr marL="0" algn="l" defTabSz="457200" rtl="0" eaLnBrk="1" latinLnBrk="0" hangingPunct="1">
+      <a:defRPr sz="1800" kern="1200">
         <a:solidFill>
           <a:schemeClr val="tx1"/>
         </a:solidFill>
@@ -23,8 +23,8 @@
         <a:cs typeface="+mn-cs"/>
       </a:defRPr>
     </a:lvl1pPr>
-    <a:lvl2pPr marL="457200" algn="l" defTabSz="914400" rtl="0" eaLnBrk="1" latinLnBrk="0" hangingPunct="1">
-      <a:defRPr kumimoji="1" sz="1800" kern="1200">
+    <a:lvl2pPr marL="457200" algn="l" defTabSz="457200" rtl="0" eaLnBrk="1" latinLnBrk="0" hangingPunct="1">
+      <a:defRPr sz="1800" kern="1200">
         <a:solidFill>
           <a:schemeClr val="tx1"/>
         </a:solidFill>
@@ -33,8 +33,8 @@
         <a:cs typeface="+mn-cs"/>
       </a:defRPr>
     </a:lvl2pPr>
-    <a:lvl3pPr marL="914400" algn="l" defTabSz="914400" rtl="0" eaLnBrk="1" latinLnBrk="0" hangingPunct="1">
-      <a:defRPr kumimoji="1" sz="1800" kern="1200">
+    <a:lvl3pPr marL="914400" algn="l" defTabSz="457200" rtl="0" eaLnBrk="1" latinLnBrk="0" hangingPunct="1">
+      <a:defRPr sz="1800" kern="1200">
         <a:solidFill>
           <a:schemeClr val="tx1"/>
         </a:solidFill>
@@ -43,8 +43,8 @@
         <a:cs typeface="+mn-cs"/>
       </a:defRPr>
     </a:lvl3pPr>
-    <a:lvl4pPr marL="1371600" algn="l" defTabSz="914400" rtl="0" eaLnBrk="1" latinLnBrk="0" hangingPunct="1">
-      <a:defRPr kumimoji="1" sz="1800" kern="1200">
+    <a:lvl4pPr marL="1371600" algn="l" defTabSz="457200" rtl="0" eaLnBrk="1" latinLnBrk="0" hangingPunct="1">
+      <a:defRPr sz="1800" kern="1200">
         <a:solidFill>
           <a:schemeClr val="tx1"/>
         </a:solidFill>
@@ -53,8 +53,8 @@
         <a:cs typeface="+mn-cs"/>
       </a:defRPr>
     </a:lvl4pPr>
-    <a:lvl5pPr marL="1828800" algn="l" defTabSz="914400" rtl="0" eaLnBrk="1" latinLnBrk="0" hangingPunct="1">
-      <a:defRPr kumimoji="1" sz="1800" kern="1200">
+    <a:lvl5pPr marL="1828800" algn="l" defTabSz="457200" rtl="0" eaLnBrk="1" latinLnBrk="0" hangingPunct="1">
+      <a:defRPr sz="1800" kern="1200">
         <a:solidFill>
           <a:schemeClr val="tx1"/>
         </a:solidFill>
@@ -63,8 +63,8 @@
         <a:cs typeface="+mn-cs"/>
       </a:defRPr>
     </a:lvl5pPr>
-    <a:lvl6pPr marL="2286000" algn="l" defTabSz="914400" rtl="0" eaLnBrk="1" latinLnBrk="0" hangingPunct="1">
-      <a:defRPr kumimoji="1" sz="1800" kern="1200">
+    <a:lvl6pPr marL="2286000" algn="l" defTabSz="457200" rtl="0" eaLnBrk="1" latinLnBrk="0" hangingPunct="1">
+      <a:defRPr sz="1800" kern="1200">
         <a:solidFill>
           <a:schemeClr val="tx1"/>
         </a:solidFill>
@@ -73,8 +73,8 @@
         <a:cs typeface="+mn-cs"/>
       </a:defRPr>
     </a:lvl6pPr>
-    <a:lvl7pPr marL="2743200" algn="l" defTabSz="914400" rtl="0" eaLnBrk="1" latinLnBrk="0" hangingPunct="1">
-      <a:defRPr kumimoji="1" sz="1800" kern="1200">
+    <a:lvl7pPr marL="2743200" algn="l" defTabSz="457200" rtl="0" eaLnBrk="1" latinLnBrk="0" hangingPunct="1">
+      <a:defRPr sz="1800" kern="1200">
         <a:solidFill>
           <a:schemeClr val="tx1"/>
         </a:solidFill>
@@ -83,8 +83,8 @@
         <a:cs typeface="+mn-cs"/>
       </a:defRPr>
     </a:lvl7pPr>
-    <a:lvl8pPr marL="3200400" algn="l" defTabSz="914400" rtl="0" eaLnBrk="1" latinLnBrk="0" hangingPunct="1">
-      <a:defRPr kumimoji="1" sz="1800" kern="1200">
+    <a:lvl8pPr marL="3200400" algn="l" defTabSz="457200" rtl="0" eaLnBrk="1" latinLnBrk="0" hangingPunct="1">
+      <a:defRPr sz="1800" kern="1200">
         <a:solidFill>
           <a:schemeClr val="tx1"/>
         </a:solidFill>
@@ -93,8 +93,8 @@
         <a:cs typeface="+mn-cs"/>
       </a:defRPr>
     </a:lvl8pPr>
-    <a:lvl9pPr marL="3657600" algn="l" defTabSz="914400" rtl="0" eaLnBrk="1" latinLnBrk="0" hangingPunct="1">
-      <a:defRPr kumimoji="1" sz="1800" kern="1200">
+    <a:lvl9pPr marL="3657600" algn="l" defTabSz="457200" rtl="0" eaLnBrk="1" latinLnBrk="0" hangingPunct="1">
+      <a:defRPr sz="1800" kern="1200">
         <a:solidFill>
           <a:schemeClr val="tx1"/>
         </a:solidFill>
@@ -104,6 +104,22 @@
       </a:defRPr>
     </a:lvl9pPr>
   </p:defaultTextStyle>
+  <p:extLst>
+    <p:ext uri="{EFAFB233-063F-42B5-8137-9DF3F51BA10A}">
+      <p15:sldGuideLst xmlns:p15="http://schemas.microsoft.com/office/powerpoint/2012/main">
+        <p15:guide id="1" orient="horz" pos="2137" userDrawn="1">
+          <p15:clr>
+            <a:srgbClr val="A4A3A4"/>
+          </p15:clr>
+        </p15:guide>
+        <p15:guide id="2" pos="5669" userDrawn="1">
+          <p15:clr>
+            <a:srgbClr val="A4A3A4"/>
+          </p15:clr>
+        </p15:guide>
+      </p15:sldGuideLst>
+    </p:ext>
+  </p:extLst>
 </p:presentation>
 </file>
 
@@ -126,13 +142,7 @@
       </p:grpSpPr>
       <p:sp>
         <p:nvSpPr>
-          <p:cNvPr id="2" name="タイトル 1">
-            <a:extLst>
-              <a:ext uri="{FF2B5EF4-FFF2-40B4-BE49-F238E27FC236}">
-                <a16:creationId xmlns:a16="http://schemas.microsoft.com/office/drawing/2014/main" id="{D47BEEE7-44F3-8A92-5F98-EB074EF95ABA}"/>
-              </a:ext>
-            </a:extLst>
-          </p:cNvPr>
+          <p:cNvPr id="2" name="Title 1"/>
           <p:cNvSpPr>
             <a:spLocks noGrp="1"/>
           </p:cNvSpPr>
@@ -142,8 +152,8 @@
         </p:nvSpPr>
         <p:spPr>
           <a:xfrm>
-            <a:off x="1524000" y="1122363"/>
-            <a:ext cx="9144000" cy="2387600"/>
+            <a:off x="2250083" y="1122363"/>
+            <a:ext cx="13500497" cy="2387600"/>
           </a:xfrm>
         </p:spPr>
         <p:txBody>
@@ -155,21 +165,16 @@
           </a:lstStyle>
           <a:p>
             <a:r>
-              <a:rPr kumimoji="1" lang="ja-JP" altLang="en-US"/>
+              <a:rPr lang="ja-JP" altLang="en-US"/>
               <a:t>マスター タイトルの書式設定</a:t>
             </a:r>
-          </a:p>
-        </p:txBody>
-      </p:sp>
-      <p:sp>
-        <p:nvSpPr>
-          <p:cNvPr id="3" name="字幕 2">
-            <a:extLst>
-              <a:ext uri="{FF2B5EF4-FFF2-40B4-BE49-F238E27FC236}">
-                <a16:creationId xmlns:a16="http://schemas.microsoft.com/office/drawing/2014/main" id="{48368911-B792-A955-26A2-206E3F46B25D}"/>
-              </a:ext>
-            </a:extLst>
-          </p:cNvPr>
+            <a:endParaRPr lang="en-US" dirty="0"/>
+          </a:p>
+        </p:txBody>
+      </p:sp>
+      <p:sp>
+        <p:nvSpPr>
+          <p:cNvPr id="3" name="Subtitle 2"/>
           <p:cNvSpPr>
             <a:spLocks noGrp="1"/>
           </p:cNvSpPr>
@@ -179,8 +184,8 @@
         </p:nvSpPr>
         <p:spPr>
           <a:xfrm>
-            <a:off x="1524000" y="3602038"/>
-            <a:ext cx="9144000" cy="1655762"/>
+            <a:off x="2250083" y="3602038"/>
+            <a:ext cx="13500497" cy="1655762"/>
           </a:xfrm>
         </p:spPr>
         <p:txBody>
@@ -225,21 +230,16 @@
           </a:lstStyle>
           <a:p>
             <a:r>
-              <a:rPr kumimoji="1" lang="ja-JP" altLang="en-US"/>
+              <a:rPr lang="ja-JP" altLang="en-US"/>
               <a:t>マスター サブタイトルの書式設定</a:t>
             </a:r>
-          </a:p>
-        </p:txBody>
-      </p:sp>
-      <p:sp>
-        <p:nvSpPr>
-          <p:cNvPr id="4" name="日付プレースホルダー 3">
-            <a:extLst>
-              <a:ext uri="{FF2B5EF4-FFF2-40B4-BE49-F238E27FC236}">
-                <a16:creationId xmlns:a16="http://schemas.microsoft.com/office/drawing/2014/main" id="{2B387833-CCE8-5C05-5B29-854503F821BE}"/>
-              </a:ext>
-            </a:extLst>
-          </p:cNvPr>
+            <a:endParaRPr lang="en-US" dirty="0"/>
+          </a:p>
+        </p:txBody>
+      </p:sp>
+      <p:sp>
+        <p:nvSpPr>
+          <p:cNvPr id="4" name="Date Placeholder 3"/>
           <p:cNvSpPr>
             <a:spLocks noGrp="1"/>
           </p:cNvSpPr>
@@ -262,13 +262,7 @@
       </p:sp>
       <p:sp>
         <p:nvSpPr>
-          <p:cNvPr id="5" name="フッター プレースホルダー 4">
-            <a:extLst>
-              <a:ext uri="{FF2B5EF4-FFF2-40B4-BE49-F238E27FC236}">
-                <a16:creationId xmlns:a16="http://schemas.microsoft.com/office/drawing/2014/main" id="{E86CE667-F917-8963-746F-7D312618D549}"/>
-              </a:ext>
-            </a:extLst>
-          </p:cNvPr>
+          <p:cNvPr id="5" name="Footer Placeholder 4"/>
           <p:cNvSpPr>
             <a:spLocks noGrp="1"/>
           </p:cNvSpPr>
@@ -287,13 +281,7 @@
       </p:sp>
       <p:sp>
         <p:nvSpPr>
-          <p:cNvPr id="6" name="スライド番号プレースホルダー 5">
-            <a:extLst>
-              <a:ext uri="{FF2B5EF4-FFF2-40B4-BE49-F238E27FC236}">
-                <a16:creationId xmlns:a16="http://schemas.microsoft.com/office/drawing/2014/main" id="{9B3D12EB-3D3F-75EF-2B36-EE5060177943}"/>
-              </a:ext>
-            </a:extLst>
-          </p:cNvPr>
+          <p:cNvPr id="6" name="Slide Number Placeholder 5"/>
           <p:cNvSpPr>
             <a:spLocks noGrp="1"/>
           </p:cNvSpPr>
@@ -317,7 +305,7 @@
     </p:spTree>
     <p:extLst>
       <p:ext uri="{BB962C8B-B14F-4D97-AF65-F5344CB8AC3E}">
-        <p14:creationId xmlns:p14="http://schemas.microsoft.com/office/powerpoint/2010/main" val="571153412"/>
+        <p14:creationId xmlns:p14="http://schemas.microsoft.com/office/powerpoint/2010/main" val="3682580600"/>
       </p:ext>
     </p:extLst>
   </p:cSld>
@@ -346,13 +334,7 @@
       </p:grpSpPr>
       <p:sp>
         <p:nvSpPr>
-          <p:cNvPr id="2" name="タイトル 1">
-            <a:extLst>
-              <a:ext uri="{FF2B5EF4-FFF2-40B4-BE49-F238E27FC236}">
-                <a16:creationId xmlns:a16="http://schemas.microsoft.com/office/drawing/2014/main" id="{971F1EE3-E2D3-E695-595D-A7AAF02BEE99}"/>
-              </a:ext>
-            </a:extLst>
-          </p:cNvPr>
+          <p:cNvPr id="2" name="Title 1"/>
           <p:cNvSpPr>
             <a:spLocks noGrp="1"/>
           </p:cNvSpPr>
@@ -366,21 +348,16 @@
           <a:lstStyle/>
           <a:p>
             <a:r>
-              <a:rPr kumimoji="1" lang="ja-JP" altLang="en-US"/>
+              <a:rPr lang="ja-JP" altLang="en-US"/>
               <a:t>マスター タイトルの書式設定</a:t>
             </a:r>
-          </a:p>
-        </p:txBody>
-      </p:sp>
-      <p:sp>
-        <p:nvSpPr>
-          <p:cNvPr id="3" name="縦書きテキスト プレースホルダー 2">
-            <a:extLst>
-              <a:ext uri="{FF2B5EF4-FFF2-40B4-BE49-F238E27FC236}">
-                <a16:creationId xmlns:a16="http://schemas.microsoft.com/office/drawing/2014/main" id="{52347976-5843-070C-3FDE-B38DD1AC1C11}"/>
-              </a:ext>
-            </a:extLst>
-          </p:cNvPr>
+            <a:endParaRPr lang="en-US" dirty="0"/>
+          </a:p>
+        </p:txBody>
+      </p:sp>
+      <p:sp>
+        <p:nvSpPr>
+          <p:cNvPr id="3" name="Vertical Text Placeholder 2"/>
           <p:cNvSpPr>
             <a:spLocks noGrp="1"/>
           </p:cNvSpPr>
@@ -395,81 +372,76 @@
           <a:p>
             <a:pPr lvl="0"/>
             <a:r>
-              <a:rPr kumimoji="1" lang="ja-JP" altLang="en-US"/>
+              <a:rPr lang="ja-JP" altLang="en-US"/>
               <a:t>マスター テキストの書式設定</a:t>
             </a:r>
           </a:p>
           <a:p>
             <a:pPr lvl="1"/>
             <a:r>
-              <a:rPr kumimoji="1" lang="ja-JP" altLang="en-US"/>
+              <a:rPr lang="ja-JP" altLang="en-US"/>
               <a:t>第 </a:t>
             </a:r>
             <a:r>
-              <a:rPr kumimoji="1" lang="en-US" altLang="ja-JP"/>
+              <a:rPr lang="en-US" altLang="ja-JP"/>
               <a:t>2 </a:t>
             </a:r>
             <a:r>
-              <a:rPr kumimoji="1" lang="ja-JP" altLang="en-US"/>
+              <a:rPr lang="ja-JP" altLang="en-US"/>
               <a:t>レベル</a:t>
             </a:r>
           </a:p>
           <a:p>
             <a:pPr lvl="2"/>
             <a:r>
-              <a:rPr kumimoji="1" lang="ja-JP" altLang="en-US"/>
+              <a:rPr lang="ja-JP" altLang="en-US"/>
               <a:t>第 </a:t>
             </a:r>
             <a:r>
-              <a:rPr kumimoji="1" lang="en-US" altLang="ja-JP"/>
+              <a:rPr lang="en-US" altLang="ja-JP"/>
               <a:t>3 </a:t>
             </a:r>
             <a:r>
-              <a:rPr kumimoji="1" lang="ja-JP" altLang="en-US"/>
+              <a:rPr lang="ja-JP" altLang="en-US"/>
               <a:t>レベル</a:t>
             </a:r>
           </a:p>
           <a:p>
             <a:pPr lvl="3"/>
             <a:r>
-              <a:rPr kumimoji="1" lang="ja-JP" altLang="en-US"/>
+              <a:rPr lang="ja-JP" altLang="en-US"/>
               <a:t>第 </a:t>
             </a:r>
             <a:r>
-              <a:rPr kumimoji="1" lang="en-US" altLang="ja-JP"/>
+              <a:rPr lang="en-US" altLang="ja-JP"/>
               <a:t>4 </a:t>
             </a:r>
             <a:r>
-              <a:rPr kumimoji="1" lang="ja-JP" altLang="en-US"/>
+              <a:rPr lang="ja-JP" altLang="en-US"/>
               <a:t>レベル</a:t>
             </a:r>
           </a:p>
           <a:p>
             <a:pPr lvl="4"/>
             <a:r>
-              <a:rPr kumimoji="1" lang="ja-JP" altLang="en-US"/>
+              <a:rPr lang="ja-JP" altLang="en-US"/>
               <a:t>第 </a:t>
             </a:r>
             <a:r>
-              <a:rPr kumimoji="1" lang="en-US" altLang="ja-JP"/>
+              <a:rPr lang="en-US" altLang="ja-JP"/>
               <a:t>5 </a:t>
             </a:r>
             <a:r>
-              <a:rPr kumimoji="1" lang="ja-JP" altLang="en-US"/>
+              <a:rPr lang="ja-JP" altLang="en-US"/>
               <a:t>レベル</a:t>
             </a:r>
-          </a:p>
-        </p:txBody>
-      </p:sp>
-      <p:sp>
-        <p:nvSpPr>
-          <p:cNvPr id="4" name="日付プレースホルダー 3">
-            <a:extLst>
-              <a:ext uri="{FF2B5EF4-FFF2-40B4-BE49-F238E27FC236}">
-                <a16:creationId xmlns:a16="http://schemas.microsoft.com/office/drawing/2014/main" id="{8902CD72-09C1-C767-C671-88280D7589F1}"/>
-              </a:ext>
-            </a:extLst>
-          </p:cNvPr>
+            <a:endParaRPr lang="en-US" dirty="0"/>
+          </a:p>
+        </p:txBody>
+      </p:sp>
+      <p:sp>
+        <p:nvSpPr>
+          <p:cNvPr id="4" name="Date Placeholder 3"/>
           <p:cNvSpPr>
             <a:spLocks noGrp="1"/>
           </p:cNvSpPr>
@@ -492,13 +464,7 @@
       </p:sp>
       <p:sp>
         <p:nvSpPr>
-          <p:cNvPr id="5" name="フッター プレースホルダー 4">
-            <a:extLst>
-              <a:ext uri="{FF2B5EF4-FFF2-40B4-BE49-F238E27FC236}">
-                <a16:creationId xmlns:a16="http://schemas.microsoft.com/office/drawing/2014/main" id="{A8D82688-1587-EDFD-72DC-EA03CC75C805}"/>
-              </a:ext>
-            </a:extLst>
-          </p:cNvPr>
+          <p:cNvPr id="5" name="Footer Placeholder 4"/>
           <p:cNvSpPr>
             <a:spLocks noGrp="1"/>
           </p:cNvSpPr>
@@ -517,13 +483,7 @@
       </p:sp>
       <p:sp>
         <p:nvSpPr>
-          <p:cNvPr id="6" name="スライド番号プレースホルダー 5">
-            <a:extLst>
-              <a:ext uri="{FF2B5EF4-FFF2-40B4-BE49-F238E27FC236}">
-                <a16:creationId xmlns:a16="http://schemas.microsoft.com/office/drawing/2014/main" id="{F13C1765-5C7A-5A16-1CCA-4BE6F02D3F94}"/>
-              </a:ext>
-            </a:extLst>
-          </p:cNvPr>
+          <p:cNvPr id="6" name="Slide Number Placeholder 5"/>
           <p:cNvSpPr>
             <a:spLocks noGrp="1"/>
           </p:cNvSpPr>
@@ -547,7 +507,7 @@
     </p:spTree>
     <p:extLst>
       <p:ext uri="{BB962C8B-B14F-4D97-AF65-F5344CB8AC3E}">
-        <p14:creationId xmlns:p14="http://schemas.microsoft.com/office/powerpoint/2010/main" val="3005276095"/>
+        <p14:creationId xmlns:p14="http://schemas.microsoft.com/office/powerpoint/2010/main" val="3463892010"/>
       </p:ext>
     </p:extLst>
   </p:cSld>
@@ -576,13 +536,7 @@
       </p:grpSpPr>
       <p:sp>
         <p:nvSpPr>
-          <p:cNvPr id="2" name="縦書きタイトル 1">
-            <a:extLst>
-              <a:ext uri="{FF2B5EF4-FFF2-40B4-BE49-F238E27FC236}">
-                <a16:creationId xmlns:a16="http://schemas.microsoft.com/office/drawing/2014/main" id="{8866426B-0AB6-D81A-0D69-F6A8B9A12E3F}"/>
-              </a:ext>
-            </a:extLst>
-          </p:cNvPr>
+          <p:cNvPr id="2" name="Vertical Title 1"/>
           <p:cNvSpPr>
             <a:spLocks noGrp="1"/>
           </p:cNvSpPr>
@@ -592,8 +546,8 @@
         </p:nvSpPr>
         <p:spPr>
           <a:xfrm>
-            <a:off x="8724900" y="365125"/>
-            <a:ext cx="2628900" cy="5811838"/>
+            <a:off x="12881724" y="365125"/>
+            <a:ext cx="3881393" cy="5811838"/>
           </a:xfrm>
         </p:spPr>
         <p:txBody>
@@ -601,21 +555,16 @@
           <a:lstStyle/>
           <a:p>
             <a:r>
-              <a:rPr kumimoji="1" lang="ja-JP" altLang="en-US"/>
+              <a:rPr lang="ja-JP" altLang="en-US"/>
               <a:t>マスター タイトルの書式設定</a:t>
             </a:r>
-          </a:p>
-        </p:txBody>
-      </p:sp>
-      <p:sp>
-        <p:nvSpPr>
-          <p:cNvPr id="3" name="縦書きテキスト プレースホルダー 2">
-            <a:extLst>
-              <a:ext uri="{FF2B5EF4-FFF2-40B4-BE49-F238E27FC236}">
-                <a16:creationId xmlns:a16="http://schemas.microsoft.com/office/drawing/2014/main" id="{B338BEA8-A812-1A41-4517-6D38470BEAA3}"/>
-              </a:ext>
-            </a:extLst>
-          </p:cNvPr>
+            <a:endParaRPr lang="en-US" dirty="0"/>
+          </a:p>
+        </p:txBody>
+      </p:sp>
+      <p:sp>
+        <p:nvSpPr>
+          <p:cNvPr id="3" name="Vertical Text Placeholder 2"/>
           <p:cNvSpPr>
             <a:spLocks noGrp="1"/>
           </p:cNvSpPr>
@@ -625,8 +574,8 @@
         </p:nvSpPr>
         <p:spPr>
           <a:xfrm>
-            <a:off x="838200" y="365125"/>
-            <a:ext cx="7734300" cy="5811838"/>
+            <a:off x="1237545" y="365125"/>
+            <a:ext cx="11419171" cy="5811838"/>
           </a:xfrm>
         </p:spPr>
         <p:txBody>
@@ -635,81 +584,76 @@
           <a:p>
             <a:pPr lvl="0"/>
             <a:r>
-              <a:rPr kumimoji="1" lang="ja-JP" altLang="en-US"/>
+              <a:rPr lang="ja-JP" altLang="en-US"/>
               <a:t>マスター テキストの書式設定</a:t>
             </a:r>
           </a:p>
           <a:p>
             <a:pPr lvl="1"/>
             <a:r>
-              <a:rPr kumimoji="1" lang="ja-JP" altLang="en-US"/>
+              <a:rPr lang="ja-JP" altLang="en-US"/>
               <a:t>第 </a:t>
             </a:r>
             <a:r>
-              <a:rPr kumimoji="1" lang="en-US" altLang="ja-JP"/>
+              <a:rPr lang="en-US" altLang="ja-JP"/>
               <a:t>2 </a:t>
             </a:r>
             <a:r>
-              <a:rPr kumimoji="1" lang="ja-JP" altLang="en-US"/>
+              <a:rPr lang="ja-JP" altLang="en-US"/>
               <a:t>レベル</a:t>
             </a:r>
           </a:p>
           <a:p>
             <a:pPr lvl="2"/>
             <a:r>
-              <a:rPr kumimoji="1" lang="ja-JP" altLang="en-US"/>
+              <a:rPr lang="ja-JP" altLang="en-US"/>
               <a:t>第 </a:t>
             </a:r>
             <a:r>
-              <a:rPr kumimoji="1" lang="en-US" altLang="ja-JP"/>
+              <a:rPr lang="en-US" altLang="ja-JP"/>
               <a:t>3 </a:t>
             </a:r>
             <a:r>
-              <a:rPr kumimoji="1" lang="ja-JP" altLang="en-US"/>
+              <a:rPr lang="ja-JP" altLang="en-US"/>
               <a:t>レベル</a:t>
             </a:r>
           </a:p>
           <a:p>
             <a:pPr lvl="3"/>
             <a:r>
-              <a:rPr kumimoji="1" lang="ja-JP" altLang="en-US"/>
+              <a:rPr lang="ja-JP" altLang="en-US"/>
               <a:t>第 </a:t>
             </a:r>
             <a:r>
-              <a:rPr kumimoji="1" lang="en-US" altLang="ja-JP"/>
+              <a:rPr lang="en-US" altLang="ja-JP"/>
               <a:t>4 </a:t>
             </a:r>
             <a:r>
-              <a:rPr kumimoji="1" lang="ja-JP" altLang="en-US"/>
+              <a:rPr lang="ja-JP" altLang="en-US"/>
               <a:t>レベル</a:t>
             </a:r>
           </a:p>
           <a:p>
             <a:pPr lvl="4"/>
             <a:r>
-              <a:rPr kumimoji="1" lang="ja-JP" altLang="en-US"/>
+              <a:rPr lang="ja-JP" altLang="en-US"/>
               <a:t>第 </a:t>
             </a:r>
             <a:r>
-              <a:rPr kumimoji="1" lang="en-US" altLang="ja-JP"/>
+              <a:rPr lang="en-US" altLang="ja-JP"/>
               <a:t>5 </a:t>
             </a:r>
             <a:r>
-              <a:rPr kumimoji="1" lang="ja-JP" altLang="en-US"/>
+              <a:rPr lang="ja-JP" altLang="en-US"/>
               <a:t>レベル</a:t>
             </a:r>
-          </a:p>
-        </p:txBody>
-      </p:sp>
-      <p:sp>
-        <p:nvSpPr>
-          <p:cNvPr id="4" name="日付プレースホルダー 3">
-            <a:extLst>
-              <a:ext uri="{FF2B5EF4-FFF2-40B4-BE49-F238E27FC236}">
-                <a16:creationId xmlns:a16="http://schemas.microsoft.com/office/drawing/2014/main" id="{D8B66F98-3224-4CF1-E9ED-8F1DE337CD40}"/>
-              </a:ext>
-            </a:extLst>
-          </p:cNvPr>
+            <a:endParaRPr lang="en-US" dirty="0"/>
+          </a:p>
+        </p:txBody>
+      </p:sp>
+      <p:sp>
+        <p:nvSpPr>
+          <p:cNvPr id="4" name="Date Placeholder 3"/>
           <p:cNvSpPr>
             <a:spLocks noGrp="1"/>
           </p:cNvSpPr>
@@ -732,13 +676,7 @@
       </p:sp>
       <p:sp>
         <p:nvSpPr>
-          <p:cNvPr id="5" name="フッター プレースホルダー 4">
-            <a:extLst>
-              <a:ext uri="{FF2B5EF4-FFF2-40B4-BE49-F238E27FC236}">
-                <a16:creationId xmlns:a16="http://schemas.microsoft.com/office/drawing/2014/main" id="{7F7C7481-91D6-2D81-6508-7B73AAFC0BB9}"/>
-              </a:ext>
-            </a:extLst>
-          </p:cNvPr>
+          <p:cNvPr id="5" name="Footer Placeholder 4"/>
           <p:cNvSpPr>
             <a:spLocks noGrp="1"/>
           </p:cNvSpPr>
@@ -757,13 +695,7 @@
       </p:sp>
       <p:sp>
         <p:nvSpPr>
-          <p:cNvPr id="6" name="スライド番号プレースホルダー 5">
-            <a:extLst>
-              <a:ext uri="{FF2B5EF4-FFF2-40B4-BE49-F238E27FC236}">
-                <a16:creationId xmlns:a16="http://schemas.microsoft.com/office/drawing/2014/main" id="{19C2F796-A8AE-8E1D-928D-5EEE82588A73}"/>
-              </a:ext>
-            </a:extLst>
-          </p:cNvPr>
+          <p:cNvPr id="6" name="Slide Number Placeholder 5"/>
           <p:cNvSpPr>
             <a:spLocks noGrp="1"/>
           </p:cNvSpPr>
@@ -787,7 +719,7 @@
     </p:spTree>
     <p:extLst>
       <p:ext uri="{BB962C8B-B14F-4D97-AF65-F5344CB8AC3E}">
-        <p14:creationId xmlns:p14="http://schemas.microsoft.com/office/powerpoint/2010/main" val="257084662"/>
+        <p14:creationId xmlns:p14="http://schemas.microsoft.com/office/powerpoint/2010/main" val="651759666"/>
       </p:ext>
     </p:extLst>
   </p:cSld>
@@ -816,13 +748,7 @@
       </p:grpSpPr>
       <p:sp>
         <p:nvSpPr>
-          <p:cNvPr id="2" name="タイトル 1">
-            <a:extLst>
-              <a:ext uri="{FF2B5EF4-FFF2-40B4-BE49-F238E27FC236}">
-                <a16:creationId xmlns:a16="http://schemas.microsoft.com/office/drawing/2014/main" id="{64184996-3972-69EA-F5E2-62D1E01E2E02}"/>
-              </a:ext>
-            </a:extLst>
-          </p:cNvPr>
+          <p:cNvPr id="2" name="Title 1"/>
           <p:cNvSpPr>
             <a:spLocks noGrp="1"/>
           </p:cNvSpPr>
@@ -836,21 +762,16 @@
           <a:lstStyle/>
           <a:p>
             <a:r>
-              <a:rPr kumimoji="1" lang="ja-JP" altLang="en-US"/>
+              <a:rPr lang="ja-JP" altLang="en-US"/>
               <a:t>マスター タイトルの書式設定</a:t>
             </a:r>
-          </a:p>
-        </p:txBody>
-      </p:sp>
-      <p:sp>
-        <p:nvSpPr>
-          <p:cNvPr id="3" name="コンテンツ プレースホルダー 2">
-            <a:extLst>
-              <a:ext uri="{FF2B5EF4-FFF2-40B4-BE49-F238E27FC236}">
-                <a16:creationId xmlns:a16="http://schemas.microsoft.com/office/drawing/2014/main" id="{90C10537-D68C-AD2F-EA8B-FDA4597F3267}"/>
-              </a:ext>
-            </a:extLst>
-          </p:cNvPr>
+            <a:endParaRPr lang="en-US" dirty="0"/>
+          </a:p>
+        </p:txBody>
+      </p:sp>
+      <p:sp>
+        <p:nvSpPr>
+          <p:cNvPr id="3" name="Content Placeholder 2"/>
           <p:cNvSpPr>
             <a:spLocks noGrp="1"/>
           </p:cNvSpPr>
@@ -865,81 +786,76 @@
           <a:p>
             <a:pPr lvl="0"/>
             <a:r>
-              <a:rPr kumimoji="1" lang="ja-JP" altLang="en-US"/>
+              <a:rPr lang="ja-JP" altLang="en-US"/>
               <a:t>マスター テキストの書式設定</a:t>
             </a:r>
           </a:p>
           <a:p>
             <a:pPr lvl="1"/>
             <a:r>
-              <a:rPr kumimoji="1" lang="ja-JP" altLang="en-US"/>
+              <a:rPr lang="ja-JP" altLang="en-US"/>
               <a:t>第 </a:t>
             </a:r>
             <a:r>
-              <a:rPr kumimoji="1" lang="en-US" altLang="ja-JP"/>
+              <a:rPr lang="en-US" altLang="ja-JP"/>
               <a:t>2 </a:t>
             </a:r>
             <a:r>
-              <a:rPr kumimoji="1" lang="ja-JP" altLang="en-US"/>
+              <a:rPr lang="ja-JP" altLang="en-US"/>
               <a:t>レベル</a:t>
             </a:r>
           </a:p>
           <a:p>
             <a:pPr lvl="2"/>
             <a:r>
-              <a:rPr kumimoji="1" lang="ja-JP" altLang="en-US"/>
+              <a:rPr lang="ja-JP" altLang="en-US"/>
               <a:t>第 </a:t>
             </a:r>
             <a:r>
-              <a:rPr kumimoji="1" lang="en-US" altLang="ja-JP"/>
+              <a:rPr lang="en-US" altLang="ja-JP"/>
               <a:t>3 </a:t>
             </a:r>
             <a:r>
-              <a:rPr kumimoji="1" lang="ja-JP" altLang="en-US"/>
+              <a:rPr lang="ja-JP" altLang="en-US"/>
               <a:t>レベル</a:t>
             </a:r>
           </a:p>
           <a:p>
             <a:pPr lvl="3"/>
             <a:r>
-              <a:rPr kumimoji="1" lang="ja-JP" altLang="en-US"/>
+              <a:rPr lang="ja-JP" altLang="en-US"/>
               <a:t>第 </a:t>
             </a:r>
             <a:r>
-              <a:rPr kumimoji="1" lang="en-US" altLang="ja-JP"/>
+              <a:rPr lang="en-US" altLang="ja-JP"/>
               <a:t>4 </a:t>
             </a:r>
             <a:r>
-              <a:rPr kumimoji="1" lang="ja-JP" altLang="en-US"/>
+              <a:rPr lang="ja-JP" altLang="en-US"/>
               <a:t>レベル</a:t>
             </a:r>
           </a:p>
           <a:p>
             <a:pPr lvl="4"/>
             <a:r>
-              <a:rPr kumimoji="1" lang="ja-JP" altLang="en-US"/>
+              <a:rPr lang="ja-JP" altLang="en-US"/>
               <a:t>第 </a:t>
             </a:r>
             <a:r>
-              <a:rPr kumimoji="1" lang="en-US" altLang="ja-JP"/>
+              <a:rPr lang="en-US" altLang="ja-JP"/>
               <a:t>5 </a:t>
             </a:r>
             <a:r>
-              <a:rPr kumimoji="1" lang="ja-JP" altLang="en-US"/>
+              <a:rPr lang="ja-JP" altLang="en-US"/>
               <a:t>レベル</a:t>
             </a:r>
-          </a:p>
-        </p:txBody>
-      </p:sp>
-      <p:sp>
-        <p:nvSpPr>
-          <p:cNvPr id="4" name="日付プレースホルダー 3">
-            <a:extLst>
-              <a:ext uri="{FF2B5EF4-FFF2-40B4-BE49-F238E27FC236}">
-                <a16:creationId xmlns:a16="http://schemas.microsoft.com/office/drawing/2014/main" id="{1A9F44B1-3B6F-BF49-B874-1325823EB9EC}"/>
-              </a:ext>
-            </a:extLst>
-          </p:cNvPr>
+            <a:endParaRPr lang="en-US" dirty="0"/>
+          </a:p>
+        </p:txBody>
+      </p:sp>
+      <p:sp>
+        <p:nvSpPr>
+          <p:cNvPr id="4" name="Date Placeholder 3"/>
           <p:cNvSpPr>
             <a:spLocks noGrp="1"/>
           </p:cNvSpPr>
@@ -962,13 +878,7 @@
       </p:sp>
       <p:sp>
         <p:nvSpPr>
-          <p:cNvPr id="5" name="フッター プレースホルダー 4">
-            <a:extLst>
-              <a:ext uri="{FF2B5EF4-FFF2-40B4-BE49-F238E27FC236}">
-                <a16:creationId xmlns:a16="http://schemas.microsoft.com/office/drawing/2014/main" id="{CDA698AD-D81D-8772-DAF6-ACF6634756A1}"/>
-              </a:ext>
-            </a:extLst>
-          </p:cNvPr>
+          <p:cNvPr id="5" name="Footer Placeholder 4"/>
           <p:cNvSpPr>
             <a:spLocks noGrp="1"/>
           </p:cNvSpPr>
@@ -987,13 +897,7 @@
       </p:sp>
       <p:sp>
         <p:nvSpPr>
-          <p:cNvPr id="6" name="スライド番号プレースホルダー 5">
-            <a:extLst>
-              <a:ext uri="{FF2B5EF4-FFF2-40B4-BE49-F238E27FC236}">
-                <a16:creationId xmlns:a16="http://schemas.microsoft.com/office/drawing/2014/main" id="{61C2081B-9C71-58B6-FB2F-BD6EAAE34C32}"/>
-              </a:ext>
-            </a:extLst>
-          </p:cNvPr>
+          <p:cNvPr id="6" name="Slide Number Placeholder 5"/>
           <p:cNvSpPr>
             <a:spLocks noGrp="1"/>
           </p:cNvSpPr>
@@ -1017,7 +921,7 @@
     </p:spTree>
     <p:extLst>
       <p:ext uri="{BB962C8B-B14F-4D97-AF65-F5344CB8AC3E}">
-        <p14:creationId xmlns:p14="http://schemas.microsoft.com/office/powerpoint/2010/main" val="3909566964"/>
+        <p14:creationId xmlns:p14="http://schemas.microsoft.com/office/powerpoint/2010/main" val="350092738"/>
       </p:ext>
     </p:extLst>
   </p:cSld>
@@ -1046,13 +950,7 @@
       </p:grpSpPr>
       <p:sp>
         <p:nvSpPr>
-          <p:cNvPr id="2" name="タイトル 1">
-            <a:extLst>
-              <a:ext uri="{FF2B5EF4-FFF2-40B4-BE49-F238E27FC236}">
-                <a16:creationId xmlns:a16="http://schemas.microsoft.com/office/drawing/2014/main" id="{2775BACA-8F6D-175E-AEFD-2F01738C7C9A}"/>
-              </a:ext>
-            </a:extLst>
-          </p:cNvPr>
+          <p:cNvPr id="2" name="Title 1"/>
           <p:cNvSpPr>
             <a:spLocks noGrp="1"/>
           </p:cNvSpPr>
@@ -1062,8 +960,8 @@
         </p:nvSpPr>
         <p:spPr>
           <a:xfrm>
-            <a:off x="831850" y="1709738"/>
-            <a:ext cx="10515600" cy="2852737"/>
+            <a:off x="1228170" y="1709739"/>
+            <a:ext cx="15525572" cy="2852737"/>
           </a:xfrm>
         </p:spPr>
         <p:txBody>
@@ -1075,21 +973,16 @@
           </a:lstStyle>
           <a:p>
             <a:r>
-              <a:rPr kumimoji="1" lang="ja-JP" altLang="en-US"/>
+              <a:rPr lang="ja-JP" altLang="en-US"/>
               <a:t>マスター タイトルの書式設定</a:t>
             </a:r>
-          </a:p>
-        </p:txBody>
-      </p:sp>
-      <p:sp>
-        <p:nvSpPr>
-          <p:cNvPr id="3" name="テキスト プレースホルダー 2">
-            <a:extLst>
-              <a:ext uri="{FF2B5EF4-FFF2-40B4-BE49-F238E27FC236}">
-                <a16:creationId xmlns:a16="http://schemas.microsoft.com/office/drawing/2014/main" id="{A551A8C8-EB95-82CF-9717-593135AC80E9}"/>
-              </a:ext>
-            </a:extLst>
-          </p:cNvPr>
+            <a:endParaRPr lang="en-US" dirty="0"/>
+          </a:p>
+        </p:txBody>
+      </p:sp>
+      <p:sp>
+        <p:nvSpPr>
+          <p:cNvPr id="3" name="Text Placeholder 2"/>
           <p:cNvSpPr>
             <a:spLocks noGrp="1"/>
           </p:cNvSpPr>
@@ -1099,8 +992,8 @@
         </p:nvSpPr>
         <p:spPr>
           <a:xfrm>
-            <a:off x="831850" y="4589463"/>
-            <a:ext cx="10515600" cy="1500187"/>
+            <a:off x="1228170" y="4589464"/>
+            <a:ext cx="15525572" cy="1500187"/>
           </a:xfrm>
         </p:spPr>
         <p:txBody>
@@ -1200,7 +1093,7 @@
           <a:p>
             <a:pPr lvl="0"/>
             <a:r>
-              <a:rPr kumimoji="1" lang="ja-JP" altLang="en-US"/>
+              <a:rPr lang="ja-JP" altLang="en-US"/>
               <a:t>マスター テキストの書式設定</a:t>
             </a:r>
           </a:p>
@@ -1208,13 +1101,7 @@
       </p:sp>
       <p:sp>
         <p:nvSpPr>
-          <p:cNvPr id="4" name="日付プレースホルダー 3">
-            <a:extLst>
-              <a:ext uri="{FF2B5EF4-FFF2-40B4-BE49-F238E27FC236}">
-                <a16:creationId xmlns:a16="http://schemas.microsoft.com/office/drawing/2014/main" id="{AE25A12D-DF1D-CD8D-E77C-0B33838DA124}"/>
-              </a:ext>
-            </a:extLst>
-          </p:cNvPr>
+          <p:cNvPr id="4" name="Date Placeholder 3"/>
           <p:cNvSpPr>
             <a:spLocks noGrp="1"/>
           </p:cNvSpPr>
@@ -1237,13 +1124,7 @@
       </p:sp>
       <p:sp>
         <p:nvSpPr>
-          <p:cNvPr id="5" name="フッター プレースホルダー 4">
-            <a:extLst>
-              <a:ext uri="{FF2B5EF4-FFF2-40B4-BE49-F238E27FC236}">
-                <a16:creationId xmlns:a16="http://schemas.microsoft.com/office/drawing/2014/main" id="{411E262B-1D86-7415-30EF-4C6812256E5A}"/>
-              </a:ext>
-            </a:extLst>
-          </p:cNvPr>
+          <p:cNvPr id="5" name="Footer Placeholder 4"/>
           <p:cNvSpPr>
             <a:spLocks noGrp="1"/>
           </p:cNvSpPr>
@@ -1262,13 +1143,7 @@
       </p:sp>
       <p:sp>
         <p:nvSpPr>
-          <p:cNvPr id="6" name="スライド番号プレースホルダー 5">
-            <a:extLst>
-              <a:ext uri="{FF2B5EF4-FFF2-40B4-BE49-F238E27FC236}">
-                <a16:creationId xmlns:a16="http://schemas.microsoft.com/office/drawing/2014/main" id="{AFA68428-EA5E-0FD0-F03B-57E6CE9B7611}"/>
-              </a:ext>
-            </a:extLst>
-          </p:cNvPr>
+          <p:cNvPr id="6" name="Slide Number Placeholder 5"/>
           <p:cNvSpPr>
             <a:spLocks noGrp="1"/>
           </p:cNvSpPr>
@@ -1292,7 +1167,7 @@
     </p:spTree>
     <p:extLst>
       <p:ext uri="{BB962C8B-B14F-4D97-AF65-F5344CB8AC3E}">
-        <p14:creationId xmlns:p14="http://schemas.microsoft.com/office/powerpoint/2010/main" val="139946547"/>
+        <p14:creationId xmlns:p14="http://schemas.microsoft.com/office/powerpoint/2010/main" val="4193875253"/>
       </p:ext>
     </p:extLst>
   </p:cSld>
@@ -1321,13 +1196,7 @@
       </p:grpSpPr>
       <p:sp>
         <p:nvSpPr>
-          <p:cNvPr id="2" name="タイトル 1">
-            <a:extLst>
-              <a:ext uri="{FF2B5EF4-FFF2-40B4-BE49-F238E27FC236}">
-                <a16:creationId xmlns:a16="http://schemas.microsoft.com/office/drawing/2014/main" id="{609B57C7-8F8B-F767-25B1-1A2FEB80911F}"/>
-              </a:ext>
-            </a:extLst>
-          </p:cNvPr>
+          <p:cNvPr id="2" name="Title 1"/>
           <p:cNvSpPr>
             <a:spLocks noGrp="1"/>
           </p:cNvSpPr>
@@ -1341,21 +1210,16 @@
           <a:lstStyle/>
           <a:p>
             <a:r>
-              <a:rPr kumimoji="1" lang="ja-JP" altLang="en-US"/>
+              <a:rPr lang="ja-JP" altLang="en-US"/>
               <a:t>マスター タイトルの書式設定</a:t>
             </a:r>
-          </a:p>
-        </p:txBody>
-      </p:sp>
-      <p:sp>
-        <p:nvSpPr>
-          <p:cNvPr id="3" name="コンテンツ プレースホルダー 2">
-            <a:extLst>
-              <a:ext uri="{FF2B5EF4-FFF2-40B4-BE49-F238E27FC236}">
-                <a16:creationId xmlns:a16="http://schemas.microsoft.com/office/drawing/2014/main" id="{8BDA39C5-3E2A-5251-047D-F80B5FCF065A}"/>
-              </a:ext>
-            </a:extLst>
-          </p:cNvPr>
+            <a:endParaRPr lang="en-US" dirty="0"/>
+          </a:p>
+        </p:txBody>
+      </p:sp>
+      <p:sp>
+        <p:nvSpPr>
+          <p:cNvPr id="3" name="Content Placeholder 2"/>
           <p:cNvSpPr>
             <a:spLocks noGrp="1"/>
           </p:cNvSpPr>
@@ -1365,8 +1229,8 @@
         </p:nvSpPr>
         <p:spPr>
           <a:xfrm>
-            <a:off x="838200" y="1825625"/>
-            <a:ext cx="5181600" cy="4351338"/>
+            <a:off x="1237545" y="1825625"/>
+            <a:ext cx="7650282" cy="4351338"/>
           </a:xfrm>
         </p:spPr>
         <p:txBody>
@@ -1375,81 +1239,76 @@
           <a:p>
             <a:pPr lvl="0"/>
             <a:r>
-              <a:rPr kumimoji="1" lang="ja-JP" altLang="en-US"/>
+              <a:rPr lang="ja-JP" altLang="en-US"/>
               <a:t>マスター テキストの書式設定</a:t>
             </a:r>
           </a:p>
           <a:p>
             <a:pPr lvl="1"/>
             <a:r>
-              <a:rPr kumimoji="1" lang="ja-JP" altLang="en-US"/>
+              <a:rPr lang="ja-JP" altLang="en-US"/>
               <a:t>第 </a:t>
             </a:r>
             <a:r>
-              <a:rPr kumimoji="1" lang="en-US" altLang="ja-JP"/>
+              <a:rPr lang="en-US" altLang="ja-JP"/>
               <a:t>2 </a:t>
             </a:r>
             <a:r>
-              <a:rPr kumimoji="1" lang="ja-JP" altLang="en-US"/>
+              <a:rPr lang="ja-JP" altLang="en-US"/>
               <a:t>レベル</a:t>
             </a:r>
           </a:p>
           <a:p>
             <a:pPr lvl="2"/>
             <a:r>
-              <a:rPr kumimoji="1" lang="ja-JP" altLang="en-US"/>
+              <a:rPr lang="ja-JP" altLang="en-US"/>
               <a:t>第 </a:t>
             </a:r>
             <a:r>
-              <a:rPr kumimoji="1" lang="en-US" altLang="ja-JP"/>
+              <a:rPr lang="en-US" altLang="ja-JP"/>
               <a:t>3 </a:t>
             </a:r>
             <a:r>
-              <a:rPr kumimoji="1" lang="ja-JP" altLang="en-US"/>
+              <a:rPr lang="ja-JP" altLang="en-US"/>
               <a:t>レベル</a:t>
             </a:r>
           </a:p>
           <a:p>
             <a:pPr lvl="3"/>
             <a:r>
-              <a:rPr kumimoji="1" lang="ja-JP" altLang="en-US"/>
+              <a:rPr lang="ja-JP" altLang="en-US"/>
               <a:t>第 </a:t>
             </a:r>
             <a:r>
-              <a:rPr kumimoji="1" lang="en-US" altLang="ja-JP"/>
+              <a:rPr lang="en-US" altLang="ja-JP"/>
               <a:t>4 </a:t>
             </a:r>
             <a:r>
-              <a:rPr kumimoji="1" lang="ja-JP" altLang="en-US"/>
+              <a:rPr lang="ja-JP" altLang="en-US"/>
               <a:t>レベル</a:t>
             </a:r>
           </a:p>
           <a:p>
             <a:pPr lvl="4"/>
             <a:r>
-              <a:rPr kumimoji="1" lang="ja-JP" altLang="en-US"/>
+              <a:rPr lang="ja-JP" altLang="en-US"/>
               <a:t>第 </a:t>
             </a:r>
             <a:r>
-              <a:rPr kumimoji="1" lang="en-US" altLang="ja-JP"/>
+              <a:rPr lang="en-US" altLang="ja-JP"/>
               <a:t>5 </a:t>
             </a:r>
             <a:r>
-              <a:rPr kumimoji="1" lang="ja-JP" altLang="en-US"/>
+              <a:rPr lang="ja-JP" altLang="en-US"/>
               <a:t>レベル</a:t>
             </a:r>
-          </a:p>
-        </p:txBody>
-      </p:sp>
-      <p:sp>
-        <p:nvSpPr>
-          <p:cNvPr id="4" name="コンテンツ プレースホルダー 3">
-            <a:extLst>
-              <a:ext uri="{FF2B5EF4-FFF2-40B4-BE49-F238E27FC236}">
-                <a16:creationId xmlns:a16="http://schemas.microsoft.com/office/drawing/2014/main" id="{3065966F-B575-0AE1-B064-ED287FEFF1D3}"/>
-              </a:ext>
-            </a:extLst>
-          </p:cNvPr>
+            <a:endParaRPr lang="en-US" dirty="0"/>
+          </a:p>
+        </p:txBody>
+      </p:sp>
+      <p:sp>
+        <p:nvSpPr>
+          <p:cNvPr id="4" name="Content Placeholder 3"/>
           <p:cNvSpPr>
             <a:spLocks noGrp="1"/>
           </p:cNvSpPr>
@@ -1459,8 +1318,8 @@
         </p:nvSpPr>
         <p:spPr>
           <a:xfrm>
-            <a:off x="6172200" y="1825625"/>
-            <a:ext cx="5181600" cy="4351338"/>
+            <a:off x="9112836" y="1825625"/>
+            <a:ext cx="7650282" cy="4351338"/>
           </a:xfrm>
         </p:spPr>
         <p:txBody>
@@ -1469,81 +1328,76 @@
           <a:p>
             <a:pPr lvl="0"/>
             <a:r>
-              <a:rPr kumimoji="1" lang="ja-JP" altLang="en-US"/>
+              <a:rPr lang="ja-JP" altLang="en-US"/>
               <a:t>マスター テキストの書式設定</a:t>
             </a:r>
           </a:p>
           <a:p>
             <a:pPr lvl="1"/>
             <a:r>
-              <a:rPr kumimoji="1" lang="ja-JP" altLang="en-US"/>
+              <a:rPr lang="ja-JP" altLang="en-US"/>
               <a:t>第 </a:t>
             </a:r>
             <a:r>
-              <a:rPr kumimoji="1" lang="en-US" altLang="ja-JP"/>
+              <a:rPr lang="en-US" altLang="ja-JP"/>
               <a:t>2 </a:t>
             </a:r>
             <a:r>
-              <a:rPr kumimoji="1" lang="ja-JP" altLang="en-US"/>
+              <a:rPr lang="ja-JP" altLang="en-US"/>
               <a:t>レベル</a:t>
             </a:r>
           </a:p>
           <a:p>
             <a:pPr lvl="2"/>
             <a:r>
-              <a:rPr kumimoji="1" lang="ja-JP" altLang="en-US"/>
+              <a:rPr lang="ja-JP" altLang="en-US"/>
               <a:t>第 </a:t>
             </a:r>
             <a:r>
-              <a:rPr kumimoji="1" lang="en-US" altLang="ja-JP"/>
+              <a:rPr lang="en-US" altLang="ja-JP"/>
               <a:t>3 </a:t>
             </a:r>
             <a:r>
-              <a:rPr kumimoji="1" lang="ja-JP" altLang="en-US"/>
+              <a:rPr lang="ja-JP" altLang="en-US"/>
               <a:t>レベル</a:t>
             </a:r>
           </a:p>
           <a:p>
             <a:pPr lvl="3"/>
             <a:r>
-              <a:rPr kumimoji="1" lang="ja-JP" altLang="en-US"/>
+              <a:rPr lang="ja-JP" altLang="en-US"/>
               <a:t>第 </a:t>
             </a:r>
             <a:r>
-              <a:rPr kumimoji="1" lang="en-US" altLang="ja-JP"/>
+              <a:rPr lang="en-US" altLang="ja-JP"/>
               <a:t>4 </a:t>
             </a:r>
             <a:r>
-              <a:rPr kumimoji="1" lang="ja-JP" altLang="en-US"/>
+              <a:rPr lang="ja-JP" altLang="en-US"/>
               <a:t>レベル</a:t>
             </a:r>
           </a:p>
           <a:p>
             <a:pPr lvl="4"/>
             <a:r>
-              <a:rPr kumimoji="1" lang="ja-JP" altLang="en-US"/>
+              <a:rPr lang="ja-JP" altLang="en-US"/>
               <a:t>第 </a:t>
             </a:r>
             <a:r>
-              <a:rPr kumimoji="1" lang="en-US" altLang="ja-JP"/>
+              <a:rPr lang="en-US" altLang="ja-JP"/>
               <a:t>5 </a:t>
             </a:r>
             <a:r>
-              <a:rPr kumimoji="1" lang="ja-JP" altLang="en-US"/>
+              <a:rPr lang="ja-JP" altLang="en-US"/>
               <a:t>レベル</a:t>
             </a:r>
-          </a:p>
-        </p:txBody>
-      </p:sp>
-      <p:sp>
-        <p:nvSpPr>
-          <p:cNvPr id="5" name="日付プレースホルダー 4">
-            <a:extLst>
-              <a:ext uri="{FF2B5EF4-FFF2-40B4-BE49-F238E27FC236}">
-                <a16:creationId xmlns:a16="http://schemas.microsoft.com/office/drawing/2014/main" id="{CC304582-A638-8CE1-1197-C1385ABA648E}"/>
-              </a:ext>
-            </a:extLst>
-          </p:cNvPr>
+            <a:endParaRPr lang="en-US" dirty="0"/>
+          </a:p>
+        </p:txBody>
+      </p:sp>
+      <p:sp>
+        <p:nvSpPr>
+          <p:cNvPr id="5" name="Date Placeholder 4"/>
           <p:cNvSpPr>
             <a:spLocks noGrp="1"/>
           </p:cNvSpPr>
@@ -1566,13 +1420,7 @@
       </p:sp>
       <p:sp>
         <p:nvSpPr>
-          <p:cNvPr id="6" name="フッター プレースホルダー 5">
-            <a:extLst>
-              <a:ext uri="{FF2B5EF4-FFF2-40B4-BE49-F238E27FC236}">
-                <a16:creationId xmlns:a16="http://schemas.microsoft.com/office/drawing/2014/main" id="{DF0EAE45-37DF-CB3A-BB3A-0267987F476E}"/>
-              </a:ext>
-            </a:extLst>
-          </p:cNvPr>
+          <p:cNvPr id="6" name="Footer Placeholder 5"/>
           <p:cNvSpPr>
             <a:spLocks noGrp="1"/>
           </p:cNvSpPr>
@@ -1591,13 +1439,7 @@
       </p:sp>
       <p:sp>
         <p:nvSpPr>
-          <p:cNvPr id="7" name="スライド番号プレースホルダー 6">
-            <a:extLst>
-              <a:ext uri="{FF2B5EF4-FFF2-40B4-BE49-F238E27FC236}">
-                <a16:creationId xmlns:a16="http://schemas.microsoft.com/office/drawing/2014/main" id="{C37B83D9-3CA1-0D6C-7184-80E0FBA78071}"/>
-              </a:ext>
-            </a:extLst>
-          </p:cNvPr>
+          <p:cNvPr id="7" name="Slide Number Placeholder 6"/>
           <p:cNvSpPr>
             <a:spLocks noGrp="1"/>
           </p:cNvSpPr>
@@ -1621,7 +1463,7 @@
     </p:spTree>
     <p:extLst>
       <p:ext uri="{BB962C8B-B14F-4D97-AF65-F5344CB8AC3E}">
-        <p14:creationId xmlns:p14="http://schemas.microsoft.com/office/powerpoint/2010/main" val="3659514912"/>
+        <p14:creationId xmlns:p14="http://schemas.microsoft.com/office/powerpoint/2010/main" val="3847910064"/>
       </p:ext>
     </p:extLst>
   </p:cSld>
@@ -1650,13 +1492,7 @@
       </p:grpSpPr>
       <p:sp>
         <p:nvSpPr>
-          <p:cNvPr id="2" name="タイトル 1">
-            <a:extLst>
-              <a:ext uri="{FF2B5EF4-FFF2-40B4-BE49-F238E27FC236}">
-                <a16:creationId xmlns:a16="http://schemas.microsoft.com/office/drawing/2014/main" id="{AAA4FCBE-C779-59BB-8E34-B5740E50058B}"/>
-              </a:ext>
-            </a:extLst>
-          </p:cNvPr>
+          <p:cNvPr id="2" name="Title 1"/>
           <p:cNvSpPr>
             <a:spLocks noGrp="1"/>
           </p:cNvSpPr>
@@ -1666,8 +1502,8 @@
         </p:nvSpPr>
         <p:spPr>
           <a:xfrm>
-            <a:off x="839788" y="365125"/>
-            <a:ext cx="10515600" cy="1325563"/>
+            <a:off x="1239890" y="365126"/>
+            <a:ext cx="15525572" cy="1325563"/>
           </a:xfrm>
         </p:spPr>
         <p:txBody>
@@ -1675,21 +1511,16 @@
           <a:lstStyle/>
           <a:p>
             <a:r>
-              <a:rPr kumimoji="1" lang="ja-JP" altLang="en-US"/>
+              <a:rPr lang="ja-JP" altLang="en-US"/>
               <a:t>マスター タイトルの書式設定</a:t>
             </a:r>
-          </a:p>
-        </p:txBody>
-      </p:sp>
-      <p:sp>
-        <p:nvSpPr>
-          <p:cNvPr id="3" name="テキスト プレースホルダー 2">
-            <a:extLst>
-              <a:ext uri="{FF2B5EF4-FFF2-40B4-BE49-F238E27FC236}">
-                <a16:creationId xmlns:a16="http://schemas.microsoft.com/office/drawing/2014/main" id="{2393C29C-5C95-CE66-53BC-0DA91895C05E}"/>
-              </a:ext>
-            </a:extLst>
-          </p:cNvPr>
+            <a:endParaRPr lang="en-US" dirty="0"/>
+          </a:p>
+        </p:txBody>
+      </p:sp>
+      <p:sp>
+        <p:nvSpPr>
+          <p:cNvPr id="3" name="Text Placeholder 2"/>
           <p:cNvSpPr>
             <a:spLocks noGrp="1"/>
           </p:cNvSpPr>
@@ -1699,8 +1530,8 @@
         </p:nvSpPr>
         <p:spPr>
           <a:xfrm>
-            <a:off x="839788" y="1681163"/>
-            <a:ext cx="5157787" cy="823912"/>
+            <a:off x="1239891" y="1681163"/>
+            <a:ext cx="7615123" cy="823912"/>
           </a:xfrm>
         </p:spPr>
         <p:txBody>
@@ -1746,7 +1577,7 @@
           <a:p>
             <a:pPr lvl="0"/>
             <a:r>
-              <a:rPr kumimoji="1" lang="ja-JP" altLang="en-US"/>
+              <a:rPr lang="ja-JP" altLang="en-US"/>
               <a:t>マスター テキストの書式設定</a:t>
             </a:r>
           </a:p>
@@ -1754,13 +1585,7 @@
       </p:sp>
       <p:sp>
         <p:nvSpPr>
-          <p:cNvPr id="4" name="コンテンツ プレースホルダー 3">
-            <a:extLst>
-              <a:ext uri="{FF2B5EF4-FFF2-40B4-BE49-F238E27FC236}">
-                <a16:creationId xmlns:a16="http://schemas.microsoft.com/office/drawing/2014/main" id="{3A02424C-D598-F249-7814-D84DE2E26EA1}"/>
-              </a:ext>
-            </a:extLst>
-          </p:cNvPr>
+          <p:cNvPr id="4" name="Content Placeholder 3"/>
           <p:cNvSpPr>
             <a:spLocks noGrp="1"/>
           </p:cNvSpPr>
@@ -1770,8 +1595,8 @@
         </p:nvSpPr>
         <p:spPr>
           <a:xfrm>
-            <a:off x="839788" y="2505075"/>
-            <a:ext cx="5157787" cy="3684588"/>
+            <a:off x="1239891" y="2505075"/>
+            <a:ext cx="7615123" cy="3684588"/>
           </a:xfrm>
         </p:spPr>
         <p:txBody>
@@ -1780,81 +1605,76 @@
           <a:p>
             <a:pPr lvl="0"/>
             <a:r>
-              <a:rPr kumimoji="1" lang="ja-JP" altLang="en-US"/>
+              <a:rPr lang="ja-JP" altLang="en-US"/>
               <a:t>マスター テキストの書式設定</a:t>
             </a:r>
           </a:p>
           <a:p>
             <a:pPr lvl="1"/>
             <a:r>
-              <a:rPr kumimoji="1" lang="ja-JP" altLang="en-US"/>
+              <a:rPr lang="ja-JP" altLang="en-US"/>
               <a:t>第 </a:t>
             </a:r>
             <a:r>
-              <a:rPr kumimoji="1" lang="en-US" altLang="ja-JP"/>
+              <a:rPr lang="en-US" altLang="ja-JP"/>
               <a:t>2 </a:t>
             </a:r>
             <a:r>
-              <a:rPr kumimoji="1" lang="ja-JP" altLang="en-US"/>
+              <a:rPr lang="ja-JP" altLang="en-US"/>
               <a:t>レベル</a:t>
             </a:r>
           </a:p>
           <a:p>
             <a:pPr lvl="2"/>
             <a:r>
-              <a:rPr kumimoji="1" lang="ja-JP" altLang="en-US"/>
+              <a:rPr lang="ja-JP" altLang="en-US"/>
               <a:t>第 </a:t>
             </a:r>
             <a:r>
-              <a:rPr kumimoji="1" lang="en-US" altLang="ja-JP"/>
+              <a:rPr lang="en-US" altLang="ja-JP"/>
               <a:t>3 </a:t>
             </a:r>
             <a:r>
-              <a:rPr kumimoji="1" lang="ja-JP" altLang="en-US"/>
+              <a:rPr lang="ja-JP" altLang="en-US"/>
               <a:t>レベル</a:t>
             </a:r>
           </a:p>
           <a:p>
             <a:pPr lvl="3"/>
             <a:r>
-              <a:rPr kumimoji="1" lang="ja-JP" altLang="en-US"/>
+              <a:rPr lang="ja-JP" altLang="en-US"/>
               <a:t>第 </a:t>
             </a:r>
             <a:r>
-              <a:rPr kumimoji="1" lang="en-US" altLang="ja-JP"/>
+              <a:rPr lang="en-US" altLang="ja-JP"/>
               <a:t>4 </a:t>
             </a:r>
             <a:r>
-              <a:rPr kumimoji="1" lang="ja-JP" altLang="en-US"/>
+              <a:rPr lang="ja-JP" altLang="en-US"/>
               <a:t>レベル</a:t>
             </a:r>
           </a:p>
           <a:p>
             <a:pPr lvl="4"/>
             <a:r>
-              <a:rPr kumimoji="1" lang="ja-JP" altLang="en-US"/>
+              <a:rPr lang="ja-JP" altLang="en-US"/>
               <a:t>第 </a:t>
             </a:r>
             <a:r>
-              <a:rPr kumimoji="1" lang="en-US" altLang="ja-JP"/>
+              <a:rPr lang="en-US" altLang="ja-JP"/>
               <a:t>5 </a:t>
             </a:r>
             <a:r>
-              <a:rPr kumimoji="1" lang="ja-JP" altLang="en-US"/>
+              <a:rPr lang="ja-JP" altLang="en-US"/>
               <a:t>レベル</a:t>
             </a:r>
-          </a:p>
-        </p:txBody>
-      </p:sp>
-      <p:sp>
-        <p:nvSpPr>
-          <p:cNvPr id="5" name="テキスト プレースホルダー 4">
-            <a:extLst>
-              <a:ext uri="{FF2B5EF4-FFF2-40B4-BE49-F238E27FC236}">
-                <a16:creationId xmlns:a16="http://schemas.microsoft.com/office/drawing/2014/main" id="{CB8DF5AE-C933-4FFF-DCB2-F421BF90C5CC}"/>
-              </a:ext>
-            </a:extLst>
-          </p:cNvPr>
+            <a:endParaRPr lang="en-US" dirty="0"/>
+          </a:p>
+        </p:txBody>
+      </p:sp>
+      <p:sp>
+        <p:nvSpPr>
+          <p:cNvPr id="5" name="Text Placeholder 4"/>
           <p:cNvSpPr>
             <a:spLocks noGrp="1"/>
           </p:cNvSpPr>
@@ -1864,8 +1684,8 @@
         </p:nvSpPr>
         <p:spPr>
           <a:xfrm>
-            <a:off x="6172200" y="1681163"/>
-            <a:ext cx="5183188" cy="823912"/>
+            <a:off x="9112836" y="1681163"/>
+            <a:ext cx="7652626" cy="823912"/>
           </a:xfrm>
         </p:spPr>
         <p:txBody>
@@ -1911,7 +1731,7 @@
           <a:p>
             <a:pPr lvl="0"/>
             <a:r>
-              <a:rPr kumimoji="1" lang="ja-JP" altLang="en-US"/>
+              <a:rPr lang="ja-JP" altLang="en-US"/>
               <a:t>マスター テキストの書式設定</a:t>
             </a:r>
           </a:p>
@@ -1919,13 +1739,7 @@
       </p:sp>
       <p:sp>
         <p:nvSpPr>
-          <p:cNvPr id="6" name="コンテンツ プレースホルダー 5">
-            <a:extLst>
-              <a:ext uri="{FF2B5EF4-FFF2-40B4-BE49-F238E27FC236}">
-                <a16:creationId xmlns:a16="http://schemas.microsoft.com/office/drawing/2014/main" id="{16130807-E8DB-A6C0-26D6-067B389DA570}"/>
-              </a:ext>
-            </a:extLst>
-          </p:cNvPr>
+          <p:cNvPr id="6" name="Content Placeholder 5"/>
           <p:cNvSpPr>
             <a:spLocks noGrp="1"/>
           </p:cNvSpPr>
@@ -1935,8 +1749,8 @@
         </p:nvSpPr>
         <p:spPr>
           <a:xfrm>
-            <a:off x="6172200" y="2505075"/>
-            <a:ext cx="5183188" cy="3684588"/>
+            <a:off x="9112836" y="2505075"/>
+            <a:ext cx="7652626" cy="3684588"/>
           </a:xfrm>
         </p:spPr>
         <p:txBody>
@@ -1945,81 +1759,76 @@
           <a:p>
             <a:pPr lvl="0"/>
             <a:r>
-              <a:rPr kumimoji="1" lang="ja-JP" altLang="en-US"/>
+              <a:rPr lang="ja-JP" altLang="en-US"/>
               <a:t>マスター テキストの書式設定</a:t>
             </a:r>
           </a:p>
           <a:p>
             <a:pPr lvl="1"/>
             <a:r>
-              <a:rPr kumimoji="1" lang="ja-JP" altLang="en-US"/>
+              <a:rPr lang="ja-JP" altLang="en-US"/>
               <a:t>第 </a:t>
             </a:r>
             <a:r>
-              <a:rPr kumimoji="1" lang="en-US" altLang="ja-JP"/>
+              <a:rPr lang="en-US" altLang="ja-JP"/>
               <a:t>2 </a:t>
             </a:r>
             <a:r>
-              <a:rPr kumimoji="1" lang="ja-JP" altLang="en-US"/>
+              <a:rPr lang="ja-JP" altLang="en-US"/>
               <a:t>レベル</a:t>
             </a:r>
           </a:p>
           <a:p>
             <a:pPr lvl="2"/>
             <a:r>
-              <a:rPr kumimoji="1" lang="ja-JP" altLang="en-US"/>
+              <a:rPr lang="ja-JP" altLang="en-US"/>
               <a:t>第 </a:t>
             </a:r>
             <a:r>
-              <a:rPr kumimoji="1" lang="en-US" altLang="ja-JP"/>
+              <a:rPr lang="en-US" altLang="ja-JP"/>
               <a:t>3 </a:t>
             </a:r>
             <a:r>
-              <a:rPr kumimoji="1" lang="ja-JP" altLang="en-US"/>
+              <a:rPr lang="ja-JP" altLang="en-US"/>
               <a:t>レベル</a:t>
             </a:r>
           </a:p>
           <a:p>
             <a:pPr lvl="3"/>
             <a:r>
-              <a:rPr kumimoji="1" lang="ja-JP" altLang="en-US"/>
+              <a:rPr lang="ja-JP" altLang="en-US"/>
               <a:t>第 </a:t>
             </a:r>
             <a:r>
-              <a:rPr kumimoji="1" lang="en-US" altLang="ja-JP"/>
+              <a:rPr lang="en-US" altLang="ja-JP"/>
               <a:t>4 </a:t>
             </a:r>
             <a:r>
-              <a:rPr kumimoji="1" lang="ja-JP" altLang="en-US"/>
+              <a:rPr lang="ja-JP" altLang="en-US"/>
               <a:t>レベル</a:t>
             </a:r>
           </a:p>
           <a:p>
             <a:pPr lvl="4"/>
             <a:r>
-              <a:rPr kumimoji="1" lang="ja-JP" altLang="en-US"/>
+              <a:rPr lang="ja-JP" altLang="en-US"/>
               <a:t>第 </a:t>
             </a:r>
             <a:r>
-              <a:rPr kumimoji="1" lang="en-US" altLang="ja-JP"/>
+              <a:rPr lang="en-US" altLang="ja-JP"/>
               <a:t>5 </a:t>
             </a:r>
             <a:r>
-              <a:rPr kumimoji="1" lang="ja-JP" altLang="en-US"/>
+              <a:rPr lang="ja-JP" altLang="en-US"/>
               <a:t>レベル</a:t>
             </a:r>
-          </a:p>
-        </p:txBody>
-      </p:sp>
-      <p:sp>
-        <p:nvSpPr>
-          <p:cNvPr id="7" name="日付プレースホルダー 6">
-            <a:extLst>
-              <a:ext uri="{FF2B5EF4-FFF2-40B4-BE49-F238E27FC236}">
-                <a16:creationId xmlns:a16="http://schemas.microsoft.com/office/drawing/2014/main" id="{50417067-3BC6-EFA3-A1C3-B6F972C414C2}"/>
-              </a:ext>
-            </a:extLst>
-          </p:cNvPr>
+            <a:endParaRPr lang="en-US" dirty="0"/>
+          </a:p>
+        </p:txBody>
+      </p:sp>
+      <p:sp>
+        <p:nvSpPr>
+          <p:cNvPr id="7" name="Date Placeholder 6"/>
           <p:cNvSpPr>
             <a:spLocks noGrp="1"/>
           </p:cNvSpPr>
@@ -2042,13 +1851,7 @@
       </p:sp>
       <p:sp>
         <p:nvSpPr>
-          <p:cNvPr id="8" name="フッター プレースホルダー 7">
-            <a:extLst>
-              <a:ext uri="{FF2B5EF4-FFF2-40B4-BE49-F238E27FC236}">
-                <a16:creationId xmlns:a16="http://schemas.microsoft.com/office/drawing/2014/main" id="{E003FEC6-00FD-6FD4-3E4E-E09E1F0D7E49}"/>
-              </a:ext>
-            </a:extLst>
-          </p:cNvPr>
+          <p:cNvPr id="8" name="Footer Placeholder 7"/>
           <p:cNvSpPr>
             <a:spLocks noGrp="1"/>
           </p:cNvSpPr>
@@ -2067,13 +1870,7 @@
       </p:sp>
       <p:sp>
         <p:nvSpPr>
-          <p:cNvPr id="9" name="スライド番号プレースホルダー 8">
-            <a:extLst>
-              <a:ext uri="{FF2B5EF4-FFF2-40B4-BE49-F238E27FC236}">
-                <a16:creationId xmlns:a16="http://schemas.microsoft.com/office/drawing/2014/main" id="{7E64C024-7AE3-943B-9026-81ED0F20B300}"/>
-              </a:ext>
-            </a:extLst>
-          </p:cNvPr>
+          <p:cNvPr id="9" name="Slide Number Placeholder 8"/>
           <p:cNvSpPr>
             <a:spLocks noGrp="1"/>
           </p:cNvSpPr>
@@ -2097,7 +1894,7 @@
     </p:spTree>
     <p:extLst>
       <p:ext uri="{BB962C8B-B14F-4D97-AF65-F5344CB8AC3E}">
-        <p14:creationId xmlns:p14="http://schemas.microsoft.com/office/powerpoint/2010/main" val="3814378219"/>
+        <p14:creationId xmlns:p14="http://schemas.microsoft.com/office/powerpoint/2010/main" val="664637378"/>
       </p:ext>
     </p:extLst>
   </p:cSld>
@@ -2126,13 +1923,7 @@
       </p:grpSpPr>
       <p:sp>
         <p:nvSpPr>
-          <p:cNvPr id="2" name="タイトル 1">
-            <a:extLst>
-              <a:ext uri="{FF2B5EF4-FFF2-40B4-BE49-F238E27FC236}">
-                <a16:creationId xmlns:a16="http://schemas.microsoft.com/office/drawing/2014/main" id="{CE71AB2E-85EC-36D2-0450-1C67D72348A4}"/>
-              </a:ext>
-            </a:extLst>
-          </p:cNvPr>
+          <p:cNvPr id="2" name="Title 1"/>
           <p:cNvSpPr>
             <a:spLocks noGrp="1"/>
           </p:cNvSpPr>
@@ -2146,21 +1937,16 @@
           <a:lstStyle/>
           <a:p>
             <a:r>
-              <a:rPr kumimoji="1" lang="ja-JP" altLang="en-US"/>
+              <a:rPr lang="ja-JP" altLang="en-US"/>
               <a:t>マスター タイトルの書式設定</a:t>
             </a:r>
-          </a:p>
-        </p:txBody>
-      </p:sp>
-      <p:sp>
-        <p:nvSpPr>
-          <p:cNvPr id="3" name="日付プレースホルダー 2">
-            <a:extLst>
-              <a:ext uri="{FF2B5EF4-FFF2-40B4-BE49-F238E27FC236}">
-                <a16:creationId xmlns:a16="http://schemas.microsoft.com/office/drawing/2014/main" id="{ACE1320E-9EC7-171F-59C2-D25A8E27D23F}"/>
-              </a:ext>
-            </a:extLst>
-          </p:cNvPr>
+            <a:endParaRPr lang="en-US" dirty="0"/>
+          </a:p>
+        </p:txBody>
+      </p:sp>
+      <p:sp>
+        <p:nvSpPr>
+          <p:cNvPr id="3" name="Date Placeholder 2"/>
           <p:cNvSpPr>
             <a:spLocks noGrp="1"/>
           </p:cNvSpPr>
@@ -2183,13 +1969,7 @@
       </p:sp>
       <p:sp>
         <p:nvSpPr>
-          <p:cNvPr id="4" name="フッター プレースホルダー 3">
-            <a:extLst>
-              <a:ext uri="{FF2B5EF4-FFF2-40B4-BE49-F238E27FC236}">
-                <a16:creationId xmlns:a16="http://schemas.microsoft.com/office/drawing/2014/main" id="{DB27FC99-42E2-AFEE-A659-4EBC7AA1BE67}"/>
-              </a:ext>
-            </a:extLst>
-          </p:cNvPr>
+          <p:cNvPr id="4" name="Footer Placeholder 3"/>
           <p:cNvSpPr>
             <a:spLocks noGrp="1"/>
           </p:cNvSpPr>
@@ -2208,13 +1988,7 @@
       </p:sp>
       <p:sp>
         <p:nvSpPr>
-          <p:cNvPr id="5" name="スライド番号プレースホルダー 4">
-            <a:extLst>
-              <a:ext uri="{FF2B5EF4-FFF2-40B4-BE49-F238E27FC236}">
-                <a16:creationId xmlns:a16="http://schemas.microsoft.com/office/drawing/2014/main" id="{43EDA454-BCFF-A94E-FD73-FEF32CCA2FAA}"/>
-              </a:ext>
-            </a:extLst>
-          </p:cNvPr>
+          <p:cNvPr id="5" name="Slide Number Placeholder 4"/>
           <p:cNvSpPr>
             <a:spLocks noGrp="1"/>
           </p:cNvSpPr>
@@ -2238,7 +2012,7 @@
     </p:spTree>
     <p:extLst>
       <p:ext uri="{BB962C8B-B14F-4D97-AF65-F5344CB8AC3E}">
-        <p14:creationId xmlns:p14="http://schemas.microsoft.com/office/powerpoint/2010/main" val="2558627549"/>
+        <p14:creationId xmlns:p14="http://schemas.microsoft.com/office/powerpoint/2010/main" val="1647669230"/>
       </p:ext>
     </p:extLst>
   </p:cSld>
@@ -2267,13 +2041,7 @@
       </p:grpSpPr>
       <p:sp>
         <p:nvSpPr>
-          <p:cNvPr id="2" name="日付プレースホルダー 1">
-            <a:extLst>
-              <a:ext uri="{FF2B5EF4-FFF2-40B4-BE49-F238E27FC236}">
-                <a16:creationId xmlns:a16="http://schemas.microsoft.com/office/drawing/2014/main" id="{DA2C4A71-365D-1694-BF69-7C2B8D1A2E37}"/>
-              </a:ext>
-            </a:extLst>
-          </p:cNvPr>
+          <p:cNvPr id="2" name="Date Placeholder 1"/>
           <p:cNvSpPr>
             <a:spLocks noGrp="1"/>
           </p:cNvSpPr>
@@ -2296,13 +2064,7 @@
       </p:sp>
       <p:sp>
         <p:nvSpPr>
-          <p:cNvPr id="3" name="フッター プレースホルダー 2">
-            <a:extLst>
-              <a:ext uri="{FF2B5EF4-FFF2-40B4-BE49-F238E27FC236}">
-                <a16:creationId xmlns:a16="http://schemas.microsoft.com/office/drawing/2014/main" id="{35B361EB-7B2F-D6F7-632F-79774DA0EBDF}"/>
-              </a:ext>
-            </a:extLst>
-          </p:cNvPr>
+          <p:cNvPr id="3" name="Footer Placeholder 2"/>
           <p:cNvSpPr>
             <a:spLocks noGrp="1"/>
           </p:cNvSpPr>
@@ -2321,13 +2083,7 @@
       </p:sp>
       <p:sp>
         <p:nvSpPr>
-          <p:cNvPr id="4" name="スライド番号プレースホルダー 3">
-            <a:extLst>
-              <a:ext uri="{FF2B5EF4-FFF2-40B4-BE49-F238E27FC236}">
-                <a16:creationId xmlns:a16="http://schemas.microsoft.com/office/drawing/2014/main" id="{37967827-FB8B-C9DF-62D2-C00283CED8EE}"/>
-              </a:ext>
-            </a:extLst>
-          </p:cNvPr>
+          <p:cNvPr id="4" name="Slide Number Placeholder 3"/>
           <p:cNvSpPr>
             <a:spLocks noGrp="1"/>
           </p:cNvSpPr>
@@ -2351,7 +2107,7 @@
     </p:spTree>
     <p:extLst>
       <p:ext uri="{BB962C8B-B14F-4D97-AF65-F5344CB8AC3E}">
-        <p14:creationId xmlns:p14="http://schemas.microsoft.com/office/powerpoint/2010/main" val="3169136518"/>
+        <p14:creationId xmlns:p14="http://schemas.microsoft.com/office/powerpoint/2010/main" val="3336372114"/>
       </p:ext>
     </p:extLst>
   </p:cSld>
@@ -2380,13 +2136,7 @@
       </p:grpSpPr>
       <p:sp>
         <p:nvSpPr>
-          <p:cNvPr id="2" name="タイトル 1">
-            <a:extLst>
-              <a:ext uri="{FF2B5EF4-FFF2-40B4-BE49-F238E27FC236}">
-                <a16:creationId xmlns:a16="http://schemas.microsoft.com/office/drawing/2014/main" id="{57612F0F-1792-BC4F-6C80-20310AB0E1BF}"/>
-              </a:ext>
-            </a:extLst>
-          </p:cNvPr>
+          <p:cNvPr id="2" name="Title 1"/>
           <p:cNvSpPr>
             <a:spLocks noGrp="1"/>
           </p:cNvSpPr>
@@ -2396,8 +2146,8 @@
         </p:nvSpPr>
         <p:spPr>
           <a:xfrm>
-            <a:off x="839788" y="457200"/>
-            <a:ext cx="3932237" cy="1600200"/>
+            <a:off x="1239891" y="457200"/>
+            <a:ext cx="5805682" cy="1600200"/>
           </a:xfrm>
         </p:spPr>
         <p:txBody>
@@ -2409,21 +2159,16 @@
           </a:lstStyle>
           <a:p>
             <a:r>
-              <a:rPr kumimoji="1" lang="ja-JP" altLang="en-US"/>
+              <a:rPr lang="ja-JP" altLang="en-US"/>
               <a:t>マスター タイトルの書式設定</a:t>
             </a:r>
-          </a:p>
-        </p:txBody>
-      </p:sp>
-      <p:sp>
-        <p:nvSpPr>
-          <p:cNvPr id="3" name="コンテンツ プレースホルダー 2">
-            <a:extLst>
-              <a:ext uri="{FF2B5EF4-FFF2-40B4-BE49-F238E27FC236}">
-                <a16:creationId xmlns:a16="http://schemas.microsoft.com/office/drawing/2014/main" id="{E37C7681-FC72-38BC-6C8B-F7BCA64E049A}"/>
-              </a:ext>
-            </a:extLst>
-          </p:cNvPr>
+            <a:endParaRPr lang="en-US" dirty="0"/>
+          </a:p>
+        </p:txBody>
+      </p:sp>
+      <p:sp>
+        <p:nvSpPr>
+          <p:cNvPr id="3" name="Content Placeholder 2"/>
           <p:cNvSpPr>
             <a:spLocks noGrp="1"/>
           </p:cNvSpPr>
@@ -2433,8 +2178,8 @@
         </p:nvSpPr>
         <p:spPr>
           <a:xfrm>
-            <a:off x="5183188" y="987425"/>
-            <a:ext cx="6172200" cy="4873625"/>
+            <a:off x="7652626" y="987426"/>
+            <a:ext cx="9112836" cy="4873625"/>
           </a:xfrm>
         </p:spPr>
         <p:txBody>
@@ -2471,81 +2216,76 @@
           <a:p>
             <a:pPr lvl="0"/>
             <a:r>
-              <a:rPr kumimoji="1" lang="ja-JP" altLang="en-US"/>
+              <a:rPr lang="ja-JP" altLang="en-US"/>
               <a:t>マスター テキストの書式設定</a:t>
             </a:r>
           </a:p>
           <a:p>
             <a:pPr lvl="1"/>
             <a:r>
-              <a:rPr kumimoji="1" lang="ja-JP" altLang="en-US"/>
+              <a:rPr lang="ja-JP" altLang="en-US"/>
               <a:t>第 </a:t>
             </a:r>
             <a:r>
-              <a:rPr kumimoji="1" lang="en-US" altLang="ja-JP"/>
+              <a:rPr lang="en-US" altLang="ja-JP"/>
               <a:t>2 </a:t>
             </a:r>
             <a:r>
-              <a:rPr kumimoji="1" lang="ja-JP" altLang="en-US"/>
+              <a:rPr lang="ja-JP" altLang="en-US"/>
               <a:t>レベル</a:t>
             </a:r>
           </a:p>
           <a:p>
             <a:pPr lvl="2"/>
             <a:r>
-              <a:rPr kumimoji="1" lang="ja-JP" altLang="en-US"/>
+              <a:rPr lang="ja-JP" altLang="en-US"/>
               <a:t>第 </a:t>
             </a:r>
             <a:r>
-              <a:rPr kumimoji="1" lang="en-US" altLang="ja-JP"/>
+              <a:rPr lang="en-US" altLang="ja-JP"/>
               <a:t>3 </a:t>
             </a:r>
             <a:r>
-              <a:rPr kumimoji="1" lang="ja-JP" altLang="en-US"/>
+              <a:rPr lang="ja-JP" altLang="en-US"/>
               <a:t>レベル</a:t>
             </a:r>
           </a:p>
           <a:p>
             <a:pPr lvl="3"/>
             <a:r>
-              <a:rPr kumimoji="1" lang="ja-JP" altLang="en-US"/>
+              <a:rPr lang="ja-JP" altLang="en-US"/>
               <a:t>第 </a:t>
             </a:r>
             <a:r>
-              <a:rPr kumimoji="1" lang="en-US" altLang="ja-JP"/>
+              <a:rPr lang="en-US" altLang="ja-JP"/>
               <a:t>4 </a:t>
             </a:r>
             <a:r>
-              <a:rPr kumimoji="1" lang="ja-JP" altLang="en-US"/>
+              <a:rPr lang="ja-JP" altLang="en-US"/>
               <a:t>レベル</a:t>
             </a:r>
           </a:p>
           <a:p>
             <a:pPr lvl="4"/>
             <a:r>
-              <a:rPr kumimoji="1" lang="ja-JP" altLang="en-US"/>
+              <a:rPr lang="ja-JP" altLang="en-US"/>
               <a:t>第 </a:t>
             </a:r>
             <a:r>
-              <a:rPr kumimoji="1" lang="en-US" altLang="ja-JP"/>
+              <a:rPr lang="en-US" altLang="ja-JP"/>
               <a:t>5 </a:t>
             </a:r>
             <a:r>
-              <a:rPr kumimoji="1" lang="ja-JP" altLang="en-US"/>
+              <a:rPr lang="ja-JP" altLang="en-US"/>
               <a:t>レベル</a:t>
             </a:r>
-          </a:p>
-        </p:txBody>
-      </p:sp>
-      <p:sp>
-        <p:nvSpPr>
-          <p:cNvPr id="4" name="テキスト プレースホルダー 3">
-            <a:extLst>
-              <a:ext uri="{FF2B5EF4-FFF2-40B4-BE49-F238E27FC236}">
-                <a16:creationId xmlns:a16="http://schemas.microsoft.com/office/drawing/2014/main" id="{7C237E01-F73E-822D-2F25-2D041891D78F}"/>
-              </a:ext>
-            </a:extLst>
-          </p:cNvPr>
+            <a:endParaRPr lang="en-US" dirty="0"/>
+          </a:p>
+        </p:txBody>
+      </p:sp>
+      <p:sp>
+        <p:nvSpPr>
+          <p:cNvPr id="4" name="Text Placeholder 3"/>
           <p:cNvSpPr>
             <a:spLocks noGrp="1"/>
           </p:cNvSpPr>
@@ -2555,8 +2295,8 @@
         </p:nvSpPr>
         <p:spPr>
           <a:xfrm>
-            <a:off x="839788" y="2057400"/>
-            <a:ext cx="3932237" cy="3811588"/>
+            <a:off x="1239891" y="2057400"/>
+            <a:ext cx="5805682" cy="3811588"/>
           </a:xfrm>
         </p:spPr>
         <p:txBody>
@@ -2602,7 +2342,7 @@
           <a:p>
             <a:pPr lvl="0"/>
             <a:r>
-              <a:rPr kumimoji="1" lang="ja-JP" altLang="en-US"/>
+              <a:rPr lang="ja-JP" altLang="en-US"/>
               <a:t>マスター テキストの書式設定</a:t>
             </a:r>
           </a:p>
@@ -2610,13 +2350,7 @@
       </p:sp>
       <p:sp>
         <p:nvSpPr>
-          <p:cNvPr id="5" name="日付プレースホルダー 4">
-            <a:extLst>
-              <a:ext uri="{FF2B5EF4-FFF2-40B4-BE49-F238E27FC236}">
-                <a16:creationId xmlns:a16="http://schemas.microsoft.com/office/drawing/2014/main" id="{3ED9AF68-BAC2-E13F-C680-9DBF19AEF326}"/>
-              </a:ext>
-            </a:extLst>
-          </p:cNvPr>
+          <p:cNvPr id="5" name="Date Placeholder 4"/>
           <p:cNvSpPr>
             <a:spLocks noGrp="1"/>
           </p:cNvSpPr>
@@ -2639,13 +2373,7 @@
       </p:sp>
       <p:sp>
         <p:nvSpPr>
-          <p:cNvPr id="6" name="フッター プレースホルダー 5">
-            <a:extLst>
-              <a:ext uri="{FF2B5EF4-FFF2-40B4-BE49-F238E27FC236}">
-                <a16:creationId xmlns:a16="http://schemas.microsoft.com/office/drawing/2014/main" id="{EAAEE4A4-EA7B-96E3-68B9-B5FF19A15B94}"/>
-              </a:ext>
-            </a:extLst>
-          </p:cNvPr>
+          <p:cNvPr id="6" name="Footer Placeholder 5"/>
           <p:cNvSpPr>
             <a:spLocks noGrp="1"/>
           </p:cNvSpPr>
@@ -2664,13 +2392,7 @@
       </p:sp>
       <p:sp>
         <p:nvSpPr>
-          <p:cNvPr id="7" name="スライド番号プレースホルダー 6">
-            <a:extLst>
-              <a:ext uri="{FF2B5EF4-FFF2-40B4-BE49-F238E27FC236}">
-                <a16:creationId xmlns:a16="http://schemas.microsoft.com/office/drawing/2014/main" id="{7A1CE026-7E91-1E16-BBA0-0360CB6C8BD2}"/>
-              </a:ext>
-            </a:extLst>
-          </p:cNvPr>
+          <p:cNvPr id="7" name="Slide Number Placeholder 6"/>
           <p:cNvSpPr>
             <a:spLocks noGrp="1"/>
           </p:cNvSpPr>
@@ -2694,7 +2416,7 @@
     </p:spTree>
     <p:extLst>
       <p:ext uri="{BB962C8B-B14F-4D97-AF65-F5344CB8AC3E}">
-        <p14:creationId xmlns:p14="http://schemas.microsoft.com/office/powerpoint/2010/main" val="1082723478"/>
+        <p14:creationId xmlns:p14="http://schemas.microsoft.com/office/powerpoint/2010/main" val="4020277702"/>
       </p:ext>
     </p:extLst>
   </p:cSld>
@@ -2723,13 +2445,7 @@
       </p:grpSpPr>
       <p:sp>
         <p:nvSpPr>
-          <p:cNvPr id="2" name="タイトル 1">
-            <a:extLst>
-              <a:ext uri="{FF2B5EF4-FFF2-40B4-BE49-F238E27FC236}">
-                <a16:creationId xmlns:a16="http://schemas.microsoft.com/office/drawing/2014/main" id="{B17FCF2F-1C62-C28C-1F05-6A06F691A19F}"/>
-              </a:ext>
-            </a:extLst>
-          </p:cNvPr>
+          <p:cNvPr id="2" name="Title 1"/>
           <p:cNvSpPr>
             <a:spLocks noGrp="1"/>
           </p:cNvSpPr>
@@ -2739,8 +2455,8 @@
         </p:nvSpPr>
         <p:spPr>
           <a:xfrm>
-            <a:off x="839788" y="457200"/>
-            <a:ext cx="3932237" cy="1600200"/>
+            <a:off x="1239891" y="457200"/>
+            <a:ext cx="5805682" cy="1600200"/>
           </a:xfrm>
         </p:spPr>
         <p:txBody>
@@ -2752,23 +2468,18 @@
           </a:lstStyle>
           <a:p>
             <a:r>
-              <a:rPr kumimoji="1" lang="ja-JP" altLang="en-US"/>
+              <a:rPr lang="ja-JP" altLang="en-US"/>
               <a:t>マスター タイトルの書式設定</a:t>
             </a:r>
-          </a:p>
-        </p:txBody>
-      </p:sp>
-      <p:sp>
-        <p:nvSpPr>
-          <p:cNvPr id="3" name="図プレースホルダー 2">
-            <a:extLst>
-              <a:ext uri="{FF2B5EF4-FFF2-40B4-BE49-F238E27FC236}">
-                <a16:creationId xmlns:a16="http://schemas.microsoft.com/office/drawing/2014/main" id="{B57452F1-B142-884A-553D-8548FB7E993D}"/>
-              </a:ext>
-            </a:extLst>
-          </p:cNvPr>
+            <a:endParaRPr lang="en-US" dirty="0"/>
+          </a:p>
+        </p:txBody>
+      </p:sp>
+      <p:sp>
+        <p:nvSpPr>
+          <p:cNvPr id="3" name="Picture Placeholder 2"/>
           <p:cNvSpPr>
-            <a:spLocks noGrp="1"/>
+            <a:spLocks noGrp="1" noChangeAspect="1"/>
           </p:cNvSpPr>
           <p:nvPr>
             <p:ph type="pic" idx="1"/>
@@ -2776,12 +2487,12 @@
         </p:nvSpPr>
         <p:spPr>
           <a:xfrm>
-            <a:off x="5183188" y="987425"/>
-            <a:ext cx="6172200" cy="4873625"/>
-          </a:xfrm>
-        </p:spPr>
-        <p:txBody>
-          <a:bodyPr/>
+            <a:off x="7652626" y="987426"/>
+            <a:ext cx="9112836" cy="4873625"/>
+          </a:xfrm>
+        </p:spPr>
+        <p:txBody>
+          <a:bodyPr anchor="t"/>
           <a:lstStyle>
             <a:lvl1pPr marL="0" indent="0">
               <a:buNone/>
@@ -2821,19 +2532,17 @@
             </a:lvl9pPr>
           </a:lstStyle>
           <a:p>
-            <a:endParaRPr kumimoji="1" lang="ja-JP" altLang="en-US"/>
-          </a:p>
-        </p:txBody>
-      </p:sp>
-      <p:sp>
-        <p:nvSpPr>
-          <p:cNvPr id="4" name="テキスト プレースホルダー 3">
-            <a:extLst>
-              <a:ext uri="{FF2B5EF4-FFF2-40B4-BE49-F238E27FC236}">
-                <a16:creationId xmlns:a16="http://schemas.microsoft.com/office/drawing/2014/main" id="{1028CC3D-1AE2-5109-CAC5-3471996F5082}"/>
-              </a:ext>
-            </a:extLst>
-          </p:cNvPr>
+            <a:r>
+              <a:rPr lang="ja-JP" altLang="en-US"/>
+              <a:t>アイコンをクリックして図を追加</a:t>
+            </a:r>
+            <a:endParaRPr lang="en-US" dirty="0"/>
+          </a:p>
+        </p:txBody>
+      </p:sp>
+      <p:sp>
+        <p:nvSpPr>
+          <p:cNvPr id="4" name="Text Placeholder 3"/>
           <p:cNvSpPr>
             <a:spLocks noGrp="1"/>
           </p:cNvSpPr>
@@ -2843,8 +2552,8 @@
         </p:nvSpPr>
         <p:spPr>
           <a:xfrm>
-            <a:off x="839788" y="2057400"/>
-            <a:ext cx="3932237" cy="3811588"/>
+            <a:off x="1239891" y="2057400"/>
+            <a:ext cx="5805682" cy="3811588"/>
           </a:xfrm>
         </p:spPr>
         <p:txBody>
@@ -2890,7 +2599,7 @@
           <a:p>
             <a:pPr lvl="0"/>
             <a:r>
-              <a:rPr kumimoji="1" lang="ja-JP" altLang="en-US"/>
+              <a:rPr lang="ja-JP" altLang="en-US"/>
               <a:t>マスター テキストの書式設定</a:t>
             </a:r>
           </a:p>
@@ -2898,13 +2607,7 @@
       </p:sp>
       <p:sp>
         <p:nvSpPr>
-          <p:cNvPr id="5" name="日付プレースホルダー 4">
-            <a:extLst>
-              <a:ext uri="{FF2B5EF4-FFF2-40B4-BE49-F238E27FC236}">
-                <a16:creationId xmlns:a16="http://schemas.microsoft.com/office/drawing/2014/main" id="{5E2967F6-3FC3-5F85-C5E9-0D08551CAD78}"/>
-              </a:ext>
-            </a:extLst>
-          </p:cNvPr>
+          <p:cNvPr id="5" name="Date Placeholder 4"/>
           <p:cNvSpPr>
             <a:spLocks noGrp="1"/>
           </p:cNvSpPr>
@@ -2927,13 +2630,7 @@
       </p:sp>
       <p:sp>
         <p:nvSpPr>
-          <p:cNvPr id="6" name="フッター プレースホルダー 5">
-            <a:extLst>
-              <a:ext uri="{FF2B5EF4-FFF2-40B4-BE49-F238E27FC236}">
-                <a16:creationId xmlns:a16="http://schemas.microsoft.com/office/drawing/2014/main" id="{30B3063E-4236-6023-6177-F7528945EED5}"/>
-              </a:ext>
-            </a:extLst>
-          </p:cNvPr>
+          <p:cNvPr id="6" name="Footer Placeholder 5"/>
           <p:cNvSpPr>
             <a:spLocks noGrp="1"/>
           </p:cNvSpPr>
@@ -2952,13 +2649,7 @@
       </p:sp>
       <p:sp>
         <p:nvSpPr>
-          <p:cNvPr id="7" name="スライド番号プレースホルダー 6">
-            <a:extLst>
-              <a:ext uri="{FF2B5EF4-FFF2-40B4-BE49-F238E27FC236}">
-                <a16:creationId xmlns:a16="http://schemas.microsoft.com/office/drawing/2014/main" id="{C441C448-B725-1DEE-569E-2E005C302DB9}"/>
-              </a:ext>
-            </a:extLst>
-          </p:cNvPr>
+          <p:cNvPr id="7" name="Slide Number Placeholder 6"/>
           <p:cNvSpPr>
             <a:spLocks noGrp="1"/>
           </p:cNvSpPr>
@@ -2982,7 +2673,7 @@
     </p:spTree>
     <p:extLst>
       <p:ext uri="{BB962C8B-B14F-4D97-AF65-F5344CB8AC3E}">
-        <p14:creationId xmlns:p14="http://schemas.microsoft.com/office/powerpoint/2010/main" val="3058068862"/>
+        <p14:creationId xmlns:p14="http://schemas.microsoft.com/office/powerpoint/2010/main" val="244466830"/>
       </p:ext>
     </p:extLst>
   </p:cSld>
@@ -3016,13 +2707,7 @@
       </p:grpSpPr>
       <p:sp>
         <p:nvSpPr>
-          <p:cNvPr id="2" name="タイトル プレースホルダー 1">
-            <a:extLst>
-              <a:ext uri="{FF2B5EF4-FFF2-40B4-BE49-F238E27FC236}">
-                <a16:creationId xmlns:a16="http://schemas.microsoft.com/office/drawing/2014/main" id="{EBC57E62-1066-A8CB-DB08-F16A1A027E1E}"/>
-              </a:ext>
-            </a:extLst>
-          </p:cNvPr>
+          <p:cNvPr id="2" name="Title Placeholder 1"/>
           <p:cNvSpPr>
             <a:spLocks noGrp="1"/>
           </p:cNvSpPr>
@@ -3032,8 +2717,8 @@
         </p:nvSpPr>
         <p:spPr>
           <a:xfrm>
-            <a:off x="838200" y="365125"/>
-            <a:ext cx="10515600" cy="1325563"/>
+            <a:off x="1237546" y="365126"/>
+            <a:ext cx="15525572" cy="1325563"/>
           </a:xfrm>
           <a:prstGeom prst="rect">
             <a:avLst/>
@@ -3046,21 +2731,16 @@
           <a:lstStyle/>
           <a:p>
             <a:r>
-              <a:rPr kumimoji="1" lang="ja-JP" altLang="en-US"/>
+              <a:rPr lang="ja-JP" altLang="en-US"/>
               <a:t>マスター タイトルの書式設定</a:t>
             </a:r>
-          </a:p>
-        </p:txBody>
-      </p:sp>
-      <p:sp>
-        <p:nvSpPr>
-          <p:cNvPr id="3" name="テキスト プレースホルダー 2">
-            <a:extLst>
-              <a:ext uri="{FF2B5EF4-FFF2-40B4-BE49-F238E27FC236}">
-                <a16:creationId xmlns:a16="http://schemas.microsoft.com/office/drawing/2014/main" id="{87455470-43AE-3A45-D723-AE76FF458420}"/>
-              </a:ext>
-            </a:extLst>
-          </p:cNvPr>
+            <a:endParaRPr lang="en-US" dirty="0"/>
+          </a:p>
+        </p:txBody>
+      </p:sp>
+      <p:sp>
+        <p:nvSpPr>
+          <p:cNvPr id="3" name="Text Placeholder 2"/>
           <p:cNvSpPr>
             <a:spLocks noGrp="1"/>
           </p:cNvSpPr>
@@ -3070,8 +2750,8 @@
         </p:nvSpPr>
         <p:spPr>
           <a:xfrm>
-            <a:off x="838200" y="1825625"/>
-            <a:ext cx="10515600" cy="4351338"/>
+            <a:off x="1237546" y="1825625"/>
+            <a:ext cx="15525572" cy="4351338"/>
           </a:xfrm>
           <a:prstGeom prst="rect">
             <a:avLst/>
@@ -3085,81 +2765,76 @@
           <a:p>
             <a:pPr lvl="0"/>
             <a:r>
-              <a:rPr kumimoji="1" lang="ja-JP" altLang="en-US"/>
+              <a:rPr lang="ja-JP" altLang="en-US"/>
               <a:t>マスター テキストの書式設定</a:t>
             </a:r>
           </a:p>
           <a:p>
             <a:pPr lvl="1"/>
             <a:r>
-              <a:rPr kumimoji="1" lang="ja-JP" altLang="en-US"/>
+              <a:rPr lang="ja-JP" altLang="en-US"/>
               <a:t>第 </a:t>
             </a:r>
             <a:r>
-              <a:rPr kumimoji="1" lang="en-US" altLang="ja-JP"/>
+              <a:rPr lang="en-US" altLang="ja-JP"/>
               <a:t>2 </a:t>
             </a:r>
             <a:r>
-              <a:rPr kumimoji="1" lang="ja-JP" altLang="en-US"/>
+              <a:rPr lang="ja-JP" altLang="en-US"/>
               <a:t>レベル</a:t>
             </a:r>
           </a:p>
           <a:p>
             <a:pPr lvl="2"/>
             <a:r>
-              <a:rPr kumimoji="1" lang="ja-JP" altLang="en-US"/>
+              <a:rPr lang="ja-JP" altLang="en-US"/>
               <a:t>第 </a:t>
             </a:r>
             <a:r>
-              <a:rPr kumimoji="1" lang="en-US" altLang="ja-JP"/>
+              <a:rPr lang="en-US" altLang="ja-JP"/>
               <a:t>3 </a:t>
             </a:r>
             <a:r>
-              <a:rPr kumimoji="1" lang="ja-JP" altLang="en-US"/>
+              <a:rPr lang="ja-JP" altLang="en-US"/>
               <a:t>レベル</a:t>
             </a:r>
           </a:p>
           <a:p>
             <a:pPr lvl="3"/>
             <a:r>
-              <a:rPr kumimoji="1" lang="ja-JP" altLang="en-US"/>
+              <a:rPr lang="ja-JP" altLang="en-US"/>
               <a:t>第 </a:t>
             </a:r>
             <a:r>
-              <a:rPr kumimoji="1" lang="en-US" altLang="ja-JP"/>
+              <a:rPr lang="en-US" altLang="ja-JP"/>
               <a:t>4 </a:t>
             </a:r>
             <a:r>
-              <a:rPr kumimoji="1" lang="ja-JP" altLang="en-US"/>
+              <a:rPr lang="ja-JP" altLang="en-US"/>
               <a:t>レベル</a:t>
             </a:r>
           </a:p>
           <a:p>
             <a:pPr lvl="4"/>
             <a:r>
-              <a:rPr kumimoji="1" lang="ja-JP" altLang="en-US"/>
+              <a:rPr lang="ja-JP" altLang="en-US"/>
               <a:t>第 </a:t>
             </a:r>
             <a:r>
-              <a:rPr kumimoji="1" lang="en-US" altLang="ja-JP"/>
+              <a:rPr lang="en-US" altLang="ja-JP"/>
               <a:t>5 </a:t>
             </a:r>
             <a:r>
-              <a:rPr kumimoji="1" lang="ja-JP" altLang="en-US"/>
+              <a:rPr lang="ja-JP" altLang="en-US"/>
               <a:t>レベル</a:t>
             </a:r>
-          </a:p>
-        </p:txBody>
-      </p:sp>
-      <p:sp>
-        <p:nvSpPr>
-          <p:cNvPr id="4" name="日付プレースホルダー 3">
-            <a:extLst>
-              <a:ext uri="{FF2B5EF4-FFF2-40B4-BE49-F238E27FC236}">
-                <a16:creationId xmlns:a16="http://schemas.microsoft.com/office/drawing/2014/main" id="{9337227F-7FA3-25AF-6847-7F1228F06A56}"/>
-              </a:ext>
-            </a:extLst>
-          </p:cNvPr>
+            <a:endParaRPr lang="en-US" dirty="0"/>
+          </a:p>
+        </p:txBody>
+      </p:sp>
+      <p:sp>
+        <p:nvSpPr>
+          <p:cNvPr id="4" name="Date Placeholder 3"/>
           <p:cNvSpPr>
             <a:spLocks noGrp="1"/>
           </p:cNvSpPr>
@@ -3169,8 +2844,8 @@
         </p:nvSpPr>
         <p:spPr>
           <a:xfrm>
-            <a:off x="838200" y="6356350"/>
-            <a:ext cx="2743200" cy="365125"/>
+            <a:off x="1237546" y="6356351"/>
+            <a:ext cx="4050149" cy="365125"/>
           </a:xfrm>
           <a:prstGeom prst="rect">
             <a:avLst/>
@@ -3200,13 +2875,7 @@
       </p:sp>
       <p:sp>
         <p:nvSpPr>
-          <p:cNvPr id="5" name="フッター プレースホルダー 4">
-            <a:extLst>
-              <a:ext uri="{FF2B5EF4-FFF2-40B4-BE49-F238E27FC236}">
-                <a16:creationId xmlns:a16="http://schemas.microsoft.com/office/drawing/2014/main" id="{A175106E-EC68-01CB-5224-B67764BCDF15}"/>
-              </a:ext>
-            </a:extLst>
-          </p:cNvPr>
+          <p:cNvPr id="5" name="Footer Placeholder 4"/>
           <p:cNvSpPr>
             <a:spLocks noGrp="1"/>
           </p:cNvSpPr>
@@ -3216,8 +2885,8 @@
         </p:nvSpPr>
         <p:spPr>
           <a:xfrm>
-            <a:off x="4038600" y="6356350"/>
-            <a:ext cx="4114800" cy="365125"/>
+            <a:off x="5962720" y="6356351"/>
+            <a:ext cx="6075224" cy="365125"/>
           </a:xfrm>
           <a:prstGeom prst="rect">
             <a:avLst/>
@@ -3243,13 +2912,7 @@
       </p:sp>
       <p:sp>
         <p:nvSpPr>
-          <p:cNvPr id="6" name="スライド番号プレースホルダー 5">
-            <a:extLst>
-              <a:ext uri="{FF2B5EF4-FFF2-40B4-BE49-F238E27FC236}">
-                <a16:creationId xmlns:a16="http://schemas.microsoft.com/office/drawing/2014/main" id="{A91AD141-6BC4-70AC-800F-88CAD43F63E5}"/>
-              </a:ext>
-            </a:extLst>
-          </p:cNvPr>
+          <p:cNvPr id="6" name="Slide Number Placeholder 5"/>
           <p:cNvSpPr>
             <a:spLocks noGrp="1"/>
           </p:cNvSpPr>
@@ -3259,8 +2922,8 @@
         </p:nvSpPr>
         <p:spPr>
           <a:xfrm>
-            <a:off x="8610600" y="6356350"/>
-            <a:ext cx="2743200" cy="365125"/>
+            <a:off x="12712968" y="6356351"/>
+            <a:ext cx="4050149" cy="365125"/>
           </a:xfrm>
           <a:prstGeom prst="rect">
             <a:avLst/>
@@ -3291,23 +2954,23 @@
     </p:spTree>
     <p:extLst>
       <p:ext uri="{BB962C8B-B14F-4D97-AF65-F5344CB8AC3E}">
-        <p14:creationId xmlns:p14="http://schemas.microsoft.com/office/powerpoint/2010/main" val="3211626387"/>
+        <p14:creationId xmlns:p14="http://schemas.microsoft.com/office/powerpoint/2010/main" val="2559437964"/>
       </p:ext>
     </p:extLst>
   </p:cSld>
   <p:clrMap bg1="lt1" tx1="dk1" bg2="lt2" tx2="dk2" accent1="accent1" accent2="accent2" accent3="accent3" accent4="accent4" accent5="accent5" accent6="accent6" hlink="hlink" folHlink="folHlink"/>
   <p:sldLayoutIdLst>
-    <p:sldLayoutId id="2147483649" r:id="rId1"/>
-    <p:sldLayoutId id="2147483650" r:id="rId2"/>
-    <p:sldLayoutId id="2147483651" r:id="rId3"/>
-    <p:sldLayoutId id="2147483652" r:id="rId4"/>
-    <p:sldLayoutId id="2147483653" r:id="rId5"/>
-    <p:sldLayoutId id="2147483654" r:id="rId6"/>
-    <p:sldLayoutId id="2147483655" r:id="rId7"/>
-    <p:sldLayoutId id="2147483656" r:id="rId8"/>
-    <p:sldLayoutId id="2147483657" r:id="rId9"/>
-    <p:sldLayoutId id="2147483658" r:id="rId10"/>
-    <p:sldLayoutId id="2147483659" r:id="rId11"/>
+    <p:sldLayoutId id="2147483661" r:id="rId1"/>
+    <p:sldLayoutId id="2147483662" r:id="rId2"/>
+    <p:sldLayoutId id="2147483663" r:id="rId3"/>
+    <p:sldLayoutId id="2147483664" r:id="rId4"/>
+    <p:sldLayoutId id="2147483665" r:id="rId5"/>
+    <p:sldLayoutId id="2147483666" r:id="rId6"/>
+    <p:sldLayoutId id="2147483667" r:id="rId7"/>
+    <p:sldLayoutId id="2147483668" r:id="rId8"/>
+    <p:sldLayoutId id="2147483669" r:id="rId9"/>
+    <p:sldLayoutId id="2147483670" r:id="rId10"/>
+    <p:sldLayoutId id="2147483671" r:id="rId11"/>
   </p:sldLayoutIdLst>
   <p:txStyles>
     <p:titleStyle>
@@ -3495,7 +3158,7 @@
     </p:bodyStyle>
     <p:otherStyle>
       <a:defPPr>
-        <a:defRPr lang="ja-JP"/>
+        <a:defRPr lang="en-US"/>
       </a:defPPr>
       <a:lvl1pPr marL="0" algn="l" defTabSz="914400" rtl="0" eaLnBrk="1" latinLnBrk="0" hangingPunct="1">
         <a:defRPr kumimoji="1" sz="1800" kern="1200">
@@ -3609,6 +3272,2729 @@
           <a:chExt cx="0" cy="0"/>
         </a:xfrm>
       </p:grpSpPr>
+      <p:sp>
+        <p:nvSpPr>
+          <p:cNvPr id="111" name="四角形: 角を丸くする 110">
+            <a:extLst>
+              <a:ext uri="{FF2B5EF4-FFF2-40B4-BE49-F238E27FC236}">
+                <a16:creationId xmlns:a16="http://schemas.microsoft.com/office/drawing/2014/main" id="{D95AB47F-9AB5-A0C3-3070-B06727A25091}"/>
+              </a:ext>
+            </a:extLst>
+          </p:cNvPr>
+          <p:cNvSpPr/>
+          <p:nvPr/>
+        </p:nvSpPr>
+        <p:spPr>
+          <a:xfrm>
+            <a:off x="717624" y="173259"/>
+            <a:ext cx="17103589" cy="6388488"/>
+          </a:xfrm>
+          <a:prstGeom prst="roundRect">
+            <a:avLst>
+              <a:gd name="adj" fmla="val 5283"/>
+            </a:avLst>
+          </a:prstGeom>
+          <a:noFill/>
+          <a:ln w="127000">
+            <a:solidFill>
+              <a:schemeClr val="tx1"/>
+            </a:solidFill>
+          </a:ln>
+        </p:spPr>
+        <p:style>
+          <a:lnRef idx="2">
+            <a:schemeClr val="accent1">
+              <a:shade val="15000"/>
+            </a:schemeClr>
+          </a:lnRef>
+          <a:fillRef idx="1">
+            <a:schemeClr val="accent1"/>
+          </a:fillRef>
+          <a:effectRef idx="0">
+            <a:schemeClr val="accent1"/>
+          </a:effectRef>
+          <a:fontRef idx="minor">
+            <a:schemeClr val="lt1"/>
+          </a:fontRef>
+        </p:style>
+        <p:txBody>
+          <a:bodyPr rtlCol="0" anchor="ctr"/>
+          <a:lstStyle/>
+          <a:p>
+            <a:pPr algn="ctr"/>
+            <a:endParaRPr lang="ja-JP" altLang="en-US" sz="3200" dirty="0">
+              <a:solidFill>
+                <a:schemeClr val="tx1"/>
+              </a:solidFill>
+              <a:latin typeface="モボ-SemiBold" panose="02000700000000000000" pitchFamily="50" charset="-128"/>
+              <a:ea typeface="モボ-SemiBold" panose="02000700000000000000" pitchFamily="50" charset="-128"/>
+            </a:endParaRPr>
+          </a:p>
+        </p:txBody>
+      </p:sp>
+      <p:sp>
+        <p:nvSpPr>
+          <p:cNvPr id="113" name="正方形/長方形 112">
+            <a:extLst>
+              <a:ext uri="{FF2B5EF4-FFF2-40B4-BE49-F238E27FC236}">
+                <a16:creationId xmlns:a16="http://schemas.microsoft.com/office/drawing/2014/main" id="{1F262937-7454-7491-1D28-843C9A381A36}"/>
+              </a:ext>
+            </a:extLst>
+          </p:cNvPr>
+          <p:cNvSpPr/>
+          <p:nvPr/>
+        </p:nvSpPr>
+        <p:spPr>
+          <a:xfrm>
+            <a:off x="434456" y="4914434"/>
+            <a:ext cx="495946" cy="322718"/>
+          </a:xfrm>
+          <a:prstGeom prst="rect">
+            <a:avLst/>
+          </a:prstGeom>
+          <a:solidFill>
+            <a:schemeClr val="bg1"/>
+          </a:solidFill>
+          <a:ln>
+            <a:noFill/>
+          </a:ln>
+        </p:spPr>
+        <p:style>
+          <a:lnRef idx="2">
+            <a:schemeClr val="accent1">
+              <a:shade val="15000"/>
+            </a:schemeClr>
+          </a:lnRef>
+          <a:fillRef idx="1">
+            <a:schemeClr val="accent1"/>
+          </a:fillRef>
+          <a:effectRef idx="0">
+            <a:schemeClr val="accent1"/>
+          </a:effectRef>
+          <a:fontRef idx="minor">
+            <a:schemeClr val="lt1"/>
+          </a:fontRef>
+        </p:style>
+        <p:txBody>
+          <a:bodyPr rtlCol="0" anchor="ctr"/>
+          <a:lstStyle/>
+          <a:p>
+            <a:pPr algn="ctr"/>
+            <a:endParaRPr kumimoji="1" lang="ja-JP" altLang="en-US"/>
+          </a:p>
+        </p:txBody>
+      </p:sp>
+      <p:sp>
+        <p:nvSpPr>
+          <p:cNvPr id="112" name="正方形/長方形 111">
+            <a:extLst>
+              <a:ext uri="{FF2B5EF4-FFF2-40B4-BE49-F238E27FC236}">
+                <a16:creationId xmlns:a16="http://schemas.microsoft.com/office/drawing/2014/main" id="{C484D61D-71E5-2777-C4B3-75CAE4CFBF91}"/>
+              </a:ext>
+            </a:extLst>
+          </p:cNvPr>
+          <p:cNvSpPr/>
+          <p:nvPr/>
+        </p:nvSpPr>
+        <p:spPr>
+          <a:xfrm>
+            <a:off x="3855621" y="6365834"/>
+            <a:ext cx="495946" cy="322718"/>
+          </a:xfrm>
+          <a:prstGeom prst="rect">
+            <a:avLst/>
+          </a:prstGeom>
+          <a:solidFill>
+            <a:schemeClr val="bg1"/>
+          </a:solidFill>
+          <a:ln>
+            <a:noFill/>
+          </a:ln>
+        </p:spPr>
+        <p:style>
+          <a:lnRef idx="2">
+            <a:schemeClr val="accent1">
+              <a:shade val="15000"/>
+            </a:schemeClr>
+          </a:lnRef>
+          <a:fillRef idx="1">
+            <a:schemeClr val="accent1"/>
+          </a:fillRef>
+          <a:effectRef idx="0">
+            <a:schemeClr val="accent1"/>
+          </a:effectRef>
+          <a:fontRef idx="minor">
+            <a:schemeClr val="lt1"/>
+          </a:fontRef>
+        </p:style>
+        <p:txBody>
+          <a:bodyPr rtlCol="0" anchor="ctr"/>
+          <a:lstStyle/>
+          <a:p>
+            <a:pPr algn="ctr"/>
+            <a:endParaRPr kumimoji="1" lang="ja-JP" altLang="en-US"/>
+          </a:p>
+        </p:txBody>
+      </p:sp>
+      <p:sp>
+        <p:nvSpPr>
+          <p:cNvPr id="2" name="四角形: 角を丸くする 1">
+            <a:extLst>
+              <a:ext uri="{FF2B5EF4-FFF2-40B4-BE49-F238E27FC236}">
+                <a16:creationId xmlns:a16="http://schemas.microsoft.com/office/drawing/2014/main" id="{AF043E09-C34D-D923-33D5-060AC35B6AE0}"/>
+              </a:ext>
+            </a:extLst>
+          </p:cNvPr>
+          <p:cNvSpPr/>
+          <p:nvPr/>
+        </p:nvSpPr>
+        <p:spPr>
+          <a:xfrm>
+            <a:off x="113460" y="1880529"/>
+            <a:ext cx="2864908" cy="2214928"/>
+          </a:xfrm>
+          <a:prstGeom prst="roundRect">
+            <a:avLst>
+              <a:gd name="adj" fmla="val 15009"/>
+            </a:avLst>
+          </a:prstGeom>
+          <a:solidFill>
+            <a:schemeClr val="bg1"/>
+          </a:solidFill>
+          <a:ln w="127000">
+            <a:solidFill>
+              <a:schemeClr val="tx1"/>
+            </a:solidFill>
+          </a:ln>
+        </p:spPr>
+        <p:style>
+          <a:lnRef idx="2">
+            <a:schemeClr val="accent1">
+              <a:shade val="15000"/>
+            </a:schemeClr>
+          </a:lnRef>
+          <a:fillRef idx="1">
+            <a:schemeClr val="accent1"/>
+          </a:fillRef>
+          <a:effectRef idx="0">
+            <a:schemeClr val="accent1"/>
+          </a:effectRef>
+          <a:fontRef idx="minor">
+            <a:schemeClr val="lt1"/>
+          </a:fontRef>
+        </p:style>
+        <p:txBody>
+          <a:bodyPr rtlCol="0" anchor="ctr"/>
+          <a:lstStyle/>
+          <a:p>
+            <a:pPr algn="ctr"/>
+            <a:endParaRPr lang="ja-JP" altLang="en-US" sz="3200" dirty="0">
+              <a:solidFill>
+                <a:schemeClr val="tx1"/>
+              </a:solidFill>
+              <a:latin typeface="モボ-SemiBold" panose="02000700000000000000" pitchFamily="50" charset="-128"/>
+              <a:ea typeface="モボ-SemiBold" panose="02000700000000000000" pitchFamily="50" charset="-128"/>
+            </a:endParaRPr>
+          </a:p>
+        </p:txBody>
+      </p:sp>
+      <p:cxnSp>
+        <p:nvCxnSpPr>
+          <p:cNvPr id="3" name="直線矢印コネクタ 2">
+            <a:extLst>
+              <a:ext uri="{FF2B5EF4-FFF2-40B4-BE49-F238E27FC236}">
+                <a16:creationId xmlns:a16="http://schemas.microsoft.com/office/drawing/2014/main" id="{45E42608-AFF4-452E-05BA-AE6E545A6368}"/>
+              </a:ext>
+            </a:extLst>
+          </p:cNvPr>
+          <p:cNvCxnSpPr>
+            <a:cxnSpLocks/>
+          </p:cNvCxnSpPr>
+          <p:nvPr/>
+        </p:nvCxnSpPr>
+        <p:spPr>
+          <a:xfrm>
+            <a:off x="113460" y="2698707"/>
+            <a:ext cx="2864908" cy="0"/>
+          </a:xfrm>
+          <a:prstGeom prst="straightConnector1">
+            <a:avLst/>
+          </a:prstGeom>
+          <a:ln w="114300">
+            <a:solidFill>
+              <a:schemeClr val="tx1"/>
+            </a:solidFill>
+            <a:tailEnd type="none" w="med" len="sm"/>
+          </a:ln>
+        </p:spPr>
+        <p:style>
+          <a:lnRef idx="2">
+            <a:schemeClr val="accent1"/>
+          </a:lnRef>
+          <a:fillRef idx="0">
+            <a:schemeClr val="accent1"/>
+          </a:fillRef>
+          <a:effectRef idx="1">
+            <a:schemeClr val="accent1"/>
+          </a:effectRef>
+          <a:fontRef idx="minor">
+            <a:schemeClr val="tx1"/>
+          </a:fontRef>
+        </p:style>
+      </p:cxnSp>
+      <p:sp>
+        <p:nvSpPr>
+          <p:cNvPr id="5" name="テキスト ボックス 4">
+            <a:extLst>
+              <a:ext uri="{FF2B5EF4-FFF2-40B4-BE49-F238E27FC236}">
+                <a16:creationId xmlns:a16="http://schemas.microsoft.com/office/drawing/2014/main" id="{8D1A5CD4-FB22-A2F5-590E-E17A7B08B72D}"/>
+              </a:ext>
+            </a:extLst>
+          </p:cNvPr>
+          <p:cNvSpPr txBox="1"/>
+          <p:nvPr/>
+        </p:nvSpPr>
+        <p:spPr>
+          <a:xfrm>
+            <a:off x="632709" y="1928757"/>
+            <a:ext cx="1826410" cy="707886"/>
+          </a:xfrm>
+          <a:prstGeom prst="rect">
+            <a:avLst/>
+          </a:prstGeom>
+          <a:noFill/>
+        </p:spPr>
+        <p:txBody>
+          <a:bodyPr wrap="square" rtlCol="0">
+            <a:spAutoFit/>
+          </a:bodyPr>
+          <a:lstStyle/>
+          <a:p>
+            <a:pPr algn="ctr"/>
+            <a:r>
+              <a:rPr lang="en-US" altLang="ja-JP" sz="4000" dirty="0">
+                <a:latin typeface="Consolas" panose="020B0609020204030204" pitchFamily="49" charset="0"/>
+                <a:ea typeface="モボ-SemiBold" panose="02000700000000000000" pitchFamily="50" charset="-128"/>
+              </a:rPr>
+              <a:t>DAWIY</a:t>
+            </a:r>
+            <a:endParaRPr lang="ja-JP" altLang="en-US" sz="4000" dirty="0">
+              <a:latin typeface="Consolas" panose="020B0609020204030204" pitchFamily="49" charset="0"/>
+              <a:ea typeface="モボ-SemiBold" panose="02000700000000000000" pitchFamily="50" charset="-128"/>
+            </a:endParaRPr>
+          </a:p>
+        </p:txBody>
+      </p:sp>
+      <p:sp>
+        <p:nvSpPr>
+          <p:cNvPr id="6" name="テキスト ボックス 5">
+            <a:extLst>
+              <a:ext uri="{FF2B5EF4-FFF2-40B4-BE49-F238E27FC236}">
+                <a16:creationId xmlns:a16="http://schemas.microsoft.com/office/drawing/2014/main" id="{78FD99CE-551C-EAD6-8027-671F581ED0E3}"/>
+              </a:ext>
+            </a:extLst>
+          </p:cNvPr>
+          <p:cNvSpPr txBox="1"/>
+          <p:nvPr/>
+        </p:nvSpPr>
+        <p:spPr>
+          <a:xfrm>
+            <a:off x="222313" y="2879061"/>
+            <a:ext cx="2647202" cy="1015663"/>
+          </a:xfrm>
+          <a:prstGeom prst="rect">
+            <a:avLst/>
+          </a:prstGeom>
+          <a:noFill/>
+        </p:spPr>
+        <p:txBody>
+          <a:bodyPr wrap="square" rtlCol="0">
+            <a:spAutoFit/>
+          </a:bodyPr>
+          <a:lstStyle/>
+          <a:p>
+            <a:r>
+              <a:rPr lang="ja-JP" altLang="en-US" sz="2000" dirty="0">
+                <a:latin typeface="+mn-ea"/>
+              </a:rPr>
+              <a:t>・起動する</a:t>
+            </a:r>
+            <a:endParaRPr lang="en-US" altLang="ja-JP" sz="2000" dirty="0">
+              <a:latin typeface="+mn-ea"/>
+            </a:endParaRPr>
+          </a:p>
+          <a:p>
+            <a:r>
+              <a:rPr lang="ja-JP" altLang="en-US" sz="2000" dirty="0">
+                <a:latin typeface="+mn-ea"/>
+              </a:rPr>
+              <a:t>・プラグイン機能を</a:t>
+            </a:r>
+            <a:endParaRPr lang="en-US" altLang="ja-JP" sz="2000" dirty="0">
+              <a:latin typeface="+mn-ea"/>
+            </a:endParaRPr>
+          </a:p>
+          <a:p>
+            <a:r>
+              <a:rPr lang="ja-JP" altLang="en-US" sz="2000" dirty="0">
+                <a:latin typeface="+mn-ea"/>
+              </a:rPr>
+              <a:t>　使えるようにする</a:t>
+            </a:r>
+          </a:p>
+        </p:txBody>
+      </p:sp>
+      <p:sp>
+        <p:nvSpPr>
+          <p:cNvPr id="8" name="四角形: 角を丸くする 7">
+            <a:extLst>
+              <a:ext uri="{FF2B5EF4-FFF2-40B4-BE49-F238E27FC236}">
+                <a16:creationId xmlns:a16="http://schemas.microsoft.com/office/drawing/2014/main" id="{8E8D87E0-63EC-D8C4-6422-6237D1B0D138}"/>
+              </a:ext>
+            </a:extLst>
+          </p:cNvPr>
+          <p:cNvSpPr/>
+          <p:nvPr/>
+        </p:nvSpPr>
+        <p:spPr>
+          <a:xfrm>
+            <a:off x="3878064" y="364087"/>
+            <a:ext cx="2864908" cy="2214928"/>
+          </a:xfrm>
+          <a:prstGeom prst="roundRect">
+            <a:avLst>
+              <a:gd name="adj" fmla="val 15009"/>
+            </a:avLst>
+          </a:prstGeom>
+          <a:noFill/>
+          <a:ln w="114300">
+            <a:solidFill>
+              <a:schemeClr val="tx1"/>
+            </a:solidFill>
+          </a:ln>
+        </p:spPr>
+        <p:style>
+          <a:lnRef idx="2">
+            <a:schemeClr val="accent1">
+              <a:shade val="15000"/>
+            </a:schemeClr>
+          </a:lnRef>
+          <a:fillRef idx="1">
+            <a:schemeClr val="accent1"/>
+          </a:fillRef>
+          <a:effectRef idx="0">
+            <a:schemeClr val="accent1"/>
+          </a:effectRef>
+          <a:fontRef idx="minor">
+            <a:schemeClr val="lt1"/>
+          </a:fontRef>
+        </p:style>
+        <p:txBody>
+          <a:bodyPr rtlCol="0" anchor="ctr"/>
+          <a:lstStyle/>
+          <a:p>
+            <a:pPr algn="ctr"/>
+            <a:endParaRPr lang="ja-JP" altLang="en-US" sz="3200" dirty="0">
+              <a:solidFill>
+                <a:schemeClr val="tx1"/>
+              </a:solidFill>
+              <a:latin typeface="モボ-SemiBold" panose="02000700000000000000" pitchFamily="50" charset="-128"/>
+              <a:ea typeface="モボ-SemiBold" panose="02000700000000000000" pitchFamily="50" charset="-128"/>
+            </a:endParaRPr>
+          </a:p>
+        </p:txBody>
+      </p:sp>
+      <p:cxnSp>
+        <p:nvCxnSpPr>
+          <p:cNvPr id="9" name="直線矢印コネクタ 8">
+            <a:extLst>
+              <a:ext uri="{FF2B5EF4-FFF2-40B4-BE49-F238E27FC236}">
+                <a16:creationId xmlns:a16="http://schemas.microsoft.com/office/drawing/2014/main" id="{718595DA-7F58-DE01-E14D-063C525BF517}"/>
+              </a:ext>
+            </a:extLst>
+          </p:cNvPr>
+          <p:cNvCxnSpPr>
+            <a:cxnSpLocks/>
+          </p:cNvCxnSpPr>
+          <p:nvPr/>
+        </p:nvCxnSpPr>
+        <p:spPr>
+          <a:xfrm>
+            <a:off x="3878064" y="1182266"/>
+            <a:ext cx="2864908" cy="0"/>
+          </a:xfrm>
+          <a:prstGeom prst="straightConnector1">
+            <a:avLst/>
+          </a:prstGeom>
+          <a:ln w="114300">
+            <a:solidFill>
+              <a:schemeClr val="tx1"/>
+            </a:solidFill>
+            <a:tailEnd type="none" w="med" len="sm"/>
+          </a:ln>
+        </p:spPr>
+        <p:style>
+          <a:lnRef idx="2">
+            <a:schemeClr val="accent1"/>
+          </a:lnRef>
+          <a:fillRef idx="0">
+            <a:schemeClr val="accent1"/>
+          </a:fillRef>
+          <a:effectRef idx="1">
+            <a:schemeClr val="accent1"/>
+          </a:effectRef>
+          <a:fontRef idx="minor">
+            <a:schemeClr val="tx1"/>
+          </a:fontRef>
+        </p:style>
+      </p:cxnSp>
+      <p:sp>
+        <p:nvSpPr>
+          <p:cNvPr id="10" name="テキスト ボックス 9">
+            <a:extLst>
+              <a:ext uri="{FF2B5EF4-FFF2-40B4-BE49-F238E27FC236}">
+                <a16:creationId xmlns:a16="http://schemas.microsoft.com/office/drawing/2014/main" id="{9B68D0DE-B0C3-881D-3A65-D5C9B2D21031}"/>
+              </a:ext>
+            </a:extLst>
+          </p:cNvPr>
+          <p:cNvSpPr txBox="1"/>
+          <p:nvPr/>
+        </p:nvSpPr>
+        <p:spPr>
+          <a:xfrm>
+            <a:off x="4022165" y="593331"/>
+            <a:ext cx="2605282" cy="400110"/>
+          </a:xfrm>
+          <a:prstGeom prst="rect">
+            <a:avLst/>
+          </a:prstGeom>
+          <a:noFill/>
+        </p:spPr>
+        <p:txBody>
+          <a:bodyPr wrap="square" rtlCol="0">
+            <a:spAutoFit/>
+          </a:bodyPr>
+          <a:lstStyle/>
+          <a:p>
+            <a:pPr algn="ctr"/>
+            <a:r>
+              <a:rPr lang="en-US" altLang="ja-JP" sz="2000" dirty="0">
+                <a:latin typeface="Consolas" panose="020B0609020204030204" pitchFamily="49" charset="0"/>
+              </a:rPr>
+              <a:t>DawiyPluginLoader</a:t>
+            </a:r>
+          </a:p>
+        </p:txBody>
+      </p:sp>
+      <p:sp>
+        <p:nvSpPr>
+          <p:cNvPr id="11" name="テキスト ボックス 10">
+            <a:extLst>
+              <a:ext uri="{FF2B5EF4-FFF2-40B4-BE49-F238E27FC236}">
+                <a16:creationId xmlns:a16="http://schemas.microsoft.com/office/drawing/2014/main" id="{09B9FD23-E8AC-0CBF-AE45-7528001A16C7}"/>
+              </a:ext>
+            </a:extLst>
+          </p:cNvPr>
+          <p:cNvSpPr txBox="1"/>
+          <p:nvPr/>
+        </p:nvSpPr>
+        <p:spPr>
+          <a:xfrm>
+            <a:off x="3915477" y="1391196"/>
+            <a:ext cx="2834966" cy="1015663"/>
+          </a:xfrm>
+          <a:prstGeom prst="rect">
+            <a:avLst/>
+          </a:prstGeom>
+          <a:noFill/>
+        </p:spPr>
+        <p:txBody>
+          <a:bodyPr wrap="square" rtlCol="0">
+            <a:spAutoFit/>
+          </a:bodyPr>
+          <a:lstStyle/>
+          <a:p>
+            <a:r>
+              <a:rPr lang="ja-JP" altLang="en-US" sz="2000" dirty="0">
+                <a:latin typeface="+mn-ea"/>
+              </a:rPr>
+              <a:t>・フォルダを見張る</a:t>
+            </a:r>
+            <a:endParaRPr lang="en-US" altLang="ja-JP" sz="2000" dirty="0">
+              <a:latin typeface="+mn-ea"/>
+            </a:endParaRPr>
+          </a:p>
+          <a:p>
+            <a:r>
+              <a:rPr lang="ja-JP" altLang="en-US" sz="2000" dirty="0">
+                <a:latin typeface="+mn-ea"/>
+              </a:rPr>
+              <a:t>・</a:t>
+            </a:r>
+            <a:r>
+              <a:rPr lang="ja-JP" altLang="en-US" sz="2000" dirty="0"/>
+              <a:t>見つけたプラグイン</a:t>
+            </a:r>
+            <a:endParaRPr lang="en-US" altLang="ja-JP" sz="2000" dirty="0"/>
+          </a:p>
+          <a:p>
+            <a:r>
+              <a:rPr lang="ja-JP" altLang="en-US" sz="2000" dirty="0"/>
+              <a:t>　を読み込む</a:t>
+            </a:r>
+          </a:p>
+        </p:txBody>
+      </p:sp>
+      <p:cxnSp>
+        <p:nvCxnSpPr>
+          <p:cNvPr id="12" name="直線矢印コネクタ 11">
+            <a:extLst>
+              <a:ext uri="{FF2B5EF4-FFF2-40B4-BE49-F238E27FC236}">
+                <a16:creationId xmlns:a16="http://schemas.microsoft.com/office/drawing/2014/main" id="{1C2A6C7D-3887-B4AB-DA13-4023CDA170AD}"/>
+              </a:ext>
+            </a:extLst>
+          </p:cNvPr>
+          <p:cNvCxnSpPr>
+            <a:cxnSpLocks/>
+          </p:cNvCxnSpPr>
+          <p:nvPr/>
+        </p:nvCxnSpPr>
+        <p:spPr>
+          <a:xfrm>
+            <a:off x="1471051" y="1318729"/>
+            <a:ext cx="2326524" cy="0"/>
+          </a:xfrm>
+          <a:prstGeom prst="straightConnector1">
+            <a:avLst/>
+          </a:prstGeom>
+          <a:ln w="152400">
+            <a:solidFill>
+              <a:schemeClr val="tx1"/>
+            </a:solidFill>
+            <a:tailEnd type="stealth" w="med" len="med"/>
+          </a:ln>
+        </p:spPr>
+        <p:style>
+          <a:lnRef idx="2">
+            <a:schemeClr val="accent1"/>
+          </a:lnRef>
+          <a:fillRef idx="0">
+            <a:schemeClr val="accent1"/>
+          </a:fillRef>
+          <a:effectRef idx="1">
+            <a:schemeClr val="accent1"/>
+          </a:effectRef>
+          <a:fontRef idx="minor">
+            <a:schemeClr val="tx1"/>
+          </a:fontRef>
+        </p:style>
+      </p:cxnSp>
+      <p:cxnSp>
+        <p:nvCxnSpPr>
+          <p:cNvPr id="13" name="直線矢印コネクタ 12">
+            <a:extLst>
+              <a:ext uri="{FF2B5EF4-FFF2-40B4-BE49-F238E27FC236}">
+                <a16:creationId xmlns:a16="http://schemas.microsoft.com/office/drawing/2014/main" id="{253ED8F4-0743-FBFD-F04F-310CA15030ED}"/>
+              </a:ext>
+            </a:extLst>
+          </p:cNvPr>
+          <p:cNvCxnSpPr>
+            <a:cxnSpLocks/>
+          </p:cNvCxnSpPr>
+          <p:nvPr/>
+        </p:nvCxnSpPr>
+        <p:spPr>
+          <a:xfrm flipV="1">
+            <a:off x="1545914" y="1295400"/>
+            <a:ext cx="0" cy="559662"/>
+          </a:xfrm>
+          <a:prstGeom prst="straightConnector1">
+            <a:avLst/>
+          </a:prstGeom>
+          <a:ln w="152400">
+            <a:solidFill>
+              <a:schemeClr val="tx1"/>
+            </a:solidFill>
+            <a:tailEnd type="none" w="med" len="sm"/>
+          </a:ln>
+        </p:spPr>
+        <p:style>
+          <a:lnRef idx="2">
+            <a:schemeClr val="accent1"/>
+          </a:lnRef>
+          <a:fillRef idx="0">
+            <a:schemeClr val="accent1"/>
+          </a:fillRef>
+          <a:effectRef idx="1">
+            <a:schemeClr val="accent1"/>
+          </a:effectRef>
+          <a:fontRef idx="minor">
+            <a:schemeClr val="tx1"/>
+          </a:fontRef>
+        </p:style>
+      </p:cxnSp>
+      <p:cxnSp>
+        <p:nvCxnSpPr>
+          <p:cNvPr id="18" name="直線矢印コネクタ 17">
+            <a:extLst>
+              <a:ext uri="{FF2B5EF4-FFF2-40B4-BE49-F238E27FC236}">
+                <a16:creationId xmlns:a16="http://schemas.microsoft.com/office/drawing/2014/main" id="{11C1B315-A55A-7B14-999E-44951E383E03}"/>
+              </a:ext>
+            </a:extLst>
+          </p:cNvPr>
+          <p:cNvCxnSpPr>
+            <a:cxnSpLocks/>
+            <a:endCxn id="2" idx="2"/>
+          </p:cNvCxnSpPr>
+          <p:nvPr/>
+        </p:nvCxnSpPr>
+        <p:spPr>
+          <a:xfrm flipV="1">
+            <a:off x="1545914" y="4095457"/>
+            <a:ext cx="0" cy="607036"/>
+          </a:xfrm>
+          <a:prstGeom prst="straightConnector1">
+            <a:avLst/>
+          </a:prstGeom>
+          <a:ln w="152400">
+            <a:solidFill>
+              <a:schemeClr val="tx1"/>
+            </a:solidFill>
+            <a:tailEnd type="none" w="med" len="sm"/>
+          </a:ln>
+        </p:spPr>
+        <p:style>
+          <a:lnRef idx="2">
+            <a:schemeClr val="accent1"/>
+          </a:lnRef>
+          <a:fillRef idx="0">
+            <a:schemeClr val="accent1"/>
+          </a:fillRef>
+          <a:effectRef idx="1">
+            <a:schemeClr val="accent1"/>
+          </a:effectRef>
+          <a:fontRef idx="minor">
+            <a:schemeClr val="tx1"/>
+          </a:fontRef>
+        </p:style>
+      </p:cxnSp>
+      <p:cxnSp>
+        <p:nvCxnSpPr>
+          <p:cNvPr id="21" name="直線矢印コネクタ 20">
+            <a:extLst>
+              <a:ext uri="{FF2B5EF4-FFF2-40B4-BE49-F238E27FC236}">
+                <a16:creationId xmlns:a16="http://schemas.microsoft.com/office/drawing/2014/main" id="{4955AEC3-6DC9-4FD1-604D-A38621B2E7EB}"/>
+              </a:ext>
+            </a:extLst>
+          </p:cNvPr>
+          <p:cNvCxnSpPr>
+            <a:cxnSpLocks/>
+          </p:cNvCxnSpPr>
+          <p:nvPr/>
+        </p:nvCxnSpPr>
+        <p:spPr>
+          <a:xfrm>
+            <a:off x="1482286" y="4702493"/>
+            <a:ext cx="3651647" cy="0"/>
+          </a:xfrm>
+          <a:prstGeom prst="straightConnector1">
+            <a:avLst/>
+          </a:prstGeom>
+          <a:ln w="152400">
+            <a:solidFill>
+              <a:schemeClr val="tx1"/>
+            </a:solidFill>
+            <a:tailEnd type="stealth" w="med" len="med"/>
+          </a:ln>
+        </p:spPr>
+        <p:style>
+          <a:lnRef idx="2">
+            <a:schemeClr val="accent1"/>
+          </a:lnRef>
+          <a:fillRef idx="0">
+            <a:schemeClr val="accent1"/>
+          </a:fillRef>
+          <a:effectRef idx="1">
+            <a:schemeClr val="accent1"/>
+          </a:effectRef>
+          <a:fontRef idx="minor">
+            <a:schemeClr val="tx1"/>
+          </a:fontRef>
+        </p:style>
+      </p:cxnSp>
+      <p:sp>
+        <p:nvSpPr>
+          <p:cNvPr id="23" name="四角形: 角を丸くする 22">
+            <a:extLst>
+              <a:ext uri="{FF2B5EF4-FFF2-40B4-BE49-F238E27FC236}">
+                <a16:creationId xmlns:a16="http://schemas.microsoft.com/office/drawing/2014/main" id="{E73E6699-006A-039E-7DF1-77BA93CB21DE}"/>
+              </a:ext>
+            </a:extLst>
+          </p:cNvPr>
+          <p:cNvSpPr/>
+          <p:nvPr/>
+        </p:nvSpPr>
+        <p:spPr>
+          <a:xfrm>
+            <a:off x="5285638" y="3595029"/>
+            <a:ext cx="4748898" cy="2214928"/>
+          </a:xfrm>
+          <a:prstGeom prst="roundRect">
+            <a:avLst>
+              <a:gd name="adj" fmla="val 15009"/>
+            </a:avLst>
+          </a:prstGeom>
+          <a:noFill/>
+          <a:ln w="114300">
+            <a:solidFill>
+              <a:schemeClr val="tx1"/>
+            </a:solidFill>
+          </a:ln>
+        </p:spPr>
+        <p:style>
+          <a:lnRef idx="2">
+            <a:schemeClr val="accent1">
+              <a:shade val="15000"/>
+            </a:schemeClr>
+          </a:lnRef>
+          <a:fillRef idx="1">
+            <a:schemeClr val="accent1"/>
+          </a:fillRef>
+          <a:effectRef idx="0">
+            <a:schemeClr val="accent1"/>
+          </a:effectRef>
+          <a:fontRef idx="minor">
+            <a:schemeClr val="lt1"/>
+          </a:fontRef>
+        </p:style>
+        <p:txBody>
+          <a:bodyPr rtlCol="0" anchor="ctr"/>
+          <a:lstStyle/>
+          <a:p>
+            <a:pPr algn="ctr"/>
+            <a:endParaRPr lang="ja-JP" altLang="en-US" sz="3200" dirty="0">
+              <a:solidFill>
+                <a:schemeClr val="tx1"/>
+              </a:solidFill>
+              <a:latin typeface="モボ-SemiBold" panose="02000700000000000000" pitchFamily="50" charset="-128"/>
+              <a:ea typeface="モボ-SemiBold" panose="02000700000000000000" pitchFamily="50" charset="-128"/>
+            </a:endParaRPr>
+          </a:p>
+        </p:txBody>
+      </p:sp>
+      <p:cxnSp>
+        <p:nvCxnSpPr>
+          <p:cNvPr id="24" name="直線矢印コネクタ 23">
+            <a:extLst>
+              <a:ext uri="{FF2B5EF4-FFF2-40B4-BE49-F238E27FC236}">
+                <a16:creationId xmlns:a16="http://schemas.microsoft.com/office/drawing/2014/main" id="{1C3F5DB4-A9A5-D896-B391-B68C5C5097E3}"/>
+              </a:ext>
+            </a:extLst>
+          </p:cNvPr>
+          <p:cNvCxnSpPr>
+            <a:cxnSpLocks/>
+          </p:cNvCxnSpPr>
+          <p:nvPr/>
+        </p:nvCxnSpPr>
+        <p:spPr>
+          <a:xfrm>
+            <a:off x="5285638" y="4413208"/>
+            <a:ext cx="4748898" cy="0"/>
+          </a:xfrm>
+          <a:prstGeom prst="straightConnector1">
+            <a:avLst/>
+          </a:prstGeom>
+          <a:ln w="114300">
+            <a:solidFill>
+              <a:schemeClr val="tx1"/>
+            </a:solidFill>
+            <a:tailEnd type="none" w="med" len="sm"/>
+          </a:ln>
+        </p:spPr>
+        <p:style>
+          <a:lnRef idx="2">
+            <a:schemeClr val="accent1"/>
+          </a:lnRef>
+          <a:fillRef idx="0">
+            <a:schemeClr val="accent1"/>
+          </a:fillRef>
+          <a:effectRef idx="1">
+            <a:schemeClr val="accent1"/>
+          </a:effectRef>
+          <a:fontRef idx="minor">
+            <a:schemeClr val="tx1"/>
+          </a:fontRef>
+        </p:style>
+      </p:cxnSp>
+      <p:sp>
+        <p:nvSpPr>
+          <p:cNvPr id="25" name="テキスト ボックス 24">
+            <a:extLst>
+              <a:ext uri="{FF2B5EF4-FFF2-40B4-BE49-F238E27FC236}">
+                <a16:creationId xmlns:a16="http://schemas.microsoft.com/office/drawing/2014/main" id="{C735A1DA-4964-40CC-EA3D-A155DB89340F}"/>
+              </a:ext>
+            </a:extLst>
+          </p:cNvPr>
+          <p:cNvSpPr txBox="1"/>
+          <p:nvPr/>
+        </p:nvSpPr>
+        <p:spPr>
+          <a:xfrm>
+            <a:off x="6609238" y="3709680"/>
+            <a:ext cx="2005034" cy="584775"/>
+          </a:xfrm>
+          <a:prstGeom prst="rect">
+            <a:avLst/>
+          </a:prstGeom>
+          <a:noFill/>
+        </p:spPr>
+        <p:txBody>
+          <a:bodyPr wrap="square" rtlCol="0">
+            <a:spAutoFit/>
+          </a:bodyPr>
+          <a:lstStyle/>
+          <a:p>
+            <a:pPr algn="ctr"/>
+            <a:r>
+              <a:rPr lang="en-US" altLang="ja-JP" sz="3200" dirty="0">
+                <a:latin typeface="Consolas" panose="020B0609020204030204" pitchFamily="49" charset="0"/>
+              </a:rPr>
+              <a:t>HostAPI</a:t>
+            </a:r>
+          </a:p>
+        </p:txBody>
+      </p:sp>
+      <p:sp>
+        <p:nvSpPr>
+          <p:cNvPr id="26" name="テキスト ボックス 25">
+            <a:extLst>
+              <a:ext uri="{FF2B5EF4-FFF2-40B4-BE49-F238E27FC236}">
+                <a16:creationId xmlns:a16="http://schemas.microsoft.com/office/drawing/2014/main" id="{DD7221F1-C068-7FF7-D047-68E044B6CFA2}"/>
+              </a:ext>
+            </a:extLst>
+          </p:cNvPr>
+          <p:cNvSpPr txBox="1"/>
+          <p:nvPr/>
+        </p:nvSpPr>
+        <p:spPr>
+          <a:xfrm>
+            <a:off x="5342788" y="4603751"/>
+            <a:ext cx="4634598" cy="1015663"/>
+          </a:xfrm>
+          <a:prstGeom prst="rect">
+            <a:avLst/>
+          </a:prstGeom>
+          <a:noFill/>
+        </p:spPr>
+        <p:txBody>
+          <a:bodyPr wrap="square" rtlCol="0">
+            <a:spAutoFit/>
+          </a:bodyPr>
+          <a:lstStyle/>
+          <a:p>
+            <a:r>
+              <a:rPr lang="ja-JP" altLang="en-US" sz="2000" dirty="0"/>
+              <a:t>・画面を表示する機能を提供</a:t>
+            </a:r>
+          </a:p>
+          <a:p>
+            <a:r>
+              <a:rPr lang="ja-JP" altLang="en-US" sz="2000" dirty="0"/>
+              <a:t>・ファイルを読み書きする機能を提供</a:t>
+            </a:r>
+          </a:p>
+          <a:p>
+            <a:r>
+              <a:rPr lang="ja-JP" altLang="en-US" sz="2000" dirty="0"/>
+              <a:t>・</a:t>
+            </a:r>
+            <a:r>
+              <a:rPr lang="en-US" altLang="ja-JP" sz="2000" dirty="0"/>
+              <a:t>DAW</a:t>
+            </a:r>
+            <a:r>
+              <a:rPr lang="ja-JP" altLang="en-US" sz="2000" dirty="0"/>
+              <a:t>の再生・停止機能を提供</a:t>
+            </a:r>
+          </a:p>
+        </p:txBody>
+      </p:sp>
+      <p:cxnSp>
+        <p:nvCxnSpPr>
+          <p:cNvPr id="31" name="直線矢印コネクタ 30">
+            <a:extLst>
+              <a:ext uri="{FF2B5EF4-FFF2-40B4-BE49-F238E27FC236}">
+                <a16:creationId xmlns:a16="http://schemas.microsoft.com/office/drawing/2014/main" id="{41FDAB57-10ED-665C-DE35-4226D4801BC1}"/>
+              </a:ext>
+            </a:extLst>
+          </p:cNvPr>
+          <p:cNvCxnSpPr>
+            <a:cxnSpLocks/>
+          </p:cNvCxnSpPr>
+          <p:nvPr/>
+        </p:nvCxnSpPr>
+        <p:spPr>
+          <a:xfrm>
+            <a:off x="6742972" y="1318729"/>
+            <a:ext cx="2019986" cy="0"/>
+          </a:xfrm>
+          <a:prstGeom prst="straightConnector1">
+            <a:avLst/>
+          </a:prstGeom>
+          <a:ln w="152400">
+            <a:solidFill>
+              <a:schemeClr val="tx1"/>
+            </a:solidFill>
+            <a:prstDash val="sysDot"/>
+            <a:tailEnd type="stealth" w="med" len="sm"/>
+          </a:ln>
+        </p:spPr>
+        <p:style>
+          <a:lnRef idx="2">
+            <a:schemeClr val="accent1"/>
+          </a:lnRef>
+          <a:fillRef idx="0">
+            <a:schemeClr val="accent1"/>
+          </a:fillRef>
+          <a:effectRef idx="1">
+            <a:schemeClr val="accent1"/>
+          </a:effectRef>
+          <a:fontRef idx="minor">
+            <a:schemeClr val="tx1"/>
+          </a:fontRef>
+        </p:style>
+      </p:cxnSp>
+      <p:sp>
+        <p:nvSpPr>
+          <p:cNvPr id="33" name="四角形: 角を丸くする 32">
+            <a:extLst>
+              <a:ext uri="{FF2B5EF4-FFF2-40B4-BE49-F238E27FC236}">
+                <a16:creationId xmlns:a16="http://schemas.microsoft.com/office/drawing/2014/main" id="{0DB73EBD-5057-F3B9-55C0-9B77F61E5DEA}"/>
+              </a:ext>
+            </a:extLst>
+          </p:cNvPr>
+          <p:cNvSpPr/>
+          <p:nvPr/>
+        </p:nvSpPr>
+        <p:spPr>
+          <a:xfrm>
+            <a:off x="8869854" y="364087"/>
+            <a:ext cx="3607860" cy="2214928"/>
+          </a:xfrm>
+          <a:prstGeom prst="roundRect">
+            <a:avLst>
+              <a:gd name="adj" fmla="val 0"/>
+            </a:avLst>
+          </a:prstGeom>
+          <a:noFill/>
+          <a:ln w="114300">
+            <a:solidFill>
+              <a:schemeClr val="tx1"/>
+            </a:solidFill>
+          </a:ln>
+        </p:spPr>
+        <p:style>
+          <a:lnRef idx="2">
+            <a:schemeClr val="accent1">
+              <a:shade val="15000"/>
+            </a:schemeClr>
+          </a:lnRef>
+          <a:fillRef idx="1">
+            <a:schemeClr val="accent1"/>
+          </a:fillRef>
+          <a:effectRef idx="0">
+            <a:schemeClr val="accent1"/>
+          </a:effectRef>
+          <a:fontRef idx="minor">
+            <a:schemeClr val="lt1"/>
+          </a:fontRef>
+        </p:style>
+        <p:txBody>
+          <a:bodyPr rtlCol="0" anchor="ctr"/>
+          <a:lstStyle/>
+          <a:p>
+            <a:pPr algn="ctr"/>
+            <a:endParaRPr lang="ja-JP" altLang="en-US" sz="3200" dirty="0">
+              <a:solidFill>
+                <a:schemeClr val="tx1"/>
+              </a:solidFill>
+              <a:latin typeface="モボ-SemiBold" panose="02000700000000000000" pitchFamily="50" charset="-128"/>
+              <a:ea typeface="モボ-SemiBold" panose="02000700000000000000" pitchFamily="50" charset="-128"/>
+            </a:endParaRPr>
+          </a:p>
+        </p:txBody>
+      </p:sp>
+      <p:cxnSp>
+        <p:nvCxnSpPr>
+          <p:cNvPr id="34" name="直線矢印コネクタ 33">
+            <a:extLst>
+              <a:ext uri="{FF2B5EF4-FFF2-40B4-BE49-F238E27FC236}">
+                <a16:creationId xmlns:a16="http://schemas.microsoft.com/office/drawing/2014/main" id="{7B49A743-4174-27A9-F55B-EA346F6FC891}"/>
+              </a:ext>
+            </a:extLst>
+          </p:cNvPr>
+          <p:cNvCxnSpPr>
+            <a:cxnSpLocks/>
+          </p:cNvCxnSpPr>
+          <p:nvPr/>
+        </p:nvCxnSpPr>
+        <p:spPr>
+          <a:xfrm>
+            <a:off x="8869854" y="1182266"/>
+            <a:ext cx="3607860" cy="0"/>
+          </a:xfrm>
+          <a:prstGeom prst="straightConnector1">
+            <a:avLst/>
+          </a:prstGeom>
+          <a:ln w="114300">
+            <a:solidFill>
+              <a:schemeClr val="tx1"/>
+            </a:solidFill>
+            <a:tailEnd type="none" w="med" len="sm"/>
+          </a:ln>
+        </p:spPr>
+        <p:style>
+          <a:lnRef idx="2">
+            <a:schemeClr val="accent1"/>
+          </a:lnRef>
+          <a:fillRef idx="0">
+            <a:schemeClr val="accent1"/>
+          </a:fillRef>
+          <a:effectRef idx="1">
+            <a:schemeClr val="accent1"/>
+          </a:effectRef>
+          <a:fontRef idx="minor">
+            <a:schemeClr val="tx1"/>
+          </a:fontRef>
+        </p:style>
+      </p:cxnSp>
+      <p:sp>
+        <p:nvSpPr>
+          <p:cNvPr id="35" name="テキスト ボックス 34">
+            <a:extLst>
+              <a:ext uri="{FF2B5EF4-FFF2-40B4-BE49-F238E27FC236}">
+                <a16:creationId xmlns:a16="http://schemas.microsoft.com/office/drawing/2014/main" id="{2CFD5B5D-6B78-5338-691F-34FF8BBD01FD}"/>
+              </a:ext>
+            </a:extLst>
+          </p:cNvPr>
+          <p:cNvSpPr txBox="1"/>
+          <p:nvPr/>
+        </p:nvSpPr>
+        <p:spPr>
+          <a:xfrm>
+            <a:off x="9134785" y="550467"/>
+            <a:ext cx="3077997" cy="461665"/>
+          </a:xfrm>
+          <a:prstGeom prst="rect">
+            <a:avLst/>
+          </a:prstGeom>
+          <a:noFill/>
+        </p:spPr>
+        <p:txBody>
+          <a:bodyPr wrap="square" rtlCol="0">
+            <a:spAutoFit/>
+          </a:bodyPr>
+          <a:lstStyle/>
+          <a:p>
+            <a:pPr algn="ctr"/>
+            <a:r>
+              <a:rPr lang="ja-JP" altLang="en-US" sz="2400" dirty="0">
+                <a:latin typeface="Consolas" panose="020B0609020204030204" pitchFamily="49" charset="0"/>
+              </a:rPr>
+              <a:t>ユーザのプラグイン</a:t>
+            </a:r>
+            <a:endParaRPr lang="en-US" altLang="ja-JP" sz="2400" dirty="0">
+              <a:latin typeface="Consolas" panose="020B0609020204030204" pitchFamily="49" charset="0"/>
+            </a:endParaRPr>
+          </a:p>
+        </p:txBody>
+      </p:sp>
+      <p:sp>
+        <p:nvSpPr>
+          <p:cNvPr id="36" name="テキスト ボックス 35">
+            <a:extLst>
+              <a:ext uri="{FF2B5EF4-FFF2-40B4-BE49-F238E27FC236}">
+                <a16:creationId xmlns:a16="http://schemas.microsoft.com/office/drawing/2014/main" id="{CC7E1ADC-D5F4-1DF2-EA5D-E37B8997448A}"/>
+              </a:ext>
+            </a:extLst>
+          </p:cNvPr>
+          <p:cNvSpPr txBox="1"/>
+          <p:nvPr/>
+        </p:nvSpPr>
+        <p:spPr>
+          <a:xfrm>
+            <a:off x="8907266" y="1391196"/>
+            <a:ext cx="3456143" cy="1015663"/>
+          </a:xfrm>
+          <a:prstGeom prst="rect">
+            <a:avLst/>
+          </a:prstGeom>
+          <a:noFill/>
+        </p:spPr>
+        <p:txBody>
+          <a:bodyPr wrap="square" rtlCol="0">
+            <a:spAutoFit/>
+          </a:bodyPr>
+          <a:lstStyle/>
+          <a:p>
+            <a:r>
+              <a:rPr lang="ja-JP" altLang="en-US" sz="2000" dirty="0"/>
+              <a:t>・初期化時に</a:t>
+            </a:r>
+            <a:r>
+              <a:rPr lang="en-US" altLang="ja-JP" sz="2000" dirty="0">
+                <a:latin typeface="Consolas" panose="020B0609020204030204" pitchFamily="49" charset="0"/>
+              </a:rPr>
+              <a:t>API</a:t>
+            </a:r>
+            <a:r>
+              <a:rPr lang="ja-JP" altLang="en-US" sz="2000" dirty="0"/>
+              <a:t>を受け取る</a:t>
+            </a:r>
+          </a:p>
+          <a:p>
+            <a:r>
+              <a:rPr lang="ja-JP" altLang="en-US" sz="2000" dirty="0"/>
+              <a:t>・画面を作る</a:t>
+            </a:r>
+          </a:p>
+          <a:p>
+            <a:r>
+              <a:rPr lang="ja-JP" altLang="en-US" sz="2000" dirty="0"/>
+              <a:t>・機能を実行する</a:t>
+            </a:r>
+          </a:p>
+        </p:txBody>
+      </p:sp>
+      <p:sp>
+        <p:nvSpPr>
+          <p:cNvPr id="38" name="テキスト ボックス 37">
+            <a:extLst>
+              <a:ext uri="{FF2B5EF4-FFF2-40B4-BE49-F238E27FC236}">
+                <a16:creationId xmlns:a16="http://schemas.microsoft.com/office/drawing/2014/main" id="{ECB3ED67-C7DF-274E-381E-D0EA7B3297CC}"/>
+              </a:ext>
+            </a:extLst>
+          </p:cNvPr>
+          <p:cNvSpPr txBox="1"/>
+          <p:nvPr/>
+        </p:nvSpPr>
+        <p:spPr>
+          <a:xfrm>
+            <a:off x="1014046" y="781299"/>
+            <a:ext cx="2491583" cy="461665"/>
+          </a:xfrm>
+          <a:prstGeom prst="rect">
+            <a:avLst/>
+          </a:prstGeom>
+          <a:noFill/>
+        </p:spPr>
+        <p:txBody>
+          <a:bodyPr wrap="square" rtlCol="0">
+            <a:spAutoFit/>
+          </a:bodyPr>
+          <a:lstStyle/>
+          <a:p>
+            <a:r>
+              <a:rPr kumimoji="1" lang="en-US" altLang="ja-JP" sz="2400" dirty="0"/>
+              <a:t>1.</a:t>
+            </a:r>
+            <a:r>
+              <a:rPr kumimoji="1" lang="ja-JP" altLang="en-US" sz="2400" dirty="0"/>
+              <a:t>  起動時に命令</a:t>
+            </a:r>
+          </a:p>
+        </p:txBody>
+      </p:sp>
+      <p:sp>
+        <p:nvSpPr>
+          <p:cNvPr id="39" name="テキスト ボックス 38">
+            <a:extLst>
+              <a:ext uri="{FF2B5EF4-FFF2-40B4-BE49-F238E27FC236}">
+                <a16:creationId xmlns:a16="http://schemas.microsoft.com/office/drawing/2014/main" id="{CB28E2B8-820E-ADE9-10CE-71850E119A55}"/>
+              </a:ext>
+            </a:extLst>
+          </p:cNvPr>
+          <p:cNvSpPr txBox="1"/>
+          <p:nvPr/>
+        </p:nvSpPr>
+        <p:spPr>
+          <a:xfrm>
+            <a:off x="1888606" y="4150187"/>
+            <a:ext cx="3145311" cy="461665"/>
+          </a:xfrm>
+          <a:prstGeom prst="rect">
+            <a:avLst/>
+          </a:prstGeom>
+          <a:noFill/>
+        </p:spPr>
+        <p:txBody>
+          <a:bodyPr wrap="square" rtlCol="0">
+            <a:spAutoFit/>
+          </a:bodyPr>
+          <a:lstStyle/>
+          <a:p>
+            <a:r>
+              <a:rPr lang="en-US" altLang="ja-JP" sz="2400" dirty="0">
+                <a:latin typeface="Consolas" panose="020B0609020204030204" pitchFamily="49" charset="0"/>
+              </a:rPr>
+              <a:t>HostAPI</a:t>
+            </a:r>
+            <a:r>
+              <a:rPr lang="ja-JP" altLang="en-US" sz="2400" dirty="0">
+                <a:latin typeface="+mn-ea"/>
+              </a:rPr>
+              <a:t>を提供する</a:t>
+            </a:r>
+          </a:p>
+        </p:txBody>
+      </p:sp>
+      <p:sp>
+        <p:nvSpPr>
+          <p:cNvPr id="41" name="テキスト ボックス 40">
+            <a:extLst>
+              <a:ext uri="{FF2B5EF4-FFF2-40B4-BE49-F238E27FC236}">
+                <a16:creationId xmlns:a16="http://schemas.microsoft.com/office/drawing/2014/main" id="{40B93CEA-66CB-0998-CEA7-AEB28B178C91}"/>
+              </a:ext>
+            </a:extLst>
+          </p:cNvPr>
+          <p:cNvSpPr txBox="1"/>
+          <p:nvPr/>
+        </p:nvSpPr>
+        <p:spPr>
+          <a:xfrm>
+            <a:off x="6737487" y="766462"/>
+            <a:ext cx="1881852" cy="461665"/>
+          </a:xfrm>
+          <a:prstGeom prst="rect">
+            <a:avLst/>
+          </a:prstGeom>
+          <a:noFill/>
+        </p:spPr>
+        <p:txBody>
+          <a:bodyPr wrap="square" rtlCol="0">
+            <a:spAutoFit/>
+          </a:bodyPr>
+          <a:lstStyle/>
+          <a:p>
+            <a:pPr algn="ctr"/>
+            <a:r>
+              <a:rPr kumimoji="1" lang="en-US" altLang="ja-JP" sz="2400" dirty="0"/>
+              <a:t>2.</a:t>
+            </a:r>
+            <a:r>
+              <a:rPr kumimoji="1" lang="ja-JP" altLang="en-US" sz="2400" dirty="0"/>
+              <a:t>  発見して</a:t>
+            </a:r>
+          </a:p>
+        </p:txBody>
+      </p:sp>
+      <p:sp>
+        <p:nvSpPr>
+          <p:cNvPr id="43" name="テキスト ボックス 42">
+            <a:extLst>
+              <a:ext uri="{FF2B5EF4-FFF2-40B4-BE49-F238E27FC236}">
+                <a16:creationId xmlns:a16="http://schemas.microsoft.com/office/drawing/2014/main" id="{C41A01CD-2068-FFC1-B9C4-C139B43B827D}"/>
+              </a:ext>
+            </a:extLst>
+          </p:cNvPr>
+          <p:cNvSpPr txBox="1"/>
+          <p:nvPr/>
+        </p:nvSpPr>
+        <p:spPr>
+          <a:xfrm>
+            <a:off x="7153624" y="1467092"/>
+            <a:ext cx="1432056" cy="461665"/>
+          </a:xfrm>
+          <a:prstGeom prst="rect">
+            <a:avLst/>
+          </a:prstGeom>
+          <a:noFill/>
+        </p:spPr>
+        <p:txBody>
+          <a:bodyPr wrap="square" rtlCol="0">
+            <a:spAutoFit/>
+          </a:bodyPr>
+          <a:lstStyle/>
+          <a:p>
+            <a:pPr algn="ctr"/>
+            <a:r>
+              <a:rPr kumimoji="1" lang="ja-JP" altLang="en-US" sz="2400" dirty="0"/>
+              <a:t>読み込む</a:t>
+            </a:r>
+          </a:p>
+        </p:txBody>
+      </p:sp>
+      <p:cxnSp>
+        <p:nvCxnSpPr>
+          <p:cNvPr id="44" name="直線矢印コネクタ 43">
+            <a:extLst>
+              <a:ext uri="{FF2B5EF4-FFF2-40B4-BE49-F238E27FC236}">
+                <a16:creationId xmlns:a16="http://schemas.microsoft.com/office/drawing/2014/main" id="{80816D4F-C793-ED38-99AB-214B69F664F8}"/>
+              </a:ext>
+            </a:extLst>
+          </p:cNvPr>
+          <p:cNvCxnSpPr>
+            <a:cxnSpLocks/>
+            <a:endCxn id="33" idx="2"/>
+          </p:cNvCxnSpPr>
+          <p:nvPr/>
+        </p:nvCxnSpPr>
+        <p:spPr>
+          <a:xfrm flipV="1">
+            <a:off x="10673784" y="2579015"/>
+            <a:ext cx="0" cy="368020"/>
+          </a:xfrm>
+          <a:prstGeom prst="straightConnector1">
+            <a:avLst/>
+          </a:prstGeom>
+          <a:ln w="152400">
+            <a:solidFill>
+              <a:schemeClr val="tx1"/>
+            </a:solidFill>
+            <a:prstDash val="sysDot"/>
+            <a:tailEnd type="none" w="med" len="sm"/>
+          </a:ln>
+        </p:spPr>
+        <p:style>
+          <a:lnRef idx="2">
+            <a:schemeClr val="accent1"/>
+          </a:lnRef>
+          <a:fillRef idx="0">
+            <a:schemeClr val="accent1"/>
+          </a:fillRef>
+          <a:effectRef idx="1">
+            <a:schemeClr val="accent1"/>
+          </a:effectRef>
+          <a:fontRef idx="minor">
+            <a:schemeClr val="tx1"/>
+          </a:fontRef>
+        </p:style>
+      </p:cxnSp>
+      <p:cxnSp>
+        <p:nvCxnSpPr>
+          <p:cNvPr id="49" name="直線矢印コネクタ 48">
+            <a:extLst>
+              <a:ext uri="{FF2B5EF4-FFF2-40B4-BE49-F238E27FC236}">
+                <a16:creationId xmlns:a16="http://schemas.microsoft.com/office/drawing/2014/main" id="{4FB92263-120F-C07D-DD1E-5C23B4A9EB92}"/>
+              </a:ext>
+            </a:extLst>
+          </p:cNvPr>
+          <p:cNvCxnSpPr>
+            <a:cxnSpLocks/>
+          </p:cNvCxnSpPr>
+          <p:nvPr/>
+        </p:nvCxnSpPr>
+        <p:spPr>
+          <a:xfrm flipH="1">
+            <a:off x="7611755" y="2870487"/>
+            <a:ext cx="3138545" cy="0"/>
+          </a:xfrm>
+          <a:prstGeom prst="straightConnector1">
+            <a:avLst/>
+          </a:prstGeom>
+          <a:ln w="152400">
+            <a:solidFill>
+              <a:schemeClr val="tx1"/>
+            </a:solidFill>
+            <a:prstDash val="sysDot"/>
+            <a:tailEnd type="none" w="med" len="sm"/>
+          </a:ln>
+        </p:spPr>
+        <p:style>
+          <a:lnRef idx="2">
+            <a:schemeClr val="accent1"/>
+          </a:lnRef>
+          <a:fillRef idx="0">
+            <a:schemeClr val="accent1"/>
+          </a:fillRef>
+          <a:effectRef idx="1">
+            <a:schemeClr val="accent1"/>
+          </a:effectRef>
+          <a:fontRef idx="minor">
+            <a:schemeClr val="tx1"/>
+          </a:fontRef>
+        </p:style>
+      </p:cxnSp>
+      <p:cxnSp>
+        <p:nvCxnSpPr>
+          <p:cNvPr id="53" name="直線矢印コネクタ 52">
+            <a:extLst>
+              <a:ext uri="{FF2B5EF4-FFF2-40B4-BE49-F238E27FC236}">
+                <a16:creationId xmlns:a16="http://schemas.microsoft.com/office/drawing/2014/main" id="{B6A3D3E5-F56A-C719-8686-2FE2048616B5}"/>
+              </a:ext>
+            </a:extLst>
+          </p:cNvPr>
+          <p:cNvCxnSpPr>
+            <a:cxnSpLocks/>
+          </p:cNvCxnSpPr>
+          <p:nvPr/>
+        </p:nvCxnSpPr>
+        <p:spPr>
+          <a:xfrm>
+            <a:off x="7660087" y="2800350"/>
+            <a:ext cx="0" cy="699770"/>
+          </a:xfrm>
+          <a:prstGeom prst="straightConnector1">
+            <a:avLst/>
+          </a:prstGeom>
+          <a:ln w="152400">
+            <a:solidFill>
+              <a:schemeClr val="tx1"/>
+            </a:solidFill>
+            <a:prstDash val="sysDot"/>
+            <a:tailEnd type="stealth" w="med" len="sm"/>
+          </a:ln>
+        </p:spPr>
+        <p:style>
+          <a:lnRef idx="2">
+            <a:schemeClr val="accent1"/>
+          </a:lnRef>
+          <a:fillRef idx="0">
+            <a:schemeClr val="accent1"/>
+          </a:fillRef>
+          <a:effectRef idx="1">
+            <a:schemeClr val="accent1"/>
+          </a:effectRef>
+          <a:fontRef idx="minor">
+            <a:schemeClr val="tx1"/>
+          </a:fontRef>
+        </p:style>
+      </p:cxnSp>
+      <p:sp>
+        <p:nvSpPr>
+          <p:cNvPr id="64" name="テキスト ボックス 63">
+            <a:extLst>
+              <a:ext uri="{FF2B5EF4-FFF2-40B4-BE49-F238E27FC236}">
+                <a16:creationId xmlns:a16="http://schemas.microsoft.com/office/drawing/2014/main" id="{5AD9438F-A4EA-00AE-145A-A726FCBAB02F}"/>
+              </a:ext>
+            </a:extLst>
+          </p:cNvPr>
+          <p:cNvSpPr txBox="1"/>
+          <p:nvPr/>
+        </p:nvSpPr>
+        <p:spPr>
+          <a:xfrm>
+            <a:off x="7957775" y="2978393"/>
+            <a:ext cx="4039222" cy="461665"/>
+          </a:xfrm>
+          <a:prstGeom prst="rect">
+            <a:avLst/>
+          </a:prstGeom>
+          <a:noFill/>
+        </p:spPr>
+        <p:txBody>
+          <a:bodyPr wrap="square" rtlCol="0">
+            <a:spAutoFit/>
+          </a:bodyPr>
+          <a:lstStyle/>
+          <a:p>
+            <a:r>
+              <a:rPr kumimoji="1" lang="en-US" altLang="ja-JP" sz="2400" dirty="0"/>
+              <a:t>3.</a:t>
+            </a:r>
+            <a:r>
+              <a:rPr kumimoji="1" lang="ja-JP" altLang="en-US" sz="2400" dirty="0"/>
+              <a:t>  </a:t>
+            </a:r>
+            <a:r>
+              <a:rPr kumimoji="1" lang="en-US" altLang="ja-JP" sz="2400" dirty="0">
+                <a:latin typeface="Consolas" panose="020B0609020204030204" pitchFamily="49" charset="0"/>
+              </a:rPr>
+              <a:t>API</a:t>
+            </a:r>
+            <a:r>
+              <a:rPr kumimoji="1" lang="ja-JP" altLang="en-US" sz="2400" dirty="0"/>
+              <a:t>を使って</a:t>
+            </a:r>
+            <a:r>
+              <a:rPr kumimoji="1" lang="en-US" altLang="ja-JP" sz="2400" dirty="0"/>
+              <a:t>DAW</a:t>
+            </a:r>
+            <a:r>
+              <a:rPr kumimoji="1" lang="ja-JP" altLang="en-US" sz="2400" dirty="0"/>
+              <a:t>を操作</a:t>
+            </a:r>
+          </a:p>
+        </p:txBody>
+      </p:sp>
+      <p:cxnSp>
+        <p:nvCxnSpPr>
+          <p:cNvPr id="65" name="直線矢印コネクタ 64">
+            <a:extLst>
+              <a:ext uri="{FF2B5EF4-FFF2-40B4-BE49-F238E27FC236}">
+                <a16:creationId xmlns:a16="http://schemas.microsoft.com/office/drawing/2014/main" id="{3345EBE9-AD86-027E-55E5-864CD409920A}"/>
+              </a:ext>
+            </a:extLst>
+          </p:cNvPr>
+          <p:cNvCxnSpPr>
+            <a:cxnSpLocks/>
+          </p:cNvCxnSpPr>
+          <p:nvPr/>
+        </p:nvCxnSpPr>
+        <p:spPr>
+          <a:xfrm>
+            <a:off x="12477714" y="1326349"/>
+            <a:ext cx="2295570" cy="16047"/>
+          </a:xfrm>
+          <a:prstGeom prst="straightConnector1">
+            <a:avLst/>
+          </a:prstGeom>
+          <a:ln w="152400">
+            <a:solidFill>
+              <a:schemeClr val="tx1"/>
+            </a:solidFill>
+            <a:tailEnd type="triangle" w="med" len="sm"/>
+          </a:ln>
+        </p:spPr>
+        <p:style>
+          <a:lnRef idx="2">
+            <a:schemeClr val="accent1"/>
+          </a:lnRef>
+          <a:fillRef idx="0">
+            <a:schemeClr val="accent1"/>
+          </a:fillRef>
+          <a:effectRef idx="1">
+            <a:schemeClr val="accent1"/>
+          </a:effectRef>
+          <a:fontRef idx="minor">
+            <a:schemeClr val="tx1"/>
+          </a:fontRef>
+        </p:style>
+      </p:cxnSp>
+      <p:sp>
+        <p:nvSpPr>
+          <p:cNvPr id="67" name="テキスト ボックス 66">
+            <a:extLst>
+              <a:ext uri="{FF2B5EF4-FFF2-40B4-BE49-F238E27FC236}">
+                <a16:creationId xmlns:a16="http://schemas.microsoft.com/office/drawing/2014/main" id="{B283C3DE-F56B-3995-CD4C-4D9E8B4560E2}"/>
+              </a:ext>
+            </a:extLst>
+          </p:cNvPr>
+          <p:cNvSpPr txBox="1"/>
+          <p:nvPr/>
+        </p:nvSpPr>
+        <p:spPr>
+          <a:xfrm>
+            <a:off x="12973064" y="799023"/>
+            <a:ext cx="1057272" cy="461665"/>
+          </a:xfrm>
+          <a:prstGeom prst="rect">
+            <a:avLst/>
+          </a:prstGeom>
+          <a:noFill/>
+        </p:spPr>
+        <p:txBody>
+          <a:bodyPr wrap="square" rtlCol="0">
+            <a:spAutoFit/>
+          </a:bodyPr>
+          <a:lstStyle/>
+          <a:p>
+            <a:pPr algn="ctr"/>
+            <a:r>
+              <a:rPr kumimoji="1" lang="ja-JP" altLang="en-US" sz="2400" dirty="0"/>
+              <a:t>継承</a:t>
+            </a:r>
+          </a:p>
+        </p:txBody>
+      </p:sp>
+      <p:sp>
+        <p:nvSpPr>
+          <p:cNvPr id="69" name="テキスト ボックス 68">
+            <a:extLst>
+              <a:ext uri="{FF2B5EF4-FFF2-40B4-BE49-F238E27FC236}">
+                <a16:creationId xmlns:a16="http://schemas.microsoft.com/office/drawing/2014/main" id="{56BCC656-443F-FFE7-7382-559313EA3103}"/>
+              </a:ext>
+            </a:extLst>
+          </p:cNvPr>
+          <p:cNvSpPr txBox="1"/>
+          <p:nvPr/>
+        </p:nvSpPr>
+        <p:spPr>
+          <a:xfrm>
+            <a:off x="12363409" y="1486478"/>
+            <a:ext cx="2372463" cy="461665"/>
+          </a:xfrm>
+          <a:prstGeom prst="rect">
+            <a:avLst/>
+          </a:prstGeom>
+          <a:noFill/>
+        </p:spPr>
+        <p:txBody>
+          <a:bodyPr wrap="square" rtlCol="0">
+            <a:spAutoFit/>
+          </a:bodyPr>
+          <a:lstStyle/>
+          <a:p>
+            <a:pPr algn="ctr"/>
+            <a:r>
+              <a:rPr kumimoji="1" lang="ja-JP" altLang="en-US" sz="2400" dirty="0"/>
+              <a:t>（親子の関係）</a:t>
+            </a:r>
+          </a:p>
+        </p:txBody>
+      </p:sp>
+      <p:sp>
+        <p:nvSpPr>
+          <p:cNvPr id="71" name="四角形: 角を丸くする 70">
+            <a:extLst>
+              <a:ext uri="{FF2B5EF4-FFF2-40B4-BE49-F238E27FC236}">
+                <a16:creationId xmlns:a16="http://schemas.microsoft.com/office/drawing/2014/main" id="{B68938FE-4905-E741-6796-A49AD48C93BB}"/>
+              </a:ext>
+            </a:extLst>
+          </p:cNvPr>
+          <p:cNvSpPr/>
+          <p:nvPr/>
+        </p:nvSpPr>
+        <p:spPr>
+          <a:xfrm>
+            <a:off x="14861767" y="535540"/>
+            <a:ext cx="2605282" cy="1564670"/>
+          </a:xfrm>
+          <a:prstGeom prst="roundRect">
+            <a:avLst>
+              <a:gd name="adj" fmla="val 37837"/>
+            </a:avLst>
+          </a:prstGeom>
+          <a:noFill/>
+          <a:ln w="114300">
+            <a:solidFill>
+              <a:schemeClr val="tx1"/>
+            </a:solidFill>
+          </a:ln>
+        </p:spPr>
+        <p:style>
+          <a:lnRef idx="2">
+            <a:schemeClr val="accent1">
+              <a:shade val="15000"/>
+            </a:schemeClr>
+          </a:lnRef>
+          <a:fillRef idx="1">
+            <a:schemeClr val="accent1"/>
+          </a:fillRef>
+          <a:effectRef idx="0">
+            <a:schemeClr val="accent1"/>
+          </a:effectRef>
+          <a:fontRef idx="minor">
+            <a:schemeClr val="lt1"/>
+          </a:fontRef>
+        </p:style>
+        <p:txBody>
+          <a:bodyPr rtlCol="0" anchor="ctr"/>
+          <a:lstStyle/>
+          <a:p>
+            <a:pPr algn="ctr"/>
+            <a:endParaRPr lang="ja-JP" altLang="en-US" sz="3200" dirty="0">
+              <a:solidFill>
+                <a:schemeClr val="tx1"/>
+              </a:solidFill>
+              <a:latin typeface="モボ-SemiBold" panose="02000700000000000000" pitchFamily="50" charset="-128"/>
+              <a:ea typeface="モボ-SemiBold" panose="02000700000000000000" pitchFamily="50" charset="-128"/>
+            </a:endParaRPr>
+          </a:p>
+        </p:txBody>
+      </p:sp>
+      <p:cxnSp>
+        <p:nvCxnSpPr>
+          <p:cNvPr id="72" name="直線矢印コネクタ 71">
+            <a:extLst>
+              <a:ext uri="{FF2B5EF4-FFF2-40B4-BE49-F238E27FC236}">
+                <a16:creationId xmlns:a16="http://schemas.microsoft.com/office/drawing/2014/main" id="{D66FB1A3-6D02-49EB-A70F-0D041E57CEE9}"/>
+              </a:ext>
+            </a:extLst>
+          </p:cNvPr>
+          <p:cNvCxnSpPr>
+            <a:cxnSpLocks/>
+          </p:cNvCxnSpPr>
+          <p:nvPr/>
+        </p:nvCxnSpPr>
+        <p:spPr>
+          <a:xfrm>
+            <a:off x="14899180" y="1475639"/>
+            <a:ext cx="2605282" cy="0"/>
+          </a:xfrm>
+          <a:prstGeom prst="straightConnector1">
+            <a:avLst/>
+          </a:prstGeom>
+          <a:ln w="114300">
+            <a:solidFill>
+              <a:schemeClr val="tx1"/>
+            </a:solidFill>
+            <a:tailEnd type="none" w="med" len="sm"/>
+          </a:ln>
+        </p:spPr>
+        <p:style>
+          <a:lnRef idx="2">
+            <a:schemeClr val="accent1"/>
+          </a:lnRef>
+          <a:fillRef idx="0">
+            <a:schemeClr val="accent1"/>
+          </a:fillRef>
+          <a:effectRef idx="1">
+            <a:schemeClr val="accent1"/>
+          </a:effectRef>
+          <a:fontRef idx="minor">
+            <a:schemeClr val="tx1"/>
+          </a:fontRef>
+        </p:style>
+      </p:cxnSp>
+      <p:sp>
+        <p:nvSpPr>
+          <p:cNvPr id="73" name="テキスト ボックス 72">
+            <a:extLst>
+              <a:ext uri="{FF2B5EF4-FFF2-40B4-BE49-F238E27FC236}">
+                <a16:creationId xmlns:a16="http://schemas.microsoft.com/office/drawing/2014/main" id="{0840CB1C-0EF9-422A-C953-89642A8FA540}"/>
+              </a:ext>
+            </a:extLst>
+          </p:cNvPr>
+          <p:cNvSpPr txBox="1"/>
+          <p:nvPr/>
+        </p:nvSpPr>
+        <p:spPr>
+          <a:xfrm>
+            <a:off x="14862990" y="936240"/>
+            <a:ext cx="2605282" cy="400110"/>
+          </a:xfrm>
+          <a:prstGeom prst="rect">
+            <a:avLst/>
+          </a:prstGeom>
+          <a:noFill/>
+        </p:spPr>
+        <p:txBody>
+          <a:bodyPr wrap="square" rtlCol="0">
+            <a:spAutoFit/>
+          </a:bodyPr>
+          <a:lstStyle/>
+          <a:p>
+            <a:pPr algn="ctr"/>
+            <a:r>
+              <a:rPr lang="en-US" altLang="ja-JP" sz="2000" dirty="0">
+                <a:latin typeface="Consolas" panose="020B0609020204030204" pitchFamily="49" charset="0"/>
+              </a:rPr>
+              <a:t>DawiyPluginBase</a:t>
+            </a:r>
+          </a:p>
+        </p:txBody>
+      </p:sp>
+      <p:sp>
+        <p:nvSpPr>
+          <p:cNvPr id="74" name="テキスト ボックス 73">
+            <a:extLst>
+              <a:ext uri="{FF2B5EF4-FFF2-40B4-BE49-F238E27FC236}">
+                <a16:creationId xmlns:a16="http://schemas.microsoft.com/office/drawing/2014/main" id="{F9919D6E-36E7-D815-BB2C-4A8C45184481}"/>
+              </a:ext>
+            </a:extLst>
+          </p:cNvPr>
+          <p:cNvSpPr txBox="1"/>
+          <p:nvPr/>
+        </p:nvSpPr>
+        <p:spPr>
+          <a:xfrm>
+            <a:off x="14960555" y="1575562"/>
+            <a:ext cx="2407705" cy="400110"/>
+          </a:xfrm>
+          <a:prstGeom prst="rect">
+            <a:avLst/>
+          </a:prstGeom>
+          <a:noFill/>
+        </p:spPr>
+        <p:txBody>
+          <a:bodyPr wrap="square" rtlCol="0">
+            <a:spAutoFit/>
+          </a:bodyPr>
+          <a:lstStyle/>
+          <a:p>
+            <a:pPr algn="ctr"/>
+            <a:r>
+              <a:rPr lang="en-US" altLang="ja-JP" sz="2000" dirty="0">
+                <a:latin typeface="Consolas" panose="020B0609020204030204" pitchFamily="49" charset="0"/>
+              </a:rPr>
+              <a:t>host : HostAPI</a:t>
+            </a:r>
+            <a:endParaRPr lang="ja-JP" altLang="en-US" sz="2000" dirty="0">
+              <a:latin typeface="Consolas" panose="020B0609020204030204" pitchFamily="49" charset="0"/>
+            </a:endParaRPr>
+          </a:p>
+        </p:txBody>
+      </p:sp>
+      <p:sp>
+        <p:nvSpPr>
+          <p:cNvPr id="76" name="テキスト ボックス 75">
+            <a:extLst>
+              <a:ext uri="{FF2B5EF4-FFF2-40B4-BE49-F238E27FC236}">
+                <a16:creationId xmlns:a16="http://schemas.microsoft.com/office/drawing/2014/main" id="{8A5870F6-4B86-DFEA-9A22-CBE883BD6871}"/>
+              </a:ext>
+            </a:extLst>
+          </p:cNvPr>
+          <p:cNvSpPr txBox="1"/>
+          <p:nvPr/>
+        </p:nvSpPr>
+        <p:spPr>
+          <a:xfrm>
+            <a:off x="15201350" y="625578"/>
+            <a:ext cx="1926116" cy="381419"/>
+          </a:xfrm>
+          <a:prstGeom prst="rect">
+            <a:avLst/>
+          </a:prstGeom>
+          <a:noFill/>
+        </p:spPr>
+        <p:txBody>
+          <a:bodyPr wrap="square" rtlCol="0">
+            <a:spAutoFit/>
+          </a:bodyPr>
+          <a:lstStyle/>
+          <a:p>
+            <a:pPr algn="ctr"/>
+            <a:r>
+              <a:rPr lang="en-US" altLang="ja-JP" dirty="0">
+                <a:latin typeface="+mn-ea"/>
+              </a:rPr>
+              <a:t>&lt;&lt;</a:t>
+            </a:r>
+            <a:r>
+              <a:rPr lang="ja-JP" altLang="en-US" dirty="0">
+                <a:latin typeface="+mn-ea"/>
+              </a:rPr>
+              <a:t>抽象クラス</a:t>
+            </a:r>
+            <a:r>
+              <a:rPr lang="en-US" altLang="ja-JP" dirty="0">
+                <a:latin typeface="+mn-ea"/>
+              </a:rPr>
+              <a:t>&gt;&gt;</a:t>
+            </a:r>
+          </a:p>
+        </p:txBody>
+      </p:sp>
+      <p:cxnSp>
+        <p:nvCxnSpPr>
+          <p:cNvPr id="77" name="直線矢印コネクタ 76">
+            <a:extLst>
+              <a:ext uri="{FF2B5EF4-FFF2-40B4-BE49-F238E27FC236}">
+                <a16:creationId xmlns:a16="http://schemas.microsoft.com/office/drawing/2014/main" id="{B1441988-4925-EDA8-F88A-DBF7F0576BF2}"/>
+              </a:ext>
+            </a:extLst>
+          </p:cNvPr>
+          <p:cNvCxnSpPr>
+            <a:cxnSpLocks/>
+            <a:endCxn id="71" idx="2"/>
+          </p:cNvCxnSpPr>
+          <p:nvPr/>
+        </p:nvCxnSpPr>
+        <p:spPr>
+          <a:xfrm flipV="1">
+            <a:off x="16164408" y="2100210"/>
+            <a:ext cx="0" cy="865558"/>
+          </a:xfrm>
+          <a:prstGeom prst="straightConnector1">
+            <a:avLst/>
+          </a:prstGeom>
+          <a:ln w="152400">
+            <a:solidFill>
+              <a:schemeClr val="tx1"/>
+            </a:solidFill>
+            <a:prstDash val="sysDot"/>
+            <a:tailEnd type="none" w="med" len="sm"/>
+          </a:ln>
+        </p:spPr>
+        <p:style>
+          <a:lnRef idx="2">
+            <a:schemeClr val="accent1"/>
+          </a:lnRef>
+          <a:fillRef idx="0">
+            <a:schemeClr val="accent1"/>
+          </a:fillRef>
+          <a:effectRef idx="1">
+            <a:schemeClr val="accent1"/>
+          </a:effectRef>
+          <a:fontRef idx="minor">
+            <a:schemeClr val="tx1"/>
+          </a:fontRef>
+        </p:style>
+      </p:cxnSp>
+      <p:cxnSp>
+        <p:nvCxnSpPr>
+          <p:cNvPr id="78" name="直線矢印コネクタ 77">
+            <a:extLst>
+              <a:ext uri="{FF2B5EF4-FFF2-40B4-BE49-F238E27FC236}">
+                <a16:creationId xmlns:a16="http://schemas.microsoft.com/office/drawing/2014/main" id="{10CF5DF1-BC00-0CF8-7913-1557A2FC7C7F}"/>
+              </a:ext>
+            </a:extLst>
+          </p:cNvPr>
+          <p:cNvCxnSpPr>
+            <a:cxnSpLocks/>
+          </p:cNvCxnSpPr>
+          <p:nvPr/>
+        </p:nvCxnSpPr>
+        <p:spPr>
+          <a:xfrm flipH="1">
+            <a:off x="13960880" y="2884633"/>
+            <a:ext cx="2281389" cy="0"/>
+          </a:xfrm>
+          <a:prstGeom prst="straightConnector1">
+            <a:avLst/>
+          </a:prstGeom>
+          <a:ln w="152400">
+            <a:solidFill>
+              <a:schemeClr val="tx1"/>
+            </a:solidFill>
+            <a:prstDash val="sysDot"/>
+            <a:tailEnd type="none" w="med" len="sm"/>
+          </a:ln>
+        </p:spPr>
+        <p:style>
+          <a:lnRef idx="2">
+            <a:schemeClr val="accent1"/>
+          </a:lnRef>
+          <a:fillRef idx="0">
+            <a:schemeClr val="accent1"/>
+          </a:fillRef>
+          <a:effectRef idx="1">
+            <a:schemeClr val="accent1"/>
+          </a:effectRef>
+          <a:fontRef idx="minor">
+            <a:schemeClr val="tx1"/>
+          </a:fontRef>
+        </p:style>
+      </p:cxnSp>
+      <p:cxnSp>
+        <p:nvCxnSpPr>
+          <p:cNvPr id="79" name="直線矢印コネクタ 78">
+            <a:extLst>
+              <a:ext uri="{FF2B5EF4-FFF2-40B4-BE49-F238E27FC236}">
+                <a16:creationId xmlns:a16="http://schemas.microsoft.com/office/drawing/2014/main" id="{69231C88-A2B4-1AC5-E749-FEE56C4EAD7F}"/>
+              </a:ext>
+            </a:extLst>
+          </p:cNvPr>
+          <p:cNvCxnSpPr>
+            <a:cxnSpLocks/>
+          </p:cNvCxnSpPr>
+          <p:nvPr/>
+        </p:nvCxnSpPr>
+        <p:spPr>
+          <a:xfrm>
+            <a:off x="14031341" y="2807970"/>
+            <a:ext cx="0" cy="699770"/>
+          </a:xfrm>
+          <a:prstGeom prst="straightConnector1">
+            <a:avLst/>
+          </a:prstGeom>
+          <a:ln w="152400">
+            <a:solidFill>
+              <a:schemeClr val="tx1"/>
+            </a:solidFill>
+            <a:prstDash val="sysDot"/>
+            <a:tailEnd type="triangle" w="med" len="sm"/>
+          </a:ln>
+        </p:spPr>
+        <p:style>
+          <a:lnRef idx="2">
+            <a:schemeClr val="accent1"/>
+          </a:lnRef>
+          <a:fillRef idx="0">
+            <a:schemeClr val="accent1"/>
+          </a:fillRef>
+          <a:effectRef idx="1">
+            <a:schemeClr val="accent1"/>
+          </a:effectRef>
+          <a:fontRef idx="minor">
+            <a:schemeClr val="tx1"/>
+          </a:fontRef>
+        </p:style>
+      </p:cxnSp>
+      <p:sp>
+        <p:nvSpPr>
+          <p:cNvPr id="83" name="四角形: 角を丸くする 82">
+            <a:extLst>
+              <a:ext uri="{FF2B5EF4-FFF2-40B4-BE49-F238E27FC236}">
+                <a16:creationId xmlns:a16="http://schemas.microsoft.com/office/drawing/2014/main" id="{3B0DD984-2671-FD8B-BD17-04E977B7335F}"/>
+              </a:ext>
+            </a:extLst>
+          </p:cNvPr>
+          <p:cNvSpPr/>
+          <p:nvPr/>
+        </p:nvSpPr>
+        <p:spPr>
+          <a:xfrm>
+            <a:off x="12027477" y="3626192"/>
+            <a:ext cx="4039220" cy="2485045"/>
+          </a:xfrm>
+          <a:prstGeom prst="roundRect">
+            <a:avLst>
+              <a:gd name="adj" fmla="val 15009"/>
+            </a:avLst>
+          </a:prstGeom>
+          <a:noFill/>
+          <a:ln w="114300">
+            <a:solidFill>
+              <a:schemeClr val="tx1"/>
+            </a:solidFill>
+          </a:ln>
+        </p:spPr>
+        <p:style>
+          <a:lnRef idx="2">
+            <a:schemeClr val="accent1">
+              <a:shade val="15000"/>
+            </a:schemeClr>
+          </a:lnRef>
+          <a:fillRef idx="1">
+            <a:schemeClr val="accent1"/>
+          </a:fillRef>
+          <a:effectRef idx="0">
+            <a:schemeClr val="accent1"/>
+          </a:effectRef>
+          <a:fontRef idx="minor">
+            <a:schemeClr val="lt1"/>
+          </a:fontRef>
+        </p:style>
+        <p:txBody>
+          <a:bodyPr rtlCol="0" anchor="ctr"/>
+          <a:lstStyle/>
+          <a:p>
+            <a:pPr algn="ctr"/>
+            <a:endParaRPr lang="ja-JP" altLang="en-US" sz="3200" dirty="0">
+              <a:solidFill>
+                <a:schemeClr val="tx1"/>
+              </a:solidFill>
+              <a:latin typeface="モボ-SemiBold" panose="02000700000000000000" pitchFamily="50" charset="-128"/>
+              <a:ea typeface="モボ-SemiBold" panose="02000700000000000000" pitchFamily="50" charset="-128"/>
+            </a:endParaRPr>
+          </a:p>
+        </p:txBody>
+      </p:sp>
+      <p:cxnSp>
+        <p:nvCxnSpPr>
+          <p:cNvPr id="84" name="直線矢印コネクタ 83">
+            <a:extLst>
+              <a:ext uri="{FF2B5EF4-FFF2-40B4-BE49-F238E27FC236}">
+                <a16:creationId xmlns:a16="http://schemas.microsoft.com/office/drawing/2014/main" id="{036D5959-F4B0-39F5-B231-741D9332BD22}"/>
+              </a:ext>
+            </a:extLst>
+          </p:cNvPr>
+          <p:cNvCxnSpPr>
+            <a:cxnSpLocks/>
+          </p:cNvCxnSpPr>
+          <p:nvPr/>
+        </p:nvCxnSpPr>
+        <p:spPr>
+          <a:xfrm>
+            <a:off x="12027477" y="4505332"/>
+            <a:ext cx="4039220" cy="0"/>
+          </a:xfrm>
+          <a:prstGeom prst="straightConnector1">
+            <a:avLst/>
+          </a:prstGeom>
+          <a:ln w="114300">
+            <a:solidFill>
+              <a:schemeClr val="tx1"/>
+            </a:solidFill>
+            <a:tailEnd type="none" w="med" len="sm"/>
+          </a:ln>
+        </p:spPr>
+        <p:style>
+          <a:lnRef idx="2">
+            <a:schemeClr val="accent1"/>
+          </a:lnRef>
+          <a:fillRef idx="0">
+            <a:schemeClr val="accent1"/>
+          </a:fillRef>
+          <a:effectRef idx="1">
+            <a:schemeClr val="accent1"/>
+          </a:effectRef>
+          <a:fontRef idx="minor">
+            <a:schemeClr val="tx1"/>
+          </a:fontRef>
+        </p:style>
+      </p:cxnSp>
+      <p:sp>
+        <p:nvSpPr>
+          <p:cNvPr id="85" name="テキスト ボックス 84">
+            <a:extLst>
+              <a:ext uri="{FF2B5EF4-FFF2-40B4-BE49-F238E27FC236}">
+                <a16:creationId xmlns:a16="http://schemas.microsoft.com/office/drawing/2014/main" id="{89BFF2FE-22D9-EAE6-068E-6260B4460F0D}"/>
+              </a:ext>
+            </a:extLst>
+          </p:cNvPr>
+          <p:cNvSpPr txBox="1"/>
+          <p:nvPr/>
+        </p:nvSpPr>
+        <p:spPr>
+          <a:xfrm>
+            <a:off x="12954152" y="3966104"/>
+            <a:ext cx="2236975" cy="461665"/>
+          </a:xfrm>
+          <a:prstGeom prst="rect">
+            <a:avLst/>
+          </a:prstGeom>
+          <a:noFill/>
+        </p:spPr>
+        <p:txBody>
+          <a:bodyPr wrap="square" rtlCol="0">
+            <a:spAutoFit/>
+          </a:bodyPr>
+          <a:lstStyle/>
+          <a:p>
+            <a:pPr algn="ctr"/>
+            <a:r>
+              <a:rPr lang="en-US" altLang="ja-JP" sz="2400" dirty="0">
+                <a:latin typeface="Consolas" panose="020B0609020204030204" pitchFamily="49" charset="0"/>
+              </a:rPr>
+              <a:t>IDawiyPlugin</a:t>
+            </a:r>
+          </a:p>
+        </p:txBody>
+      </p:sp>
+      <p:sp>
+        <p:nvSpPr>
+          <p:cNvPr id="86" name="テキスト ボックス 85">
+            <a:extLst>
+              <a:ext uri="{FF2B5EF4-FFF2-40B4-BE49-F238E27FC236}">
+                <a16:creationId xmlns:a16="http://schemas.microsoft.com/office/drawing/2014/main" id="{1ABF382E-DDBA-B501-B9D1-D7DD4194C68E}"/>
+              </a:ext>
+            </a:extLst>
+          </p:cNvPr>
+          <p:cNvSpPr txBox="1"/>
+          <p:nvPr/>
+        </p:nvSpPr>
+        <p:spPr>
+          <a:xfrm>
+            <a:off x="12193009" y="4668349"/>
+            <a:ext cx="3596701" cy="1323439"/>
+          </a:xfrm>
+          <a:prstGeom prst="rect">
+            <a:avLst/>
+          </a:prstGeom>
+          <a:noFill/>
+        </p:spPr>
+        <p:txBody>
+          <a:bodyPr wrap="square" rtlCol="0">
+            <a:spAutoFit/>
+          </a:bodyPr>
+          <a:lstStyle/>
+          <a:p>
+            <a:r>
+              <a:rPr lang="en-US" altLang="ja-JP" sz="2000" dirty="0"/>
+              <a:t>id</a:t>
+            </a:r>
+            <a:r>
+              <a:rPr lang="ja-JP" altLang="en-US" sz="2000" dirty="0"/>
+              <a:t>（識別子）</a:t>
+            </a:r>
+            <a:endParaRPr lang="en-US" altLang="ja-JP" sz="2000" dirty="0"/>
+          </a:p>
+          <a:p>
+            <a:endParaRPr lang="ja-JP" altLang="en-US" sz="2000" dirty="0"/>
+          </a:p>
+          <a:p>
+            <a:r>
+              <a:rPr lang="en-US" altLang="ja-JP" sz="2000" dirty="0"/>
+              <a:t>onInit(host) : </a:t>
+            </a:r>
+            <a:r>
+              <a:rPr lang="ja-JP" altLang="en-US" sz="2000" dirty="0"/>
+              <a:t>初期化時の処理</a:t>
+            </a:r>
+          </a:p>
+          <a:p>
+            <a:r>
+              <a:rPr lang="en-US" altLang="ja-JP" sz="2000" dirty="0"/>
+              <a:t>render(container) : </a:t>
+            </a:r>
+            <a:r>
+              <a:rPr lang="ja-JP" altLang="en-US" sz="2000" dirty="0"/>
+              <a:t>描画処理</a:t>
+            </a:r>
+          </a:p>
+        </p:txBody>
+      </p:sp>
+      <p:sp>
+        <p:nvSpPr>
+          <p:cNvPr id="90" name="テキスト ボックス 89">
+            <a:extLst>
+              <a:ext uri="{FF2B5EF4-FFF2-40B4-BE49-F238E27FC236}">
+                <a16:creationId xmlns:a16="http://schemas.microsoft.com/office/drawing/2014/main" id="{E7B82E25-5282-C769-9B37-BF4C1B38F5C9}"/>
+              </a:ext>
+            </a:extLst>
+          </p:cNvPr>
+          <p:cNvSpPr txBox="1"/>
+          <p:nvPr/>
+        </p:nvSpPr>
+        <p:spPr>
+          <a:xfrm>
+            <a:off x="14345794" y="3001511"/>
+            <a:ext cx="3322253" cy="461665"/>
+          </a:xfrm>
+          <a:prstGeom prst="rect">
+            <a:avLst/>
+          </a:prstGeom>
+          <a:noFill/>
+        </p:spPr>
+        <p:txBody>
+          <a:bodyPr wrap="square" rtlCol="0">
+            <a:spAutoFit/>
+          </a:bodyPr>
+          <a:lstStyle/>
+          <a:p>
+            <a:r>
+              <a:rPr kumimoji="1" lang="ja-JP" altLang="en-US" sz="2400" dirty="0"/>
+              <a:t>実装（ルールを守る）</a:t>
+            </a:r>
+          </a:p>
+        </p:txBody>
+      </p:sp>
+      <p:sp>
+        <p:nvSpPr>
+          <p:cNvPr id="91" name="テキスト ボックス 90">
+            <a:extLst>
+              <a:ext uri="{FF2B5EF4-FFF2-40B4-BE49-F238E27FC236}">
+                <a16:creationId xmlns:a16="http://schemas.microsoft.com/office/drawing/2014/main" id="{1175B58F-14AB-BE5E-2D86-FD797F43898B}"/>
+              </a:ext>
+            </a:extLst>
+          </p:cNvPr>
+          <p:cNvSpPr txBox="1"/>
+          <p:nvPr/>
+        </p:nvSpPr>
+        <p:spPr>
+          <a:xfrm>
+            <a:off x="12731413" y="3690444"/>
+            <a:ext cx="2682451" cy="369332"/>
+          </a:xfrm>
+          <a:prstGeom prst="rect">
+            <a:avLst/>
+          </a:prstGeom>
+          <a:noFill/>
+        </p:spPr>
+        <p:txBody>
+          <a:bodyPr wrap="square" rtlCol="0">
+            <a:spAutoFit/>
+          </a:bodyPr>
+          <a:lstStyle/>
+          <a:p>
+            <a:pPr algn="ctr"/>
+            <a:r>
+              <a:rPr lang="en-US" altLang="ja-JP" dirty="0">
+                <a:latin typeface="+mn-ea"/>
+              </a:rPr>
+              <a:t>&lt;&lt;</a:t>
+            </a:r>
+            <a:r>
+              <a:rPr lang="ja-JP" altLang="en-US" dirty="0">
+                <a:latin typeface="+mn-ea"/>
+              </a:rPr>
+              <a:t>インターフェース</a:t>
+            </a:r>
+            <a:r>
+              <a:rPr lang="en-US" altLang="ja-JP" dirty="0">
+                <a:latin typeface="+mn-ea"/>
+              </a:rPr>
+              <a:t>&gt;&gt;</a:t>
+            </a:r>
+          </a:p>
+        </p:txBody>
+      </p:sp>
+      <p:cxnSp>
+        <p:nvCxnSpPr>
+          <p:cNvPr id="94" name="直線矢印コネクタ 93">
+            <a:extLst>
+              <a:ext uri="{FF2B5EF4-FFF2-40B4-BE49-F238E27FC236}">
+                <a16:creationId xmlns:a16="http://schemas.microsoft.com/office/drawing/2014/main" id="{C315EC2D-C9F5-39B8-392D-EC2BF41EF39F}"/>
+              </a:ext>
+            </a:extLst>
+          </p:cNvPr>
+          <p:cNvCxnSpPr>
+            <a:cxnSpLocks/>
+          </p:cNvCxnSpPr>
+          <p:nvPr/>
+        </p:nvCxnSpPr>
+        <p:spPr>
+          <a:xfrm>
+            <a:off x="11996997" y="5160652"/>
+            <a:ext cx="4039220" cy="0"/>
+          </a:xfrm>
+          <a:prstGeom prst="straightConnector1">
+            <a:avLst/>
+          </a:prstGeom>
+          <a:ln w="114300">
+            <a:solidFill>
+              <a:schemeClr val="tx1"/>
+            </a:solidFill>
+            <a:tailEnd type="none" w="med" len="sm"/>
+          </a:ln>
+        </p:spPr>
+        <p:style>
+          <a:lnRef idx="2">
+            <a:schemeClr val="accent1"/>
+          </a:lnRef>
+          <a:fillRef idx="0">
+            <a:schemeClr val="accent1"/>
+          </a:fillRef>
+          <a:effectRef idx="1">
+            <a:schemeClr val="accent1"/>
+          </a:effectRef>
+          <a:fontRef idx="minor">
+            <a:schemeClr val="tx1"/>
+          </a:fontRef>
+        </p:style>
+      </p:cxnSp>
+      <p:sp>
+        <p:nvSpPr>
+          <p:cNvPr id="97" name="四角形: 角を丸くする 96">
+            <a:extLst>
+              <a:ext uri="{FF2B5EF4-FFF2-40B4-BE49-F238E27FC236}">
+                <a16:creationId xmlns:a16="http://schemas.microsoft.com/office/drawing/2014/main" id="{D77FF0A1-AD3F-3150-F973-4466582887BA}"/>
+              </a:ext>
+            </a:extLst>
+          </p:cNvPr>
+          <p:cNvSpPr/>
+          <p:nvPr/>
+        </p:nvSpPr>
+        <p:spPr>
+          <a:xfrm>
+            <a:off x="179449" y="5112207"/>
+            <a:ext cx="3942613" cy="1572535"/>
+          </a:xfrm>
+          <a:prstGeom prst="roundRect">
+            <a:avLst>
+              <a:gd name="adj" fmla="val 0"/>
+            </a:avLst>
+          </a:prstGeom>
+          <a:solidFill>
+            <a:schemeClr val="bg1"/>
+          </a:solidFill>
+          <a:ln w="114300">
+            <a:solidFill>
+              <a:schemeClr val="tx1"/>
+            </a:solidFill>
+            <a:prstDash val="dash"/>
+          </a:ln>
+        </p:spPr>
+        <p:style>
+          <a:lnRef idx="2">
+            <a:schemeClr val="accent1">
+              <a:shade val="15000"/>
+            </a:schemeClr>
+          </a:lnRef>
+          <a:fillRef idx="1">
+            <a:schemeClr val="accent1"/>
+          </a:fillRef>
+          <a:effectRef idx="0">
+            <a:schemeClr val="accent1"/>
+          </a:effectRef>
+          <a:fontRef idx="minor">
+            <a:schemeClr val="lt1"/>
+          </a:fontRef>
+        </p:style>
+        <p:txBody>
+          <a:bodyPr rtlCol="0" anchor="t"/>
+          <a:lstStyle/>
+          <a:p>
+            <a:endParaRPr lang="ja-JP" altLang="en-US" sz="1200" dirty="0">
+              <a:solidFill>
+                <a:schemeClr val="tx1"/>
+              </a:solidFill>
+            </a:endParaRPr>
+          </a:p>
+        </p:txBody>
+      </p:sp>
+      <p:cxnSp>
+        <p:nvCxnSpPr>
+          <p:cNvPr id="99" name="直線矢印コネクタ 98">
+            <a:extLst>
+              <a:ext uri="{FF2B5EF4-FFF2-40B4-BE49-F238E27FC236}">
+                <a16:creationId xmlns:a16="http://schemas.microsoft.com/office/drawing/2014/main" id="{782E8296-DF4B-F5C1-0381-2095DD77C7BA}"/>
+              </a:ext>
+            </a:extLst>
+          </p:cNvPr>
+          <p:cNvCxnSpPr>
+            <a:cxnSpLocks/>
+          </p:cNvCxnSpPr>
+          <p:nvPr/>
+        </p:nvCxnSpPr>
+        <p:spPr>
+          <a:xfrm>
+            <a:off x="1065665" y="5640116"/>
+            <a:ext cx="826277" cy="0"/>
+          </a:xfrm>
+          <a:prstGeom prst="straightConnector1">
+            <a:avLst/>
+          </a:prstGeom>
+          <a:ln w="63500">
+            <a:solidFill>
+              <a:schemeClr val="tx1"/>
+            </a:solidFill>
+            <a:prstDash val="solid"/>
+            <a:tailEnd type="stealth" w="med" len="med"/>
+          </a:ln>
+        </p:spPr>
+        <p:style>
+          <a:lnRef idx="2">
+            <a:schemeClr val="accent1"/>
+          </a:lnRef>
+          <a:fillRef idx="0">
+            <a:schemeClr val="accent1"/>
+          </a:fillRef>
+          <a:effectRef idx="1">
+            <a:schemeClr val="accent1"/>
+          </a:effectRef>
+          <a:fontRef idx="minor">
+            <a:schemeClr val="tx1"/>
+          </a:fontRef>
+        </p:style>
+      </p:cxnSp>
+      <p:cxnSp>
+        <p:nvCxnSpPr>
+          <p:cNvPr id="106" name="直線矢印コネクタ 105">
+            <a:extLst>
+              <a:ext uri="{FF2B5EF4-FFF2-40B4-BE49-F238E27FC236}">
+                <a16:creationId xmlns:a16="http://schemas.microsoft.com/office/drawing/2014/main" id="{F5EAFAF1-D899-2B4E-94F0-A624B8DEC0E6}"/>
+              </a:ext>
+            </a:extLst>
+          </p:cNvPr>
+          <p:cNvCxnSpPr>
+            <a:cxnSpLocks/>
+          </p:cNvCxnSpPr>
+          <p:nvPr/>
+        </p:nvCxnSpPr>
+        <p:spPr>
+          <a:xfrm>
+            <a:off x="1065664" y="6132151"/>
+            <a:ext cx="826277" cy="0"/>
+          </a:xfrm>
+          <a:prstGeom prst="straightConnector1">
+            <a:avLst/>
+          </a:prstGeom>
+          <a:ln w="63500">
+            <a:solidFill>
+              <a:schemeClr val="tx1"/>
+            </a:solidFill>
+            <a:prstDash val="sysDot"/>
+            <a:tailEnd type="stealth" w="med" len="sm"/>
+          </a:ln>
+        </p:spPr>
+        <p:style>
+          <a:lnRef idx="2">
+            <a:schemeClr val="accent1"/>
+          </a:lnRef>
+          <a:fillRef idx="0">
+            <a:schemeClr val="accent1"/>
+          </a:fillRef>
+          <a:effectRef idx="1">
+            <a:schemeClr val="accent1"/>
+          </a:effectRef>
+          <a:fontRef idx="minor">
+            <a:schemeClr val="tx1"/>
+          </a:fontRef>
+        </p:style>
+      </p:cxnSp>
+      <p:cxnSp>
+        <p:nvCxnSpPr>
+          <p:cNvPr id="108" name="直線矢印コネクタ 107">
+            <a:extLst>
+              <a:ext uri="{FF2B5EF4-FFF2-40B4-BE49-F238E27FC236}">
+                <a16:creationId xmlns:a16="http://schemas.microsoft.com/office/drawing/2014/main" id="{A80DD3A7-280A-2DA8-1D74-FFE04224F97C}"/>
+              </a:ext>
+            </a:extLst>
+          </p:cNvPr>
+          <p:cNvCxnSpPr>
+            <a:cxnSpLocks/>
+          </p:cNvCxnSpPr>
+          <p:nvPr/>
+        </p:nvCxnSpPr>
+        <p:spPr>
+          <a:xfrm>
+            <a:off x="1062329" y="5890782"/>
+            <a:ext cx="826277" cy="0"/>
+          </a:xfrm>
+          <a:prstGeom prst="straightConnector1">
+            <a:avLst/>
+          </a:prstGeom>
+          <a:ln w="63500">
+            <a:solidFill>
+              <a:schemeClr val="tx1"/>
+            </a:solidFill>
+            <a:prstDash val="solid"/>
+            <a:tailEnd type="triangle" w="med" len="sm"/>
+          </a:ln>
+        </p:spPr>
+        <p:style>
+          <a:lnRef idx="2">
+            <a:schemeClr val="accent1"/>
+          </a:lnRef>
+          <a:fillRef idx="0">
+            <a:schemeClr val="accent1"/>
+          </a:fillRef>
+          <a:effectRef idx="1">
+            <a:schemeClr val="accent1"/>
+          </a:effectRef>
+          <a:fontRef idx="minor">
+            <a:schemeClr val="tx1"/>
+          </a:fontRef>
+        </p:style>
+      </p:cxnSp>
+      <p:cxnSp>
+        <p:nvCxnSpPr>
+          <p:cNvPr id="109" name="直線矢印コネクタ 108">
+            <a:extLst>
+              <a:ext uri="{FF2B5EF4-FFF2-40B4-BE49-F238E27FC236}">
+                <a16:creationId xmlns:a16="http://schemas.microsoft.com/office/drawing/2014/main" id="{85A292EF-0D0B-FB94-CEF7-CE8DAF9DEF17}"/>
+              </a:ext>
+            </a:extLst>
+          </p:cNvPr>
+          <p:cNvCxnSpPr>
+            <a:cxnSpLocks/>
+          </p:cNvCxnSpPr>
+          <p:nvPr/>
+        </p:nvCxnSpPr>
+        <p:spPr>
+          <a:xfrm>
+            <a:off x="1065665" y="6381074"/>
+            <a:ext cx="826277" cy="0"/>
+          </a:xfrm>
+          <a:prstGeom prst="straightConnector1">
+            <a:avLst/>
+          </a:prstGeom>
+          <a:ln w="63500">
+            <a:solidFill>
+              <a:schemeClr val="tx1"/>
+            </a:solidFill>
+            <a:prstDash val="sysDot"/>
+            <a:tailEnd type="triangle" w="med" len="sm"/>
+          </a:ln>
+        </p:spPr>
+        <p:style>
+          <a:lnRef idx="2">
+            <a:schemeClr val="accent1"/>
+          </a:lnRef>
+          <a:fillRef idx="0">
+            <a:schemeClr val="accent1"/>
+          </a:fillRef>
+          <a:effectRef idx="1">
+            <a:schemeClr val="accent1"/>
+          </a:effectRef>
+          <a:fontRef idx="minor">
+            <a:schemeClr val="tx1"/>
+          </a:fontRef>
+        </p:style>
+      </p:cxnSp>
+      <p:sp>
+        <p:nvSpPr>
+          <p:cNvPr id="104" name="テキスト ボックス 103">
+            <a:extLst>
+              <a:ext uri="{FF2B5EF4-FFF2-40B4-BE49-F238E27FC236}">
+                <a16:creationId xmlns:a16="http://schemas.microsoft.com/office/drawing/2014/main" id="{825DEDB6-7365-FD19-A88E-5D23AA9A900E}"/>
+              </a:ext>
+            </a:extLst>
+          </p:cNvPr>
+          <p:cNvSpPr txBox="1"/>
+          <p:nvPr/>
+        </p:nvSpPr>
+        <p:spPr>
+          <a:xfrm>
+            <a:off x="347994" y="5238316"/>
+            <a:ext cx="3704652" cy="1323439"/>
+          </a:xfrm>
+          <a:prstGeom prst="rect">
+            <a:avLst/>
+          </a:prstGeom>
+          <a:noFill/>
+        </p:spPr>
+        <p:txBody>
+          <a:bodyPr wrap="square">
+            <a:spAutoFit/>
+          </a:bodyPr>
+          <a:lstStyle/>
+          <a:p>
+            <a:r>
+              <a:rPr lang="ja-JP" altLang="en-US" sz="1600" b="1" dirty="0">
+                <a:solidFill>
+                  <a:schemeClr val="tx1"/>
+                </a:solidFill>
+              </a:rPr>
+              <a:t>凡例：</a:t>
+            </a:r>
+            <a:endParaRPr lang="en-US" altLang="ja-JP" sz="1600" b="1" dirty="0">
+              <a:solidFill>
+                <a:schemeClr val="tx1"/>
+              </a:solidFill>
+            </a:endParaRPr>
+          </a:p>
+          <a:p>
+            <a:pPr marL="628650" lvl="1" indent="-171450">
+              <a:buFont typeface="Arial" panose="020B0604020202020204" pitchFamily="34" charset="0"/>
+              <a:buChar char="•"/>
+            </a:pPr>
+            <a:r>
+              <a:rPr lang="ja-JP" altLang="en-US" sz="1600" dirty="0">
+                <a:solidFill>
+                  <a:schemeClr val="tx1"/>
+                </a:solidFill>
+              </a:rPr>
+              <a:t>　　　　：</a:t>
+            </a:r>
+            <a:r>
+              <a:rPr lang="ja-JP" altLang="en-US" sz="1600" dirty="0"/>
+              <a:t>命令、所有</a:t>
+            </a:r>
+            <a:endParaRPr lang="en-US" altLang="ja-JP" sz="1600" dirty="0">
+              <a:solidFill>
+                <a:schemeClr val="tx1"/>
+              </a:solidFill>
+            </a:endParaRPr>
+          </a:p>
+          <a:p>
+            <a:pPr marL="628650" lvl="1" indent="-171450">
+              <a:buFont typeface="Arial" panose="020B0604020202020204" pitchFamily="34" charset="0"/>
+              <a:buChar char="•"/>
+            </a:pPr>
+            <a:r>
+              <a:rPr lang="ja-JP" altLang="en-US" sz="1600" dirty="0">
+                <a:solidFill>
+                  <a:schemeClr val="tx1"/>
+                </a:solidFill>
+              </a:rPr>
+              <a:t>　　　　：継承</a:t>
+            </a:r>
+            <a:endParaRPr lang="en-US" altLang="ja-JP" sz="1600" dirty="0">
+              <a:solidFill>
+                <a:schemeClr val="tx1"/>
+              </a:solidFill>
+            </a:endParaRPr>
+          </a:p>
+          <a:p>
+            <a:pPr marL="628650" lvl="1" indent="-171450">
+              <a:buFont typeface="Arial" panose="020B0604020202020204" pitchFamily="34" charset="0"/>
+              <a:buChar char="•"/>
+            </a:pPr>
+            <a:r>
+              <a:rPr lang="ja-JP" altLang="en-US" sz="1600" dirty="0">
+                <a:solidFill>
+                  <a:schemeClr val="tx1"/>
+                </a:solidFill>
+              </a:rPr>
+              <a:t>　　　　：一時的な読み込み</a:t>
+            </a:r>
+            <a:endParaRPr lang="en-US" altLang="ja-JP" sz="1600" dirty="0">
+              <a:solidFill>
+                <a:schemeClr val="tx1"/>
+              </a:solidFill>
+            </a:endParaRPr>
+          </a:p>
+          <a:p>
+            <a:pPr marL="628650" lvl="1" indent="-171450">
+              <a:buFont typeface="Arial" panose="020B0604020202020204" pitchFamily="34" charset="0"/>
+              <a:buChar char="•"/>
+            </a:pPr>
+            <a:r>
+              <a:rPr lang="ja-JP" altLang="en-US" sz="1600" dirty="0">
+                <a:solidFill>
+                  <a:schemeClr val="tx1"/>
+                </a:solidFill>
+              </a:rPr>
+              <a:t>　　　　：実装</a:t>
+            </a:r>
+          </a:p>
+        </p:txBody>
+      </p:sp>
     </p:spTree>
     <p:extLst>
       <p:ext uri="{BB962C8B-B14F-4D97-AF65-F5344CB8AC3E}">
@@ -3625,7 +6011,7 @@
 <file path=ppt/theme/theme1.xml><?xml version="1.0" encoding="utf-8"?>
 <a:theme xmlns:a="http://schemas.openxmlformats.org/drawingml/2006/main" name="Office テーマ">
   <a:themeElements>
-    <a:clrScheme name="Office">
+    <a:clrScheme name="Office テーマ">
       <a:dk1>
         <a:sysClr val="windowText" lastClr="000000"/>
       </a:dk1>
@@ -3663,113 +6049,19 @@
         <a:srgbClr val="96607D"/>
       </a:folHlink>
     </a:clrScheme>
-    <a:fontScheme name="Office">
+    <a:fontScheme name="ユーザー定義 2">
       <a:majorFont>
-        <a:latin typeface="游ゴシック Light" panose="02110004020202020204"/>
-        <a:ea typeface=""/>
+        <a:latin typeface="モボ-Bold"/>
+        <a:ea typeface="モボ-Bold"/>
         <a:cs typeface=""/>
-        <a:font script="Jpan" typeface="游ゴシック Light"/>
-        <a:font script="Hang" typeface="맑은 고딕"/>
-        <a:font script="Hans" typeface="等线 Light"/>
-        <a:font script="Hant" typeface="新細明體"/>
-        <a:font script="Arab" typeface="Times New Roman"/>
-        <a:font script="Hebr" typeface="Times New Roman"/>
-        <a:font script="Thai" typeface="Angsana New"/>
-        <a:font script="Ethi" typeface="Nyala"/>
-        <a:font script="Beng" typeface="Vrinda"/>
-        <a:font script="Gujr" typeface="Shruti"/>
-        <a:font script="Khmr" typeface="MoolBoran"/>
-        <a:font script="Knda" typeface="Tunga"/>
-        <a:font script="Guru" typeface="Raavi"/>
-        <a:font script="Cans" typeface="Euphemia"/>
-        <a:font script="Cher" typeface="Plantagenet Cherokee"/>
-        <a:font script="Yiii" typeface="Microsoft Yi Baiti"/>
-        <a:font script="Tibt" typeface="Microsoft Himalaya"/>
-        <a:font script="Thaa" typeface="MV Boli"/>
-        <a:font script="Deva" typeface="Mangal"/>
-        <a:font script="Telu" typeface="Gautami"/>
-        <a:font script="Taml" typeface="Latha"/>
-        <a:font script="Syrc" typeface="Estrangelo Edessa"/>
-        <a:font script="Orya" typeface="Kalinga"/>
-        <a:font script="Mlym" typeface="Kartika"/>
-        <a:font script="Laoo" typeface="DokChampa"/>
-        <a:font script="Sinh" typeface="Iskoola Pota"/>
-        <a:font script="Mong" typeface="Mongolian Baiti"/>
-        <a:font script="Viet" typeface="Times New Roman"/>
-        <a:font script="Uigh" typeface="Microsoft Uighur"/>
-        <a:font script="Geor" typeface="Sylfaen"/>
-        <a:font script="Armn" typeface="Arial"/>
-        <a:font script="Bugi" typeface="Leelawadee UI"/>
-        <a:font script="Bopo" typeface="Microsoft JhengHei"/>
-        <a:font script="Java" typeface="Javanese Text"/>
-        <a:font script="Lisu" typeface="Segoe UI"/>
-        <a:font script="Mymr" typeface="Myanmar Text"/>
-        <a:font script="Nkoo" typeface="Ebrima"/>
-        <a:font script="Olck" typeface="Nirmala UI"/>
-        <a:font script="Osma" typeface="Ebrima"/>
-        <a:font script="Phag" typeface="Phagspa"/>
-        <a:font script="Syrn" typeface="Estrangelo Edessa"/>
-        <a:font script="Syrj" typeface="Estrangelo Edessa"/>
-        <a:font script="Syre" typeface="Estrangelo Edessa"/>
-        <a:font script="Sora" typeface="Nirmala UI"/>
-        <a:font script="Tale" typeface="Microsoft Tai Le"/>
-        <a:font script="Talu" typeface="Microsoft New Tai Lue"/>
-        <a:font script="Tfng" typeface="Ebrima"/>
       </a:majorFont>
       <a:minorFont>
-        <a:latin typeface="游ゴシック" panose="02110004020202020204"/>
-        <a:ea typeface=""/>
+        <a:latin typeface="モボ-Regular"/>
+        <a:ea typeface="モボ-Regular"/>
         <a:cs typeface=""/>
-        <a:font script="Jpan" typeface="游ゴシック"/>
-        <a:font script="Hang" typeface="맑은 고딕"/>
-        <a:font script="Hans" typeface="等线"/>
-        <a:font script="Hant" typeface="新細明體"/>
-        <a:font script="Arab" typeface="Arial"/>
-        <a:font script="Hebr" typeface="Arial"/>
-        <a:font script="Thai" typeface="Cordia New"/>
-        <a:font script="Ethi" typeface="Nyala"/>
-        <a:font script="Beng" typeface="Vrinda"/>
-        <a:font script="Gujr" typeface="Shruti"/>
-        <a:font script="Khmr" typeface="DaunPenh"/>
-        <a:font script="Knda" typeface="Tunga"/>
-        <a:font script="Guru" typeface="Raavi"/>
-        <a:font script="Cans" typeface="Euphemia"/>
-        <a:font script="Cher" typeface="Plantagenet Cherokee"/>
-        <a:font script="Yiii" typeface="Microsoft Yi Baiti"/>
-        <a:font script="Tibt" typeface="Microsoft Himalaya"/>
-        <a:font script="Thaa" typeface="MV Boli"/>
-        <a:font script="Deva" typeface="Mangal"/>
-        <a:font script="Telu" typeface="Gautami"/>
-        <a:font script="Taml" typeface="Latha"/>
-        <a:font script="Syrc" typeface="Estrangelo Edessa"/>
-        <a:font script="Orya" typeface="Kalinga"/>
-        <a:font script="Mlym" typeface="Kartika"/>
-        <a:font script="Laoo" typeface="DokChampa"/>
-        <a:font script="Sinh" typeface="Iskoola Pota"/>
-        <a:font script="Mong" typeface="Mongolian Baiti"/>
-        <a:font script="Viet" typeface="Arial"/>
-        <a:font script="Uigh" typeface="Microsoft Uighur"/>
-        <a:font script="Geor" typeface="Sylfaen"/>
-        <a:font script="Armn" typeface="Arial"/>
-        <a:font script="Bugi" typeface="Leelawadee UI"/>
-        <a:font script="Bopo" typeface="Microsoft JhengHei"/>
-        <a:font script="Java" typeface="Javanese Text"/>
-        <a:font script="Lisu" typeface="Segoe UI"/>
-        <a:font script="Mymr" typeface="Myanmar Text"/>
-        <a:font script="Nkoo" typeface="Ebrima"/>
-        <a:font script="Olck" typeface="Nirmala UI"/>
-        <a:font script="Osma" typeface="Ebrima"/>
-        <a:font script="Phag" typeface="Phagspa"/>
-        <a:font script="Syrn" typeface="Estrangelo Edessa"/>
-        <a:font script="Syrj" typeface="Estrangelo Edessa"/>
-        <a:font script="Syre" typeface="Estrangelo Edessa"/>
-        <a:font script="Sora" typeface="Nirmala UI"/>
-        <a:font script="Tale" typeface="Microsoft Tai Le"/>
-        <a:font script="Talu" typeface="Microsoft New Tai Lue"/>
-        <a:font script="Tfng" typeface="Ebrima"/>
       </a:minorFont>
     </a:fontScheme>
-    <a:fmtScheme name="Office">
+    <a:fmtScheme name="Office テーマ">
       <a:fillStyleLst>
         <a:solidFill>
           <a:schemeClr val="phClr"/>

--- a/fig/class_diagram.pptx
+++ b/fig/class_diagram.pptx
@@ -2,12 +2,12 @@
 <file path=ppt/presentation.xml><?xml version="1.0" encoding="utf-8"?>
 <p:presentation xmlns:a="http://schemas.openxmlformats.org/drawingml/2006/main" xmlns:r="http://schemas.openxmlformats.org/officeDocument/2006/relationships" xmlns:p="http://schemas.openxmlformats.org/presentationml/2006/main" saveSubsetFonts="1">
   <p:sldMasterIdLst>
-    <p:sldMasterId id="2147483660" r:id="rId1"/>
+    <p:sldMasterId id="2147483684" r:id="rId1"/>
   </p:sldMasterIdLst>
   <p:sldIdLst>
     <p:sldId id="256" r:id="rId2"/>
   </p:sldIdLst>
-  <p:sldSz cx="18000663" cy="6858000"/>
+  <p:sldSz cx="23999825" cy="13500100"/>
   <p:notesSz cx="6858000" cy="9144000"/>
   <p:defaultTextStyle>
     <a:defPPr>
@@ -107,12 +107,12 @@
   <p:extLst>
     <p:ext uri="{EFAFB233-063F-42B5-8137-9DF3F51BA10A}">
       <p15:sldGuideLst xmlns:p15="http://schemas.microsoft.com/office/powerpoint/2012/main">
-        <p15:guide id="1" orient="horz" pos="2137" userDrawn="1">
+        <p15:guide id="1" orient="horz" pos="4207" userDrawn="1">
           <p15:clr>
             <a:srgbClr val="A4A3A4"/>
           </p15:clr>
         </p15:guide>
-        <p15:guide id="2" pos="5669" userDrawn="1">
+        <p15:guide id="2" pos="7560" userDrawn="1">
           <p15:clr>
             <a:srgbClr val="A4A3A4"/>
           </p15:clr>
@@ -152,15 +152,15 @@
         </p:nvSpPr>
         <p:spPr>
           <a:xfrm>
-            <a:off x="2250083" y="1122363"/>
-            <a:ext cx="13500497" cy="2387600"/>
+            <a:off x="2999978" y="2209392"/>
+            <a:ext cx="17999869" cy="4700035"/>
           </a:xfrm>
         </p:spPr>
         <p:txBody>
           <a:bodyPr anchor="b"/>
           <a:lstStyle>
             <a:lvl1pPr algn="ctr">
-              <a:defRPr sz="6000"/>
+              <a:defRPr sz="11811"/>
             </a:lvl1pPr>
           </a:lstStyle>
           <a:p>
@@ -184,8 +184,8 @@
         </p:nvSpPr>
         <p:spPr>
           <a:xfrm>
-            <a:off x="2250083" y="3602038"/>
-            <a:ext cx="13500497" cy="1655762"/>
+            <a:off x="2999978" y="7090679"/>
+            <a:ext cx="17999869" cy="3259398"/>
           </a:xfrm>
         </p:spPr>
         <p:txBody>
@@ -193,39 +193,39 @@
           <a:lstStyle>
             <a:lvl1pPr marL="0" indent="0" algn="ctr">
               <a:buNone/>
-              <a:defRPr sz="2400"/>
+              <a:defRPr sz="4724"/>
             </a:lvl1pPr>
-            <a:lvl2pPr marL="457200" indent="0" algn="ctr">
+            <a:lvl2pPr marL="899998" indent="0" algn="ctr">
               <a:buNone/>
-              <a:defRPr sz="2000"/>
+              <a:defRPr sz="3937"/>
             </a:lvl2pPr>
-            <a:lvl3pPr marL="914400" indent="0" algn="ctr">
+            <a:lvl3pPr marL="1799996" indent="0" algn="ctr">
               <a:buNone/>
-              <a:defRPr sz="1800"/>
+              <a:defRPr sz="3543"/>
             </a:lvl3pPr>
-            <a:lvl4pPr marL="1371600" indent="0" algn="ctr">
+            <a:lvl4pPr marL="2699995" indent="0" algn="ctr">
               <a:buNone/>
-              <a:defRPr sz="1600"/>
+              <a:defRPr sz="3150"/>
             </a:lvl4pPr>
-            <a:lvl5pPr marL="1828800" indent="0" algn="ctr">
+            <a:lvl5pPr marL="3599993" indent="0" algn="ctr">
               <a:buNone/>
-              <a:defRPr sz="1600"/>
+              <a:defRPr sz="3150"/>
             </a:lvl5pPr>
-            <a:lvl6pPr marL="2286000" indent="0" algn="ctr">
+            <a:lvl6pPr marL="4499991" indent="0" algn="ctr">
               <a:buNone/>
-              <a:defRPr sz="1600"/>
+              <a:defRPr sz="3150"/>
             </a:lvl6pPr>
-            <a:lvl7pPr marL="2743200" indent="0" algn="ctr">
+            <a:lvl7pPr marL="5399989" indent="0" algn="ctr">
               <a:buNone/>
-              <a:defRPr sz="1600"/>
+              <a:defRPr sz="3150"/>
             </a:lvl7pPr>
-            <a:lvl8pPr marL="3200400" indent="0" algn="ctr">
+            <a:lvl8pPr marL="6299987" indent="0" algn="ctr">
               <a:buNone/>
-              <a:defRPr sz="1600"/>
+              <a:defRPr sz="3150"/>
             </a:lvl8pPr>
-            <a:lvl9pPr marL="3657600" indent="0" algn="ctr">
+            <a:lvl9pPr marL="7199986" indent="0" algn="ctr">
               <a:buNone/>
-              <a:defRPr sz="1600"/>
+              <a:defRPr sz="3150"/>
             </a:lvl9pPr>
           </a:lstStyle>
           <a:p>
@@ -305,7 +305,7 @@
     </p:spTree>
     <p:extLst>
       <p:ext uri="{BB962C8B-B14F-4D97-AF65-F5344CB8AC3E}">
-        <p14:creationId xmlns:p14="http://schemas.microsoft.com/office/powerpoint/2010/main" val="3682580600"/>
+        <p14:creationId xmlns:p14="http://schemas.microsoft.com/office/powerpoint/2010/main" val="2567259479"/>
       </p:ext>
     </p:extLst>
   </p:cSld>
@@ -507,7 +507,7 @@
     </p:spTree>
     <p:extLst>
       <p:ext uri="{BB962C8B-B14F-4D97-AF65-F5344CB8AC3E}">
-        <p14:creationId xmlns:p14="http://schemas.microsoft.com/office/powerpoint/2010/main" val="3463892010"/>
+        <p14:creationId xmlns:p14="http://schemas.microsoft.com/office/powerpoint/2010/main" val="1838621835"/>
       </p:ext>
     </p:extLst>
   </p:cSld>
@@ -546,8 +546,8 @@
         </p:nvSpPr>
         <p:spPr>
           <a:xfrm>
-            <a:off x="12881724" y="365125"/>
-            <a:ext cx="3881393" cy="5811838"/>
+            <a:off x="17174875" y="718755"/>
+            <a:ext cx="5174962" cy="11440711"/>
           </a:xfrm>
         </p:spPr>
         <p:txBody>
@@ -574,8 +574,8 @@
         </p:nvSpPr>
         <p:spPr>
           <a:xfrm>
-            <a:off x="1237545" y="365125"/>
-            <a:ext cx="11419171" cy="5811838"/>
+            <a:off x="1649988" y="718755"/>
+            <a:ext cx="15224889" cy="11440711"/>
           </a:xfrm>
         </p:spPr>
         <p:txBody>
@@ -719,7 +719,7 @@
     </p:spTree>
     <p:extLst>
       <p:ext uri="{BB962C8B-B14F-4D97-AF65-F5344CB8AC3E}">
-        <p14:creationId xmlns:p14="http://schemas.microsoft.com/office/powerpoint/2010/main" val="651759666"/>
+        <p14:creationId xmlns:p14="http://schemas.microsoft.com/office/powerpoint/2010/main" val="2311636056"/>
       </p:ext>
     </p:extLst>
   </p:cSld>
@@ -921,7 +921,7 @@
     </p:spTree>
     <p:extLst>
       <p:ext uri="{BB962C8B-B14F-4D97-AF65-F5344CB8AC3E}">
-        <p14:creationId xmlns:p14="http://schemas.microsoft.com/office/powerpoint/2010/main" val="350092738"/>
+        <p14:creationId xmlns:p14="http://schemas.microsoft.com/office/powerpoint/2010/main" val="3397827660"/>
       </p:ext>
     </p:extLst>
   </p:cSld>
@@ -960,15 +960,15 @@
         </p:nvSpPr>
         <p:spPr>
           <a:xfrm>
-            <a:off x="1228170" y="1709739"/>
-            <a:ext cx="15525572" cy="2852737"/>
+            <a:off x="1637488" y="3365652"/>
+            <a:ext cx="20699849" cy="5615666"/>
           </a:xfrm>
         </p:spPr>
         <p:txBody>
           <a:bodyPr anchor="b"/>
           <a:lstStyle>
             <a:lvl1pPr>
-              <a:defRPr sz="6000"/>
+              <a:defRPr sz="11811"/>
             </a:lvl1pPr>
           </a:lstStyle>
           <a:p>
@@ -992,8 +992,8 @@
         </p:nvSpPr>
         <p:spPr>
           <a:xfrm>
-            <a:off x="1228170" y="4589464"/>
-            <a:ext cx="15525572" cy="1500187"/>
+            <a:off x="1637488" y="9034444"/>
+            <a:ext cx="20699849" cy="2953146"/>
           </a:xfrm>
         </p:spPr>
         <p:txBody>
@@ -1001,7 +1001,7 @@
           <a:lstStyle>
             <a:lvl1pPr marL="0" indent="0">
               <a:buNone/>
-              <a:defRPr sz="2400">
+              <a:defRPr sz="4724">
                 <a:solidFill>
                   <a:schemeClr val="tx1">
                     <a:tint val="82000"/>
@@ -1009,9 +1009,9 @@
                 </a:solidFill>
               </a:defRPr>
             </a:lvl1pPr>
-            <a:lvl2pPr marL="457200" indent="0">
+            <a:lvl2pPr marL="899998" indent="0">
               <a:buNone/>
-              <a:defRPr sz="2000">
+              <a:defRPr sz="3937">
                 <a:solidFill>
                   <a:schemeClr val="tx1">
                     <a:tint val="82000"/>
@@ -1019,9 +1019,9 @@
                 </a:solidFill>
               </a:defRPr>
             </a:lvl2pPr>
-            <a:lvl3pPr marL="914400" indent="0">
+            <a:lvl3pPr marL="1799996" indent="0">
               <a:buNone/>
-              <a:defRPr sz="1800">
+              <a:defRPr sz="3543">
                 <a:solidFill>
                   <a:schemeClr val="tx1">
                     <a:tint val="82000"/>
@@ -1029,9 +1029,9 @@
                 </a:solidFill>
               </a:defRPr>
             </a:lvl3pPr>
-            <a:lvl4pPr marL="1371600" indent="0">
+            <a:lvl4pPr marL="2699995" indent="0">
               <a:buNone/>
-              <a:defRPr sz="1600">
+              <a:defRPr sz="3150">
                 <a:solidFill>
                   <a:schemeClr val="tx1">
                     <a:tint val="82000"/>
@@ -1039,9 +1039,9 @@
                 </a:solidFill>
               </a:defRPr>
             </a:lvl4pPr>
-            <a:lvl5pPr marL="1828800" indent="0">
+            <a:lvl5pPr marL="3599993" indent="0">
               <a:buNone/>
-              <a:defRPr sz="1600">
+              <a:defRPr sz="3150">
                 <a:solidFill>
                   <a:schemeClr val="tx1">
                     <a:tint val="82000"/>
@@ -1049,9 +1049,9 @@
                 </a:solidFill>
               </a:defRPr>
             </a:lvl5pPr>
-            <a:lvl6pPr marL="2286000" indent="0">
+            <a:lvl6pPr marL="4499991" indent="0">
               <a:buNone/>
-              <a:defRPr sz="1600">
+              <a:defRPr sz="3150">
                 <a:solidFill>
                   <a:schemeClr val="tx1">
                     <a:tint val="82000"/>
@@ -1059,9 +1059,9 @@
                 </a:solidFill>
               </a:defRPr>
             </a:lvl6pPr>
-            <a:lvl7pPr marL="2743200" indent="0">
+            <a:lvl7pPr marL="5399989" indent="0">
               <a:buNone/>
-              <a:defRPr sz="1600">
+              <a:defRPr sz="3150">
                 <a:solidFill>
                   <a:schemeClr val="tx1">
                     <a:tint val="82000"/>
@@ -1069,9 +1069,9 @@
                 </a:solidFill>
               </a:defRPr>
             </a:lvl7pPr>
-            <a:lvl8pPr marL="3200400" indent="0">
+            <a:lvl8pPr marL="6299987" indent="0">
               <a:buNone/>
-              <a:defRPr sz="1600">
+              <a:defRPr sz="3150">
                 <a:solidFill>
                   <a:schemeClr val="tx1">
                     <a:tint val="82000"/>
@@ -1079,9 +1079,9 @@
                 </a:solidFill>
               </a:defRPr>
             </a:lvl8pPr>
-            <a:lvl9pPr marL="3657600" indent="0">
+            <a:lvl9pPr marL="7199986" indent="0">
               <a:buNone/>
-              <a:defRPr sz="1600">
+              <a:defRPr sz="3150">
                 <a:solidFill>
                   <a:schemeClr val="tx1">
                     <a:tint val="82000"/>
@@ -1167,7 +1167,7 @@
     </p:spTree>
     <p:extLst>
       <p:ext uri="{BB962C8B-B14F-4D97-AF65-F5344CB8AC3E}">
-        <p14:creationId xmlns:p14="http://schemas.microsoft.com/office/powerpoint/2010/main" val="4193875253"/>
+        <p14:creationId xmlns:p14="http://schemas.microsoft.com/office/powerpoint/2010/main" val="1490966579"/>
       </p:ext>
     </p:extLst>
   </p:cSld>
@@ -1229,8 +1229,8 @@
         </p:nvSpPr>
         <p:spPr>
           <a:xfrm>
-            <a:off x="1237545" y="1825625"/>
-            <a:ext cx="7650282" cy="4351338"/>
+            <a:off x="1649988" y="3593777"/>
+            <a:ext cx="10199926" cy="8565689"/>
           </a:xfrm>
         </p:spPr>
         <p:txBody>
@@ -1318,8 +1318,8 @@
         </p:nvSpPr>
         <p:spPr>
           <a:xfrm>
-            <a:off x="9112836" y="1825625"/>
-            <a:ext cx="7650282" cy="4351338"/>
+            <a:off x="12149911" y="3593777"/>
+            <a:ext cx="10199926" cy="8565689"/>
           </a:xfrm>
         </p:spPr>
         <p:txBody>
@@ -1463,7 +1463,7 @@
     </p:spTree>
     <p:extLst>
       <p:ext uri="{BB962C8B-B14F-4D97-AF65-F5344CB8AC3E}">
-        <p14:creationId xmlns:p14="http://schemas.microsoft.com/office/powerpoint/2010/main" val="3847910064"/>
+        <p14:creationId xmlns:p14="http://schemas.microsoft.com/office/powerpoint/2010/main" val="3523218715"/>
       </p:ext>
     </p:extLst>
   </p:cSld>
@@ -1502,8 +1502,8 @@
         </p:nvSpPr>
         <p:spPr>
           <a:xfrm>
-            <a:off x="1239890" y="365126"/>
-            <a:ext cx="15525572" cy="1325563"/>
+            <a:off x="1653114" y="718756"/>
+            <a:ext cx="20699849" cy="2609395"/>
           </a:xfrm>
         </p:spPr>
         <p:txBody>
@@ -1530,8 +1530,8 @@
         </p:nvSpPr>
         <p:spPr>
           <a:xfrm>
-            <a:off x="1239891" y="1681163"/>
-            <a:ext cx="7615123" cy="823912"/>
+            <a:off x="1653115" y="3309401"/>
+            <a:ext cx="10153050" cy="1621886"/>
           </a:xfrm>
         </p:spPr>
         <p:txBody>
@@ -1539,39 +1539,39 @@
           <a:lstStyle>
             <a:lvl1pPr marL="0" indent="0">
               <a:buNone/>
-              <a:defRPr sz="2400" b="1"/>
+              <a:defRPr sz="4724" b="1"/>
             </a:lvl1pPr>
-            <a:lvl2pPr marL="457200" indent="0">
+            <a:lvl2pPr marL="899998" indent="0">
               <a:buNone/>
-              <a:defRPr sz="2000" b="1"/>
+              <a:defRPr sz="3937" b="1"/>
             </a:lvl2pPr>
-            <a:lvl3pPr marL="914400" indent="0">
+            <a:lvl3pPr marL="1799996" indent="0">
               <a:buNone/>
-              <a:defRPr sz="1800" b="1"/>
+              <a:defRPr sz="3543" b="1"/>
             </a:lvl3pPr>
-            <a:lvl4pPr marL="1371600" indent="0">
+            <a:lvl4pPr marL="2699995" indent="0">
               <a:buNone/>
-              <a:defRPr sz="1600" b="1"/>
+              <a:defRPr sz="3150" b="1"/>
             </a:lvl4pPr>
-            <a:lvl5pPr marL="1828800" indent="0">
+            <a:lvl5pPr marL="3599993" indent="0">
               <a:buNone/>
-              <a:defRPr sz="1600" b="1"/>
+              <a:defRPr sz="3150" b="1"/>
             </a:lvl5pPr>
-            <a:lvl6pPr marL="2286000" indent="0">
+            <a:lvl6pPr marL="4499991" indent="0">
               <a:buNone/>
-              <a:defRPr sz="1600" b="1"/>
+              <a:defRPr sz="3150" b="1"/>
             </a:lvl6pPr>
-            <a:lvl7pPr marL="2743200" indent="0">
+            <a:lvl7pPr marL="5399989" indent="0">
               <a:buNone/>
-              <a:defRPr sz="1600" b="1"/>
+              <a:defRPr sz="3150" b="1"/>
             </a:lvl7pPr>
-            <a:lvl8pPr marL="3200400" indent="0">
+            <a:lvl8pPr marL="6299987" indent="0">
               <a:buNone/>
-              <a:defRPr sz="1600" b="1"/>
+              <a:defRPr sz="3150" b="1"/>
             </a:lvl8pPr>
-            <a:lvl9pPr marL="3657600" indent="0">
+            <a:lvl9pPr marL="7199986" indent="0">
               <a:buNone/>
-              <a:defRPr sz="1600" b="1"/>
+              <a:defRPr sz="3150" b="1"/>
             </a:lvl9pPr>
           </a:lstStyle>
           <a:p>
@@ -1595,8 +1595,8 @@
         </p:nvSpPr>
         <p:spPr>
           <a:xfrm>
-            <a:off x="1239891" y="2505075"/>
-            <a:ext cx="7615123" cy="3684588"/>
+            <a:off x="1653115" y="4931286"/>
+            <a:ext cx="10153050" cy="7253180"/>
           </a:xfrm>
         </p:spPr>
         <p:txBody>
@@ -1684,8 +1684,8 @@
         </p:nvSpPr>
         <p:spPr>
           <a:xfrm>
-            <a:off x="9112836" y="1681163"/>
-            <a:ext cx="7652626" cy="823912"/>
+            <a:off x="12149911" y="3309401"/>
+            <a:ext cx="10203052" cy="1621886"/>
           </a:xfrm>
         </p:spPr>
         <p:txBody>
@@ -1693,39 +1693,39 @@
           <a:lstStyle>
             <a:lvl1pPr marL="0" indent="0">
               <a:buNone/>
-              <a:defRPr sz="2400" b="1"/>
+              <a:defRPr sz="4724" b="1"/>
             </a:lvl1pPr>
-            <a:lvl2pPr marL="457200" indent="0">
+            <a:lvl2pPr marL="899998" indent="0">
               <a:buNone/>
-              <a:defRPr sz="2000" b="1"/>
+              <a:defRPr sz="3937" b="1"/>
             </a:lvl2pPr>
-            <a:lvl3pPr marL="914400" indent="0">
+            <a:lvl3pPr marL="1799996" indent="0">
               <a:buNone/>
-              <a:defRPr sz="1800" b="1"/>
+              <a:defRPr sz="3543" b="1"/>
             </a:lvl3pPr>
-            <a:lvl4pPr marL="1371600" indent="0">
+            <a:lvl4pPr marL="2699995" indent="0">
               <a:buNone/>
-              <a:defRPr sz="1600" b="1"/>
+              <a:defRPr sz="3150" b="1"/>
             </a:lvl4pPr>
-            <a:lvl5pPr marL="1828800" indent="0">
+            <a:lvl5pPr marL="3599993" indent="0">
               <a:buNone/>
-              <a:defRPr sz="1600" b="1"/>
+              <a:defRPr sz="3150" b="1"/>
             </a:lvl5pPr>
-            <a:lvl6pPr marL="2286000" indent="0">
+            <a:lvl6pPr marL="4499991" indent="0">
               <a:buNone/>
-              <a:defRPr sz="1600" b="1"/>
+              <a:defRPr sz="3150" b="1"/>
             </a:lvl6pPr>
-            <a:lvl7pPr marL="2743200" indent="0">
+            <a:lvl7pPr marL="5399989" indent="0">
               <a:buNone/>
-              <a:defRPr sz="1600" b="1"/>
+              <a:defRPr sz="3150" b="1"/>
             </a:lvl7pPr>
-            <a:lvl8pPr marL="3200400" indent="0">
+            <a:lvl8pPr marL="6299987" indent="0">
               <a:buNone/>
-              <a:defRPr sz="1600" b="1"/>
+              <a:defRPr sz="3150" b="1"/>
             </a:lvl8pPr>
-            <a:lvl9pPr marL="3657600" indent="0">
+            <a:lvl9pPr marL="7199986" indent="0">
               <a:buNone/>
-              <a:defRPr sz="1600" b="1"/>
+              <a:defRPr sz="3150" b="1"/>
             </a:lvl9pPr>
           </a:lstStyle>
           <a:p>
@@ -1749,8 +1749,8 @@
         </p:nvSpPr>
         <p:spPr>
           <a:xfrm>
-            <a:off x="9112836" y="2505075"/>
-            <a:ext cx="7652626" cy="3684588"/>
+            <a:off x="12149911" y="4931286"/>
+            <a:ext cx="10203052" cy="7253180"/>
           </a:xfrm>
         </p:spPr>
         <p:txBody>
@@ -1894,7 +1894,7 @@
     </p:spTree>
     <p:extLst>
       <p:ext uri="{BB962C8B-B14F-4D97-AF65-F5344CB8AC3E}">
-        <p14:creationId xmlns:p14="http://schemas.microsoft.com/office/powerpoint/2010/main" val="664637378"/>
+        <p14:creationId xmlns:p14="http://schemas.microsoft.com/office/powerpoint/2010/main" val="682084790"/>
       </p:ext>
     </p:extLst>
   </p:cSld>
@@ -2012,7 +2012,7 @@
     </p:spTree>
     <p:extLst>
       <p:ext uri="{BB962C8B-B14F-4D97-AF65-F5344CB8AC3E}">
-        <p14:creationId xmlns:p14="http://schemas.microsoft.com/office/powerpoint/2010/main" val="1647669230"/>
+        <p14:creationId xmlns:p14="http://schemas.microsoft.com/office/powerpoint/2010/main" val="4130427566"/>
       </p:ext>
     </p:extLst>
   </p:cSld>
@@ -2107,7 +2107,7 @@
     </p:spTree>
     <p:extLst>
       <p:ext uri="{BB962C8B-B14F-4D97-AF65-F5344CB8AC3E}">
-        <p14:creationId xmlns:p14="http://schemas.microsoft.com/office/powerpoint/2010/main" val="3336372114"/>
+        <p14:creationId xmlns:p14="http://schemas.microsoft.com/office/powerpoint/2010/main" val="3482280844"/>
       </p:ext>
     </p:extLst>
   </p:cSld>
@@ -2146,15 +2146,15 @@
         </p:nvSpPr>
         <p:spPr>
           <a:xfrm>
-            <a:off x="1239891" y="457200"/>
-            <a:ext cx="5805682" cy="1600200"/>
+            <a:off x="1653115" y="900007"/>
+            <a:ext cx="7740568" cy="3150023"/>
           </a:xfrm>
         </p:spPr>
         <p:txBody>
           <a:bodyPr anchor="b"/>
           <a:lstStyle>
             <a:lvl1pPr>
-              <a:defRPr sz="3200"/>
+              <a:defRPr sz="6299"/>
             </a:lvl1pPr>
           </a:lstStyle>
           <a:p>
@@ -2178,39 +2178,39 @@
         </p:nvSpPr>
         <p:spPr>
           <a:xfrm>
-            <a:off x="7652626" y="987426"/>
-            <a:ext cx="9112836" cy="4873625"/>
+            <a:off x="10203052" y="1943765"/>
+            <a:ext cx="12149911" cy="9593821"/>
           </a:xfrm>
         </p:spPr>
         <p:txBody>
           <a:bodyPr/>
           <a:lstStyle>
             <a:lvl1pPr>
-              <a:defRPr sz="3200"/>
+              <a:defRPr sz="6299"/>
             </a:lvl1pPr>
             <a:lvl2pPr>
-              <a:defRPr sz="2800"/>
+              <a:defRPr sz="5512"/>
             </a:lvl2pPr>
             <a:lvl3pPr>
-              <a:defRPr sz="2400"/>
+              <a:defRPr sz="4724"/>
             </a:lvl3pPr>
             <a:lvl4pPr>
-              <a:defRPr sz="2000"/>
+              <a:defRPr sz="3937"/>
             </a:lvl4pPr>
             <a:lvl5pPr>
-              <a:defRPr sz="2000"/>
+              <a:defRPr sz="3937"/>
             </a:lvl5pPr>
             <a:lvl6pPr>
-              <a:defRPr sz="2000"/>
+              <a:defRPr sz="3937"/>
             </a:lvl6pPr>
             <a:lvl7pPr>
-              <a:defRPr sz="2000"/>
+              <a:defRPr sz="3937"/>
             </a:lvl7pPr>
             <a:lvl8pPr>
-              <a:defRPr sz="2000"/>
+              <a:defRPr sz="3937"/>
             </a:lvl8pPr>
             <a:lvl9pPr>
-              <a:defRPr sz="2000"/>
+              <a:defRPr sz="3937"/>
             </a:lvl9pPr>
           </a:lstStyle>
           <a:p>
@@ -2295,8 +2295,8 @@
         </p:nvSpPr>
         <p:spPr>
           <a:xfrm>
-            <a:off x="1239891" y="2057400"/>
-            <a:ext cx="5805682" cy="3811588"/>
+            <a:off x="1653115" y="4050030"/>
+            <a:ext cx="7740568" cy="7503182"/>
           </a:xfrm>
         </p:spPr>
         <p:txBody>
@@ -2304,39 +2304,39 @@
           <a:lstStyle>
             <a:lvl1pPr marL="0" indent="0">
               <a:buNone/>
-              <a:defRPr sz="1600"/>
+              <a:defRPr sz="3150"/>
             </a:lvl1pPr>
-            <a:lvl2pPr marL="457200" indent="0">
+            <a:lvl2pPr marL="899998" indent="0">
               <a:buNone/>
-              <a:defRPr sz="1400"/>
+              <a:defRPr sz="2756"/>
             </a:lvl2pPr>
-            <a:lvl3pPr marL="914400" indent="0">
+            <a:lvl3pPr marL="1799996" indent="0">
               <a:buNone/>
-              <a:defRPr sz="1200"/>
+              <a:defRPr sz="2362"/>
             </a:lvl3pPr>
-            <a:lvl4pPr marL="1371600" indent="0">
+            <a:lvl4pPr marL="2699995" indent="0">
               <a:buNone/>
-              <a:defRPr sz="1000"/>
+              <a:defRPr sz="1968"/>
             </a:lvl4pPr>
-            <a:lvl5pPr marL="1828800" indent="0">
+            <a:lvl5pPr marL="3599993" indent="0">
               <a:buNone/>
-              <a:defRPr sz="1000"/>
+              <a:defRPr sz="1968"/>
             </a:lvl5pPr>
-            <a:lvl6pPr marL="2286000" indent="0">
+            <a:lvl6pPr marL="4499991" indent="0">
               <a:buNone/>
-              <a:defRPr sz="1000"/>
+              <a:defRPr sz="1968"/>
             </a:lvl6pPr>
-            <a:lvl7pPr marL="2743200" indent="0">
+            <a:lvl7pPr marL="5399989" indent="0">
               <a:buNone/>
-              <a:defRPr sz="1000"/>
+              <a:defRPr sz="1968"/>
             </a:lvl7pPr>
-            <a:lvl8pPr marL="3200400" indent="0">
+            <a:lvl8pPr marL="6299987" indent="0">
               <a:buNone/>
-              <a:defRPr sz="1000"/>
+              <a:defRPr sz="1968"/>
             </a:lvl8pPr>
-            <a:lvl9pPr marL="3657600" indent="0">
+            <a:lvl9pPr marL="7199986" indent="0">
               <a:buNone/>
-              <a:defRPr sz="1000"/>
+              <a:defRPr sz="1968"/>
             </a:lvl9pPr>
           </a:lstStyle>
           <a:p>
@@ -2416,7 +2416,7 @@
     </p:spTree>
     <p:extLst>
       <p:ext uri="{BB962C8B-B14F-4D97-AF65-F5344CB8AC3E}">
-        <p14:creationId xmlns:p14="http://schemas.microsoft.com/office/powerpoint/2010/main" val="4020277702"/>
+        <p14:creationId xmlns:p14="http://schemas.microsoft.com/office/powerpoint/2010/main" val="4141580714"/>
       </p:ext>
     </p:extLst>
   </p:cSld>
@@ -2455,15 +2455,15 @@
         </p:nvSpPr>
         <p:spPr>
           <a:xfrm>
-            <a:off x="1239891" y="457200"/>
-            <a:ext cx="5805682" cy="1600200"/>
+            <a:off x="1653115" y="900007"/>
+            <a:ext cx="7740568" cy="3150023"/>
           </a:xfrm>
         </p:spPr>
         <p:txBody>
           <a:bodyPr anchor="b"/>
           <a:lstStyle>
             <a:lvl1pPr>
-              <a:defRPr sz="3200"/>
+              <a:defRPr sz="6299"/>
             </a:lvl1pPr>
           </a:lstStyle>
           <a:p>
@@ -2487,8 +2487,8 @@
         </p:nvSpPr>
         <p:spPr>
           <a:xfrm>
-            <a:off x="7652626" y="987426"/>
-            <a:ext cx="9112836" cy="4873625"/>
+            <a:off x="10203052" y="1943765"/>
+            <a:ext cx="12149911" cy="9593821"/>
           </a:xfrm>
         </p:spPr>
         <p:txBody>
@@ -2496,39 +2496,39 @@
           <a:lstStyle>
             <a:lvl1pPr marL="0" indent="0">
               <a:buNone/>
-              <a:defRPr sz="3200"/>
+              <a:defRPr sz="6299"/>
             </a:lvl1pPr>
-            <a:lvl2pPr marL="457200" indent="0">
+            <a:lvl2pPr marL="899998" indent="0">
               <a:buNone/>
-              <a:defRPr sz="2800"/>
+              <a:defRPr sz="5512"/>
             </a:lvl2pPr>
-            <a:lvl3pPr marL="914400" indent="0">
+            <a:lvl3pPr marL="1799996" indent="0">
               <a:buNone/>
-              <a:defRPr sz="2400"/>
+              <a:defRPr sz="4724"/>
             </a:lvl3pPr>
-            <a:lvl4pPr marL="1371600" indent="0">
+            <a:lvl4pPr marL="2699995" indent="0">
               <a:buNone/>
-              <a:defRPr sz="2000"/>
+              <a:defRPr sz="3937"/>
             </a:lvl4pPr>
-            <a:lvl5pPr marL="1828800" indent="0">
+            <a:lvl5pPr marL="3599993" indent="0">
               <a:buNone/>
-              <a:defRPr sz="2000"/>
+              <a:defRPr sz="3937"/>
             </a:lvl5pPr>
-            <a:lvl6pPr marL="2286000" indent="0">
+            <a:lvl6pPr marL="4499991" indent="0">
               <a:buNone/>
-              <a:defRPr sz="2000"/>
+              <a:defRPr sz="3937"/>
             </a:lvl6pPr>
-            <a:lvl7pPr marL="2743200" indent="0">
+            <a:lvl7pPr marL="5399989" indent="0">
               <a:buNone/>
-              <a:defRPr sz="2000"/>
+              <a:defRPr sz="3937"/>
             </a:lvl7pPr>
-            <a:lvl8pPr marL="3200400" indent="0">
+            <a:lvl8pPr marL="6299987" indent="0">
               <a:buNone/>
-              <a:defRPr sz="2000"/>
+              <a:defRPr sz="3937"/>
             </a:lvl8pPr>
-            <a:lvl9pPr marL="3657600" indent="0">
+            <a:lvl9pPr marL="7199986" indent="0">
               <a:buNone/>
-              <a:defRPr sz="2000"/>
+              <a:defRPr sz="3937"/>
             </a:lvl9pPr>
           </a:lstStyle>
           <a:p>
@@ -2552,8 +2552,8 @@
         </p:nvSpPr>
         <p:spPr>
           <a:xfrm>
-            <a:off x="1239891" y="2057400"/>
-            <a:ext cx="5805682" cy="3811588"/>
+            <a:off x="1653115" y="4050030"/>
+            <a:ext cx="7740568" cy="7503182"/>
           </a:xfrm>
         </p:spPr>
         <p:txBody>
@@ -2561,39 +2561,39 @@
           <a:lstStyle>
             <a:lvl1pPr marL="0" indent="0">
               <a:buNone/>
-              <a:defRPr sz="1600"/>
+              <a:defRPr sz="3150"/>
             </a:lvl1pPr>
-            <a:lvl2pPr marL="457200" indent="0">
+            <a:lvl2pPr marL="899998" indent="0">
               <a:buNone/>
-              <a:defRPr sz="1400"/>
+              <a:defRPr sz="2756"/>
             </a:lvl2pPr>
-            <a:lvl3pPr marL="914400" indent="0">
+            <a:lvl3pPr marL="1799996" indent="0">
               <a:buNone/>
-              <a:defRPr sz="1200"/>
+              <a:defRPr sz="2362"/>
             </a:lvl3pPr>
-            <a:lvl4pPr marL="1371600" indent="0">
+            <a:lvl4pPr marL="2699995" indent="0">
               <a:buNone/>
-              <a:defRPr sz="1000"/>
+              <a:defRPr sz="1968"/>
             </a:lvl4pPr>
-            <a:lvl5pPr marL="1828800" indent="0">
+            <a:lvl5pPr marL="3599993" indent="0">
               <a:buNone/>
-              <a:defRPr sz="1000"/>
+              <a:defRPr sz="1968"/>
             </a:lvl5pPr>
-            <a:lvl6pPr marL="2286000" indent="0">
+            <a:lvl6pPr marL="4499991" indent="0">
               <a:buNone/>
-              <a:defRPr sz="1000"/>
+              <a:defRPr sz="1968"/>
             </a:lvl6pPr>
-            <a:lvl7pPr marL="2743200" indent="0">
+            <a:lvl7pPr marL="5399989" indent="0">
               <a:buNone/>
-              <a:defRPr sz="1000"/>
+              <a:defRPr sz="1968"/>
             </a:lvl7pPr>
-            <a:lvl8pPr marL="3200400" indent="0">
+            <a:lvl8pPr marL="6299987" indent="0">
               <a:buNone/>
-              <a:defRPr sz="1000"/>
+              <a:defRPr sz="1968"/>
             </a:lvl8pPr>
-            <a:lvl9pPr marL="3657600" indent="0">
+            <a:lvl9pPr marL="7199986" indent="0">
               <a:buNone/>
-              <a:defRPr sz="1000"/>
+              <a:defRPr sz="1968"/>
             </a:lvl9pPr>
           </a:lstStyle>
           <a:p>
@@ -2673,7 +2673,7 @@
     </p:spTree>
     <p:extLst>
       <p:ext uri="{BB962C8B-B14F-4D97-AF65-F5344CB8AC3E}">
-        <p14:creationId xmlns:p14="http://schemas.microsoft.com/office/powerpoint/2010/main" val="244466830"/>
+        <p14:creationId xmlns:p14="http://schemas.microsoft.com/office/powerpoint/2010/main" val="3417626496"/>
       </p:ext>
     </p:extLst>
   </p:cSld>
@@ -2717,8 +2717,8 @@
         </p:nvSpPr>
         <p:spPr>
           <a:xfrm>
-            <a:off x="1237546" y="365126"/>
-            <a:ext cx="15525572" cy="1325563"/>
+            <a:off x="1649988" y="718756"/>
+            <a:ext cx="20699849" cy="2609395"/>
           </a:xfrm>
           <a:prstGeom prst="rect">
             <a:avLst/>
@@ -2750,8 +2750,8 @@
         </p:nvSpPr>
         <p:spPr>
           <a:xfrm>
-            <a:off x="1237546" y="1825625"/>
-            <a:ext cx="15525572" cy="4351338"/>
+            <a:off x="1649988" y="3593777"/>
+            <a:ext cx="20699849" cy="8565689"/>
           </a:xfrm>
           <a:prstGeom prst="rect">
             <a:avLst/>
@@ -2844,8 +2844,8 @@
         </p:nvSpPr>
         <p:spPr>
           <a:xfrm>
-            <a:off x="1237546" y="6356351"/>
-            <a:ext cx="4050149" cy="365125"/>
+            <a:off x="1649988" y="12512594"/>
+            <a:ext cx="5399961" cy="718755"/>
           </a:xfrm>
           <a:prstGeom prst="rect">
             <a:avLst/>
@@ -2855,7 +2855,7 @@
           <a:bodyPr vert="horz" lIns="91440" tIns="45720" rIns="91440" bIns="45720" rtlCol="0" anchor="ctr"/>
           <a:lstStyle>
             <a:lvl1pPr algn="l">
-              <a:defRPr sz="1200">
+              <a:defRPr sz="2362">
                 <a:solidFill>
                   <a:schemeClr val="tx1">
                     <a:tint val="82000"/>
@@ -2885,8 +2885,8 @@
         </p:nvSpPr>
         <p:spPr>
           <a:xfrm>
-            <a:off x="5962720" y="6356351"/>
-            <a:ext cx="6075224" cy="365125"/>
+            <a:off x="7949942" y="12512594"/>
+            <a:ext cx="8099941" cy="718755"/>
           </a:xfrm>
           <a:prstGeom prst="rect">
             <a:avLst/>
@@ -2896,7 +2896,7 @@
           <a:bodyPr vert="horz" lIns="91440" tIns="45720" rIns="91440" bIns="45720" rtlCol="0" anchor="ctr"/>
           <a:lstStyle>
             <a:lvl1pPr algn="ctr">
-              <a:defRPr sz="1200">
+              <a:defRPr sz="2362">
                 <a:solidFill>
                   <a:schemeClr val="tx1">
                     <a:tint val="82000"/>
@@ -2922,8 +2922,8 @@
         </p:nvSpPr>
         <p:spPr>
           <a:xfrm>
-            <a:off x="12712968" y="6356351"/>
-            <a:ext cx="4050149" cy="365125"/>
+            <a:off x="16949876" y="12512594"/>
+            <a:ext cx="5399961" cy="718755"/>
           </a:xfrm>
           <a:prstGeom prst="rect">
             <a:avLst/>
@@ -2933,7 +2933,7 @@
           <a:bodyPr vert="horz" lIns="91440" tIns="45720" rIns="91440" bIns="45720" rtlCol="0" anchor="ctr"/>
           <a:lstStyle>
             <a:lvl1pPr algn="r">
-              <a:defRPr sz="1200">
+              <a:defRPr sz="2362">
                 <a:solidFill>
                   <a:schemeClr val="tx1">
                     <a:tint val="82000"/>
@@ -2954,27 +2954,27 @@
     </p:spTree>
     <p:extLst>
       <p:ext uri="{BB962C8B-B14F-4D97-AF65-F5344CB8AC3E}">
-        <p14:creationId xmlns:p14="http://schemas.microsoft.com/office/powerpoint/2010/main" val="2559437964"/>
+        <p14:creationId xmlns:p14="http://schemas.microsoft.com/office/powerpoint/2010/main" val="613319610"/>
       </p:ext>
     </p:extLst>
   </p:cSld>
   <p:clrMap bg1="lt1" tx1="dk1" bg2="lt2" tx2="dk2" accent1="accent1" accent2="accent2" accent3="accent3" accent4="accent4" accent5="accent5" accent6="accent6" hlink="hlink" folHlink="folHlink"/>
   <p:sldLayoutIdLst>
-    <p:sldLayoutId id="2147483661" r:id="rId1"/>
-    <p:sldLayoutId id="2147483662" r:id="rId2"/>
-    <p:sldLayoutId id="2147483663" r:id="rId3"/>
-    <p:sldLayoutId id="2147483664" r:id="rId4"/>
-    <p:sldLayoutId id="2147483665" r:id="rId5"/>
-    <p:sldLayoutId id="2147483666" r:id="rId6"/>
-    <p:sldLayoutId id="2147483667" r:id="rId7"/>
-    <p:sldLayoutId id="2147483668" r:id="rId8"/>
-    <p:sldLayoutId id="2147483669" r:id="rId9"/>
-    <p:sldLayoutId id="2147483670" r:id="rId10"/>
-    <p:sldLayoutId id="2147483671" r:id="rId11"/>
+    <p:sldLayoutId id="2147483685" r:id="rId1"/>
+    <p:sldLayoutId id="2147483686" r:id="rId2"/>
+    <p:sldLayoutId id="2147483687" r:id="rId3"/>
+    <p:sldLayoutId id="2147483688" r:id="rId4"/>
+    <p:sldLayoutId id="2147483689" r:id="rId5"/>
+    <p:sldLayoutId id="2147483690" r:id="rId6"/>
+    <p:sldLayoutId id="2147483691" r:id="rId7"/>
+    <p:sldLayoutId id="2147483692" r:id="rId8"/>
+    <p:sldLayoutId id="2147483693" r:id="rId9"/>
+    <p:sldLayoutId id="2147483694" r:id="rId10"/>
+    <p:sldLayoutId id="2147483695" r:id="rId11"/>
   </p:sldLayoutIdLst>
   <p:txStyles>
     <p:titleStyle>
-      <a:lvl1pPr algn="l" defTabSz="914400" rtl="0" eaLnBrk="1" latinLnBrk="0" hangingPunct="1">
+      <a:lvl1pPr algn="l" defTabSz="1799996" rtl="0" eaLnBrk="1" latinLnBrk="0" hangingPunct="1">
         <a:lnSpc>
           <a:spcPct val="90000"/>
         </a:lnSpc>
@@ -2982,7 +2982,7 @@
           <a:spcPct val="0"/>
         </a:spcBef>
         <a:buNone/>
-        <a:defRPr kumimoji="1" sz="4400" kern="1200">
+        <a:defRPr kumimoji="1" sz="8661" kern="1200">
           <a:solidFill>
             <a:schemeClr val="tx1"/>
           </a:solidFill>
@@ -2993,16 +2993,16 @@
       </a:lvl1pPr>
     </p:titleStyle>
     <p:bodyStyle>
-      <a:lvl1pPr marL="228600" indent="-228600" algn="l" defTabSz="914400" rtl="0" eaLnBrk="1" latinLnBrk="0" hangingPunct="1">
+      <a:lvl1pPr marL="449999" indent="-449999" algn="l" defTabSz="1799996" rtl="0" eaLnBrk="1" latinLnBrk="0" hangingPunct="1">
         <a:lnSpc>
           <a:spcPct val="90000"/>
         </a:lnSpc>
         <a:spcBef>
-          <a:spcPts val="1000"/>
+          <a:spcPts val="1968"/>
         </a:spcBef>
         <a:buFont typeface="Arial" panose="020B0604020202020204" pitchFamily="34" charset="0"/>
         <a:buChar char="•"/>
-        <a:defRPr kumimoji="1" sz="2800" kern="1200">
+        <a:defRPr kumimoji="1" sz="5512" kern="1200">
           <a:solidFill>
             <a:schemeClr val="tx1"/>
           </a:solidFill>
@@ -3011,16 +3011,16 @@
           <a:cs typeface="+mn-cs"/>
         </a:defRPr>
       </a:lvl1pPr>
-      <a:lvl2pPr marL="685800" indent="-228600" algn="l" defTabSz="914400" rtl="0" eaLnBrk="1" latinLnBrk="0" hangingPunct="1">
+      <a:lvl2pPr marL="1349997" indent="-449999" algn="l" defTabSz="1799996" rtl="0" eaLnBrk="1" latinLnBrk="0" hangingPunct="1">
         <a:lnSpc>
           <a:spcPct val="90000"/>
         </a:lnSpc>
         <a:spcBef>
-          <a:spcPts val="500"/>
+          <a:spcPts val="984"/>
         </a:spcBef>
         <a:buFont typeface="Arial" panose="020B0604020202020204" pitchFamily="34" charset="0"/>
         <a:buChar char="•"/>
-        <a:defRPr kumimoji="1" sz="2400" kern="1200">
+        <a:defRPr kumimoji="1" sz="4724" kern="1200">
           <a:solidFill>
             <a:schemeClr val="tx1"/>
           </a:solidFill>
@@ -3029,16 +3029,16 @@
           <a:cs typeface="+mn-cs"/>
         </a:defRPr>
       </a:lvl2pPr>
-      <a:lvl3pPr marL="1143000" indent="-228600" algn="l" defTabSz="914400" rtl="0" eaLnBrk="1" latinLnBrk="0" hangingPunct="1">
+      <a:lvl3pPr marL="2249996" indent="-449999" algn="l" defTabSz="1799996" rtl="0" eaLnBrk="1" latinLnBrk="0" hangingPunct="1">
         <a:lnSpc>
           <a:spcPct val="90000"/>
         </a:lnSpc>
         <a:spcBef>
-          <a:spcPts val="500"/>
+          <a:spcPts val="984"/>
         </a:spcBef>
         <a:buFont typeface="Arial" panose="020B0604020202020204" pitchFamily="34" charset="0"/>
         <a:buChar char="•"/>
-        <a:defRPr kumimoji="1" sz="2000" kern="1200">
+        <a:defRPr kumimoji="1" sz="3937" kern="1200">
           <a:solidFill>
             <a:schemeClr val="tx1"/>
           </a:solidFill>
@@ -3047,16 +3047,16 @@
           <a:cs typeface="+mn-cs"/>
         </a:defRPr>
       </a:lvl3pPr>
-      <a:lvl4pPr marL="1600200" indent="-228600" algn="l" defTabSz="914400" rtl="0" eaLnBrk="1" latinLnBrk="0" hangingPunct="1">
+      <a:lvl4pPr marL="3149994" indent="-449999" algn="l" defTabSz="1799996" rtl="0" eaLnBrk="1" latinLnBrk="0" hangingPunct="1">
         <a:lnSpc>
           <a:spcPct val="90000"/>
         </a:lnSpc>
         <a:spcBef>
-          <a:spcPts val="500"/>
+          <a:spcPts val="984"/>
         </a:spcBef>
         <a:buFont typeface="Arial" panose="020B0604020202020204" pitchFamily="34" charset="0"/>
         <a:buChar char="•"/>
-        <a:defRPr kumimoji="1" sz="1800" kern="1200">
+        <a:defRPr kumimoji="1" sz="3543" kern="1200">
           <a:solidFill>
             <a:schemeClr val="tx1"/>
           </a:solidFill>
@@ -3065,16 +3065,16 @@
           <a:cs typeface="+mn-cs"/>
         </a:defRPr>
       </a:lvl4pPr>
-      <a:lvl5pPr marL="2057400" indent="-228600" algn="l" defTabSz="914400" rtl="0" eaLnBrk="1" latinLnBrk="0" hangingPunct="1">
+      <a:lvl5pPr marL="4049992" indent="-449999" algn="l" defTabSz="1799996" rtl="0" eaLnBrk="1" latinLnBrk="0" hangingPunct="1">
         <a:lnSpc>
           <a:spcPct val="90000"/>
         </a:lnSpc>
         <a:spcBef>
-          <a:spcPts val="500"/>
+          <a:spcPts val="984"/>
         </a:spcBef>
         <a:buFont typeface="Arial" panose="020B0604020202020204" pitchFamily="34" charset="0"/>
         <a:buChar char="•"/>
-        <a:defRPr kumimoji="1" sz="1800" kern="1200">
+        <a:defRPr kumimoji="1" sz="3543" kern="1200">
           <a:solidFill>
             <a:schemeClr val="tx1"/>
           </a:solidFill>
@@ -3083,16 +3083,16 @@
           <a:cs typeface="+mn-cs"/>
         </a:defRPr>
       </a:lvl5pPr>
-      <a:lvl6pPr marL="2514600" indent="-228600" algn="l" defTabSz="914400" rtl="0" eaLnBrk="1" latinLnBrk="0" hangingPunct="1">
+      <a:lvl6pPr marL="4949990" indent="-449999" algn="l" defTabSz="1799996" rtl="0" eaLnBrk="1" latinLnBrk="0" hangingPunct="1">
         <a:lnSpc>
           <a:spcPct val="90000"/>
         </a:lnSpc>
         <a:spcBef>
-          <a:spcPts val="500"/>
+          <a:spcPts val="984"/>
         </a:spcBef>
         <a:buFont typeface="Arial" panose="020B0604020202020204" pitchFamily="34" charset="0"/>
         <a:buChar char="•"/>
-        <a:defRPr kumimoji="1" sz="1800" kern="1200">
+        <a:defRPr kumimoji="1" sz="3543" kern="1200">
           <a:solidFill>
             <a:schemeClr val="tx1"/>
           </a:solidFill>
@@ -3101,16 +3101,16 @@
           <a:cs typeface="+mn-cs"/>
         </a:defRPr>
       </a:lvl6pPr>
-      <a:lvl7pPr marL="2971800" indent="-228600" algn="l" defTabSz="914400" rtl="0" eaLnBrk="1" latinLnBrk="0" hangingPunct="1">
+      <a:lvl7pPr marL="5849988" indent="-449999" algn="l" defTabSz="1799996" rtl="0" eaLnBrk="1" latinLnBrk="0" hangingPunct="1">
         <a:lnSpc>
           <a:spcPct val="90000"/>
         </a:lnSpc>
         <a:spcBef>
-          <a:spcPts val="500"/>
+          <a:spcPts val="984"/>
         </a:spcBef>
         <a:buFont typeface="Arial" panose="020B0604020202020204" pitchFamily="34" charset="0"/>
         <a:buChar char="•"/>
-        <a:defRPr kumimoji="1" sz="1800" kern="1200">
+        <a:defRPr kumimoji="1" sz="3543" kern="1200">
           <a:solidFill>
             <a:schemeClr val="tx1"/>
           </a:solidFill>
@@ -3119,16 +3119,16 @@
           <a:cs typeface="+mn-cs"/>
         </a:defRPr>
       </a:lvl7pPr>
-      <a:lvl8pPr marL="3429000" indent="-228600" algn="l" defTabSz="914400" rtl="0" eaLnBrk="1" latinLnBrk="0" hangingPunct="1">
+      <a:lvl8pPr marL="6749987" indent="-449999" algn="l" defTabSz="1799996" rtl="0" eaLnBrk="1" latinLnBrk="0" hangingPunct="1">
         <a:lnSpc>
           <a:spcPct val="90000"/>
         </a:lnSpc>
         <a:spcBef>
-          <a:spcPts val="500"/>
+          <a:spcPts val="984"/>
         </a:spcBef>
         <a:buFont typeface="Arial" panose="020B0604020202020204" pitchFamily="34" charset="0"/>
         <a:buChar char="•"/>
-        <a:defRPr kumimoji="1" sz="1800" kern="1200">
+        <a:defRPr kumimoji="1" sz="3543" kern="1200">
           <a:solidFill>
             <a:schemeClr val="tx1"/>
           </a:solidFill>
@@ -3137,16 +3137,16 @@
           <a:cs typeface="+mn-cs"/>
         </a:defRPr>
       </a:lvl8pPr>
-      <a:lvl9pPr marL="3886200" indent="-228600" algn="l" defTabSz="914400" rtl="0" eaLnBrk="1" latinLnBrk="0" hangingPunct="1">
+      <a:lvl9pPr marL="7649985" indent="-449999" algn="l" defTabSz="1799996" rtl="0" eaLnBrk="1" latinLnBrk="0" hangingPunct="1">
         <a:lnSpc>
           <a:spcPct val="90000"/>
         </a:lnSpc>
         <a:spcBef>
-          <a:spcPts val="500"/>
+          <a:spcPts val="984"/>
         </a:spcBef>
         <a:buFont typeface="Arial" panose="020B0604020202020204" pitchFamily="34" charset="0"/>
         <a:buChar char="•"/>
-        <a:defRPr kumimoji="1" sz="1800" kern="1200">
+        <a:defRPr kumimoji="1" sz="3543" kern="1200">
           <a:solidFill>
             <a:schemeClr val="tx1"/>
           </a:solidFill>
@@ -3160,8 +3160,8 @@
       <a:defPPr>
         <a:defRPr lang="en-US"/>
       </a:defPPr>
-      <a:lvl1pPr marL="0" algn="l" defTabSz="914400" rtl="0" eaLnBrk="1" latinLnBrk="0" hangingPunct="1">
-        <a:defRPr kumimoji="1" sz="1800" kern="1200">
+      <a:lvl1pPr marL="0" algn="l" defTabSz="1799996" rtl="0" eaLnBrk="1" latinLnBrk="0" hangingPunct="1">
+        <a:defRPr kumimoji="1" sz="3543" kern="1200">
           <a:solidFill>
             <a:schemeClr val="tx1"/>
           </a:solidFill>
@@ -3170,8 +3170,8 @@
           <a:cs typeface="+mn-cs"/>
         </a:defRPr>
       </a:lvl1pPr>
-      <a:lvl2pPr marL="457200" algn="l" defTabSz="914400" rtl="0" eaLnBrk="1" latinLnBrk="0" hangingPunct="1">
-        <a:defRPr kumimoji="1" sz="1800" kern="1200">
+      <a:lvl2pPr marL="899998" algn="l" defTabSz="1799996" rtl="0" eaLnBrk="1" latinLnBrk="0" hangingPunct="1">
+        <a:defRPr kumimoji="1" sz="3543" kern="1200">
           <a:solidFill>
             <a:schemeClr val="tx1"/>
           </a:solidFill>
@@ -3180,8 +3180,8 @@
           <a:cs typeface="+mn-cs"/>
         </a:defRPr>
       </a:lvl2pPr>
-      <a:lvl3pPr marL="914400" algn="l" defTabSz="914400" rtl="0" eaLnBrk="1" latinLnBrk="0" hangingPunct="1">
-        <a:defRPr kumimoji="1" sz="1800" kern="1200">
+      <a:lvl3pPr marL="1799996" algn="l" defTabSz="1799996" rtl="0" eaLnBrk="1" latinLnBrk="0" hangingPunct="1">
+        <a:defRPr kumimoji="1" sz="3543" kern="1200">
           <a:solidFill>
             <a:schemeClr val="tx1"/>
           </a:solidFill>
@@ -3190,8 +3190,8 @@
           <a:cs typeface="+mn-cs"/>
         </a:defRPr>
       </a:lvl3pPr>
-      <a:lvl4pPr marL="1371600" algn="l" defTabSz="914400" rtl="0" eaLnBrk="1" latinLnBrk="0" hangingPunct="1">
-        <a:defRPr kumimoji="1" sz="1800" kern="1200">
+      <a:lvl4pPr marL="2699995" algn="l" defTabSz="1799996" rtl="0" eaLnBrk="1" latinLnBrk="0" hangingPunct="1">
+        <a:defRPr kumimoji="1" sz="3543" kern="1200">
           <a:solidFill>
             <a:schemeClr val="tx1"/>
           </a:solidFill>
@@ -3200,8 +3200,8 @@
           <a:cs typeface="+mn-cs"/>
         </a:defRPr>
       </a:lvl4pPr>
-      <a:lvl5pPr marL="1828800" algn="l" defTabSz="914400" rtl="0" eaLnBrk="1" latinLnBrk="0" hangingPunct="1">
-        <a:defRPr kumimoji="1" sz="1800" kern="1200">
+      <a:lvl5pPr marL="3599993" algn="l" defTabSz="1799996" rtl="0" eaLnBrk="1" latinLnBrk="0" hangingPunct="1">
+        <a:defRPr kumimoji="1" sz="3543" kern="1200">
           <a:solidFill>
             <a:schemeClr val="tx1"/>
           </a:solidFill>
@@ -3210,8 +3210,8 @@
           <a:cs typeface="+mn-cs"/>
         </a:defRPr>
       </a:lvl5pPr>
-      <a:lvl6pPr marL="2286000" algn="l" defTabSz="914400" rtl="0" eaLnBrk="1" latinLnBrk="0" hangingPunct="1">
-        <a:defRPr kumimoji="1" sz="1800" kern="1200">
+      <a:lvl6pPr marL="4499991" algn="l" defTabSz="1799996" rtl="0" eaLnBrk="1" latinLnBrk="0" hangingPunct="1">
+        <a:defRPr kumimoji="1" sz="3543" kern="1200">
           <a:solidFill>
             <a:schemeClr val="tx1"/>
           </a:solidFill>
@@ -3220,8 +3220,8 @@
           <a:cs typeface="+mn-cs"/>
         </a:defRPr>
       </a:lvl6pPr>
-      <a:lvl7pPr marL="2743200" algn="l" defTabSz="914400" rtl="0" eaLnBrk="1" latinLnBrk="0" hangingPunct="1">
-        <a:defRPr kumimoji="1" sz="1800" kern="1200">
+      <a:lvl7pPr marL="5399989" algn="l" defTabSz="1799996" rtl="0" eaLnBrk="1" latinLnBrk="0" hangingPunct="1">
+        <a:defRPr kumimoji="1" sz="3543" kern="1200">
           <a:solidFill>
             <a:schemeClr val="tx1"/>
           </a:solidFill>
@@ -3230,8 +3230,8 @@
           <a:cs typeface="+mn-cs"/>
         </a:defRPr>
       </a:lvl7pPr>
-      <a:lvl8pPr marL="3200400" algn="l" defTabSz="914400" rtl="0" eaLnBrk="1" latinLnBrk="0" hangingPunct="1">
-        <a:defRPr kumimoji="1" sz="1800" kern="1200">
+      <a:lvl8pPr marL="6299987" algn="l" defTabSz="1799996" rtl="0" eaLnBrk="1" latinLnBrk="0" hangingPunct="1">
+        <a:defRPr kumimoji="1" sz="3543" kern="1200">
           <a:solidFill>
             <a:schemeClr val="tx1"/>
           </a:solidFill>
@@ -3240,8 +3240,8 @@
           <a:cs typeface="+mn-cs"/>
         </a:defRPr>
       </a:lvl8pPr>
-      <a:lvl9pPr marL="3657600" algn="l" defTabSz="914400" rtl="0" eaLnBrk="1" latinLnBrk="0" hangingPunct="1">
-        <a:defRPr kumimoji="1" sz="1800" kern="1200">
+      <a:lvl9pPr marL="7199986" algn="l" defTabSz="1799996" rtl="0" eaLnBrk="1" latinLnBrk="0" hangingPunct="1">
+        <a:defRPr kumimoji="1" sz="3543" kern="1200">
           <a:solidFill>
             <a:schemeClr val="tx1"/>
           </a:solidFill>
@@ -3286,8 +3286,8 @@
         </p:nvSpPr>
         <p:spPr>
           <a:xfrm>
-            <a:off x="717624" y="173259"/>
-            <a:ext cx="17103589" cy="6388488"/>
+            <a:off x="933450" y="475493"/>
+            <a:ext cx="22155150" cy="12710155"/>
           </a:xfrm>
           <a:prstGeom prst="roundRect">
             <a:avLst>
@@ -3295,7 +3295,7 @@
             </a:avLst>
           </a:prstGeom>
           <a:noFill/>
-          <a:ln w="127000">
+          <a:ln w="190500">
             <a:solidFill>
               <a:schemeClr val="tx1"/>
             </a:solidFill>
@@ -3322,7 +3322,7 @@
           <a:lstStyle/>
           <a:p>
             <a:pPr algn="ctr"/>
-            <a:endParaRPr lang="ja-JP" altLang="en-US" sz="3200" dirty="0">
+            <a:endParaRPr lang="ja-JP" altLang="en-US" sz="3199" dirty="0">
               <a:solidFill>
                 <a:schemeClr val="tx1"/>
               </a:solidFill>
@@ -3346,8 +3346,8 @@
         </p:nvSpPr>
         <p:spPr>
           <a:xfrm>
-            <a:off x="434456" y="4914434"/>
-            <a:ext cx="495946" cy="322718"/>
+            <a:off x="3434042" y="10929127"/>
+            <a:ext cx="651989" cy="518582"/>
           </a:xfrm>
           <a:prstGeom prst="rect">
             <a:avLst/>
@@ -3398,8 +3398,8 @@
         </p:nvSpPr>
         <p:spPr>
           <a:xfrm>
-            <a:off x="3855621" y="6365834"/>
-            <a:ext cx="495946" cy="322718"/>
+            <a:off x="6855207" y="12380526"/>
+            <a:ext cx="651989" cy="518582"/>
           </a:xfrm>
           <a:prstGeom prst="rect">
             <a:avLst/>
@@ -3450,8 +3450,8 @@
         </p:nvSpPr>
         <p:spPr>
           <a:xfrm>
-            <a:off x="113460" y="1880529"/>
-            <a:ext cx="2864908" cy="2214928"/>
+            <a:off x="1229885" y="4550961"/>
+            <a:ext cx="4031416" cy="4196158"/>
           </a:xfrm>
           <a:prstGeom prst="roundRect">
             <a:avLst>
@@ -3488,7 +3488,7 @@
           <a:lstStyle/>
           <a:p>
             <a:pPr algn="ctr"/>
-            <a:endParaRPr lang="ja-JP" altLang="en-US" sz="3200" dirty="0">
+            <a:endParaRPr lang="ja-JP" altLang="en-US" sz="3199" dirty="0">
               <a:solidFill>
                 <a:schemeClr val="tx1"/>
               </a:solidFill>
@@ -3514,8 +3514,8 @@
         </p:nvCxnSpPr>
         <p:spPr>
           <a:xfrm>
-            <a:off x="113460" y="2698707"/>
-            <a:ext cx="2864908" cy="0"/>
+            <a:off x="1229886" y="6174521"/>
+            <a:ext cx="4031415" cy="0"/>
           </a:xfrm>
           <a:prstGeom prst="straightConnector1">
             <a:avLst/>
@@ -3556,8 +3556,8 @@
         </p:nvSpPr>
         <p:spPr>
           <a:xfrm>
-            <a:off x="632709" y="1928757"/>
-            <a:ext cx="1826410" cy="707886"/>
+            <a:off x="2041421" y="4914709"/>
+            <a:ext cx="2401069" cy="923330"/>
           </a:xfrm>
           <a:prstGeom prst="rect">
             <a:avLst/>
@@ -3572,13 +3572,13 @@
           <a:p>
             <a:pPr algn="ctr"/>
             <a:r>
-              <a:rPr lang="en-US" altLang="ja-JP" sz="4000" dirty="0">
+              <a:rPr lang="en-US" altLang="ja-JP" sz="5400" dirty="0">
                 <a:latin typeface="Consolas" panose="020B0609020204030204" pitchFamily="49" charset="0"/>
                 <a:ea typeface="モボ-SemiBold" panose="02000700000000000000" pitchFamily="50" charset="-128"/>
               </a:rPr>
               <a:t>DAWIY</a:t>
             </a:r>
-            <a:endParaRPr lang="ja-JP" altLang="en-US" sz="4000" dirty="0">
+            <a:endParaRPr lang="ja-JP" altLang="en-US" sz="5400" dirty="0">
               <a:latin typeface="Consolas" panose="020B0609020204030204" pitchFamily="49" charset="0"/>
               <a:ea typeface="モボ-SemiBold" panose="02000700000000000000" pitchFamily="50" charset="-128"/>
             </a:endParaRPr>
@@ -3599,8 +3599,8 @@
         </p:nvSpPr>
         <p:spPr>
           <a:xfrm>
-            <a:off x="222313" y="2879061"/>
-            <a:ext cx="2647202" cy="1015663"/>
+            <a:off x="1292377" y="6657300"/>
+            <a:ext cx="4013299" cy="1569660"/>
           </a:xfrm>
           <a:prstGeom prst="rect">
             <a:avLst/>
@@ -3614,29 +3614,29 @@
           <a:lstStyle/>
           <a:p>
             <a:r>
-              <a:rPr lang="ja-JP" altLang="en-US" sz="2000" dirty="0">
+              <a:rPr lang="ja-JP" altLang="en-US" sz="3200" dirty="0">
                 <a:latin typeface="+mn-ea"/>
               </a:rPr>
               <a:t>・起動する</a:t>
             </a:r>
-            <a:endParaRPr lang="en-US" altLang="ja-JP" sz="2000" dirty="0">
+            <a:endParaRPr lang="en-US" altLang="ja-JP" sz="3200" dirty="0">
               <a:latin typeface="+mn-ea"/>
             </a:endParaRPr>
           </a:p>
           <a:p>
             <a:r>
-              <a:rPr lang="ja-JP" altLang="en-US" sz="2000" dirty="0">
+              <a:rPr lang="ja-JP" altLang="en-US" sz="3200" dirty="0">
                 <a:latin typeface="+mn-ea"/>
               </a:rPr>
               <a:t>・プラグイン機能を</a:t>
             </a:r>
-            <a:endParaRPr lang="en-US" altLang="ja-JP" sz="2000" dirty="0">
+            <a:endParaRPr lang="en-US" altLang="ja-JP" sz="3200" dirty="0">
               <a:latin typeface="+mn-ea"/>
             </a:endParaRPr>
           </a:p>
           <a:p>
             <a:r>
-              <a:rPr lang="ja-JP" altLang="en-US" sz="2000" dirty="0">
+              <a:rPr lang="ja-JP" altLang="en-US" sz="3200" dirty="0">
                 <a:latin typeface="+mn-ea"/>
               </a:rPr>
               <a:t>　使えるようにする</a:t>
@@ -3658,8 +3658,8 @@
         </p:nvSpPr>
         <p:spPr>
           <a:xfrm>
-            <a:off x="3878064" y="364087"/>
-            <a:ext cx="2864908" cy="2214928"/>
+            <a:off x="4964314" y="823518"/>
+            <a:ext cx="5152432" cy="3559202"/>
           </a:xfrm>
           <a:prstGeom prst="roundRect">
             <a:avLst>
@@ -3694,7 +3694,7 @@
           <a:lstStyle/>
           <a:p>
             <a:pPr algn="ctr"/>
-            <a:endParaRPr lang="ja-JP" altLang="en-US" sz="3200" dirty="0">
+            <a:endParaRPr lang="ja-JP" altLang="en-US" sz="3199" dirty="0">
               <a:solidFill>
                 <a:schemeClr val="tx1"/>
               </a:solidFill>
@@ -3720,8 +3720,8 @@
         </p:nvCxnSpPr>
         <p:spPr>
           <a:xfrm>
-            <a:off x="3878064" y="1182266"/>
-            <a:ext cx="2864908" cy="0"/>
+            <a:off x="4964314" y="2254268"/>
+            <a:ext cx="5072469" cy="7620"/>
           </a:xfrm>
           <a:prstGeom prst="straightConnector1">
             <a:avLst/>
@@ -3762,8 +3762,8 @@
         </p:nvSpPr>
         <p:spPr>
           <a:xfrm>
-            <a:off x="4022165" y="593331"/>
-            <a:ext cx="2605282" cy="400110"/>
+            <a:off x="5287083" y="1244297"/>
+            <a:ext cx="4630678" cy="646331"/>
           </a:xfrm>
           <a:prstGeom prst="rect">
             <a:avLst/>
@@ -3778,7 +3778,7 @@
           <a:p>
             <a:pPr algn="ctr"/>
             <a:r>
-              <a:rPr lang="en-US" altLang="ja-JP" sz="2000" dirty="0">
+              <a:rPr lang="en-US" altLang="ja-JP" sz="3600" dirty="0">
                 <a:latin typeface="Consolas" panose="020B0609020204030204" pitchFamily="49" charset="0"/>
               </a:rPr>
               <a:t>DawiyPluginLoader</a:t>
@@ -3800,8 +3800,8 @@
         </p:nvSpPr>
         <p:spPr>
           <a:xfrm>
-            <a:off x="3915477" y="1391196"/>
-            <a:ext cx="2834966" cy="1015663"/>
+            <a:off x="5311042" y="2555612"/>
+            <a:ext cx="4389136" cy="1569660"/>
           </a:xfrm>
           <a:prstGeom prst="rect">
             <a:avLst/>
@@ -3815,31 +3815,31 @@
           <a:lstStyle/>
           <a:p>
             <a:r>
-              <a:rPr lang="ja-JP" altLang="en-US" sz="2000" dirty="0">
+              <a:rPr lang="ja-JP" altLang="en-US" sz="3200" dirty="0">
                 <a:latin typeface="+mn-ea"/>
               </a:rPr>
               <a:t>・フォルダを見張る</a:t>
             </a:r>
-            <a:endParaRPr lang="en-US" altLang="ja-JP" sz="2000" dirty="0">
+            <a:endParaRPr lang="en-US" altLang="ja-JP" sz="3200" dirty="0">
               <a:latin typeface="+mn-ea"/>
             </a:endParaRPr>
           </a:p>
           <a:p>
             <a:r>
-              <a:rPr lang="ja-JP" altLang="en-US" sz="2000" dirty="0">
+              <a:rPr lang="ja-JP" altLang="en-US" sz="3200" dirty="0">
                 <a:latin typeface="+mn-ea"/>
               </a:rPr>
               <a:t>・</a:t>
             </a:r>
             <a:r>
-              <a:rPr lang="ja-JP" altLang="en-US" sz="2000" dirty="0"/>
+              <a:rPr lang="ja-JP" altLang="en-US" sz="3200" dirty="0"/>
               <a:t>見つけたプラグイン</a:t>
             </a:r>
-            <a:endParaRPr lang="en-US" altLang="ja-JP" sz="2000" dirty="0"/>
-          </a:p>
-          <a:p>
-            <a:r>
-              <a:rPr lang="ja-JP" altLang="en-US" sz="2000" dirty="0"/>
+            <a:endParaRPr lang="en-US" altLang="ja-JP" sz="3200" dirty="0"/>
+          </a:p>
+          <a:p>
+            <a:r>
+              <a:rPr lang="ja-JP" altLang="en-US" sz="3200" dirty="0"/>
               <a:t>　を読み込む</a:t>
             </a:r>
           </a:p>
@@ -3861,13 +3861,13 @@
         </p:nvCxnSpPr>
         <p:spPr>
           <a:xfrm>
-            <a:off x="1471051" y="1318729"/>
-            <a:ext cx="2326524" cy="0"/>
+            <a:off x="2895600" y="2603119"/>
+            <a:ext cx="1967138" cy="0"/>
           </a:xfrm>
           <a:prstGeom prst="straightConnector1">
             <a:avLst/>
           </a:prstGeom>
-          <a:ln w="152400">
+          <a:ln w="254000">
             <a:solidFill>
               <a:schemeClr val="tx1"/>
             </a:solidFill>
@@ -3904,14 +3904,14 @@
           <p:nvPr/>
         </p:nvCxnSpPr>
         <p:spPr>
-          <a:xfrm flipV="1">
-            <a:off x="1545914" y="1295400"/>
-            <a:ext cx="0" cy="559662"/>
+          <a:xfrm>
+            <a:off x="3070280" y="3373907"/>
+            <a:ext cx="0" cy="339668"/>
           </a:xfrm>
           <a:prstGeom prst="straightConnector1">
             <a:avLst/>
           </a:prstGeom>
-          <a:ln w="152400">
+          <a:ln w="254000">
             <a:solidFill>
               <a:schemeClr val="tx1"/>
             </a:solidFill>
@@ -3944,19 +3944,18 @@
           </p:cNvPr>
           <p:cNvCxnSpPr>
             <a:cxnSpLocks/>
-            <a:endCxn id="2" idx="2"/>
           </p:cNvCxnSpPr>
           <p:nvPr/>
         </p:nvCxnSpPr>
         <p:spPr>
           <a:xfrm flipV="1">
-            <a:off x="1545914" y="4095457"/>
-            <a:ext cx="0" cy="607036"/>
+            <a:off x="2041421" y="8974351"/>
+            <a:ext cx="450705" cy="607036"/>
           </a:xfrm>
           <a:prstGeom prst="straightConnector1">
             <a:avLst/>
           </a:prstGeom>
-          <a:ln w="152400">
+          <a:ln w="254000">
             <a:solidFill>
               <a:schemeClr val="tx1"/>
             </a:solidFill>
@@ -3994,13 +3993,13 @@
         </p:nvCxnSpPr>
         <p:spPr>
           <a:xfrm>
-            <a:off x="1482286" y="4702493"/>
-            <a:ext cx="3651647" cy="0"/>
+            <a:off x="1965644" y="9846906"/>
+            <a:ext cx="4800597" cy="0"/>
           </a:xfrm>
           <a:prstGeom prst="straightConnector1">
             <a:avLst/>
           </a:prstGeom>
-          <a:ln w="152400">
+          <a:ln w="254000">
             <a:solidFill>
               <a:schemeClr val="tx1"/>
             </a:solidFill>
@@ -4036,8 +4035,8 @@
         </p:nvSpPr>
         <p:spPr>
           <a:xfrm>
-            <a:off x="5285638" y="3595029"/>
-            <a:ext cx="4748898" cy="2214928"/>
+            <a:off x="8522965" y="8479599"/>
+            <a:ext cx="5059618" cy="3559202"/>
           </a:xfrm>
           <a:prstGeom prst="roundRect">
             <a:avLst>
@@ -4072,7 +4071,7 @@
           <a:lstStyle/>
           <a:p>
             <a:pPr algn="ctr"/>
-            <a:endParaRPr lang="ja-JP" altLang="en-US" sz="3200" dirty="0">
+            <a:endParaRPr lang="ja-JP" altLang="en-US" sz="3199" dirty="0">
               <a:solidFill>
                 <a:schemeClr val="tx1"/>
               </a:solidFill>
@@ -4098,8 +4097,8 @@
         </p:nvCxnSpPr>
         <p:spPr>
           <a:xfrm>
-            <a:off x="5285638" y="4413208"/>
-            <a:ext cx="4748898" cy="0"/>
+            <a:off x="8495374" y="9751760"/>
+            <a:ext cx="5059618" cy="0"/>
           </a:xfrm>
           <a:prstGeom prst="straightConnector1">
             <a:avLst/>
@@ -4140,8 +4139,8 @@
         </p:nvSpPr>
         <p:spPr>
           <a:xfrm>
-            <a:off x="6609238" y="3709680"/>
-            <a:ext cx="2005034" cy="584775"/>
+            <a:off x="9591052" y="8627783"/>
+            <a:ext cx="2915958" cy="830997"/>
           </a:xfrm>
           <a:prstGeom prst="rect">
             <a:avLst/>
@@ -4156,7 +4155,7 @@
           <a:p>
             <a:pPr algn="ctr"/>
             <a:r>
-              <a:rPr lang="en-US" altLang="ja-JP" sz="3200" dirty="0">
+              <a:rPr lang="en-US" altLang="ja-JP" sz="4800" dirty="0">
                 <a:latin typeface="Consolas" panose="020B0609020204030204" pitchFamily="49" charset="0"/>
               </a:rPr>
               <a:t>HostAPI</a:t>
@@ -4178,8 +4177,8 @@
         </p:nvSpPr>
         <p:spPr>
           <a:xfrm>
-            <a:off x="5342788" y="4603751"/>
-            <a:ext cx="4634598" cy="1015663"/>
+            <a:off x="8556264" y="10183242"/>
+            <a:ext cx="4937838" cy="1016047"/>
           </a:xfrm>
           <a:prstGeom prst="rect">
             <a:avLst/>
@@ -4193,27 +4192,27 @@
           <a:lstStyle/>
           <a:p>
             <a:r>
-              <a:rPr lang="ja-JP" altLang="en-US" sz="2000" dirty="0"/>
+              <a:rPr lang="ja-JP" altLang="en-US" sz="2001" dirty="0"/>
               <a:t>・画面を表示する機能を提供</a:t>
             </a:r>
           </a:p>
           <a:p>
             <a:r>
-              <a:rPr lang="ja-JP" altLang="en-US" sz="2000" dirty="0"/>
+              <a:rPr lang="ja-JP" altLang="en-US" sz="2001" dirty="0"/>
               <a:t>・ファイルを読み書きする機能を提供</a:t>
             </a:r>
           </a:p>
           <a:p>
             <a:r>
-              <a:rPr lang="ja-JP" altLang="en-US" sz="2000" dirty="0"/>
+              <a:rPr lang="ja-JP" altLang="en-US" sz="2001" dirty="0"/>
               <a:t>・</a:t>
             </a:r>
             <a:r>
-              <a:rPr lang="en-US" altLang="ja-JP" sz="2000" dirty="0"/>
+              <a:rPr lang="en-US" altLang="ja-JP" sz="2001" dirty="0"/>
               <a:t>DAW</a:t>
             </a:r>
             <a:r>
-              <a:rPr lang="ja-JP" altLang="en-US" sz="2000" dirty="0"/>
+              <a:rPr lang="ja-JP" altLang="en-US" sz="2001" dirty="0"/>
               <a:t>の再生・停止機能を提供</a:t>
             </a:r>
           </a:p>
@@ -4235,13 +4234,13 @@
         </p:nvCxnSpPr>
         <p:spPr>
           <a:xfrm>
-            <a:off x="6742972" y="1318729"/>
-            <a:ext cx="2019986" cy="0"/>
+            <a:off x="10153650" y="2551597"/>
+            <a:ext cx="4501813" cy="0"/>
           </a:xfrm>
           <a:prstGeom prst="straightConnector1">
             <a:avLst/>
           </a:prstGeom>
-          <a:ln w="152400">
+          <a:ln w="254000">
             <a:solidFill>
               <a:schemeClr val="tx1"/>
             </a:solidFill>
@@ -4278,8 +4277,8 @@
         </p:nvSpPr>
         <p:spPr>
           <a:xfrm>
-            <a:off x="8869854" y="364087"/>
-            <a:ext cx="3607860" cy="2214928"/>
+            <a:off x="14785300" y="956065"/>
+            <a:ext cx="5750600" cy="3191065"/>
           </a:xfrm>
           <a:prstGeom prst="roundRect">
             <a:avLst>
@@ -4314,7 +4313,7 @@
           <a:lstStyle/>
           <a:p>
             <a:pPr algn="ctr"/>
-            <a:endParaRPr lang="ja-JP" altLang="en-US" sz="3200" dirty="0">
+            <a:endParaRPr lang="ja-JP" altLang="en-US" sz="3199" dirty="0">
               <a:solidFill>
                 <a:schemeClr val="tx1"/>
               </a:solidFill>
@@ -4340,8 +4339,8 @@
         </p:nvCxnSpPr>
         <p:spPr>
           <a:xfrm>
-            <a:off x="8869854" y="1182266"/>
-            <a:ext cx="3607860" cy="0"/>
+            <a:off x="14742037" y="2080113"/>
+            <a:ext cx="5793863" cy="0"/>
           </a:xfrm>
           <a:prstGeom prst="straightConnector1">
             <a:avLst/>
@@ -4382,8 +4381,8 @@
         </p:nvSpPr>
         <p:spPr>
           <a:xfrm>
-            <a:off x="9134785" y="550467"/>
-            <a:ext cx="3077997" cy="461665"/>
+            <a:off x="15080690" y="1249272"/>
+            <a:ext cx="5112310" cy="646331"/>
           </a:xfrm>
           <a:prstGeom prst="rect">
             <a:avLst/>
@@ -4398,12 +4397,12 @@
           <a:p>
             <a:pPr algn="ctr"/>
             <a:r>
-              <a:rPr lang="ja-JP" altLang="en-US" sz="2400" dirty="0">
+              <a:rPr lang="ja-JP" altLang="en-US" sz="3600" dirty="0">
                 <a:latin typeface="Consolas" panose="020B0609020204030204" pitchFamily="49" charset="0"/>
               </a:rPr>
               <a:t>ユーザのプラグイン</a:t>
             </a:r>
-            <a:endParaRPr lang="en-US" altLang="ja-JP" sz="2400" dirty="0">
+            <a:endParaRPr lang="en-US" altLang="ja-JP" sz="3600" dirty="0">
               <a:latin typeface="Consolas" panose="020B0609020204030204" pitchFamily="49" charset="0"/>
             </a:endParaRPr>
           </a:p>
@@ -4423,8 +4422,8 @@
         </p:nvSpPr>
         <p:spPr>
           <a:xfrm>
-            <a:off x="8907266" y="1391196"/>
-            <a:ext cx="3456143" cy="1015663"/>
+            <a:off x="14897208" y="2361887"/>
+            <a:ext cx="5447247" cy="1569660"/>
           </a:xfrm>
           <a:prstGeom prst="rect">
             <a:avLst/>
@@ -4438,29 +4437,29 @@
           <a:lstStyle/>
           <a:p>
             <a:r>
-              <a:rPr lang="ja-JP" altLang="en-US" sz="2000" dirty="0"/>
+              <a:rPr lang="ja-JP" altLang="en-US" sz="3200" dirty="0"/>
               <a:t>・初期化時に</a:t>
             </a:r>
             <a:r>
-              <a:rPr lang="en-US" altLang="ja-JP" sz="2000" dirty="0">
+              <a:rPr lang="en-US" altLang="ja-JP" sz="3200" dirty="0">
                 <a:latin typeface="Consolas" panose="020B0609020204030204" pitchFamily="49" charset="0"/>
               </a:rPr>
               <a:t>API</a:t>
             </a:r>
             <a:r>
-              <a:rPr lang="ja-JP" altLang="en-US" sz="2000" dirty="0"/>
+              <a:rPr lang="ja-JP" altLang="en-US" sz="3200" dirty="0"/>
               <a:t>を受け取る</a:t>
             </a:r>
           </a:p>
           <a:p>
             <a:r>
-              <a:rPr lang="ja-JP" altLang="en-US" sz="2000" dirty="0"/>
+              <a:rPr lang="ja-JP" altLang="en-US" sz="3200" dirty="0"/>
               <a:t>・画面を作る</a:t>
             </a:r>
           </a:p>
           <a:p>
             <a:r>
-              <a:rPr lang="ja-JP" altLang="en-US" sz="2000" dirty="0"/>
+              <a:rPr lang="ja-JP" altLang="en-US" sz="3200" dirty="0"/>
               <a:t>・機能を実行する</a:t>
             </a:r>
           </a:p>
@@ -4480,8 +4479,8 @@
         </p:nvSpPr>
         <p:spPr>
           <a:xfrm>
-            <a:off x="1014046" y="781299"/>
-            <a:ext cx="2491583" cy="461665"/>
+            <a:off x="1381341" y="1420613"/>
+            <a:ext cx="4165168" cy="646331"/>
           </a:xfrm>
           <a:prstGeom prst="rect">
             <a:avLst/>
@@ -4495,11 +4494,11 @@
           <a:lstStyle/>
           <a:p>
             <a:r>
-              <a:rPr kumimoji="1" lang="en-US" altLang="ja-JP" sz="2400" dirty="0"/>
+              <a:rPr kumimoji="1" lang="en-US" altLang="ja-JP" sz="3600" dirty="0"/>
               <a:t>1.</a:t>
             </a:r>
             <a:r>
-              <a:rPr kumimoji="1" lang="ja-JP" altLang="en-US" sz="2400" dirty="0"/>
+              <a:rPr kumimoji="1" lang="ja-JP" altLang="en-US" sz="3600" dirty="0"/>
               <a:t>  起動時に命令</a:t>
             </a:r>
           </a:p>
@@ -4519,8 +4518,8 @@
         </p:nvSpPr>
         <p:spPr>
           <a:xfrm>
-            <a:off x="1888606" y="4150187"/>
-            <a:ext cx="3145311" cy="461665"/>
+            <a:off x="4442491" y="8732060"/>
+            <a:ext cx="5372214" cy="646331"/>
           </a:xfrm>
           <a:prstGeom prst="rect">
             <a:avLst/>
@@ -4534,13 +4533,13 @@
           <a:lstStyle/>
           <a:p>
             <a:r>
-              <a:rPr lang="en-US" altLang="ja-JP" sz="2400" dirty="0">
+              <a:rPr lang="en-US" altLang="ja-JP" sz="3600" dirty="0">
                 <a:latin typeface="Consolas" panose="020B0609020204030204" pitchFamily="49" charset="0"/>
               </a:rPr>
               <a:t>HostAPI</a:t>
             </a:r>
             <a:r>
-              <a:rPr lang="ja-JP" altLang="en-US" sz="2400" dirty="0">
+              <a:rPr lang="ja-JP" altLang="en-US" sz="3600" dirty="0">
                 <a:latin typeface="+mn-ea"/>
               </a:rPr>
               <a:t>を提供する</a:t>
@@ -4562,8 +4561,8 @@
         </p:nvSpPr>
         <p:spPr>
           <a:xfrm>
-            <a:off x="6737487" y="766462"/>
-            <a:ext cx="1881852" cy="461665"/>
+            <a:off x="9873354" y="1425494"/>
+            <a:ext cx="4911946" cy="646331"/>
           </a:xfrm>
           <a:prstGeom prst="rect">
             <a:avLst/>
@@ -4578,48 +4577,12 @@
           <a:p>
             <a:pPr algn="ctr"/>
             <a:r>
-              <a:rPr kumimoji="1" lang="en-US" altLang="ja-JP" sz="2400" dirty="0"/>
+              <a:rPr kumimoji="1" lang="en-US" altLang="ja-JP" sz="3600" dirty="0"/>
               <a:t>2.</a:t>
             </a:r>
             <a:r>
-              <a:rPr kumimoji="1" lang="ja-JP" altLang="en-US" sz="2400" dirty="0"/>
-              <a:t>  発見して</a:t>
-            </a:r>
-          </a:p>
-        </p:txBody>
-      </p:sp>
-      <p:sp>
-        <p:nvSpPr>
-          <p:cNvPr id="43" name="テキスト ボックス 42">
-            <a:extLst>
-              <a:ext uri="{FF2B5EF4-FFF2-40B4-BE49-F238E27FC236}">
-                <a16:creationId xmlns:a16="http://schemas.microsoft.com/office/drawing/2014/main" id="{C41A01CD-2068-FFC1-B9C4-C139B43B827D}"/>
-              </a:ext>
-            </a:extLst>
-          </p:cNvPr>
-          <p:cNvSpPr txBox="1"/>
-          <p:nvPr/>
-        </p:nvSpPr>
-        <p:spPr>
-          <a:xfrm>
-            <a:off x="7153624" y="1467092"/>
-            <a:ext cx="1432056" cy="461665"/>
-          </a:xfrm>
-          <a:prstGeom prst="rect">
-            <a:avLst/>
-          </a:prstGeom>
-          <a:noFill/>
-        </p:spPr>
-        <p:txBody>
-          <a:bodyPr wrap="square" rtlCol="0">
-            <a:spAutoFit/>
-          </a:bodyPr>
-          <a:lstStyle/>
-          <a:p>
-            <a:pPr algn="ctr"/>
-            <a:r>
-              <a:rPr kumimoji="1" lang="ja-JP" altLang="en-US" sz="2400" dirty="0"/>
-              <a:t>読み込む</a:t>
+              <a:rPr kumimoji="1" lang="ja-JP" altLang="en-US" sz="3600" dirty="0"/>
+              <a:t>  発見して読み込む</a:t>
             </a:r>
           </a:p>
         </p:txBody>
@@ -4635,14 +4598,13 @@
           </p:cNvPr>
           <p:cNvCxnSpPr>
             <a:cxnSpLocks/>
-            <a:endCxn id="33" idx="2"/>
           </p:cNvCxnSpPr>
           <p:nvPr/>
         </p:nvCxnSpPr>
         <p:spPr>
           <a:xfrm flipV="1">
-            <a:off x="10673784" y="2579015"/>
-            <a:ext cx="0" cy="368020"/>
+            <a:off x="16729583" y="5678213"/>
+            <a:ext cx="567586" cy="368019"/>
           </a:xfrm>
           <a:prstGeom prst="straightConnector1">
             <a:avLst/>
@@ -4685,9 +4647,9 @@
           <p:nvPr/>
         </p:nvCxnSpPr>
         <p:spPr>
-          <a:xfrm flipH="1">
-            <a:off x="7611755" y="2870487"/>
-            <a:ext cx="3138545" cy="0"/>
+          <a:xfrm>
+            <a:off x="14963954" y="5863225"/>
+            <a:ext cx="987508" cy="0"/>
           </a:xfrm>
           <a:prstGeom prst="straightConnector1">
             <a:avLst/>
@@ -4731,13 +4693,13 @@
         </p:nvCxnSpPr>
         <p:spPr>
           <a:xfrm>
-            <a:off x="7660087" y="2800350"/>
-            <a:ext cx="0" cy="699770"/>
+            <a:off x="12605879" y="6403821"/>
+            <a:ext cx="0" cy="1124472"/>
           </a:xfrm>
           <a:prstGeom prst="straightConnector1">
             <a:avLst/>
           </a:prstGeom>
-          <a:ln w="152400">
+          <a:ln w="254000">
             <a:solidFill>
               <a:schemeClr val="tx1"/>
             </a:solidFill>
@@ -4774,8 +4736,8 @@
         </p:nvSpPr>
         <p:spPr>
           <a:xfrm>
-            <a:off x="7957775" y="2978393"/>
-            <a:ext cx="4039222" cy="461665"/>
+            <a:off x="11177919" y="4865357"/>
+            <a:ext cx="3902772" cy="1200329"/>
           </a:xfrm>
           <a:prstGeom prst="rect">
             <a:avLst/>
@@ -4789,29 +4751,29 @@
           <a:lstStyle/>
           <a:p>
             <a:r>
-              <a:rPr kumimoji="1" lang="en-US" altLang="ja-JP" sz="2400" dirty="0"/>
+              <a:rPr kumimoji="1" lang="en-US" altLang="ja-JP" sz="3600" dirty="0"/>
               <a:t>3.</a:t>
             </a:r>
             <a:r>
-              <a:rPr kumimoji="1" lang="ja-JP" altLang="en-US" sz="2400" dirty="0"/>
+              <a:rPr kumimoji="1" lang="ja-JP" altLang="en-US" sz="3600" dirty="0"/>
               <a:t>  </a:t>
             </a:r>
             <a:r>
-              <a:rPr kumimoji="1" lang="en-US" altLang="ja-JP" sz="2400" dirty="0">
+              <a:rPr kumimoji="1" lang="en-US" altLang="ja-JP" sz="3600" dirty="0">
                 <a:latin typeface="Consolas" panose="020B0609020204030204" pitchFamily="49" charset="0"/>
               </a:rPr>
               <a:t>API</a:t>
             </a:r>
             <a:r>
-              <a:rPr kumimoji="1" lang="ja-JP" altLang="en-US" sz="2400" dirty="0"/>
+              <a:rPr kumimoji="1" lang="ja-JP" altLang="en-US" sz="3600" dirty="0"/>
               <a:t>を使って</a:t>
             </a:r>
             <a:r>
-              <a:rPr kumimoji="1" lang="en-US" altLang="ja-JP" sz="2400" dirty="0"/>
+              <a:rPr kumimoji="1" lang="en-US" altLang="ja-JP" sz="3600" dirty="0"/>
               <a:t>DAW</a:t>
             </a:r>
             <a:r>
-              <a:rPr kumimoji="1" lang="ja-JP" altLang="en-US" sz="2400" dirty="0"/>
+              <a:rPr kumimoji="1" lang="ja-JP" altLang="en-US" sz="3600" dirty="0"/>
               <a:t>を操作</a:t>
             </a:r>
           </a:p>
@@ -4832,14 +4794,14 @@
           <p:nvPr/>
         </p:nvCxnSpPr>
         <p:spPr>
-          <a:xfrm>
-            <a:off x="12477714" y="1326349"/>
-            <a:ext cx="2295570" cy="16047"/>
+          <a:xfrm flipV="1">
+            <a:off x="19801524" y="9464255"/>
+            <a:ext cx="3017845" cy="9739"/>
           </a:xfrm>
           <a:prstGeom prst="straightConnector1">
             <a:avLst/>
           </a:prstGeom>
-          <a:ln w="152400">
+          <a:ln w="254000">
             <a:solidFill>
               <a:schemeClr val="tx1"/>
             </a:solidFill>
@@ -4875,8 +4837,8 @@
         </p:nvSpPr>
         <p:spPr>
           <a:xfrm>
-            <a:off x="12973064" y="799023"/>
-            <a:ext cx="1057272" cy="461665"/>
+            <a:off x="20359604" y="8346673"/>
+            <a:ext cx="1389931" cy="646331"/>
           </a:xfrm>
           <a:prstGeom prst="rect">
             <a:avLst/>
@@ -4891,7 +4853,7 @@
           <a:p>
             <a:pPr algn="ctr"/>
             <a:r>
-              <a:rPr kumimoji="1" lang="ja-JP" altLang="en-US" sz="2400" dirty="0"/>
+              <a:rPr kumimoji="1" lang="ja-JP" altLang="en-US" sz="3600" dirty="0"/>
               <a:t>継承</a:t>
             </a:r>
           </a:p>
@@ -4911,8 +4873,8 @@
         </p:nvSpPr>
         <p:spPr>
           <a:xfrm>
-            <a:off x="12363409" y="1486478"/>
-            <a:ext cx="2372463" cy="461665"/>
+            <a:off x="19700437" y="9751760"/>
+            <a:ext cx="3118932" cy="1200329"/>
           </a:xfrm>
           <a:prstGeom prst="rect">
             <a:avLst/>
@@ -4927,7 +4889,7 @@
           <a:p>
             <a:pPr algn="ctr"/>
             <a:r>
-              <a:rPr kumimoji="1" lang="ja-JP" altLang="en-US" sz="2400" dirty="0"/>
+              <a:rPr kumimoji="1" lang="ja-JP" altLang="en-US" sz="3600" dirty="0"/>
               <a:t>（親子の関係）</a:t>
             </a:r>
           </a:p>
@@ -4947,8 +4909,8 @@
         </p:nvSpPr>
         <p:spPr>
           <a:xfrm>
-            <a:off x="14861767" y="535540"/>
-            <a:ext cx="2605282" cy="1564670"/>
+            <a:off x="18663039" y="5753039"/>
+            <a:ext cx="4106900" cy="2514294"/>
           </a:xfrm>
           <a:prstGeom prst="roundRect">
             <a:avLst>
@@ -4983,7 +4945,7 @@
           <a:lstStyle/>
           <a:p>
             <a:pPr algn="ctr"/>
-            <a:endParaRPr lang="ja-JP" altLang="en-US" sz="3200" dirty="0">
+            <a:endParaRPr lang="ja-JP" altLang="en-US" sz="3199" dirty="0">
               <a:solidFill>
                 <a:schemeClr val="tx1"/>
               </a:solidFill>
@@ -5004,13 +4966,14 @@
           </p:cNvPr>
           <p:cNvCxnSpPr>
             <a:cxnSpLocks/>
+            <a:endCxn id="71" idx="3"/>
           </p:cNvCxnSpPr>
           <p:nvPr/>
         </p:nvCxnSpPr>
         <p:spPr>
           <a:xfrm>
-            <a:off x="14899180" y="1475639"/>
-            <a:ext cx="2605282" cy="0"/>
+            <a:off x="18663039" y="7010186"/>
+            <a:ext cx="4106900" cy="0"/>
           </a:xfrm>
           <a:prstGeom prst="straightConnector1">
             <a:avLst/>
@@ -5051,8 +5014,8 @@
         </p:nvSpPr>
         <p:spPr>
           <a:xfrm>
-            <a:off x="14862990" y="936240"/>
-            <a:ext cx="2605282" cy="400110"/>
+            <a:off x="18614832" y="6269911"/>
+            <a:ext cx="4155107" cy="584775"/>
           </a:xfrm>
           <a:prstGeom prst="rect">
             <a:avLst/>
@@ -5067,7 +5030,7 @@
           <a:p>
             <a:pPr algn="ctr"/>
             <a:r>
-              <a:rPr lang="en-US" altLang="ja-JP" sz="2000" dirty="0">
+              <a:rPr lang="en-US" altLang="ja-JP" sz="3200" dirty="0">
                 <a:latin typeface="Consolas" panose="020B0609020204030204" pitchFamily="49" charset="0"/>
               </a:rPr>
               <a:t>DawiyPluginBase</a:t>
@@ -5089,8 +5052,8 @@
         </p:nvSpPr>
         <p:spPr>
           <a:xfrm>
-            <a:off x="14960555" y="1575562"/>
-            <a:ext cx="2407705" cy="400110"/>
+            <a:off x="18941338" y="7235698"/>
+            <a:ext cx="3550866" cy="584775"/>
           </a:xfrm>
           <a:prstGeom prst="rect">
             <a:avLst/>
@@ -5105,12 +5068,12 @@
           <a:p>
             <a:pPr algn="ctr"/>
             <a:r>
-              <a:rPr lang="en-US" altLang="ja-JP" sz="2000" dirty="0">
+              <a:rPr lang="en-US" altLang="ja-JP" sz="3200" dirty="0">
                 <a:latin typeface="Consolas" panose="020B0609020204030204" pitchFamily="49" charset="0"/>
               </a:rPr>
               <a:t>host : HostAPI</a:t>
             </a:r>
-            <a:endParaRPr lang="ja-JP" altLang="en-US" sz="2000" dirty="0">
+            <a:endParaRPr lang="ja-JP" altLang="en-US" sz="3200" dirty="0">
               <a:latin typeface="Consolas" panose="020B0609020204030204" pitchFamily="49" charset="0"/>
             </a:endParaRPr>
           </a:p>
@@ -5130,8 +5093,8 @@
         </p:nvSpPr>
         <p:spPr>
           <a:xfrm>
-            <a:off x="15201350" y="625578"/>
-            <a:ext cx="1926116" cy="381419"/>
+            <a:off x="18914177" y="5876773"/>
+            <a:ext cx="3275558" cy="523220"/>
           </a:xfrm>
           <a:prstGeom prst="rect">
             <a:avLst/>
@@ -5146,19 +5109,19 @@
           <a:p>
             <a:pPr algn="ctr"/>
             <a:r>
-              <a:rPr lang="en-US" altLang="ja-JP" dirty="0">
+              <a:rPr lang="en-US" altLang="ja-JP" sz="2800" dirty="0">
                 <a:latin typeface="+mn-ea"/>
               </a:rPr>
               <a:t>&lt;&lt;</a:t>
             </a:r>
             <a:r>
-              <a:rPr lang="ja-JP" altLang="en-US" dirty="0">
+              <a:rPr lang="ja-JP" altLang="en-US" sz="2800" dirty="0">
                 <a:latin typeface="+mn-ea"/>
               </a:rPr>
               <a:t>抽象クラス</a:t>
             </a:r>
             <a:r>
-              <a:rPr lang="en-US" altLang="ja-JP" dirty="0">
+              <a:rPr lang="en-US" altLang="ja-JP" sz="2800" dirty="0">
                 <a:latin typeface="+mn-ea"/>
               </a:rPr>
               <a:t>&gt;&gt;</a:t>
@@ -5183,13 +5146,13 @@
         </p:nvCxnSpPr>
         <p:spPr>
           <a:xfrm flipV="1">
-            <a:off x="16164408" y="2100210"/>
-            <a:ext cx="0" cy="865558"/>
+            <a:off x="19965676" y="8267333"/>
+            <a:ext cx="750813" cy="865558"/>
           </a:xfrm>
           <a:prstGeom prst="straightConnector1">
             <a:avLst/>
           </a:prstGeom>
-          <a:ln w="152400">
+          <a:ln w="254000">
             <a:solidFill>
               <a:schemeClr val="tx1"/>
             </a:solidFill>
@@ -5227,14 +5190,14 @@
           <p:nvPr/>
         </p:nvCxnSpPr>
         <p:spPr>
-          <a:xfrm flipH="1">
-            <a:off x="13960880" y="2884633"/>
-            <a:ext cx="2281389" cy="0"/>
+          <a:xfrm>
+            <a:off x="17945226" y="8215325"/>
+            <a:ext cx="717813" cy="0"/>
           </a:xfrm>
           <a:prstGeom prst="straightConnector1">
             <a:avLst/>
           </a:prstGeom>
-          <a:ln w="152400">
+          <a:ln w="254000">
             <a:solidFill>
               <a:schemeClr val="tx1"/>
             </a:solidFill>
@@ -5273,13 +5236,13 @@
         </p:nvCxnSpPr>
         <p:spPr>
           <a:xfrm>
-            <a:off x="14031341" y="2807970"/>
-            <a:ext cx="0" cy="699770"/>
+            <a:off x="14963954" y="6956196"/>
+            <a:ext cx="0" cy="1124472"/>
           </a:xfrm>
           <a:prstGeom prst="straightConnector1">
             <a:avLst/>
           </a:prstGeom>
-          <a:ln w="152400">
+          <a:ln w="254000">
             <a:solidFill>
               <a:schemeClr val="tx1"/>
             </a:solidFill>
@@ -5316,8 +5279,8 @@
         </p:nvSpPr>
         <p:spPr>
           <a:xfrm>
-            <a:off x="12027477" y="3626192"/>
-            <a:ext cx="4039220" cy="2485045"/>
+            <a:off x="14388797" y="8747122"/>
+            <a:ext cx="5310116" cy="3993259"/>
           </a:xfrm>
           <a:prstGeom prst="roundRect">
             <a:avLst>
@@ -5352,7 +5315,7 @@
           <a:lstStyle/>
           <a:p>
             <a:pPr algn="ctr"/>
-            <a:endParaRPr lang="ja-JP" altLang="en-US" sz="3200" dirty="0">
+            <a:endParaRPr lang="ja-JP" altLang="en-US" sz="3199" dirty="0">
               <a:solidFill>
                 <a:schemeClr val="tx1"/>
               </a:solidFill>
@@ -5378,8 +5341,8 @@
         </p:nvCxnSpPr>
         <p:spPr>
           <a:xfrm>
-            <a:off x="12027477" y="4505332"/>
-            <a:ext cx="4039220" cy="0"/>
+            <a:off x="14388797" y="11134471"/>
+            <a:ext cx="5310116" cy="0"/>
           </a:xfrm>
           <a:prstGeom prst="straightConnector1">
             <a:avLst/>
@@ -5420,8 +5383,8 @@
         </p:nvSpPr>
         <p:spPr>
           <a:xfrm>
-            <a:off x="12954152" y="3966104"/>
-            <a:ext cx="2236975" cy="461665"/>
+            <a:off x="14915394" y="10144126"/>
+            <a:ext cx="3888213" cy="707886"/>
           </a:xfrm>
           <a:prstGeom prst="rect">
             <a:avLst/>
@@ -5436,7 +5399,7 @@
           <a:p>
             <a:pPr algn="ctr"/>
             <a:r>
-              <a:rPr lang="en-US" altLang="ja-JP" sz="2400" dirty="0">
+              <a:rPr lang="en-US" altLang="ja-JP" sz="4000" dirty="0">
                 <a:latin typeface="Consolas" panose="020B0609020204030204" pitchFamily="49" charset="0"/>
               </a:rPr>
               <a:t>IDawiyPlugin</a:t>
@@ -5458,8 +5421,8 @@
         </p:nvSpPr>
         <p:spPr>
           <a:xfrm>
-            <a:off x="12193009" y="4668349"/>
-            <a:ext cx="3596701" cy="1323439"/>
+            <a:off x="15024827" y="11294454"/>
+            <a:ext cx="4728362" cy="1323952"/>
           </a:xfrm>
           <a:prstGeom prst="rect">
             <a:avLst/>
@@ -5473,35 +5436,35 @@
           <a:lstStyle/>
           <a:p>
             <a:r>
-              <a:rPr lang="en-US" altLang="ja-JP" sz="2000" dirty="0"/>
+              <a:rPr lang="en-US" altLang="ja-JP" sz="2001" dirty="0"/>
               <a:t>id</a:t>
             </a:r>
             <a:r>
-              <a:rPr lang="ja-JP" altLang="en-US" sz="2000" dirty="0"/>
+              <a:rPr lang="ja-JP" altLang="en-US" sz="2001" dirty="0"/>
               <a:t>（識別子）</a:t>
             </a:r>
-            <a:endParaRPr lang="en-US" altLang="ja-JP" sz="2000" dirty="0"/>
-          </a:p>
-          <a:p>
-            <a:endParaRPr lang="ja-JP" altLang="en-US" sz="2000" dirty="0"/>
-          </a:p>
-          <a:p>
-            <a:r>
-              <a:rPr lang="en-US" altLang="ja-JP" sz="2000" dirty="0"/>
+            <a:endParaRPr lang="en-US" altLang="ja-JP" sz="2001" dirty="0"/>
+          </a:p>
+          <a:p>
+            <a:endParaRPr lang="ja-JP" altLang="en-US" sz="2001" dirty="0"/>
+          </a:p>
+          <a:p>
+            <a:r>
+              <a:rPr lang="en-US" altLang="ja-JP" sz="2001" dirty="0"/>
               <a:t>onInit(host) : </a:t>
             </a:r>
             <a:r>
-              <a:rPr lang="ja-JP" altLang="en-US" sz="2000" dirty="0"/>
+              <a:rPr lang="ja-JP" altLang="en-US" sz="2001" dirty="0"/>
               <a:t>初期化時の処理</a:t>
             </a:r>
           </a:p>
           <a:p>
             <a:r>
-              <a:rPr lang="en-US" altLang="ja-JP" sz="2000" dirty="0"/>
+              <a:rPr lang="en-US" altLang="ja-JP" sz="2001" dirty="0"/>
               <a:t>render(container) : </a:t>
             </a:r>
             <a:r>
-              <a:rPr lang="ja-JP" altLang="en-US" sz="2000" dirty="0"/>
+              <a:rPr lang="ja-JP" altLang="en-US" sz="2001" dirty="0"/>
               <a:t>描画処理</a:t>
             </a:r>
           </a:p>
@@ -5521,8 +5484,8 @@
         </p:nvSpPr>
         <p:spPr>
           <a:xfrm>
-            <a:off x="14345794" y="3001511"/>
-            <a:ext cx="3322253" cy="461665"/>
+            <a:off x="14785300" y="6496139"/>
+            <a:ext cx="4838941" cy="646331"/>
           </a:xfrm>
           <a:prstGeom prst="rect">
             <a:avLst/>
@@ -5536,7 +5499,7 @@
           <a:lstStyle/>
           <a:p>
             <a:r>
-              <a:rPr kumimoji="1" lang="ja-JP" altLang="en-US" sz="2400" dirty="0"/>
+              <a:rPr kumimoji="1" lang="ja-JP" altLang="en-US" sz="3600" dirty="0"/>
               <a:t>実装（ルールを守る）</a:t>
             </a:r>
           </a:p>
@@ -5556,8 +5519,8 @@
         </p:nvSpPr>
         <p:spPr>
           <a:xfrm>
-            <a:off x="12731413" y="3690444"/>
-            <a:ext cx="2682451" cy="369332"/>
+            <a:off x="15339307" y="9463373"/>
+            <a:ext cx="3526455" cy="369332"/>
           </a:xfrm>
           <a:prstGeom prst="rect">
             <a:avLst/>
@@ -5608,8 +5571,8 @@
         </p:nvCxnSpPr>
         <p:spPr>
           <a:xfrm>
-            <a:off x="11996997" y="5160652"/>
-            <a:ext cx="4039220" cy="0"/>
+            <a:off x="14388797" y="11850669"/>
+            <a:ext cx="5310116" cy="0"/>
           </a:xfrm>
           <a:prstGeom prst="straightConnector1">
             <a:avLst/>
@@ -5650,8 +5613,8 @@
         </p:nvSpPr>
         <p:spPr>
           <a:xfrm>
-            <a:off x="179449" y="5112207"/>
-            <a:ext cx="3942613" cy="1572535"/>
+            <a:off x="3179034" y="10368368"/>
+            <a:ext cx="5183112" cy="2526932"/>
           </a:xfrm>
           <a:prstGeom prst="roundRect">
             <a:avLst>
@@ -5712,8 +5675,8 @@
         </p:nvCxnSpPr>
         <p:spPr>
           <a:xfrm>
-            <a:off x="1065665" y="5640116"/>
-            <a:ext cx="826277" cy="0"/>
+            <a:off x="4065248" y="11850669"/>
+            <a:ext cx="1086254" cy="0"/>
           </a:xfrm>
           <a:prstGeom prst="straightConnector1">
             <a:avLst/>
@@ -5757,8 +5720,8 @@
         </p:nvCxnSpPr>
         <p:spPr>
           <a:xfrm>
-            <a:off x="1065664" y="6132151"/>
-            <a:ext cx="826277" cy="0"/>
+            <a:off x="4065246" y="12342705"/>
+            <a:ext cx="1086254" cy="0"/>
           </a:xfrm>
           <a:prstGeom prst="straightConnector1">
             <a:avLst/>
@@ -5802,8 +5765,8 @@
         </p:nvCxnSpPr>
         <p:spPr>
           <a:xfrm>
-            <a:off x="1062329" y="5890782"/>
-            <a:ext cx="826277" cy="0"/>
+            <a:off x="4061911" y="12101337"/>
+            <a:ext cx="1086254" cy="0"/>
           </a:xfrm>
           <a:prstGeom prst="straightConnector1">
             <a:avLst/>
@@ -5847,8 +5810,8 @@
         </p:nvCxnSpPr>
         <p:spPr>
           <a:xfrm>
-            <a:off x="1065665" y="6381074"/>
-            <a:ext cx="826277" cy="0"/>
+            <a:off x="4065248" y="12591629"/>
+            <a:ext cx="1086254" cy="0"/>
           </a:xfrm>
           <a:prstGeom prst="straightConnector1">
             <a:avLst/>
@@ -5890,8 +5853,8 @@
         </p:nvSpPr>
         <p:spPr>
           <a:xfrm>
-            <a:off x="347994" y="5238316"/>
-            <a:ext cx="3704652" cy="1323439"/>
+            <a:off x="3418916" y="11416942"/>
+            <a:ext cx="4870279" cy="1323439"/>
           </a:xfrm>
           <a:prstGeom prst="rect">
             <a:avLst/>
@@ -5905,91 +5868,51 @@
           <a:lstStyle/>
           <a:p>
             <a:r>
-              <a:rPr lang="ja-JP" altLang="en-US" sz="1600" b="1" dirty="0">
-                <a:solidFill>
-                  <a:schemeClr val="tx1"/>
-                </a:solidFill>
-              </a:rPr>
+              <a:rPr lang="ja-JP" altLang="en-US" sz="1600" b="1" dirty="0"/>
               <a:t>凡例：</a:t>
             </a:r>
-            <a:endParaRPr lang="en-US" altLang="ja-JP" sz="1600" b="1" dirty="0">
-              <a:solidFill>
-                <a:schemeClr val="tx1"/>
-              </a:solidFill>
-            </a:endParaRPr>
-          </a:p>
-          <a:p>
-            <a:pPr marL="628650" lvl="1" indent="-171450">
+            <a:endParaRPr lang="en-US" altLang="ja-JP" sz="1600" b="1" dirty="0"/>
+          </a:p>
+          <a:p>
+            <a:pPr marL="628613" lvl="1" indent="-171440">
               <a:buFont typeface="Arial" panose="020B0604020202020204" pitchFamily="34" charset="0"/>
               <a:buChar char="•"/>
             </a:pPr>
             <a:r>
-              <a:rPr lang="ja-JP" altLang="en-US" sz="1600" dirty="0">
-                <a:solidFill>
-                  <a:schemeClr val="tx1"/>
-                </a:solidFill>
-              </a:rPr>
-              <a:t>　　　　：</a:t>
-            </a:r>
-            <a:r>
               <a:rPr lang="ja-JP" altLang="en-US" sz="1600" dirty="0"/>
-              <a:t>命令、所有</a:t>
-            </a:r>
-            <a:endParaRPr lang="en-US" altLang="ja-JP" sz="1600" dirty="0">
-              <a:solidFill>
-                <a:schemeClr val="tx1"/>
-              </a:solidFill>
-            </a:endParaRPr>
-          </a:p>
-          <a:p>
-            <a:pPr marL="628650" lvl="1" indent="-171450">
+              <a:t>　　　　：命令、所有</a:t>
+            </a:r>
+            <a:endParaRPr lang="en-US" altLang="ja-JP" sz="1600" dirty="0"/>
+          </a:p>
+          <a:p>
+            <a:pPr marL="628613" lvl="1" indent="-171440">
               <a:buFont typeface="Arial" panose="020B0604020202020204" pitchFamily="34" charset="0"/>
               <a:buChar char="•"/>
             </a:pPr>
             <a:r>
-              <a:rPr lang="ja-JP" altLang="en-US" sz="1600" dirty="0">
-                <a:solidFill>
-                  <a:schemeClr val="tx1"/>
-                </a:solidFill>
-              </a:rPr>
+              <a:rPr lang="ja-JP" altLang="en-US" sz="1600" dirty="0"/>
               <a:t>　　　　：継承</a:t>
             </a:r>
-            <a:endParaRPr lang="en-US" altLang="ja-JP" sz="1600" dirty="0">
-              <a:solidFill>
-                <a:schemeClr val="tx1"/>
-              </a:solidFill>
-            </a:endParaRPr>
-          </a:p>
-          <a:p>
-            <a:pPr marL="628650" lvl="1" indent="-171450">
+            <a:endParaRPr lang="en-US" altLang="ja-JP" sz="1600" dirty="0"/>
+          </a:p>
+          <a:p>
+            <a:pPr marL="628613" lvl="1" indent="-171440">
               <a:buFont typeface="Arial" panose="020B0604020202020204" pitchFamily="34" charset="0"/>
               <a:buChar char="•"/>
             </a:pPr>
             <a:r>
-              <a:rPr lang="ja-JP" altLang="en-US" sz="1600" dirty="0">
-                <a:solidFill>
-                  <a:schemeClr val="tx1"/>
-                </a:solidFill>
-              </a:rPr>
+              <a:rPr lang="ja-JP" altLang="en-US" sz="1600" dirty="0"/>
               <a:t>　　　　：一時的な読み込み</a:t>
             </a:r>
-            <a:endParaRPr lang="en-US" altLang="ja-JP" sz="1600" dirty="0">
-              <a:solidFill>
-                <a:schemeClr val="tx1"/>
-              </a:solidFill>
-            </a:endParaRPr>
-          </a:p>
-          <a:p>
-            <a:pPr marL="628650" lvl="1" indent="-171450">
+            <a:endParaRPr lang="en-US" altLang="ja-JP" sz="1600" dirty="0"/>
+          </a:p>
+          <a:p>
+            <a:pPr marL="628613" lvl="1" indent="-171440">
               <a:buFont typeface="Arial" panose="020B0604020202020204" pitchFamily="34" charset="0"/>
               <a:buChar char="•"/>
             </a:pPr>
             <a:r>
-              <a:rPr lang="ja-JP" altLang="en-US" sz="1600" dirty="0">
-                <a:solidFill>
-                  <a:schemeClr val="tx1"/>
-                </a:solidFill>
-              </a:rPr>
+              <a:rPr lang="ja-JP" altLang="en-US" sz="1600" dirty="0"/>
               <a:t>　　　　：実装</a:t>
             </a:r>
           </a:p>
@@ -6049,16 +5972,110 @@
         <a:srgbClr val="96607D"/>
       </a:folHlink>
     </a:clrScheme>
-    <a:fontScheme name="ユーザー定義 2">
+    <a:fontScheme name="Office テーマ">
       <a:majorFont>
-        <a:latin typeface="モボ-Bold"/>
-        <a:ea typeface="モボ-Bold"/>
+        <a:latin typeface="Aptos Display" panose="02110004020202020204"/>
+        <a:ea typeface=""/>
         <a:cs typeface=""/>
+        <a:font script="Jpan" typeface="游ゴシック Light"/>
+        <a:font script="Hang" typeface="맑은 고딕"/>
+        <a:font script="Hans" typeface="等线 Light"/>
+        <a:font script="Hant" typeface="新細明體"/>
+        <a:font script="Arab" typeface="Times New Roman"/>
+        <a:font script="Hebr" typeface="Times New Roman"/>
+        <a:font script="Thai" typeface="Angsana New"/>
+        <a:font script="Ethi" typeface="Nyala"/>
+        <a:font script="Beng" typeface="Vrinda"/>
+        <a:font script="Gujr" typeface="Shruti"/>
+        <a:font script="Khmr" typeface="MoolBoran"/>
+        <a:font script="Knda" typeface="Tunga"/>
+        <a:font script="Guru" typeface="Raavi"/>
+        <a:font script="Cans" typeface="Euphemia"/>
+        <a:font script="Cher" typeface="Plantagenet Cherokee"/>
+        <a:font script="Yiii" typeface="Microsoft Yi Baiti"/>
+        <a:font script="Tibt" typeface="Microsoft Himalaya"/>
+        <a:font script="Thaa" typeface="MV Boli"/>
+        <a:font script="Deva" typeface="Mangal"/>
+        <a:font script="Telu" typeface="Gautami"/>
+        <a:font script="Taml" typeface="Latha"/>
+        <a:font script="Syrc" typeface="Estrangelo Edessa"/>
+        <a:font script="Orya" typeface="Kalinga"/>
+        <a:font script="Mlym" typeface="Kartika"/>
+        <a:font script="Laoo" typeface="DokChampa"/>
+        <a:font script="Sinh" typeface="Iskoola Pota"/>
+        <a:font script="Mong" typeface="Mongolian Baiti"/>
+        <a:font script="Viet" typeface="Times New Roman"/>
+        <a:font script="Uigh" typeface="Microsoft Uighur"/>
+        <a:font script="Geor" typeface="Sylfaen"/>
+        <a:font script="Armn" typeface="Arial"/>
+        <a:font script="Bugi" typeface="Leelawadee UI"/>
+        <a:font script="Bopo" typeface="Microsoft JhengHei"/>
+        <a:font script="Java" typeface="Javanese Text"/>
+        <a:font script="Lisu" typeface="Segoe UI"/>
+        <a:font script="Mymr" typeface="Myanmar Text"/>
+        <a:font script="Nkoo" typeface="Ebrima"/>
+        <a:font script="Olck" typeface="Nirmala UI"/>
+        <a:font script="Osma" typeface="Ebrima"/>
+        <a:font script="Phag" typeface="Phagspa"/>
+        <a:font script="Syrn" typeface="Estrangelo Edessa"/>
+        <a:font script="Syrj" typeface="Estrangelo Edessa"/>
+        <a:font script="Syre" typeface="Estrangelo Edessa"/>
+        <a:font script="Sora" typeface="Nirmala UI"/>
+        <a:font script="Tale" typeface="Microsoft Tai Le"/>
+        <a:font script="Talu" typeface="Microsoft New Tai Lue"/>
+        <a:font script="Tfng" typeface="Ebrima"/>
       </a:majorFont>
       <a:minorFont>
-        <a:latin typeface="モボ-Regular"/>
-        <a:ea typeface="モボ-Regular"/>
+        <a:latin typeface="Aptos" panose="02110004020202020204"/>
+        <a:ea typeface=""/>
         <a:cs typeface=""/>
+        <a:font script="Jpan" typeface="游ゴシック"/>
+        <a:font script="Hang" typeface="맑은 고딕"/>
+        <a:font script="Hans" typeface="等线"/>
+        <a:font script="Hant" typeface="新細明體"/>
+        <a:font script="Arab" typeface="Arial"/>
+        <a:font script="Hebr" typeface="Arial"/>
+        <a:font script="Thai" typeface="Cordia New"/>
+        <a:font script="Ethi" typeface="Nyala"/>
+        <a:font script="Beng" typeface="Vrinda"/>
+        <a:font script="Gujr" typeface="Shruti"/>
+        <a:font script="Khmr" typeface="DaunPenh"/>
+        <a:font script="Knda" typeface="Tunga"/>
+        <a:font script="Guru" typeface="Raavi"/>
+        <a:font script="Cans" typeface="Euphemia"/>
+        <a:font script="Cher" typeface="Plantagenet Cherokee"/>
+        <a:font script="Yiii" typeface="Microsoft Yi Baiti"/>
+        <a:font script="Tibt" typeface="Microsoft Himalaya"/>
+        <a:font script="Thaa" typeface="MV Boli"/>
+        <a:font script="Deva" typeface="Mangal"/>
+        <a:font script="Telu" typeface="Gautami"/>
+        <a:font script="Taml" typeface="Latha"/>
+        <a:font script="Syrc" typeface="Estrangelo Edessa"/>
+        <a:font script="Orya" typeface="Kalinga"/>
+        <a:font script="Mlym" typeface="Kartika"/>
+        <a:font script="Laoo" typeface="DokChampa"/>
+        <a:font script="Sinh" typeface="Iskoola Pota"/>
+        <a:font script="Mong" typeface="Mongolian Baiti"/>
+        <a:font script="Viet" typeface="Arial"/>
+        <a:font script="Uigh" typeface="Microsoft Uighur"/>
+        <a:font script="Geor" typeface="Sylfaen"/>
+        <a:font script="Armn" typeface="Arial"/>
+        <a:font script="Bugi" typeface="Leelawadee UI"/>
+        <a:font script="Bopo" typeface="Microsoft JhengHei"/>
+        <a:font script="Java" typeface="Javanese Text"/>
+        <a:font script="Lisu" typeface="Segoe UI"/>
+        <a:font script="Mymr" typeface="Myanmar Text"/>
+        <a:font script="Nkoo" typeface="Ebrima"/>
+        <a:font script="Olck" typeface="Nirmala UI"/>
+        <a:font script="Osma" typeface="Ebrima"/>
+        <a:font script="Phag" typeface="Phagspa"/>
+        <a:font script="Syrn" typeface="Estrangelo Edessa"/>
+        <a:font script="Syrj" typeface="Estrangelo Edessa"/>
+        <a:font script="Syre" typeface="Estrangelo Edessa"/>
+        <a:font script="Sora" typeface="Nirmala UI"/>
+        <a:font script="Tale" typeface="Microsoft Tai Le"/>
+        <a:font script="Talu" typeface="Microsoft New Tai Lue"/>
+        <a:font script="Tfng" typeface="Ebrima"/>
       </a:minorFont>
     </a:fontScheme>
     <a:fmtScheme name="Office テーマ">

--- a/fig/class_diagram.pptx
+++ b/fig/class_diagram.pptx
@@ -3274,6 +3274,85 @@
       </p:grpSpPr>
       <p:sp>
         <p:nvSpPr>
+          <p:cNvPr id="86" name="テキスト ボックス 85">
+            <a:extLst>
+              <a:ext uri="{FF2B5EF4-FFF2-40B4-BE49-F238E27FC236}">
+                <a16:creationId xmlns:a16="http://schemas.microsoft.com/office/drawing/2014/main" id="{1ABF382E-DDBA-B501-B9D1-D7DD4194C68E}"/>
+              </a:ext>
+            </a:extLst>
+          </p:cNvPr>
+          <p:cNvSpPr txBox="1"/>
+          <p:nvPr/>
+        </p:nvSpPr>
+        <p:spPr>
+          <a:xfrm>
+            <a:off x="8844774" y="10850046"/>
+            <a:ext cx="6310119" cy="1815882"/>
+          </a:xfrm>
+          <a:prstGeom prst="rect">
+            <a:avLst/>
+          </a:prstGeom>
+          <a:noFill/>
+        </p:spPr>
+        <p:txBody>
+          <a:bodyPr wrap="square" rtlCol="0">
+            <a:spAutoFit/>
+          </a:bodyPr>
+          <a:lstStyle/>
+          <a:p>
+            <a:r>
+              <a:rPr lang="en-US" altLang="ja-JP" sz="3200" dirty="0">
+                <a:latin typeface="Consolas" panose="020B0609020204030204" pitchFamily="49" charset="0"/>
+              </a:rPr>
+              <a:t>id</a:t>
+            </a:r>
+            <a:r>
+              <a:rPr lang="ja-JP" altLang="en-US" sz="3200" dirty="0"/>
+              <a:t>（識別子）</a:t>
+            </a:r>
+            <a:endParaRPr lang="en-US" altLang="ja-JP" sz="3200" dirty="0"/>
+          </a:p>
+          <a:p>
+            <a:endParaRPr lang="ja-JP" altLang="en-US" sz="1600" dirty="0">
+              <a:latin typeface="Consolas" panose="020B0609020204030204" pitchFamily="49" charset="0"/>
+            </a:endParaRPr>
+          </a:p>
+          <a:p>
+            <a:r>
+              <a:rPr lang="en-US" altLang="ja-JP" sz="3200" dirty="0">
+                <a:latin typeface="Consolas" panose="020B0609020204030204" pitchFamily="49" charset="0"/>
+              </a:rPr>
+              <a:t>onInit(host)</a:t>
+            </a:r>
+            <a:r>
+              <a:rPr lang="en-US" altLang="ja-JP" sz="3200" dirty="0"/>
+              <a:t> : </a:t>
+            </a:r>
+            <a:r>
+              <a:rPr lang="ja-JP" altLang="en-US" sz="3200" dirty="0"/>
+              <a:t>初期化時の処理</a:t>
+            </a:r>
+          </a:p>
+          <a:p>
+            <a:r>
+              <a:rPr lang="en-US" altLang="ja-JP" sz="3200" dirty="0">
+                <a:latin typeface="Consolas" panose="020B0609020204030204" pitchFamily="49" charset="0"/>
+              </a:rPr>
+              <a:t>render(container) </a:t>
+            </a:r>
+            <a:r>
+              <a:rPr lang="en-US" altLang="ja-JP" sz="3200" dirty="0"/>
+              <a:t>: </a:t>
+            </a:r>
+            <a:r>
+              <a:rPr lang="ja-JP" altLang="en-US" sz="3200" dirty="0"/>
+              <a:t>描画処理</a:t>
+            </a:r>
+          </a:p>
+        </p:txBody>
+      </p:sp>
+      <p:sp>
+        <p:nvSpPr>
           <p:cNvPr id="111" name="四角形: 角を丸くする 110">
             <a:extLst>
               <a:ext uri="{FF2B5EF4-FFF2-40B4-BE49-F238E27FC236}">
@@ -3286,8 +3365,8 @@
         </p:nvSpPr>
         <p:spPr>
           <a:xfrm>
-            <a:off x="933450" y="475493"/>
-            <a:ext cx="22155150" cy="12710155"/>
+            <a:off x="1027233" y="405155"/>
+            <a:ext cx="22456547" cy="12710155"/>
           </a:xfrm>
           <a:prstGeom prst="roundRect">
             <a:avLst>
@@ -3346,7 +3425,7 @@
         </p:nvSpPr>
         <p:spPr>
           <a:xfrm>
-            <a:off x="3434042" y="10929127"/>
+            <a:off x="701238" y="9473232"/>
             <a:ext cx="651989" cy="518582"/>
           </a:xfrm>
           <a:prstGeom prst="rect">
@@ -3398,7 +3477,7 @@
         </p:nvSpPr>
         <p:spPr>
           <a:xfrm>
-            <a:off x="6855207" y="12380526"/>
+            <a:off x="7244760" y="12699262"/>
             <a:ext cx="651989" cy="518582"/>
           </a:xfrm>
           <a:prstGeom prst="rect">
@@ -3450,8 +3529,8 @@
         </p:nvSpPr>
         <p:spPr>
           <a:xfrm>
-            <a:off x="1229885" y="4550961"/>
-            <a:ext cx="4031416" cy="4196158"/>
+            <a:off x="449460" y="4480623"/>
+            <a:ext cx="4507043" cy="4196158"/>
           </a:xfrm>
           <a:prstGeom prst="roundRect">
             <a:avLst>
@@ -3461,7 +3540,7 @@
           <a:solidFill>
             <a:schemeClr val="bg1"/>
           </a:solidFill>
-          <a:ln w="127000">
+          <a:ln w="165100">
             <a:solidFill>
               <a:schemeClr val="tx1"/>
             </a:solidFill>
@@ -3514,13 +3593,13 @@
         </p:nvCxnSpPr>
         <p:spPr>
           <a:xfrm>
-            <a:off x="1229886" y="6174521"/>
-            <a:ext cx="4031415" cy="0"/>
+            <a:off x="449460" y="6104183"/>
+            <a:ext cx="4507043" cy="0"/>
           </a:xfrm>
           <a:prstGeom prst="straightConnector1">
             <a:avLst/>
           </a:prstGeom>
-          <a:ln w="114300">
+          <a:ln w="165100">
             <a:solidFill>
               <a:schemeClr val="tx1"/>
             </a:solidFill>
@@ -3556,7 +3635,7 @@
         </p:nvSpPr>
         <p:spPr>
           <a:xfrm>
-            <a:off x="2041421" y="4914709"/>
+            <a:off x="1502446" y="4816773"/>
             <a:ext cx="2401069" cy="923330"/>
           </a:xfrm>
           <a:prstGeom prst="rect">
@@ -3599,7 +3678,7 @@
         </p:nvSpPr>
         <p:spPr>
           <a:xfrm>
-            <a:off x="1292377" y="6657300"/>
+            <a:off x="758558" y="6591999"/>
             <a:ext cx="4013299" cy="1569660"/>
           </a:xfrm>
           <a:prstGeom prst="rect">
@@ -3658,7 +3737,7 @@
         </p:nvSpPr>
         <p:spPr>
           <a:xfrm>
-            <a:off x="4964314" y="823518"/>
+            <a:off x="5058098" y="753180"/>
             <a:ext cx="5152432" cy="3559202"/>
           </a:xfrm>
           <a:prstGeom prst="roundRect">
@@ -3667,7 +3746,7 @@
             </a:avLst>
           </a:prstGeom>
           <a:noFill/>
-          <a:ln w="114300">
+          <a:ln w="165100">
             <a:solidFill>
               <a:schemeClr val="tx1"/>
             </a:solidFill>
@@ -3720,13 +3799,13 @@
         </p:nvCxnSpPr>
         <p:spPr>
           <a:xfrm>
-            <a:off x="4964314" y="2254268"/>
+            <a:off x="5058098" y="2183930"/>
             <a:ext cx="5072469" cy="7620"/>
           </a:xfrm>
           <a:prstGeom prst="straightConnector1">
             <a:avLst/>
           </a:prstGeom>
-          <a:ln w="114300">
+          <a:ln w="165100">
             <a:solidFill>
               <a:schemeClr val="tx1"/>
             </a:solidFill>
@@ -3762,8 +3841,8 @@
         </p:nvSpPr>
         <p:spPr>
           <a:xfrm>
-            <a:off x="5287083" y="1244297"/>
-            <a:ext cx="4630678" cy="646331"/>
+            <a:off x="5110526" y="1173959"/>
+            <a:ext cx="5072469" cy="707886"/>
           </a:xfrm>
           <a:prstGeom prst="rect">
             <a:avLst/>
@@ -3778,7 +3857,7 @@
           <a:p>
             <a:pPr algn="ctr"/>
             <a:r>
-              <a:rPr lang="en-US" altLang="ja-JP" sz="3600" dirty="0">
+              <a:rPr lang="en-US" altLang="ja-JP" sz="4000" dirty="0">
                 <a:latin typeface="Consolas" panose="020B0609020204030204" pitchFamily="49" charset="0"/>
               </a:rPr>
               <a:t>DawiyPluginLoader</a:t>
@@ -3800,7 +3879,7 @@
         </p:nvSpPr>
         <p:spPr>
           <a:xfrm>
-            <a:off x="5311042" y="2555612"/>
+            <a:off x="5404826" y="2485274"/>
             <a:ext cx="4389136" cy="1569660"/>
           </a:xfrm>
           <a:prstGeom prst="rect">
@@ -3861,8 +3940,8 @@
         </p:nvCxnSpPr>
         <p:spPr>
           <a:xfrm>
-            <a:off x="2895600" y="2603119"/>
-            <a:ext cx="1967138" cy="0"/>
+            <a:off x="2702982" y="2481259"/>
+            <a:ext cx="2068875" cy="0"/>
           </a:xfrm>
           <a:prstGeom prst="straightConnector1">
             <a:avLst/>
@@ -3900,57 +3979,14 @@
           </p:cNvPr>
           <p:cNvCxnSpPr>
             <a:cxnSpLocks/>
+            <a:endCxn id="2" idx="0"/>
           </p:cNvCxnSpPr>
           <p:nvPr/>
         </p:nvCxnSpPr>
         <p:spPr>
-          <a:xfrm>
-            <a:off x="3070280" y="3373907"/>
-            <a:ext cx="0" cy="339668"/>
-          </a:xfrm>
-          <a:prstGeom prst="straightConnector1">
-            <a:avLst/>
-          </a:prstGeom>
-          <a:ln w="254000">
-            <a:solidFill>
-              <a:schemeClr val="tx1"/>
-            </a:solidFill>
-            <a:tailEnd type="none" w="med" len="sm"/>
-          </a:ln>
-        </p:spPr>
-        <p:style>
-          <a:lnRef idx="2">
-            <a:schemeClr val="accent1"/>
-          </a:lnRef>
-          <a:fillRef idx="0">
-            <a:schemeClr val="accent1"/>
-          </a:fillRef>
-          <a:effectRef idx="1">
-            <a:schemeClr val="accent1"/>
-          </a:effectRef>
-          <a:fontRef idx="minor">
-            <a:schemeClr val="tx1"/>
-          </a:fontRef>
-        </p:style>
-      </p:cxnSp>
-      <p:cxnSp>
-        <p:nvCxnSpPr>
-          <p:cNvPr id="18" name="直線矢印コネクタ 17">
-            <a:extLst>
-              <a:ext uri="{FF2B5EF4-FFF2-40B4-BE49-F238E27FC236}">
-                <a16:creationId xmlns:a16="http://schemas.microsoft.com/office/drawing/2014/main" id="{11C1B315-A55A-7B14-999E-44951E383E03}"/>
-              </a:ext>
-            </a:extLst>
-          </p:cNvPr>
-          <p:cNvCxnSpPr>
-            <a:cxnSpLocks/>
-          </p:cNvCxnSpPr>
-          <p:nvPr/>
-        </p:nvCxnSpPr>
-        <p:spPr>
-          <a:xfrm flipV="1">
-            <a:off x="2041421" y="8974351"/>
-            <a:ext cx="450705" cy="607036"/>
+          <a:xfrm flipH="1">
+            <a:off x="2702982" y="2360442"/>
+            <a:ext cx="1" cy="2120181"/>
           </a:xfrm>
           <a:prstGeom prst="straightConnector1">
             <a:avLst/>
@@ -3992,9 +4028,9 @@
           <p:nvPr/>
         </p:nvCxnSpPr>
         <p:spPr>
-          <a:xfrm>
-            <a:off x="1965644" y="9846906"/>
-            <a:ext cx="4800597" cy="0"/>
+          <a:xfrm flipV="1">
+            <a:off x="4956503" y="7143545"/>
+            <a:ext cx="4454197" cy="14195"/>
           </a:xfrm>
           <a:prstGeom prst="straightConnector1">
             <a:avLst/>
@@ -4035,8 +4071,8 @@
         </p:nvSpPr>
         <p:spPr>
           <a:xfrm>
-            <a:off x="8522965" y="8479599"/>
-            <a:ext cx="5059618" cy="3559202"/>
+            <a:off x="9793962" y="5254976"/>
+            <a:ext cx="7144412" cy="3559202"/>
           </a:xfrm>
           <a:prstGeom prst="roundRect">
             <a:avLst>
@@ -4044,7 +4080,7 @@
             </a:avLst>
           </a:prstGeom>
           <a:noFill/>
-          <a:ln w="114300">
+          <a:ln w="165100">
             <a:solidFill>
               <a:schemeClr val="tx1"/>
             </a:solidFill>
@@ -4097,13 +4133,13 @@
         </p:nvCxnSpPr>
         <p:spPr>
           <a:xfrm>
-            <a:off x="8495374" y="9751760"/>
-            <a:ext cx="5059618" cy="0"/>
+            <a:off x="9766371" y="6527137"/>
+            <a:ext cx="7172003" cy="0"/>
           </a:xfrm>
           <a:prstGeom prst="straightConnector1">
             <a:avLst/>
           </a:prstGeom>
-          <a:ln w="114300">
+          <a:ln w="165100">
             <a:solidFill>
               <a:schemeClr val="tx1"/>
             </a:solidFill>
@@ -4139,7 +4175,7 @@
         </p:nvSpPr>
         <p:spPr>
           <a:xfrm>
-            <a:off x="9591052" y="8627783"/>
+            <a:off x="11894393" y="5481115"/>
             <a:ext cx="2915958" cy="830997"/>
           </a:xfrm>
           <a:prstGeom prst="rect">
@@ -4177,8 +4213,8 @@
         </p:nvSpPr>
         <p:spPr>
           <a:xfrm>
-            <a:off x="8556264" y="10183242"/>
-            <a:ext cx="4937838" cy="1016047"/>
+            <a:off x="9766371" y="6805845"/>
+            <a:ext cx="7289280" cy="1569660"/>
           </a:xfrm>
           <a:prstGeom prst="rect">
             <a:avLst/>
@@ -4192,27 +4228,27 @@
           <a:lstStyle/>
           <a:p>
             <a:r>
-              <a:rPr lang="ja-JP" altLang="en-US" sz="2001" dirty="0"/>
+              <a:rPr lang="ja-JP" altLang="en-US" sz="3200" dirty="0"/>
               <a:t>・画面を表示する機能を提供</a:t>
             </a:r>
           </a:p>
           <a:p>
             <a:r>
-              <a:rPr lang="ja-JP" altLang="en-US" sz="2001" dirty="0"/>
+              <a:rPr lang="ja-JP" altLang="en-US" sz="3200" dirty="0"/>
               <a:t>・ファイルを読み書きする機能を提供</a:t>
             </a:r>
           </a:p>
           <a:p>
             <a:r>
-              <a:rPr lang="ja-JP" altLang="en-US" sz="2001" dirty="0"/>
+              <a:rPr lang="ja-JP" altLang="en-US" sz="3200" dirty="0"/>
               <a:t>・</a:t>
             </a:r>
             <a:r>
-              <a:rPr lang="en-US" altLang="ja-JP" sz="2001" dirty="0"/>
+              <a:rPr lang="en-US" altLang="ja-JP" sz="3200" dirty="0"/>
               <a:t>DAW</a:t>
             </a:r>
             <a:r>
-              <a:rPr lang="ja-JP" altLang="en-US" sz="2001" dirty="0"/>
+              <a:rPr lang="ja-JP" altLang="en-US" sz="3200" dirty="0"/>
               <a:t>の再生・停止機能を提供</a:t>
             </a:r>
           </a:p>
@@ -4234,8 +4270,8 @@
         </p:nvCxnSpPr>
         <p:spPr>
           <a:xfrm>
-            <a:off x="10153650" y="2551597"/>
-            <a:ext cx="4501813" cy="0"/>
+            <a:off x="10247434" y="2481259"/>
+            <a:ext cx="4304459" cy="0"/>
           </a:xfrm>
           <a:prstGeom prst="straightConnector1">
             <a:avLst/>
@@ -4277,7 +4313,7 @@
         </p:nvSpPr>
         <p:spPr>
           <a:xfrm>
-            <a:off x="14785300" y="956065"/>
+            <a:off x="14879084" y="885727"/>
             <a:ext cx="5750600" cy="3191065"/>
           </a:xfrm>
           <a:prstGeom prst="roundRect">
@@ -4286,7 +4322,7 @@
             </a:avLst>
           </a:prstGeom>
           <a:noFill/>
-          <a:ln w="114300">
+          <a:ln w="165100">
             <a:solidFill>
               <a:schemeClr val="tx1"/>
             </a:solidFill>
@@ -4339,13 +4375,13 @@
         </p:nvCxnSpPr>
         <p:spPr>
           <a:xfrm>
-            <a:off x="14742037" y="2080113"/>
+            <a:off x="14835821" y="2009775"/>
             <a:ext cx="5793863" cy="0"/>
           </a:xfrm>
           <a:prstGeom prst="straightConnector1">
             <a:avLst/>
           </a:prstGeom>
-          <a:ln w="114300">
+          <a:ln w="165100">
             <a:solidFill>
               <a:schemeClr val="tx1"/>
             </a:solidFill>
@@ -4381,7 +4417,7 @@
         </p:nvSpPr>
         <p:spPr>
           <a:xfrm>
-            <a:off x="15080690" y="1249272"/>
+            <a:off x="15174474" y="1178934"/>
             <a:ext cx="5112310" cy="646331"/>
           </a:xfrm>
           <a:prstGeom prst="rect">
@@ -4422,7 +4458,7 @@
         </p:nvSpPr>
         <p:spPr>
           <a:xfrm>
-            <a:off x="14897208" y="2361887"/>
+            <a:off x="14990992" y="2291549"/>
             <a:ext cx="5447247" cy="1569660"/>
           </a:xfrm>
           <a:prstGeom prst="rect">
@@ -4479,8 +4515,8 @@
         </p:nvSpPr>
         <p:spPr>
           <a:xfrm>
-            <a:off x="1381341" y="1420613"/>
-            <a:ext cx="4165168" cy="646331"/>
+            <a:off x="1475125" y="1368725"/>
+            <a:ext cx="3582973" cy="646331"/>
           </a:xfrm>
           <a:prstGeom prst="rect">
             <a:avLst/>
@@ -4518,8 +4554,8 @@
         </p:nvSpPr>
         <p:spPr>
           <a:xfrm>
-            <a:off x="4442491" y="8732060"/>
-            <a:ext cx="5372214" cy="646331"/>
+            <a:off x="5234657" y="6184682"/>
+            <a:ext cx="4407285" cy="646331"/>
           </a:xfrm>
           <a:prstGeom prst="rect">
             <a:avLst/>
@@ -4561,7 +4597,7 @@
         </p:nvSpPr>
         <p:spPr>
           <a:xfrm>
-            <a:off x="9873354" y="1425494"/>
+            <a:off x="9967138" y="1355156"/>
             <a:ext cx="4911946" cy="646331"/>
           </a:xfrm>
           <a:prstGeom prst="rect">
@@ -4587,96 +4623,6 @@
           </a:p>
         </p:txBody>
       </p:sp>
-      <p:cxnSp>
-        <p:nvCxnSpPr>
-          <p:cNvPr id="44" name="直線矢印コネクタ 43">
-            <a:extLst>
-              <a:ext uri="{FF2B5EF4-FFF2-40B4-BE49-F238E27FC236}">
-                <a16:creationId xmlns:a16="http://schemas.microsoft.com/office/drawing/2014/main" id="{80816D4F-C793-ED38-99AB-214B69F664F8}"/>
-              </a:ext>
-            </a:extLst>
-          </p:cNvPr>
-          <p:cNvCxnSpPr>
-            <a:cxnSpLocks/>
-          </p:cNvCxnSpPr>
-          <p:nvPr/>
-        </p:nvCxnSpPr>
-        <p:spPr>
-          <a:xfrm flipV="1">
-            <a:off x="16729583" y="5678213"/>
-            <a:ext cx="567586" cy="368019"/>
-          </a:xfrm>
-          <a:prstGeom prst="straightConnector1">
-            <a:avLst/>
-          </a:prstGeom>
-          <a:ln w="152400">
-            <a:solidFill>
-              <a:schemeClr val="tx1"/>
-            </a:solidFill>
-            <a:prstDash val="sysDot"/>
-            <a:tailEnd type="none" w="med" len="sm"/>
-          </a:ln>
-        </p:spPr>
-        <p:style>
-          <a:lnRef idx="2">
-            <a:schemeClr val="accent1"/>
-          </a:lnRef>
-          <a:fillRef idx="0">
-            <a:schemeClr val="accent1"/>
-          </a:fillRef>
-          <a:effectRef idx="1">
-            <a:schemeClr val="accent1"/>
-          </a:effectRef>
-          <a:fontRef idx="minor">
-            <a:schemeClr val="tx1"/>
-          </a:fontRef>
-        </p:style>
-      </p:cxnSp>
-      <p:cxnSp>
-        <p:nvCxnSpPr>
-          <p:cNvPr id="49" name="直線矢印コネクタ 48">
-            <a:extLst>
-              <a:ext uri="{FF2B5EF4-FFF2-40B4-BE49-F238E27FC236}">
-                <a16:creationId xmlns:a16="http://schemas.microsoft.com/office/drawing/2014/main" id="{4FB92263-120F-C07D-DD1E-5C23B4A9EB92}"/>
-              </a:ext>
-            </a:extLst>
-          </p:cNvPr>
-          <p:cNvCxnSpPr>
-            <a:cxnSpLocks/>
-          </p:cNvCxnSpPr>
-          <p:nvPr/>
-        </p:nvCxnSpPr>
-        <p:spPr>
-          <a:xfrm>
-            <a:off x="14963954" y="5863225"/>
-            <a:ext cx="987508" cy="0"/>
-          </a:xfrm>
-          <a:prstGeom prst="straightConnector1">
-            <a:avLst/>
-          </a:prstGeom>
-          <a:ln w="152400">
-            <a:solidFill>
-              <a:schemeClr val="tx1"/>
-            </a:solidFill>
-            <a:prstDash val="sysDot"/>
-            <a:tailEnd type="none" w="med" len="sm"/>
-          </a:ln>
-        </p:spPr>
-        <p:style>
-          <a:lnRef idx="2">
-            <a:schemeClr val="accent1"/>
-          </a:lnRef>
-          <a:fillRef idx="0">
-            <a:schemeClr val="accent1"/>
-          </a:fillRef>
-          <a:effectRef idx="1">
-            <a:schemeClr val="accent1"/>
-          </a:effectRef>
-          <a:fontRef idx="minor">
-            <a:schemeClr val="tx1"/>
-          </a:fontRef>
-        </p:style>
-      </p:cxnSp>
       <p:cxnSp>
         <p:nvCxnSpPr>
           <p:cNvPr id="53" name="直線矢印コネクタ 52">
@@ -4693,8 +4639,8 @@
         </p:nvCxnSpPr>
         <p:spPr>
           <a:xfrm>
-            <a:off x="12605879" y="6403821"/>
-            <a:ext cx="0" cy="1124472"/>
+            <a:off x="15985461" y="4076792"/>
+            <a:ext cx="0" cy="945932"/>
           </a:xfrm>
           <a:prstGeom prst="straightConnector1">
             <a:avLst/>
@@ -4736,8 +4682,8 @@
         </p:nvSpPr>
         <p:spPr>
           <a:xfrm>
-            <a:off x="11177919" y="4865357"/>
-            <a:ext cx="3902772" cy="1200329"/>
+            <a:off x="9943017" y="4376393"/>
+            <a:ext cx="5884775" cy="646331"/>
           </a:xfrm>
           <a:prstGeom prst="rect">
             <a:avLst/>
@@ -4794,9 +4740,9 @@
           <p:nvPr/>
         </p:nvCxnSpPr>
         <p:spPr>
-          <a:xfrm flipV="1">
-            <a:off x="19801524" y="9464255"/>
-            <a:ext cx="3017845" cy="9739"/>
+          <a:xfrm>
+            <a:off x="19451947" y="4054934"/>
+            <a:ext cx="0" cy="1372549"/>
           </a:xfrm>
           <a:prstGeom prst="straightConnector1">
             <a:avLst/>
@@ -4837,8 +4783,8 @@
         </p:nvSpPr>
         <p:spPr>
           <a:xfrm>
-            <a:off x="20359604" y="8346673"/>
-            <a:ext cx="1389931" cy="646331"/>
+            <a:off x="19775569" y="4227154"/>
+            <a:ext cx="3563782" cy="1200329"/>
           </a:xfrm>
           <a:prstGeom prst="rect">
             <a:avLst/>
@@ -4856,36 +4802,8 @@
               <a:rPr kumimoji="1" lang="ja-JP" altLang="en-US" sz="3600" dirty="0"/>
               <a:t>継承</a:t>
             </a:r>
-          </a:p>
-        </p:txBody>
-      </p:sp>
-      <p:sp>
-        <p:nvSpPr>
-          <p:cNvPr id="69" name="テキスト ボックス 68">
-            <a:extLst>
-              <a:ext uri="{FF2B5EF4-FFF2-40B4-BE49-F238E27FC236}">
-                <a16:creationId xmlns:a16="http://schemas.microsoft.com/office/drawing/2014/main" id="{56BCC656-443F-FFE7-7382-559313EA3103}"/>
-              </a:ext>
-            </a:extLst>
-          </p:cNvPr>
-          <p:cNvSpPr txBox="1"/>
-          <p:nvPr/>
-        </p:nvSpPr>
-        <p:spPr>
-          <a:xfrm>
-            <a:off x="19700437" y="9751760"/>
-            <a:ext cx="3118932" cy="1200329"/>
-          </a:xfrm>
-          <a:prstGeom prst="rect">
-            <a:avLst/>
-          </a:prstGeom>
-          <a:noFill/>
-        </p:spPr>
-        <p:txBody>
-          <a:bodyPr wrap="square" rtlCol="0">
-            <a:spAutoFit/>
-          </a:bodyPr>
-          <a:lstStyle/>
+            <a:endParaRPr kumimoji="1" lang="en-US" altLang="ja-JP" sz="3600" dirty="0"/>
+          </a:p>
           <a:p>
             <a:pPr algn="ctr"/>
             <a:r>
@@ -4909,16 +4827,16 @@
         </p:nvSpPr>
         <p:spPr>
           <a:xfrm>
-            <a:off x="18663039" y="5753039"/>
-            <a:ext cx="4106900" cy="2514294"/>
+            <a:off x="17845926" y="5682701"/>
+            <a:ext cx="5017797" cy="3272154"/>
           </a:xfrm>
           <a:prstGeom prst="roundRect">
             <a:avLst>
-              <a:gd name="adj" fmla="val 37837"/>
+              <a:gd name="adj" fmla="val 19653"/>
             </a:avLst>
           </a:prstGeom>
           <a:noFill/>
-          <a:ln w="114300">
+          <a:ln w="165100">
             <a:solidFill>
               <a:schemeClr val="tx1"/>
             </a:solidFill>
@@ -4966,19 +4884,18 @@
           </p:cNvPr>
           <p:cNvCxnSpPr>
             <a:cxnSpLocks/>
-            <a:endCxn id="71" idx="3"/>
           </p:cNvCxnSpPr>
           <p:nvPr/>
         </p:nvCxnSpPr>
         <p:spPr>
           <a:xfrm>
-            <a:off x="18663039" y="7010186"/>
-            <a:ext cx="4106900" cy="0"/>
+            <a:off x="17811230" y="7574898"/>
+            <a:ext cx="5017797" cy="9893"/>
           </a:xfrm>
           <a:prstGeom prst="straightConnector1">
             <a:avLst/>
           </a:prstGeom>
-          <a:ln w="114300">
+          <a:ln w="165100">
             <a:solidFill>
               <a:schemeClr val="tx1"/>
             </a:solidFill>
@@ -5014,8 +4931,8 @@
         </p:nvSpPr>
         <p:spPr>
           <a:xfrm>
-            <a:off x="18614832" y="6269911"/>
-            <a:ext cx="4155107" cy="584775"/>
+            <a:off x="18117942" y="6598392"/>
+            <a:ext cx="4526294" cy="707886"/>
           </a:xfrm>
           <a:prstGeom prst="rect">
             <a:avLst/>
@@ -5030,7 +4947,7 @@
           <a:p>
             <a:pPr algn="ctr"/>
             <a:r>
-              <a:rPr lang="en-US" altLang="ja-JP" sz="3200" dirty="0">
+              <a:rPr lang="en-US" altLang="ja-JP" sz="4000" dirty="0">
                 <a:latin typeface="Consolas" panose="020B0609020204030204" pitchFamily="49" charset="0"/>
               </a:rPr>
               <a:t>DawiyPluginBase</a:t>
@@ -5052,8 +4969,8 @@
         </p:nvSpPr>
         <p:spPr>
           <a:xfrm>
-            <a:off x="18941338" y="7235698"/>
-            <a:ext cx="3550866" cy="584775"/>
+            <a:off x="18340040" y="7946657"/>
+            <a:ext cx="4082098" cy="646331"/>
           </a:xfrm>
           <a:prstGeom prst="rect">
             <a:avLst/>
@@ -5068,12 +4985,12 @@
           <a:p>
             <a:pPr algn="ctr"/>
             <a:r>
-              <a:rPr lang="en-US" altLang="ja-JP" sz="3200" dirty="0">
+              <a:rPr lang="en-US" altLang="ja-JP" sz="3600" dirty="0">
                 <a:latin typeface="Consolas" panose="020B0609020204030204" pitchFamily="49" charset="0"/>
               </a:rPr>
               <a:t>host : HostAPI</a:t>
             </a:r>
-            <a:endParaRPr lang="ja-JP" altLang="en-US" sz="3200" dirty="0">
+            <a:endParaRPr lang="ja-JP" altLang="en-US" sz="3600" dirty="0">
               <a:latin typeface="Consolas" panose="020B0609020204030204" pitchFamily="49" charset="0"/>
             </a:endParaRPr>
           </a:p>
@@ -5093,8 +5010,8 @@
         </p:nvSpPr>
         <p:spPr>
           <a:xfrm>
-            <a:off x="18914177" y="5876773"/>
-            <a:ext cx="3275558" cy="523220"/>
+            <a:off x="18563506" y="5994711"/>
+            <a:ext cx="3513244" cy="584775"/>
           </a:xfrm>
           <a:prstGeom prst="rect">
             <a:avLst/>
@@ -5109,19 +5026,19 @@
           <a:p>
             <a:pPr algn="ctr"/>
             <a:r>
-              <a:rPr lang="en-US" altLang="ja-JP" sz="2800" dirty="0">
+              <a:rPr lang="en-US" altLang="ja-JP" sz="3200" dirty="0">
                 <a:latin typeface="+mn-ea"/>
               </a:rPr>
               <a:t>&lt;&lt;</a:t>
             </a:r>
             <a:r>
-              <a:rPr lang="ja-JP" altLang="en-US" sz="2800" dirty="0">
+              <a:rPr lang="ja-JP" altLang="en-US" sz="3200" dirty="0">
                 <a:latin typeface="+mn-ea"/>
               </a:rPr>
               <a:t>抽象クラス</a:t>
             </a:r>
             <a:r>
-              <a:rPr lang="en-US" altLang="ja-JP" sz="2800" dirty="0">
+              <a:rPr lang="en-US" altLang="ja-JP" sz="3200" dirty="0">
                 <a:latin typeface="+mn-ea"/>
               </a:rPr>
               <a:t>&gt;&gt;</a:t>
@@ -5129,97 +5046,6 @@
           </a:p>
         </p:txBody>
       </p:sp>
-      <p:cxnSp>
-        <p:nvCxnSpPr>
-          <p:cNvPr id="77" name="直線矢印コネクタ 76">
-            <a:extLst>
-              <a:ext uri="{FF2B5EF4-FFF2-40B4-BE49-F238E27FC236}">
-                <a16:creationId xmlns:a16="http://schemas.microsoft.com/office/drawing/2014/main" id="{B1441988-4925-EDA8-F88A-DBF7F0576BF2}"/>
-              </a:ext>
-            </a:extLst>
-          </p:cNvPr>
-          <p:cNvCxnSpPr>
-            <a:cxnSpLocks/>
-            <a:endCxn id="71" idx="2"/>
-          </p:cNvCxnSpPr>
-          <p:nvPr/>
-        </p:nvCxnSpPr>
-        <p:spPr>
-          <a:xfrm flipV="1">
-            <a:off x="19965676" y="8267333"/>
-            <a:ext cx="750813" cy="865558"/>
-          </a:xfrm>
-          <a:prstGeom prst="straightConnector1">
-            <a:avLst/>
-          </a:prstGeom>
-          <a:ln w="254000">
-            <a:solidFill>
-              <a:schemeClr val="tx1"/>
-            </a:solidFill>
-            <a:prstDash val="sysDot"/>
-            <a:tailEnd type="none" w="med" len="sm"/>
-          </a:ln>
-        </p:spPr>
-        <p:style>
-          <a:lnRef idx="2">
-            <a:schemeClr val="accent1"/>
-          </a:lnRef>
-          <a:fillRef idx="0">
-            <a:schemeClr val="accent1"/>
-          </a:fillRef>
-          <a:effectRef idx="1">
-            <a:schemeClr val="accent1"/>
-          </a:effectRef>
-          <a:fontRef idx="minor">
-            <a:schemeClr val="tx1"/>
-          </a:fontRef>
-        </p:style>
-      </p:cxnSp>
-      <p:cxnSp>
-        <p:nvCxnSpPr>
-          <p:cNvPr id="78" name="直線矢印コネクタ 77">
-            <a:extLst>
-              <a:ext uri="{FF2B5EF4-FFF2-40B4-BE49-F238E27FC236}">
-                <a16:creationId xmlns:a16="http://schemas.microsoft.com/office/drawing/2014/main" id="{10CF5DF1-BC00-0CF8-7913-1557A2FC7C7F}"/>
-              </a:ext>
-            </a:extLst>
-          </p:cNvPr>
-          <p:cNvCxnSpPr>
-            <a:cxnSpLocks/>
-          </p:cNvCxnSpPr>
-          <p:nvPr/>
-        </p:nvCxnSpPr>
-        <p:spPr>
-          <a:xfrm>
-            <a:off x="17945226" y="8215325"/>
-            <a:ext cx="717813" cy="0"/>
-          </a:xfrm>
-          <a:prstGeom prst="straightConnector1">
-            <a:avLst/>
-          </a:prstGeom>
-          <a:ln w="254000">
-            <a:solidFill>
-              <a:schemeClr val="tx1"/>
-            </a:solidFill>
-            <a:prstDash val="sysDot"/>
-            <a:tailEnd type="none" w="med" len="sm"/>
-          </a:ln>
-        </p:spPr>
-        <p:style>
-          <a:lnRef idx="2">
-            <a:schemeClr val="accent1"/>
-          </a:lnRef>
-          <a:fillRef idx="0">
-            <a:schemeClr val="accent1"/>
-          </a:fillRef>
-          <a:effectRef idx="1">
-            <a:schemeClr val="accent1"/>
-          </a:effectRef>
-          <a:fontRef idx="minor">
-            <a:schemeClr val="tx1"/>
-          </a:fontRef>
-        </p:style>
-      </p:cxnSp>
       <p:cxnSp>
         <p:nvCxnSpPr>
           <p:cNvPr id="79" name="直線矢印コネクタ 78">
@@ -5235,9 +5061,9 @@
           <p:nvPr/>
         </p:nvCxnSpPr>
         <p:spPr>
-          <a:xfrm>
-            <a:off x="14963954" y="6956196"/>
-            <a:ext cx="0" cy="1124472"/>
+          <a:xfrm flipH="1">
+            <a:off x="15444300" y="11561496"/>
+            <a:ext cx="6196499" cy="0"/>
           </a:xfrm>
           <a:prstGeom prst="straightConnector1">
             <a:avLst/>
@@ -5279,8 +5105,8 @@
         </p:nvSpPr>
         <p:spPr>
           <a:xfrm>
-            <a:off x="14388797" y="8747122"/>
-            <a:ext cx="5310116" cy="3993259"/>
+            <a:off x="8581296" y="9167187"/>
+            <a:ext cx="6539383" cy="3597706"/>
           </a:xfrm>
           <a:prstGeom prst="roundRect">
             <a:avLst>
@@ -5288,7 +5114,7 @@
             </a:avLst>
           </a:prstGeom>
           <a:noFill/>
-          <a:ln w="114300">
+          <a:ln w="165100">
             <a:solidFill>
               <a:schemeClr val="tx1"/>
             </a:solidFill>
@@ -5341,13 +5167,13 @@
         </p:nvCxnSpPr>
         <p:spPr>
           <a:xfrm>
-            <a:off x="14388797" y="11134471"/>
-            <a:ext cx="5310116" cy="0"/>
+            <a:off x="8581296" y="10713509"/>
+            <a:ext cx="6539383" cy="0"/>
           </a:xfrm>
           <a:prstGeom prst="straightConnector1">
             <a:avLst/>
           </a:prstGeom>
-          <a:ln w="114300">
+          <a:ln w="165100">
             <a:solidFill>
               <a:schemeClr val="tx1"/>
             </a:solidFill>
@@ -5383,7 +5209,7 @@
         </p:nvSpPr>
         <p:spPr>
           <a:xfrm>
-            <a:off x="14915394" y="10144126"/>
+            <a:off x="9915527" y="9882794"/>
             <a:ext cx="3888213" cy="707886"/>
           </a:xfrm>
           <a:prstGeom prst="rect">
@@ -5403,69 +5229,6 @@
                 <a:latin typeface="Consolas" panose="020B0609020204030204" pitchFamily="49" charset="0"/>
               </a:rPr>
               <a:t>IDawiyPlugin</a:t>
-            </a:r>
-          </a:p>
-        </p:txBody>
-      </p:sp>
-      <p:sp>
-        <p:nvSpPr>
-          <p:cNvPr id="86" name="テキスト ボックス 85">
-            <a:extLst>
-              <a:ext uri="{FF2B5EF4-FFF2-40B4-BE49-F238E27FC236}">
-                <a16:creationId xmlns:a16="http://schemas.microsoft.com/office/drawing/2014/main" id="{1ABF382E-DDBA-B501-B9D1-D7DD4194C68E}"/>
-              </a:ext>
-            </a:extLst>
-          </p:cNvPr>
-          <p:cNvSpPr txBox="1"/>
-          <p:nvPr/>
-        </p:nvSpPr>
-        <p:spPr>
-          <a:xfrm>
-            <a:off x="15024827" y="11294454"/>
-            <a:ext cx="4728362" cy="1323952"/>
-          </a:xfrm>
-          <a:prstGeom prst="rect">
-            <a:avLst/>
-          </a:prstGeom>
-          <a:noFill/>
-        </p:spPr>
-        <p:txBody>
-          <a:bodyPr wrap="square" rtlCol="0">
-            <a:spAutoFit/>
-          </a:bodyPr>
-          <a:lstStyle/>
-          <a:p>
-            <a:r>
-              <a:rPr lang="en-US" altLang="ja-JP" sz="2001" dirty="0"/>
-              <a:t>id</a:t>
-            </a:r>
-            <a:r>
-              <a:rPr lang="ja-JP" altLang="en-US" sz="2001" dirty="0"/>
-              <a:t>（識別子）</a:t>
-            </a:r>
-            <a:endParaRPr lang="en-US" altLang="ja-JP" sz="2001" dirty="0"/>
-          </a:p>
-          <a:p>
-            <a:endParaRPr lang="ja-JP" altLang="en-US" sz="2001" dirty="0"/>
-          </a:p>
-          <a:p>
-            <a:r>
-              <a:rPr lang="en-US" altLang="ja-JP" sz="2001" dirty="0"/>
-              <a:t>onInit(host) : </a:t>
-            </a:r>
-            <a:r>
-              <a:rPr lang="ja-JP" altLang="en-US" sz="2001" dirty="0"/>
-              <a:t>初期化時の処理</a:t>
-            </a:r>
-          </a:p>
-          <a:p>
-            <a:r>
-              <a:rPr lang="en-US" altLang="ja-JP" sz="2001" dirty="0"/>
-              <a:t>render(container) : </a:t>
-            </a:r>
-            <a:r>
-              <a:rPr lang="ja-JP" altLang="en-US" sz="2001" dirty="0"/>
-              <a:t>描画処理</a:t>
             </a:r>
           </a:p>
         </p:txBody>
@@ -5484,8 +5247,8 @@
         </p:nvSpPr>
         <p:spPr>
           <a:xfrm>
-            <a:off x="14785300" y="6496139"/>
-            <a:ext cx="4838941" cy="646331"/>
+            <a:off x="16233158" y="10481218"/>
+            <a:ext cx="5017797" cy="646331"/>
           </a:xfrm>
           <a:prstGeom prst="rect">
             <a:avLst/>
@@ -5519,8 +5282,8 @@
         </p:nvSpPr>
         <p:spPr>
           <a:xfrm>
-            <a:off x="15339307" y="9463373"/>
-            <a:ext cx="3526455" cy="369332"/>
+            <a:off x="9167376" y="9355739"/>
+            <a:ext cx="5384517" cy="584775"/>
           </a:xfrm>
           <a:prstGeom prst="rect">
             <a:avLst/>
@@ -5535,19 +5298,19 @@
           <a:p>
             <a:pPr algn="ctr"/>
             <a:r>
-              <a:rPr lang="en-US" altLang="ja-JP" dirty="0">
+              <a:rPr lang="en-US" altLang="ja-JP" sz="3200" dirty="0">
                 <a:latin typeface="+mn-ea"/>
               </a:rPr>
               <a:t>&lt;&lt;</a:t>
             </a:r>
             <a:r>
-              <a:rPr lang="ja-JP" altLang="en-US" dirty="0">
+              <a:rPr lang="ja-JP" altLang="en-US" sz="3200" dirty="0">
                 <a:latin typeface="+mn-ea"/>
               </a:rPr>
               <a:t>インターフェース</a:t>
             </a:r>
             <a:r>
-              <a:rPr lang="en-US" altLang="ja-JP" dirty="0">
+              <a:rPr lang="en-US" altLang="ja-JP" sz="3200" dirty="0">
                 <a:latin typeface="+mn-ea"/>
               </a:rPr>
               <a:t>&gt;&gt;</a:t>
@@ -5571,13 +5334,13 @@
         </p:nvCxnSpPr>
         <p:spPr>
           <a:xfrm>
-            <a:off x="14388797" y="11850669"/>
-            <a:ext cx="5310116" cy="0"/>
+            <a:off x="8581296" y="11570383"/>
+            <a:ext cx="6539383" cy="0"/>
           </a:xfrm>
           <a:prstGeom prst="straightConnector1">
             <a:avLst/>
           </a:prstGeom>
-          <a:ln w="114300">
+          <a:ln w="165100">
             <a:solidFill>
               <a:schemeClr val="tx1"/>
             </a:solidFill>
@@ -5613,8 +5376,8 @@
         </p:nvSpPr>
         <p:spPr>
           <a:xfrm>
-            <a:off x="3179034" y="10368368"/>
-            <a:ext cx="5183112" cy="2526932"/>
+            <a:off x="536012" y="9779415"/>
+            <a:ext cx="7064967" cy="3444260"/>
           </a:xfrm>
           <a:prstGeom prst="roundRect">
             <a:avLst>
@@ -5624,7 +5387,7 @@
           <a:solidFill>
             <a:schemeClr val="bg1"/>
           </a:solidFill>
-          <a:ln w="114300">
+          <a:ln w="190500">
             <a:solidFill>
               <a:schemeClr val="tx1"/>
             </a:solidFill>
@@ -5659,6 +5422,130 @@
           </a:p>
         </p:txBody>
       </p:sp>
+      <p:sp>
+        <p:nvSpPr>
+          <p:cNvPr id="104" name="テキスト ボックス 103">
+            <a:extLst>
+              <a:ext uri="{FF2B5EF4-FFF2-40B4-BE49-F238E27FC236}">
+                <a16:creationId xmlns:a16="http://schemas.microsoft.com/office/drawing/2014/main" id="{825DEDB6-7365-FD19-A88E-5D23AA9A900E}"/>
+              </a:ext>
+            </a:extLst>
+          </p:cNvPr>
+          <p:cNvSpPr txBox="1"/>
+          <p:nvPr/>
+        </p:nvSpPr>
+        <p:spPr>
+          <a:xfrm>
+            <a:off x="609828" y="10091947"/>
+            <a:ext cx="6930702" cy="2862322"/>
+          </a:xfrm>
+          <a:prstGeom prst="rect">
+            <a:avLst/>
+          </a:prstGeom>
+          <a:noFill/>
+        </p:spPr>
+        <p:txBody>
+          <a:bodyPr wrap="square">
+            <a:spAutoFit/>
+          </a:bodyPr>
+          <a:lstStyle/>
+          <a:p>
+            <a:r>
+              <a:rPr lang="ja-JP" altLang="en-US" sz="3600" b="1" dirty="0"/>
+              <a:t>凡例：</a:t>
+            </a:r>
+            <a:endParaRPr lang="en-US" altLang="ja-JP" sz="3600" b="1" dirty="0"/>
+          </a:p>
+          <a:p>
+            <a:pPr marL="628613" lvl="1" indent="-171440">
+              <a:buFont typeface="Arial" panose="020B0604020202020204" pitchFamily="34" charset="0"/>
+              <a:buChar char="•"/>
+            </a:pPr>
+            <a:r>
+              <a:rPr lang="ja-JP" altLang="en-US" sz="3600" dirty="0"/>
+              <a:t>　　　　：命令、所有</a:t>
+            </a:r>
+            <a:endParaRPr lang="en-US" altLang="ja-JP" sz="3600" dirty="0"/>
+          </a:p>
+          <a:p>
+            <a:pPr marL="628613" lvl="1" indent="-171440">
+              <a:buFont typeface="Arial" panose="020B0604020202020204" pitchFamily="34" charset="0"/>
+              <a:buChar char="•"/>
+            </a:pPr>
+            <a:r>
+              <a:rPr lang="ja-JP" altLang="en-US" sz="3600" dirty="0"/>
+              <a:t>　　　　：継承</a:t>
+            </a:r>
+            <a:endParaRPr lang="en-US" altLang="ja-JP" sz="3600" dirty="0"/>
+          </a:p>
+          <a:p>
+            <a:pPr marL="628613" lvl="1" indent="-171440">
+              <a:buFont typeface="Arial" panose="020B0604020202020204" pitchFamily="34" charset="0"/>
+              <a:buChar char="•"/>
+            </a:pPr>
+            <a:r>
+              <a:rPr lang="ja-JP" altLang="en-US" sz="3600" dirty="0"/>
+              <a:t>　　　　：一時的な読み込み</a:t>
+            </a:r>
+            <a:endParaRPr lang="en-US" altLang="ja-JP" sz="3600" dirty="0"/>
+          </a:p>
+          <a:p>
+            <a:pPr marL="628613" lvl="1" indent="-171440">
+              <a:buFont typeface="Arial" panose="020B0604020202020204" pitchFamily="34" charset="0"/>
+              <a:buChar char="•"/>
+            </a:pPr>
+            <a:r>
+              <a:rPr lang="ja-JP" altLang="en-US" sz="3600" dirty="0"/>
+              <a:t>　　　　：実装</a:t>
+            </a:r>
+          </a:p>
+        </p:txBody>
+      </p:sp>
+      <p:cxnSp>
+        <p:nvCxnSpPr>
+          <p:cNvPr id="61" name="直線矢印コネクタ 60">
+            <a:extLst>
+              <a:ext uri="{FF2B5EF4-FFF2-40B4-BE49-F238E27FC236}">
+                <a16:creationId xmlns:a16="http://schemas.microsoft.com/office/drawing/2014/main" id="{B0F2EB56-A9F5-9686-2CD6-13DB6F9EDBA7}"/>
+              </a:ext>
+            </a:extLst>
+          </p:cNvPr>
+          <p:cNvCxnSpPr>
+            <a:cxnSpLocks/>
+          </p:cNvCxnSpPr>
+          <p:nvPr/>
+        </p:nvCxnSpPr>
+        <p:spPr>
+          <a:xfrm>
+            <a:off x="21501728" y="8920129"/>
+            <a:ext cx="0" cy="2519442"/>
+          </a:xfrm>
+          <a:prstGeom prst="straightConnector1">
+            <a:avLst/>
+          </a:prstGeom>
+          <a:ln w="254000">
+            <a:solidFill>
+              <a:schemeClr val="tx1"/>
+            </a:solidFill>
+            <a:prstDash val="sysDot"/>
+            <a:tailEnd type="none" w="med" len="sm"/>
+          </a:ln>
+        </p:spPr>
+        <p:style>
+          <a:lnRef idx="2">
+            <a:schemeClr val="accent1"/>
+          </a:lnRef>
+          <a:fillRef idx="0">
+            <a:schemeClr val="accent1"/>
+          </a:fillRef>
+          <a:effectRef idx="1">
+            <a:schemeClr val="accent1"/>
+          </a:effectRef>
+          <a:fontRef idx="minor">
+            <a:schemeClr val="tx1"/>
+          </a:fontRef>
+        </p:style>
+      </p:cxnSp>
       <p:cxnSp>
         <p:nvCxnSpPr>
           <p:cNvPr id="99" name="直線矢印コネクタ 98">
@@ -5675,18 +5562,63 @@
         </p:nvCxnSpPr>
         <p:spPr>
           <a:xfrm>
-            <a:off x="4065248" y="11850669"/>
-            <a:ext cx="1086254" cy="0"/>
+            <a:off x="1504928" y="10929909"/>
+            <a:ext cx="1667899" cy="0"/>
           </a:xfrm>
           <a:prstGeom prst="straightConnector1">
             <a:avLst/>
           </a:prstGeom>
-          <a:ln w="63500">
+          <a:ln w="152400">
             <a:solidFill>
               <a:schemeClr val="tx1"/>
             </a:solidFill>
             <a:prstDash val="solid"/>
             <a:tailEnd type="stealth" w="med" len="med"/>
+          </a:ln>
+        </p:spPr>
+        <p:style>
+          <a:lnRef idx="2">
+            <a:schemeClr val="accent1"/>
+          </a:lnRef>
+          <a:fillRef idx="0">
+            <a:schemeClr val="accent1"/>
+          </a:fillRef>
+          <a:effectRef idx="1">
+            <a:schemeClr val="accent1"/>
+          </a:effectRef>
+          <a:fontRef idx="minor">
+            <a:schemeClr val="tx1"/>
+          </a:fontRef>
+        </p:style>
+      </p:cxnSp>
+      <p:cxnSp>
+        <p:nvCxnSpPr>
+          <p:cNvPr id="108" name="直線矢印コネクタ 107">
+            <a:extLst>
+              <a:ext uri="{FF2B5EF4-FFF2-40B4-BE49-F238E27FC236}">
+                <a16:creationId xmlns:a16="http://schemas.microsoft.com/office/drawing/2014/main" id="{A80DD3A7-280A-2DA8-1D74-FFE04224F97C}"/>
+              </a:ext>
+            </a:extLst>
+          </p:cNvPr>
+          <p:cNvCxnSpPr>
+            <a:cxnSpLocks/>
+          </p:cNvCxnSpPr>
+          <p:nvPr/>
+        </p:nvCxnSpPr>
+        <p:spPr>
+          <a:xfrm>
+            <a:off x="1510823" y="11490014"/>
+            <a:ext cx="1662004" cy="0"/>
+          </a:xfrm>
+          <a:prstGeom prst="straightConnector1">
+            <a:avLst/>
+          </a:prstGeom>
+          <a:ln w="152400">
+            <a:solidFill>
+              <a:schemeClr val="tx1"/>
+            </a:solidFill>
+            <a:prstDash val="solid"/>
+            <a:tailEnd type="triangle" w="med" len="sm"/>
           </a:ln>
         </p:spPr>
         <p:style>
@@ -5720,63 +5652,18 @@
         </p:nvCxnSpPr>
         <p:spPr>
           <a:xfrm>
-            <a:off x="4065246" y="12342705"/>
-            <a:ext cx="1086254" cy="0"/>
+            <a:off x="1510823" y="12034173"/>
+            <a:ext cx="1662004" cy="0"/>
           </a:xfrm>
           <a:prstGeom prst="straightConnector1">
             <a:avLst/>
           </a:prstGeom>
-          <a:ln w="63500">
+          <a:ln w="152400">
             <a:solidFill>
               <a:schemeClr val="tx1"/>
             </a:solidFill>
             <a:prstDash val="sysDot"/>
             <a:tailEnd type="stealth" w="med" len="sm"/>
-          </a:ln>
-        </p:spPr>
-        <p:style>
-          <a:lnRef idx="2">
-            <a:schemeClr val="accent1"/>
-          </a:lnRef>
-          <a:fillRef idx="0">
-            <a:schemeClr val="accent1"/>
-          </a:fillRef>
-          <a:effectRef idx="1">
-            <a:schemeClr val="accent1"/>
-          </a:effectRef>
-          <a:fontRef idx="minor">
-            <a:schemeClr val="tx1"/>
-          </a:fontRef>
-        </p:style>
-      </p:cxnSp>
-      <p:cxnSp>
-        <p:nvCxnSpPr>
-          <p:cNvPr id="108" name="直線矢印コネクタ 107">
-            <a:extLst>
-              <a:ext uri="{FF2B5EF4-FFF2-40B4-BE49-F238E27FC236}">
-                <a16:creationId xmlns:a16="http://schemas.microsoft.com/office/drawing/2014/main" id="{A80DD3A7-280A-2DA8-1D74-FFE04224F97C}"/>
-              </a:ext>
-            </a:extLst>
-          </p:cNvPr>
-          <p:cNvCxnSpPr>
-            <a:cxnSpLocks/>
-          </p:cNvCxnSpPr>
-          <p:nvPr/>
-        </p:nvCxnSpPr>
-        <p:spPr>
-          <a:xfrm>
-            <a:off x="4061911" y="12101337"/>
-            <a:ext cx="1086254" cy="0"/>
-          </a:xfrm>
-          <a:prstGeom prst="straightConnector1">
-            <a:avLst/>
-          </a:prstGeom>
-          <a:ln w="63500">
-            <a:solidFill>
-              <a:schemeClr val="tx1"/>
-            </a:solidFill>
-            <a:prstDash val="solid"/>
-            <a:tailEnd type="triangle" w="med" len="sm"/>
           </a:ln>
         </p:spPr>
         <p:style>
@@ -5810,13 +5697,13 @@
         </p:nvCxnSpPr>
         <p:spPr>
           <a:xfrm>
-            <a:off x="4065248" y="12591629"/>
-            <a:ext cx="1086254" cy="0"/>
+            <a:off x="1510823" y="12564610"/>
+            <a:ext cx="1662004" cy="4869"/>
           </a:xfrm>
           <a:prstGeom prst="straightConnector1">
             <a:avLst/>
           </a:prstGeom>
-          <a:ln w="63500">
+          <a:ln w="152400">
             <a:solidFill>
               <a:schemeClr val="tx1"/>
             </a:solidFill>
@@ -5839,85 +5726,6 @@
           </a:fontRef>
         </p:style>
       </p:cxnSp>
-      <p:sp>
-        <p:nvSpPr>
-          <p:cNvPr id="104" name="テキスト ボックス 103">
-            <a:extLst>
-              <a:ext uri="{FF2B5EF4-FFF2-40B4-BE49-F238E27FC236}">
-                <a16:creationId xmlns:a16="http://schemas.microsoft.com/office/drawing/2014/main" id="{825DEDB6-7365-FD19-A88E-5D23AA9A900E}"/>
-              </a:ext>
-            </a:extLst>
-          </p:cNvPr>
-          <p:cNvSpPr txBox="1"/>
-          <p:nvPr/>
-        </p:nvSpPr>
-        <p:spPr>
-          <a:xfrm>
-            <a:off x="3418916" y="11416942"/>
-            <a:ext cx="4870279" cy="1323439"/>
-          </a:xfrm>
-          <a:prstGeom prst="rect">
-            <a:avLst/>
-          </a:prstGeom>
-          <a:noFill/>
-        </p:spPr>
-        <p:txBody>
-          <a:bodyPr wrap="square">
-            <a:spAutoFit/>
-          </a:bodyPr>
-          <a:lstStyle/>
-          <a:p>
-            <a:r>
-              <a:rPr lang="ja-JP" altLang="en-US" sz="1600" b="1" dirty="0"/>
-              <a:t>凡例：</a:t>
-            </a:r>
-            <a:endParaRPr lang="en-US" altLang="ja-JP" sz="1600" b="1" dirty="0"/>
-          </a:p>
-          <a:p>
-            <a:pPr marL="628613" lvl="1" indent="-171440">
-              <a:buFont typeface="Arial" panose="020B0604020202020204" pitchFamily="34" charset="0"/>
-              <a:buChar char="•"/>
-            </a:pPr>
-            <a:r>
-              <a:rPr lang="ja-JP" altLang="en-US" sz="1600" dirty="0"/>
-              <a:t>　　　　：命令、所有</a:t>
-            </a:r>
-            <a:endParaRPr lang="en-US" altLang="ja-JP" sz="1600" dirty="0"/>
-          </a:p>
-          <a:p>
-            <a:pPr marL="628613" lvl="1" indent="-171440">
-              <a:buFont typeface="Arial" panose="020B0604020202020204" pitchFamily="34" charset="0"/>
-              <a:buChar char="•"/>
-            </a:pPr>
-            <a:r>
-              <a:rPr lang="ja-JP" altLang="en-US" sz="1600" dirty="0"/>
-              <a:t>　　　　：継承</a:t>
-            </a:r>
-            <a:endParaRPr lang="en-US" altLang="ja-JP" sz="1600" dirty="0"/>
-          </a:p>
-          <a:p>
-            <a:pPr marL="628613" lvl="1" indent="-171440">
-              <a:buFont typeface="Arial" panose="020B0604020202020204" pitchFamily="34" charset="0"/>
-              <a:buChar char="•"/>
-            </a:pPr>
-            <a:r>
-              <a:rPr lang="ja-JP" altLang="en-US" sz="1600" dirty="0"/>
-              <a:t>　　　　：一時的な読み込み</a:t>
-            </a:r>
-            <a:endParaRPr lang="en-US" altLang="ja-JP" sz="1600" dirty="0"/>
-          </a:p>
-          <a:p>
-            <a:pPr marL="628613" lvl="1" indent="-171440">
-              <a:buFont typeface="Arial" panose="020B0604020202020204" pitchFamily="34" charset="0"/>
-              <a:buChar char="•"/>
-            </a:pPr>
-            <a:r>
-              <a:rPr lang="ja-JP" altLang="en-US" sz="1600" dirty="0"/>
-              <a:t>　　　　：実装</a:t>
-            </a:r>
-          </a:p>
-        </p:txBody>
-      </p:sp>
     </p:spTree>
     <p:extLst>
       <p:ext uri="{BB962C8B-B14F-4D97-AF65-F5344CB8AC3E}">

--- a/fig/class_diagram.pptx
+++ b/fig/class_diagram.pptx
@@ -3286,8 +3286,8 @@
         </p:nvSpPr>
         <p:spPr>
           <a:xfrm>
-            <a:off x="8844774" y="10850046"/>
-            <a:ext cx="6310119" cy="1815882"/>
+            <a:off x="10501605" y="10507435"/>
+            <a:ext cx="3890063" cy="707886"/>
           </a:xfrm>
           <a:prstGeom prst="rect">
             <a:avLst/>
@@ -3300,54 +3300,18 @@
           </a:bodyPr>
           <a:lstStyle/>
           <a:p>
-            <a:r>
-              <a:rPr lang="en-US" altLang="ja-JP" sz="3200" dirty="0">
+            <a:pPr algn="ctr"/>
+            <a:r>
+              <a:rPr lang="en-US" altLang="ja-JP" sz="4000" dirty="0">
                 <a:latin typeface="Consolas" panose="020B0609020204030204" pitchFamily="49" charset="0"/>
               </a:rPr>
               <a:t>id</a:t>
             </a:r>
             <a:r>
-              <a:rPr lang="ja-JP" altLang="en-US" sz="3200" dirty="0"/>
+              <a:rPr lang="ja-JP" altLang="en-US" sz="4000" dirty="0"/>
               <a:t>（識別子）</a:t>
             </a:r>
-            <a:endParaRPr lang="en-US" altLang="ja-JP" sz="3200" dirty="0"/>
-          </a:p>
-          <a:p>
-            <a:endParaRPr lang="ja-JP" altLang="en-US" sz="1600" dirty="0">
-              <a:latin typeface="Consolas" panose="020B0609020204030204" pitchFamily="49" charset="0"/>
-            </a:endParaRPr>
-          </a:p>
-          <a:p>
-            <a:r>
-              <a:rPr lang="en-US" altLang="ja-JP" sz="3200" dirty="0">
-                <a:latin typeface="Consolas" panose="020B0609020204030204" pitchFamily="49" charset="0"/>
-              </a:rPr>
-              <a:t>onInit(host)</a:t>
-            </a:r>
-            <a:r>
-              <a:rPr lang="en-US" altLang="ja-JP" sz="3200" dirty="0"/>
-              <a:t> : </a:t>
-            </a:r>
-            <a:r>
-              <a:rPr lang="ja-JP" altLang="en-US" sz="3200" dirty="0"/>
-              <a:t>初期化時の処理</a:t>
-            </a:r>
-          </a:p>
-          <a:p>
-            <a:r>
-              <a:rPr lang="en-US" altLang="ja-JP" sz="3200" dirty="0">
-                <a:latin typeface="Consolas" panose="020B0609020204030204" pitchFamily="49" charset="0"/>
-              </a:rPr>
-              <a:t>render(container) </a:t>
-            </a:r>
-            <a:r>
-              <a:rPr lang="en-US" altLang="ja-JP" sz="3200" dirty="0"/>
-              <a:t>: </a:t>
-            </a:r>
-            <a:r>
-              <a:rPr lang="ja-JP" altLang="en-US" sz="3200" dirty="0"/>
-              <a:t>描画処理</a:t>
-            </a:r>
+            <a:endParaRPr lang="en-US" altLang="ja-JP" sz="4000" dirty="0"/>
           </a:p>
         </p:txBody>
       </p:sp>
@@ -3540,7 +3504,7 @@
           <a:solidFill>
             <a:schemeClr val="bg1"/>
           </a:solidFill>
-          <a:ln w="165100">
+          <a:ln w="114300">
             <a:solidFill>
               <a:schemeClr val="tx1"/>
             </a:solidFill>
@@ -3599,7 +3563,7 @@
           <a:prstGeom prst="straightConnector1">
             <a:avLst/>
           </a:prstGeom>
-          <a:ln w="165100">
+          <a:ln w="114300">
             <a:solidFill>
               <a:schemeClr val="tx1"/>
             </a:solidFill>
@@ -3635,8 +3599,8 @@
         </p:nvSpPr>
         <p:spPr>
           <a:xfrm>
-            <a:off x="1502446" y="4816773"/>
-            <a:ext cx="2401069" cy="923330"/>
+            <a:off x="881949" y="4569128"/>
+            <a:ext cx="3700201" cy="1446550"/>
           </a:xfrm>
           <a:prstGeom prst="rect">
             <a:avLst/>
@@ -3651,13 +3615,13 @@
           <a:p>
             <a:pPr algn="ctr"/>
             <a:r>
-              <a:rPr lang="en-US" altLang="ja-JP" sz="5400" dirty="0">
+              <a:rPr lang="en-US" altLang="ja-JP" sz="8800" dirty="0">
                 <a:latin typeface="Consolas" panose="020B0609020204030204" pitchFamily="49" charset="0"/>
                 <a:ea typeface="モボ-SemiBold" panose="02000700000000000000" pitchFamily="50" charset="-128"/>
               </a:rPr>
               <a:t>DAWIY</a:t>
             </a:r>
-            <a:endParaRPr lang="ja-JP" altLang="en-US" sz="5400" dirty="0">
+            <a:endParaRPr lang="ja-JP" altLang="en-US" sz="8800" dirty="0">
               <a:latin typeface="Consolas" panose="020B0609020204030204" pitchFamily="49" charset="0"/>
               <a:ea typeface="モボ-SemiBold" panose="02000700000000000000" pitchFamily="50" charset="-128"/>
             </a:endParaRPr>
@@ -3678,8 +3642,8 @@
         </p:nvSpPr>
         <p:spPr>
           <a:xfrm>
-            <a:off x="758558" y="6591999"/>
-            <a:ext cx="4013299" cy="1569660"/>
+            <a:off x="469673" y="6450198"/>
+            <a:ext cx="4465120" cy="1754326"/>
           </a:xfrm>
           <a:prstGeom prst="rect">
             <a:avLst/>
@@ -3693,29 +3657,29 @@
           <a:lstStyle/>
           <a:p>
             <a:r>
-              <a:rPr lang="ja-JP" altLang="en-US" sz="3200" dirty="0">
+              <a:rPr lang="ja-JP" altLang="en-US" sz="3600" dirty="0">
                 <a:latin typeface="+mn-ea"/>
               </a:rPr>
               <a:t>・起動する</a:t>
             </a:r>
-            <a:endParaRPr lang="en-US" altLang="ja-JP" sz="3200" dirty="0">
+            <a:endParaRPr lang="en-US" altLang="ja-JP" sz="3600" dirty="0">
               <a:latin typeface="+mn-ea"/>
             </a:endParaRPr>
           </a:p>
           <a:p>
             <a:r>
-              <a:rPr lang="ja-JP" altLang="en-US" sz="3200" dirty="0">
+              <a:rPr lang="ja-JP" altLang="en-US" sz="3600" dirty="0">
                 <a:latin typeface="+mn-ea"/>
               </a:rPr>
               <a:t>・プラグイン機能を</a:t>
             </a:r>
-            <a:endParaRPr lang="en-US" altLang="ja-JP" sz="3200" dirty="0">
+            <a:endParaRPr lang="en-US" altLang="ja-JP" sz="3600" dirty="0">
               <a:latin typeface="+mn-ea"/>
             </a:endParaRPr>
           </a:p>
           <a:p>
             <a:r>
-              <a:rPr lang="ja-JP" altLang="en-US" sz="3200" dirty="0">
+              <a:rPr lang="ja-JP" altLang="en-US" sz="3600" dirty="0">
                 <a:latin typeface="+mn-ea"/>
               </a:rPr>
               <a:t>　使えるようにする</a:t>
@@ -3746,7 +3710,7 @@
             </a:avLst>
           </a:prstGeom>
           <a:noFill/>
-          <a:ln w="165100">
+          <a:ln w="114300">
             <a:solidFill>
               <a:schemeClr val="tx1"/>
             </a:solidFill>
@@ -3800,12 +3764,12 @@
         <p:spPr>
           <a:xfrm>
             <a:off x="5058098" y="2183930"/>
-            <a:ext cx="5072469" cy="7620"/>
+            <a:ext cx="5124897" cy="4098"/>
           </a:xfrm>
           <a:prstGeom prst="straightConnector1">
             <a:avLst/>
           </a:prstGeom>
-          <a:ln w="165100">
+          <a:ln w="114300">
             <a:solidFill>
               <a:schemeClr val="tx1"/>
             </a:solidFill>
@@ -3879,8 +3843,8 @@
         </p:nvSpPr>
         <p:spPr>
           <a:xfrm>
-            <a:off x="5404826" y="2485274"/>
-            <a:ext cx="4389136" cy="1569660"/>
+            <a:off x="5166522" y="2354019"/>
+            <a:ext cx="4756118" cy="1754326"/>
           </a:xfrm>
           <a:prstGeom prst="rect">
             <a:avLst/>
@@ -3894,31 +3858,31 @@
           <a:lstStyle/>
           <a:p>
             <a:r>
-              <a:rPr lang="ja-JP" altLang="en-US" sz="3200" dirty="0">
+              <a:rPr lang="ja-JP" altLang="en-US" sz="3600" dirty="0">
                 <a:latin typeface="+mn-ea"/>
               </a:rPr>
               <a:t>・フォルダを見張る</a:t>
             </a:r>
-            <a:endParaRPr lang="en-US" altLang="ja-JP" sz="3200" dirty="0">
+            <a:endParaRPr lang="en-US" altLang="ja-JP" sz="3600" dirty="0">
               <a:latin typeface="+mn-ea"/>
             </a:endParaRPr>
           </a:p>
           <a:p>
             <a:r>
-              <a:rPr lang="ja-JP" altLang="en-US" sz="3200" dirty="0">
+              <a:rPr lang="ja-JP" altLang="en-US" sz="3600" dirty="0">
                 <a:latin typeface="+mn-ea"/>
               </a:rPr>
               <a:t>・</a:t>
             </a:r>
             <a:r>
-              <a:rPr lang="ja-JP" altLang="en-US" sz="3200" dirty="0"/>
+              <a:rPr lang="ja-JP" altLang="en-US" sz="3600" dirty="0"/>
               <a:t>見つけたプラグイン</a:t>
             </a:r>
-            <a:endParaRPr lang="en-US" altLang="ja-JP" sz="3200" dirty="0"/>
-          </a:p>
-          <a:p>
-            <a:r>
-              <a:rPr lang="ja-JP" altLang="en-US" sz="3200" dirty="0"/>
+            <a:endParaRPr lang="en-US" altLang="ja-JP" sz="3600" dirty="0"/>
+          </a:p>
+          <a:p>
+            <a:r>
+              <a:rPr lang="ja-JP" altLang="en-US" sz="3600" dirty="0"/>
               <a:t>　を読み込む</a:t>
             </a:r>
           </a:p>
@@ -4072,7 +4036,7 @@
         <p:spPr>
           <a:xfrm>
             <a:off x="9793962" y="5254976"/>
-            <a:ext cx="7144412" cy="3559202"/>
+            <a:ext cx="7726124" cy="3559202"/>
           </a:xfrm>
           <a:prstGeom prst="roundRect">
             <a:avLst>
@@ -4080,7 +4044,7 @@
             </a:avLst>
           </a:prstGeom>
           <a:noFill/>
-          <a:ln w="165100">
+          <a:ln w="114300">
             <a:solidFill>
               <a:schemeClr val="tx1"/>
             </a:solidFill>
@@ -4134,12 +4098,12 @@
         <p:spPr>
           <a:xfrm>
             <a:off x="9766371" y="6527137"/>
-            <a:ext cx="7172003" cy="0"/>
+            <a:ext cx="7753715" cy="0"/>
           </a:xfrm>
           <a:prstGeom prst="straightConnector1">
             <a:avLst/>
           </a:prstGeom>
-          <a:ln w="165100">
+          <a:ln w="114300">
             <a:solidFill>
               <a:schemeClr val="tx1"/>
             </a:solidFill>
@@ -4175,8 +4139,8 @@
         </p:nvSpPr>
         <p:spPr>
           <a:xfrm>
-            <a:off x="11894393" y="5481115"/>
-            <a:ext cx="2915958" cy="830997"/>
+            <a:off x="11761456" y="5324865"/>
+            <a:ext cx="3933399" cy="1107996"/>
           </a:xfrm>
           <a:prstGeom prst="rect">
             <a:avLst/>
@@ -4191,7 +4155,7 @@
           <a:p>
             <a:pPr algn="ctr"/>
             <a:r>
-              <a:rPr lang="en-US" altLang="ja-JP" sz="4800" dirty="0">
+              <a:rPr lang="en-US" altLang="ja-JP" sz="6600" dirty="0">
                 <a:latin typeface="Consolas" panose="020B0609020204030204" pitchFamily="49" charset="0"/>
               </a:rPr>
               <a:t>HostAPI</a:t>
@@ -4213,8 +4177,8 @@
         </p:nvSpPr>
         <p:spPr>
           <a:xfrm>
-            <a:off x="9766371" y="6805845"/>
-            <a:ext cx="7289280" cy="1569660"/>
+            <a:off x="9762048" y="6767543"/>
+            <a:ext cx="7708359" cy="1754326"/>
           </a:xfrm>
           <a:prstGeom prst="rect">
             <a:avLst/>
@@ -4228,27 +4192,27 @@
           <a:lstStyle/>
           <a:p>
             <a:r>
-              <a:rPr lang="ja-JP" altLang="en-US" sz="3200" dirty="0"/>
+              <a:rPr lang="ja-JP" altLang="en-US" sz="3600" spc="-150" dirty="0"/>
               <a:t>・画面を表示する機能を提供</a:t>
             </a:r>
           </a:p>
           <a:p>
             <a:r>
-              <a:rPr lang="ja-JP" altLang="en-US" sz="3200" dirty="0"/>
+              <a:rPr lang="ja-JP" altLang="en-US" sz="3600" spc="-150" dirty="0"/>
               <a:t>・ファイルを読み書きする機能を提供</a:t>
             </a:r>
           </a:p>
           <a:p>
             <a:r>
-              <a:rPr lang="ja-JP" altLang="en-US" sz="3200" dirty="0"/>
+              <a:rPr lang="ja-JP" altLang="en-US" sz="3600" spc="-150" dirty="0"/>
               <a:t>・</a:t>
             </a:r>
             <a:r>
-              <a:rPr lang="en-US" altLang="ja-JP" sz="3200" dirty="0"/>
+              <a:rPr lang="en-US" altLang="ja-JP" sz="3600" spc="-150" dirty="0"/>
               <a:t>DAW</a:t>
             </a:r>
             <a:r>
-              <a:rPr lang="ja-JP" altLang="en-US" sz="3200" dirty="0"/>
+              <a:rPr lang="ja-JP" altLang="en-US" sz="3600" spc="-150" dirty="0"/>
               <a:t>の再生・停止機能を提供</a:t>
             </a:r>
           </a:p>
@@ -4313,8 +4277,8 @@
         </p:nvSpPr>
         <p:spPr>
           <a:xfrm>
-            <a:off x="14879084" y="885727"/>
-            <a:ext cx="5750600" cy="3191065"/>
+            <a:off x="14879083" y="885727"/>
+            <a:ext cx="7197665" cy="3191065"/>
           </a:xfrm>
           <a:prstGeom prst="roundRect">
             <a:avLst>
@@ -4322,7 +4286,7 @@
             </a:avLst>
           </a:prstGeom>
           <a:noFill/>
-          <a:ln w="165100">
+          <a:ln w="114300">
             <a:solidFill>
               <a:schemeClr val="tx1"/>
             </a:solidFill>
@@ -4376,12 +4340,12 @@
         <p:spPr>
           <a:xfrm>
             <a:off x="14835821" y="2009775"/>
-            <a:ext cx="5793863" cy="0"/>
+            <a:ext cx="7240927" cy="0"/>
           </a:xfrm>
           <a:prstGeom prst="straightConnector1">
             <a:avLst/>
           </a:prstGeom>
-          <a:ln w="165100">
+          <a:ln w="114300">
             <a:solidFill>
               <a:schemeClr val="tx1"/>
             </a:solidFill>
@@ -4417,8 +4381,8 @@
         </p:nvSpPr>
         <p:spPr>
           <a:xfrm>
-            <a:off x="15174474" y="1178934"/>
-            <a:ext cx="5112310" cy="646331"/>
+            <a:off x="15198713" y="1044793"/>
+            <a:ext cx="6492694" cy="830997"/>
           </a:xfrm>
           <a:prstGeom prst="rect">
             <a:avLst/>
@@ -4433,12 +4397,12 @@
           <a:p>
             <a:pPr algn="ctr"/>
             <a:r>
-              <a:rPr lang="ja-JP" altLang="en-US" sz="3600" dirty="0">
+              <a:rPr lang="ja-JP" altLang="en-US" sz="4800" dirty="0">
                 <a:latin typeface="Consolas" panose="020B0609020204030204" pitchFamily="49" charset="0"/>
               </a:rPr>
               <a:t>ユーザのプラグイン</a:t>
             </a:r>
-            <a:endParaRPr lang="en-US" altLang="ja-JP" sz="3600" dirty="0">
+            <a:endParaRPr lang="en-US" altLang="ja-JP" sz="4800" dirty="0">
               <a:latin typeface="Consolas" panose="020B0609020204030204" pitchFamily="49" charset="0"/>
             </a:endParaRPr>
           </a:p>
@@ -4458,8 +4422,8 @@
         </p:nvSpPr>
         <p:spPr>
           <a:xfrm>
-            <a:off x="14990992" y="2291549"/>
-            <a:ext cx="5447247" cy="1569660"/>
+            <a:off x="15268131" y="2179024"/>
+            <a:ext cx="6510735" cy="1754326"/>
           </a:xfrm>
           <a:prstGeom prst="rect">
             <a:avLst/>
@@ -4473,29 +4437,29 @@
           <a:lstStyle/>
           <a:p>
             <a:r>
-              <a:rPr lang="ja-JP" altLang="en-US" sz="3200" dirty="0"/>
+              <a:rPr lang="ja-JP" altLang="en-US" sz="3600" dirty="0"/>
               <a:t>・初期化時に</a:t>
             </a:r>
             <a:r>
-              <a:rPr lang="en-US" altLang="ja-JP" sz="3200" dirty="0">
+              <a:rPr lang="en-US" altLang="ja-JP" sz="3600" dirty="0">
                 <a:latin typeface="Consolas" panose="020B0609020204030204" pitchFamily="49" charset="0"/>
               </a:rPr>
               <a:t>API</a:t>
             </a:r>
             <a:r>
-              <a:rPr lang="ja-JP" altLang="en-US" sz="3200" dirty="0"/>
+              <a:rPr lang="ja-JP" altLang="en-US" sz="3600" dirty="0"/>
               <a:t>を受け取る</a:t>
             </a:r>
           </a:p>
           <a:p>
             <a:r>
-              <a:rPr lang="ja-JP" altLang="en-US" sz="3200" dirty="0"/>
+              <a:rPr lang="ja-JP" altLang="en-US" sz="3600" dirty="0"/>
               <a:t>・画面を作る</a:t>
             </a:r>
           </a:p>
           <a:p>
             <a:r>
-              <a:rPr lang="ja-JP" altLang="en-US" sz="3200" dirty="0"/>
+              <a:rPr lang="ja-JP" altLang="en-US" sz="3600" dirty="0"/>
               <a:t>・機能を実行する</a:t>
             </a:r>
           </a:p>
@@ -4515,8 +4479,8 @@
         </p:nvSpPr>
         <p:spPr>
           <a:xfrm>
-            <a:off x="1475125" y="1368725"/>
-            <a:ext cx="3582973" cy="646331"/>
+            <a:off x="1510823" y="678782"/>
+            <a:ext cx="3582973" cy="1661993"/>
           </a:xfrm>
           <a:prstGeom prst="rect">
             <a:avLst/>
@@ -4530,12 +4494,27 @@
           <a:lstStyle/>
           <a:p>
             <a:r>
-              <a:rPr kumimoji="1" lang="en-US" altLang="ja-JP" sz="3600" dirty="0"/>
+              <a:rPr kumimoji="1" lang="en-US" altLang="ja-JP" sz="4800" dirty="0"/>
               <a:t>1.</a:t>
             </a:r>
             <a:r>
-              <a:rPr kumimoji="1" lang="ja-JP" altLang="en-US" sz="3600" dirty="0"/>
-              <a:t>  起動時に命令</a:t>
+              <a:rPr kumimoji="1" lang="ja-JP" altLang="en-US" sz="4800" dirty="0"/>
+              <a:t>  起動時に</a:t>
+            </a:r>
+            <a:br>
+              <a:rPr kumimoji="1" lang="en-US" altLang="ja-JP" sz="4800" dirty="0"/>
+            </a:br>
+            <a:r>
+              <a:rPr kumimoji="1" lang="ja-JP" altLang="en-US" sz="4800" dirty="0"/>
+              <a:t>　</a:t>
+            </a:r>
+            <a:r>
+              <a:rPr kumimoji="1" lang="ja-JP" altLang="en-US" sz="5400" dirty="0"/>
+              <a:t> </a:t>
+            </a:r>
+            <a:r>
+              <a:rPr kumimoji="1" lang="ja-JP" altLang="en-US" sz="4800" dirty="0"/>
+              <a:t>命令</a:t>
             </a:r>
           </a:p>
         </p:txBody>
@@ -4554,8 +4533,8 @@
         </p:nvSpPr>
         <p:spPr>
           <a:xfrm>
-            <a:off x="5234657" y="6184682"/>
-            <a:ext cx="4407285" cy="646331"/>
+            <a:off x="5223679" y="5787551"/>
+            <a:ext cx="4407285" cy="830997"/>
           </a:xfrm>
           <a:prstGeom prst="rect">
             <a:avLst/>
@@ -4569,16 +4548,16 @@
           <a:lstStyle/>
           <a:p>
             <a:r>
-              <a:rPr lang="en-US" altLang="ja-JP" sz="3600" dirty="0">
+              <a:rPr lang="en-US" altLang="ja-JP" sz="4800" dirty="0">
                 <a:latin typeface="Consolas" panose="020B0609020204030204" pitchFamily="49" charset="0"/>
               </a:rPr>
               <a:t>HostAPI</a:t>
             </a:r>
             <a:r>
-              <a:rPr lang="ja-JP" altLang="en-US" sz="3600" dirty="0">
+              <a:rPr lang="ja-JP" altLang="en-US" sz="4800" dirty="0">
                 <a:latin typeface="+mn-ea"/>
               </a:rPr>
-              <a:t>を提供する</a:t>
+              <a:t>を提供</a:t>
             </a:r>
           </a:p>
         </p:txBody>
@@ -4597,8 +4576,8 @@
         </p:nvSpPr>
         <p:spPr>
           <a:xfrm>
-            <a:off x="9967138" y="1355156"/>
-            <a:ext cx="4911946" cy="646331"/>
+            <a:off x="10053826" y="706534"/>
+            <a:ext cx="4911946" cy="1569660"/>
           </a:xfrm>
           <a:prstGeom prst="rect">
             <a:avLst/>
@@ -4611,14 +4590,20 @@
           </a:bodyPr>
           <a:lstStyle/>
           <a:p>
+            <a:pPr marL="742950" indent="-742950" algn="ctr">
+              <a:buAutoNum type="arabicPeriod" startAt="2"/>
+            </a:pPr>
+            <a:r>
+              <a:rPr kumimoji="1" lang="ja-JP" altLang="en-US" sz="4800" dirty="0"/>
+              <a:t>発見して</a:t>
+            </a:r>
+            <a:endParaRPr kumimoji="1" lang="en-US" altLang="ja-JP" sz="4800" dirty="0"/>
+          </a:p>
+          <a:p>
             <a:pPr algn="ctr"/>
             <a:r>
-              <a:rPr kumimoji="1" lang="en-US" altLang="ja-JP" sz="3600" dirty="0"/>
-              <a:t>2.</a:t>
-            </a:r>
-            <a:r>
-              <a:rPr kumimoji="1" lang="ja-JP" altLang="en-US" sz="3600" dirty="0"/>
-              <a:t>  発見して読み込む</a:t>
+              <a:rPr kumimoji="1" lang="ja-JP" altLang="en-US" sz="4800" dirty="0"/>
+              <a:t>　 読み込む</a:t>
             </a:r>
           </a:p>
         </p:txBody>
@@ -4682,8 +4667,8 @@
         </p:nvSpPr>
         <p:spPr>
           <a:xfrm>
-            <a:off x="9943017" y="4376393"/>
-            <a:ext cx="5884775" cy="646331"/>
+            <a:off x="8697112" y="4280666"/>
+            <a:ext cx="8226813" cy="830997"/>
           </a:xfrm>
           <a:prstGeom prst="rect">
             <a:avLst/>
@@ -4697,29 +4682,29 @@
           <a:lstStyle/>
           <a:p>
             <a:r>
-              <a:rPr kumimoji="1" lang="en-US" altLang="ja-JP" sz="3600" dirty="0"/>
+              <a:rPr kumimoji="1" lang="en-US" altLang="ja-JP" sz="4800" dirty="0"/>
               <a:t>3.</a:t>
             </a:r>
             <a:r>
-              <a:rPr kumimoji="1" lang="ja-JP" altLang="en-US" sz="3600" dirty="0"/>
+              <a:rPr kumimoji="1" lang="ja-JP" altLang="en-US" sz="4800" dirty="0"/>
               <a:t>  </a:t>
             </a:r>
             <a:r>
-              <a:rPr kumimoji="1" lang="en-US" altLang="ja-JP" sz="3600" dirty="0">
+              <a:rPr kumimoji="1" lang="en-US" altLang="ja-JP" sz="4800" dirty="0">
                 <a:latin typeface="Consolas" panose="020B0609020204030204" pitchFamily="49" charset="0"/>
               </a:rPr>
               <a:t>API</a:t>
             </a:r>
             <a:r>
-              <a:rPr kumimoji="1" lang="ja-JP" altLang="en-US" sz="3600" dirty="0"/>
-              <a:t>を使って</a:t>
-            </a:r>
-            <a:r>
-              <a:rPr kumimoji="1" lang="en-US" altLang="ja-JP" sz="3600" dirty="0"/>
+              <a:rPr kumimoji="1" lang="ja-JP" altLang="en-US" sz="4800" dirty="0"/>
+              <a:t>を使い</a:t>
+            </a:r>
+            <a:r>
+              <a:rPr kumimoji="1" lang="en-US" altLang="ja-JP" sz="4800" dirty="0"/>
               <a:t>DAW</a:t>
             </a:r>
             <a:r>
-              <a:rPr kumimoji="1" lang="ja-JP" altLang="en-US" sz="3600" dirty="0"/>
+              <a:rPr kumimoji="1" lang="ja-JP" altLang="en-US" sz="4800" dirty="0"/>
               <a:t>を操作</a:t>
             </a:r>
           </a:p>
@@ -4741,8 +4726,8 @@
         </p:nvCxnSpPr>
         <p:spPr>
           <a:xfrm>
-            <a:off x="19451947" y="4054934"/>
-            <a:ext cx="0" cy="1372549"/>
+            <a:off x="18954500" y="4108345"/>
+            <a:ext cx="0" cy="1573052"/>
           </a:xfrm>
           <a:prstGeom prst="straightConnector1">
             <a:avLst/>
@@ -4783,8 +4768,8 @@
         </p:nvSpPr>
         <p:spPr>
           <a:xfrm>
-            <a:off x="19775569" y="4227154"/>
-            <a:ext cx="3563782" cy="1200329"/>
+            <a:off x="18977259" y="4206987"/>
+            <a:ext cx="4708819" cy="1569660"/>
           </a:xfrm>
           <a:prstGeom prst="rect">
             <a:avLst/>
@@ -4799,15 +4784,15 @@
           <a:p>
             <a:pPr algn="ctr"/>
             <a:r>
-              <a:rPr kumimoji="1" lang="ja-JP" altLang="en-US" sz="3600" dirty="0"/>
+              <a:rPr kumimoji="1" lang="ja-JP" altLang="en-US" sz="4800" dirty="0"/>
               <a:t>継承</a:t>
             </a:r>
-            <a:endParaRPr kumimoji="1" lang="en-US" altLang="ja-JP" sz="3600" dirty="0"/>
+            <a:endParaRPr kumimoji="1" lang="en-US" altLang="ja-JP" sz="4800" dirty="0"/>
           </a:p>
           <a:p>
             <a:pPr algn="ctr"/>
             <a:r>
-              <a:rPr kumimoji="1" lang="ja-JP" altLang="en-US" sz="3600" dirty="0"/>
+              <a:rPr kumimoji="1" lang="ja-JP" altLang="en-US" sz="4800" dirty="0"/>
               <a:t>（親子の関係）</a:t>
             </a:r>
           </a:p>
@@ -4827,7 +4812,7 @@
         </p:nvSpPr>
         <p:spPr>
           <a:xfrm>
-            <a:off x="17845926" y="5682701"/>
+            <a:off x="17998326" y="5911301"/>
             <a:ext cx="5017797" cy="3272154"/>
           </a:xfrm>
           <a:prstGeom prst="roundRect">
@@ -4836,7 +4821,7 @@
             </a:avLst>
           </a:prstGeom>
           <a:noFill/>
-          <a:ln w="165100">
+          <a:ln w="114300">
             <a:solidFill>
               <a:schemeClr val="tx1"/>
             </a:solidFill>
@@ -4889,13 +4874,13 @@
         </p:nvCxnSpPr>
         <p:spPr>
           <a:xfrm>
-            <a:off x="17811230" y="7574898"/>
+            <a:off x="17963630" y="7498698"/>
             <a:ext cx="5017797" cy="9893"/>
           </a:xfrm>
           <a:prstGeom prst="straightConnector1">
             <a:avLst/>
           </a:prstGeom>
-          <a:ln w="165100">
+          <a:ln w="114300">
             <a:solidFill>
               <a:schemeClr val="tx1"/>
             </a:solidFill>
@@ -4931,8 +4916,8 @@
         </p:nvSpPr>
         <p:spPr>
           <a:xfrm>
-            <a:off x="18117942" y="6598392"/>
-            <a:ext cx="4526294" cy="707886"/>
+            <a:off x="18125058" y="6521728"/>
+            <a:ext cx="4891065" cy="769441"/>
           </a:xfrm>
           <a:prstGeom prst="rect">
             <a:avLst/>
@@ -4947,7 +4932,7 @@
           <a:p>
             <a:pPr algn="ctr"/>
             <a:r>
-              <a:rPr lang="en-US" altLang="ja-JP" sz="4000" dirty="0">
+              <a:rPr lang="en-US" altLang="ja-JP" sz="4400" dirty="0">
                 <a:latin typeface="Consolas" panose="020B0609020204030204" pitchFamily="49" charset="0"/>
               </a:rPr>
               <a:t>DawiyPluginBase</a:t>
@@ -4969,8 +4954,8 @@
         </p:nvSpPr>
         <p:spPr>
           <a:xfrm>
-            <a:off x="18340040" y="7946657"/>
-            <a:ext cx="4082098" cy="646331"/>
+            <a:off x="18049044" y="7827500"/>
+            <a:ext cx="4954459" cy="830997"/>
           </a:xfrm>
           <a:prstGeom prst="rect">
             <a:avLst/>
@@ -4985,12 +4970,36 @@
           <a:p>
             <a:pPr algn="ctr"/>
             <a:r>
-              <a:rPr lang="en-US" altLang="ja-JP" sz="3600" dirty="0">
+              <a:rPr lang="en-US" altLang="ja-JP" sz="4800" dirty="0">
                 <a:latin typeface="Consolas" panose="020B0609020204030204" pitchFamily="49" charset="0"/>
               </a:rPr>
-              <a:t>host : HostAPI</a:t>
-            </a:r>
-            <a:endParaRPr lang="ja-JP" altLang="en-US" sz="3600" dirty="0">
+              <a:t>host</a:t>
+            </a:r>
+            <a:r>
+              <a:rPr lang="en-US" altLang="ja-JP" sz="2000" dirty="0">
+                <a:latin typeface="Consolas" panose="020B0609020204030204" pitchFamily="49" charset="0"/>
+              </a:rPr>
+              <a:t> </a:t>
+            </a:r>
+            <a:r>
+              <a:rPr lang="en-US" altLang="ja-JP" sz="4800" dirty="0">
+                <a:latin typeface="Consolas" panose="020B0609020204030204" pitchFamily="49" charset="0"/>
+              </a:rPr>
+              <a:t>:</a:t>
+            </a:r>
+            <a:r>
+              <a:rPr lang="en-US" altLang="ja-JP" dirty="0">
+                <a:latin typeface="Consolas" panose="020B0609020204030204" pitchFamily="49" charset="0"/>
+              </a:rPr>
+              <a:t> </a:t>
+            </a:r>
+            <a:r>
+              <a:rPr lang="en-US" altLang="ja-JP" sz="4800" dirty="0">
+                <a:latin typeface="Consolas" panose="020B0609020204030204" pitchFamily="49" charset="0"/>
+              </a:rPr>
+              <a:t>HostAPI</a:t>
+            </a:r>
+            <a:endParaRPr lang="ja-JP" altLang="en-US" sz="4800" dirty="0">
               <a:latin typeface="Consolas" panose="020B0609020204030204" pitchFamily="49" charset="0"/>
             </a:endParaRPr>
           </a:p>
@@ -5010,7 +5019,7 @@
         </p:nvSpPr>
         <p:spPr>
           <a:xfrm>
-            <a:off x="18563506" y="5994711"/>
+            <a:off x="18715906" y="6013761"/>
             <a:ext cx="3513244" cy="584775"/>
           </a:xfrm>
           <a:prstGeom prst="rect">
@@ -5062,8 +5071,8 @@
         </p:nvCxnSpPr>
         <p:spPr>
           <a:xfrm flipH="1">
-            <a:off x="15444300" y="11561496"/>
-            <a:ext cx="6196499" cy="0"/>
+            <a:off x="16454910" y="11080455"/>
+            <a:ext cx="5185887" cy="0"/>
           </a:xfrm>
           <a:prstGeom prst="straightConnector1">
             <a:avLst/>
@@ -5106,15 +5115,15 @@
         <p:spPr>
           <a:xfrm>
             <a:off x="8581296" y="9167187"/>
-            <a:ext cx="6539383" cy="3597706"/>
+            <a:ext cx="7726124" cy="3597706"/>
           </a:xfrm>
           <a:prstGeom prst="roundRect">
             <a:avLst>
-              <a:gd name="adj" fmla="val 15009"/>
+              <a:gd name="adj" fmla="val 8125"/>
             </a:avLst>
           </a:prstGeom>
           <a:noFill/>
-          <a:ln w="165100">
+          <a:ln w="114300">
             <a:solidFill>
               <a:schemeClr val="tx1"/>
             </a:solidFill>
@@ -5167,13 +5176,13 @@
         </p:nvCxnSpPr>
         <p:spPr>
           <a:xfrm>
-            <a:off x="8581296" y="10713509"/>
-            <a:ext cx="6539383" cy="0"/>
+            <a:off x="8581296" y="10427759"/>
+            <a:ext cx="7726124" cy="0"/>
           </a:xfrm>
           <a:prstGeom prst="straightConnector1">
             <a:avLst/>
           </a:prstGeom>
-          <a:ln w="165100">
+          <a:ln w="114300">
             <a:solidFill>
               <a:schemeClr val="tx1"/>
             </a:solidFill>
@@ -5209,8 +5218,8 @@
         </p:nvSpPr>
         <p:spPr>
           <a:xfrm>
-            <a:off x="9915527" y="9882794"/>
-            <a:ext cx="3888213" cy="707886"/>
+            <a:off x="10513190" y="9615287"/>
+            <a:ext cx="3888213" cy="769441"/>
           </a:xfrm>
           <a:prstGeom prst="rect">
             <a:avLst/>
@@ -5225,7 +5234,7 @@
           <a:p>
             <a:pPr algn="ctr"/>
             <a:r>
-              <a:rPr lang="en-US" altLang="ja-JP" sz="4000" dirty="0">
+              <a:rPr lang="en-US" altLang="ja-JP" sz="4400" dirty="0">
                 <a:latin typeface="Consolas" panose="020B0609020204030204" pitchFamily="49" charset="0"/>
               </a:rPr>
               <a:t>IDawiyPlugin</a:t>
@@ -5247,8 +5256,8 @@
         </p:nvSpPr>
         <p:spPr>
           <a:xfrm>
-            <a:off x="16233158" y="10481218"/>
-            <a:ext cx="5017797" cy="646331"/>
+            <a:off x="16454910" y="9292822"/>
+            <a:ext cx="5215014" cy="1569660"/>
           </a:xfrm>
           <a:prstGeom prst="rect">
             <a:avLst/>
@@ -5261,9 +5270,18 @@
           </a:bodyPr>
           <a:lstStyle/>
           <a:p>
-            <a:r>
-              <a:rPr kumimoji="1" lang="ja-JP" altLang="en-US" sz="3600" dirty="0"/>
-              <a:t>実装（ルールを守る）</a:t>
+            <a:pPr algn="ctr"/>
+            <a:r>
+              <a:rPr kumimoji="1" lang="ja-JP" altLang="en-US" sz="4800" dirty="0"/>
+              <a:t>実装</a:t>
+            </a:r>
+            <a:endParaRPr kumimoji="1" lang="en-US" altLang="ja-JP" sz="4800" dirty="0"/>
+          </a:p>
+          <a:p>
+            <a:pPr algn="ctr"/>
+            <a:r>
+              <a:rPr kumimoji="1" lang="ja-JP" altLang="en-US" sz="4800" dirty="0"/>
+              <a:t>（ルールを守る）</a:t>
             </a:r>
           </a:p>
         </p:txBody>
@@ -5282,7 +5300,7 @@
         </p:nvSpPr>
         <p:spPr>
           <a:xfrm>
-            <a:off x="9167376" y="9355739"/>
+            <a:off x="9760434" y="9185848"/>
             <a:ext cx="5384517" cy="584775"/>
           </a:xfrm>
           <a:prstGeom prst="rect">
@@ -5334,13 +5352,13 @@
         </p:nvCxnSpPr>
         <p:spPr>
           <a:xfrm>
-            <a:off x="8581296" y="11570383"/>
-            <a:ext cx="6539383" cy="0"/>
+            <a:off x="8581296" y="11303683"/>
+            <a:ext cx="7726124" cy="0"/>
           </a:xfrm>
           <a:prstGeom prst="straightConnector1">
             <a:avLst/>
           </a:prstGeom>
-          <a:ln w="165100">
+          <a:ln w="114300">
             <a:solidFill>
               <a:schemeClr val="tx1"/>
             </a:solidFill>
@@ -5436,8 +5454,8 @@
         </p:nvSpPr>
         <p:spPr>
           <a:xfrm>
-            <a:off x="609828" y="10091947"/>
-            <a:ext cx="6930702" cy="2862322"/>
+            <a:off x="609828" y="9844297"/>
+            <a:ext cx="6930702" cy="3257815"/>
           </a:xfrm>
           <a:prstGeom prst="rect">
             <a:avLst/>
@@ -5450,6 +5468,11 @@
           </a:bodyPr>
           <a:lstStyle/>
           <a:p>
+            <a:pPr>
+              <a:lnSpc>
+                <a:spcPts val="5000"/>
+              </a:lnSpc>
+            </a:pPr>
             <a:r>
               <a:rPr lang="ja-JP" altLang="en-US" sz="3600" b="1" dirty="0"/>
               <a:t>凡例：</a:t>
@@ -5458,45 +5481,57 @@
           </a:p>
           <a:p>
             <a:pPr marL="628613" lvl="1" indent="-171440">
+              <a:lnSpc>
+                <a:spcPts val="5000"/>
+              </a:lnSpc>
               <a:buFont typeface="Arial" panose="020B0604020202020204" pitchFamily="34" charset="0"/>
               <a:buChar char="•"/>
             </a:pPr>
             <a:r>
               <a:rPr lang="ja-JP" altLang="en-US" sz="3600" dirty="0"/>
-              <a:t>　　　　：命令、所有</a:t>
+              <a:t>　　　　 ：命令、所有</a:t>
             </a:r>
             <a:endParaRPr lang="en-US" altLang="ja-JP" sz="3600" dirty="0"/>
           </a:p>
           <a:p>
             <a:pPr marL="628613" lvl="1" indent="-171440">
+              <a:lnSpc>
+                <a:spcPts val="5000"/>
+              </a:lnSpc>
               <a:buFont typeface="Arial" panose="020B0604020202020204" pitchFamily="34" charset="0"/>
               <a:buChar char="•"/>
             </a:pPr>
             <a:r>
               <a:rPr lang="ja-JP" altLang="en-US" sz="3600" dirty="0"/>
-              <a:t>　　　　：継承</a:t>
+              <a:t>　　　　 ：継承</a:t>
             </a:r>
             <a:endParaRPr lang="en-US" altLang="ja-JP" sz="3600" dirty="0"/>
           </a:p>
           <a:p>
             <a:pPr marL="628613" lvl="1" indent="-171440">
+              <a:lnSpc>
+                <a:spcPts val="5000"/>
+              </a:lnSpc>
               <a:buFont typeface="Arial" panose="020B0604020202020204" pitchFamily="34" charset="0"/>
               <a:buChar char="•"/>
             </a:pPr>
             <a:r>
               <a:rPr lang="ja-JP" altLang="en-US" sz="3600" dirty="0"/>
-              <a:t>　　　　：一時的な読み込み</a:t>
+              <a:t>　　　　 ：一時的な読み込み</a:t>
             </a:r>
             <a:endParaRPr lang="en-US" altLang="ja-JP" sz="3600" dirty="0"/>
           </a:p>
           <a:p>
             <a:pPr marL="628613" lvl="1" indent="-171440">
+              <a:lnSpc>
+                <a:spcPts val="5000"/>
+              </a:lnSpc>
               <a:buFont typeface="Arial" panose="020B0604020202020204" pitchFamily="34" charset="0"/>
               <a:buChar char="•"/>
             </a:pPr>
             <a:r>
               <a:rPr lang="ja-JP" altLang="en-US" sz="3600" dirty="0"/>
-              <a:t>　　　　：実装</a:t>
+              <a:t>　　　　 ：実装</a:t>
             </a:r>
           </a:p>
         </p:txBody>
@@ -5517,8 +5552,8 @@
         </p:nvCxnSpPr>
         <p:spPr>
           <a:xfrm>
-            <a:off x="21501728" y="8920129"/>
-            <a:ext cx="0" cy="2519442"/>
+            <a:off x="21520778" y="9416082"/>
+            <a:ext cx="0" cy="1966339"/>
           </a:xfrm>
           <a:prstGeom prst="straightConnector1">
             <a:avLst/>
@@ -5562,7 +5597,7 @@
         </p:nvCxnSpPr>
         <p:spPr>
           <a:xfrm>
-            <a:off x="1504928" y="10929909"/>
+            <a:off x="1504928" y="10815609"/>
             <a:ext cx="1667899" cy="0"/>
           </a:xfrm>
           <a:prstGeom prst="straightConnector1">
@@ -5607,7 +5642,7 @@
         </p:nvCxnSpPr>
         <p:spPr>
           <a:xfrm>
-            <a:off x="1510823" y="11490014"/>
+            <a:off x="1510823" y="11470964"/>
             <a:ext cx="1662004" cy="0"/>
           </a:xfrm>
           <a:prstGeom prst="straightConnector1">
@@ -5652,7 +5687,7 @@
         </p:nvCxnSpPr>
         <p:spPr>
           <a:xfrm>
-            <a:off x="1510823" y="12034173"/>
+            <a:off x="1510823" y="12110373"/>
             <a:ext cx="1662004" cy="0"/>
           </a:xfrm>
           <a:prstGeom prst="straightConnector1">
@@ -5697,7 +5732,7 @@
         </p:nvCxnSpPr>
         <p:spPr>
           <a:xfrm>
-            <a:off x="1510823" y="12564610"/>
+            <a:off x="1510823" y="12697960"/>
             <a:ext cx="1662004" cy="4869"/>
           </a:xfrm>
           <a:prstGeom prst="straightConnector1">
@@ -5726,6 +5761,67 @@
           </a:fontRef>
         </p:style>
       </p:cxnSp>
+      <p:sp>
+        <p:nvSpPr>
+          <p:cNvPr id="18" name="テキスト ボックス 17">
+            <a:extLst>
+              <a:ext uri="{FF2B5EF4-FFF2-40B4-BE49-F238E27FC236}">
+                <a16:creationId xmlns:a16="http://schemas.microsoft.com/office/drawing/2014/main" id="{F9C7D6B0-1972-DBC2-2488-91523DF2F28C}"/>
+              </a:ext>
+            </a:extLst>
+          </p:cNvPr>
+          <p:cNvSpPr txBox="1"/>
+          <p:nvPr/>
+        </p:nvSpPr>
+        <p:spPr>
+          <a:xfrm>
+            <a:off x="8673772" y="11364249"/>
+            <a:ext cx="7900742" cy="1323439"/>
+          </a:xfrm>
+          <a:prstGeom prst="rect">
+            <a:avLst/>
+          </a:prstGeom>
+          <a:noFill/>
+        </p:spPr>
+        <p:txBody>
+          <a:bodyPr wrap="square" rtlCol="0">
+            <a:spAutoFit/>
+          </a:bodyPr>
+          <a:lstStyle/>
+          <a:p>
+            <a:r>
+              <a:rPr lang="en-US" altLang="ja-JP" sz="4000" dirty="0">
+                <a:latin typeface="Consolas" panose="020B0609020204030204" pitchFamily="49" charset="0"/>
+              </a:rPr>
+              <a:t>onInit(host)</a:t>
+            </a:r>
+            <a:r>
+              <a:rPr lang="en-US" altLang="ja-JP" sz="4000" dirty="0"/>
+              <a:t> : </a:t>
+            </a:r>
+            <a:r>
+              <a:rPr lang="ja-JP" altLang="en-US" sz="4000" dirty="0"/>
+              <a:t>初期化時の処理</a:t>
+            </a:r>
+          </a:p>
+          <a:p>
+            <a:r>
+              <a:rPr lang="en-US" altLang="ja-JP" sz="4000" dirty="0">
+                <a:latin typeface="Consolas" panose="020B0609020204030204" pitchFamily="49" charset="0"/>
+              </a:rPr>
+              <a:t>render(container) </a:t>
+            </a:r>
+            <a:r>
+              <a:rPr lang="en-US" altLang="ja-JP" sz="4000" dirty="0"/>
+              <a:t>: </a:t>
+            </a:r>
+            <a:r>
+              <a:rPr lang="ja-JP" altLang="en-US" sz="4000" dirty="0"/>
+              <a:t>描画処理</a:t>
+            </a:r>
+          </a:p>
+        </p:txBody>
+      </p:sp>
     </p:spTree>
     <p:extLst>
       <p:ext uri="{BB962C8B-B14F-4D97-AF65-F5344CB8AC3E}">
@@ -5780,110 +5876,16 @@
         <a:srgbClr val="96607D"/>
       </a:folHlink>
     </a:clrScheme>
-    <a:fontScheme name="Office テーマ">
+    <a:fontScheme name="ユーザー定義 2">
       <a:majorFont>
-        <a:latin typeface="Aptos Display" panose="02110004020202020204"/>
-        <a:ea typeface=""/>
+        <a:latin typeface="モボ-Bold"/>
+        <a:ea typeface="モボ-Bold"/>
         <a:cs typeface=""/>
-        <a:font script="Jpan" typeface="游ゴシック Light"/>
-        <a:font script="Hang" typeface="맑은 고딕"/>
-        <a:font script="Hans" typeface="等线 Light"/>
-        <a:font script="Hant" typeface="新細明體"/>
-        <a:font script="Arab" typeface="Times New Roman"/>
-        <a:font script="Hebr" typeface="Times New Roman"/>
-        <a:font script="Thai" typeface="Angsana New"/>
-        <a:font script="Ethi" typeface="Nyala"/>
-        <a:font script="Beng" typeface="Vrinda"/>
-        <a:font script="Gujr" typeface="Shruti"/>
-        <a:font script="Khmr" typeface="MoolBoran"/>
-        <a:font script="Knda" typeface="Tunga"/>
-        <a:font script="Guru" typeface="Raavi"/>
-        <a:font script="Cans" typeface="Euphemia"/>
-        <a:font script="Cher" typeface="Plantagenet Cherokee"/>
-        <a:font script="Yiii" typeface="Microsoft Yi Baiti"/>
-        <a:font script="Tibt" typeface="Microsoft Himalaya"/>
-        <a:font script="Thaa" typeface="MV Boli"/>
-        <a:font script="Deva" typeface="Mangal"/>
-        <a:font script="Telu" typeface="Gautami"/>
-        <a:font script="Taml" typeface="Latha"/>
-        <a:font script="Syrc" typeface="Estrangelo Edessa"/>
-        <a:font script="Orya" typeface="Kalinga"/>
-        <a:font script="Mlym" typeface="Kartika"/>
-        <a:font script="Laoo" typeface="DokChampa"/>
-        <a:font script="Sinh" typeface="Iskoola Pota"/>
-        <a:font script="Mong" typeface="Mongolian Baiti"/>
-        <a:font script="Viet" typeface="Times New Roman"/>
-        <a:font script="Uigh" typeface="Microsoft Uighur"/>
-        <a:font script="Geor" typeface="Sylfaen"/>
-        <a:font script="Armn" typeface="Arial"/>
-        <a:font script="Bugi" typeface="Leelawadee UI"/>
-        <a:font script="Bopo" typeface="Microsoft JhengHei"/>
-        <a:font script="Java" typeface="Javanese Text"/>
-        <a:font script="Lisu" typeface="Segoe UI"/>
-        <a:font script="Mymr" typeface="Myanmar Text"/>
-        <a:font script="Nkoo" typeface="Ebrima"/>
-        <a:font script="Olck" typeface="Nirmala UI"/>
-        <a:font script="Osma" typeface="Ebrima"/>
-        <a:font script="Phag" typeface="Phagspa"/>
-        <a:font script="Syrn" typeface="Estrangelo Edessa"/>
-        <a:font script="Syrj" typeface="Estrangelo Edessa"/>
-        <a:font script="Syre" typeface="Estrangelo Edessa"/>
-        <a:font script="Sora" typeface="Nirmala UI"/>
-        <a:font script="Tale" typeface="Microsoft Tai Le"/>
-        <a:font script="Talu" typeface="Microsoft New Tai Lue"/>
-        <a:font script="Tfng" typeface="Ebrima"/>
       </a:majorFont>
       <a:minorFont>
-        <a:latin typeface="Aptos" panose="02110004020202020204"/>
-        <a:ea typeface=""/>
+        <a:latin typeface="モボ-Regular"/>
+        <a:ea typeface="モボ-Regular"/>
         <a:cs typeface=""/>
-        <a:font script="Jpan" typeface="游ゴシック"/>
-        <a:font script="Hang" typeface="맑은 고딕"/>
-        <a:font script="Hans" typeface="等线"/>
-        <a:font script="Hant" typeface="新細明體"/>
-        <a:font script="Arab" typeface="Arial"/>
-        <a:font script="Hebr" typeface="Arial"/>
-        <a:font script="Thai" typeface="Cordia New"/>
-        <a:font script="Ethi" typeface="Nyala"/>
-        <a:font script="Beng" typeface="Vrinda"/>
-        <a:font script="Gujr" typeface="Shruti"/>
-        <a:font script="Khmr" typeface="DaunPenh"/>
-        <a:font script="Knda" typeface="Tunga"/>
-        <a:font script="Guru" typeface="Raavi"/>
-        <a:font script="Cans" typeface="Euphemia"/>
-        <a:font script="Cher" typeface="Plantagenet Cherokee"/>
-        <a:font script="Yiii" typeface="Microsoft Yi Baiti"/>
-        <a:font script="Tibt" typeface="Microsoft Himalaya"/>
-        <a:font script="Thaa" typeface="MV Boli"/>
-        <a:font script="Deva" typeface="Mangal"/>
-        <a:font script="Telu" typeface="Gautami"/>
-        <a:font script="Taml" typeface="Latha"/>
-        <a:font script="Syrc" typeface="Estrangelo Edessa"/>
-        <a:font script="Orya" typeface="Kalinga"/>
-        <a:font script="Mlym" typeface="Kartika"/>
-        <a:font script="Laoo" typeface="DokChampa"/>
-        <a:font script="Sinh" typeface="Iskoola Pota"/>
-        <a:font script="Mong" typeface="Mongolian Baiti"/>
-        <a:font script="Viet" typeface="Arial"/>
-        <a:font script="Uigh" typeface="Microsoft Uighur"/>
-        <a:font script="Geor" typeface="Sylfaen"/>
-        <a:font script="Armn" typeface="Arial"/>
-        <a:font script="Bugi" typeface="Leelawadee UI"/>
-        <a:font script="Bopo" typeface="Microsoft JhengHei"/>
-        <a:font script="Java" typeface="Javanese Text"/>
-        <a:font script="Lisu" typeface="Segoe UI"/>
-        <a:font script="Mymr" typeface="Myanmar Text"/>
-        <a:font script="Nkoo" typeface="Ebrima"/>
-        <a:font script="Olck" typeface="Nirmala UI"/>
-        <a:font script="Osma" typeface="Ebrima"/>
-        <a:font script="Phag" typeface="Phagspa"/>
-        <a:font script="Syrn" typeface="Estrangelo Edessa"/>
-        <a:font script="Syrj" typeface="Estrangelo Edessa"/>
-        <a:font script="Syre" typeface="Estrangelo Edessa"/>
-        <a:font script="Sora" typeface="Nirmala UI"/>
-        <a:font script="Tale" typeface="Microsoft Tai Le"/>
-        <a:font script="Talu" typeface="Microsoft New Tai Lue"/>
-        <a:font script="Tfng" typeface="Ebrima"/>
       </a:minorFont>
     </a:fontScheme>
     <a:fmtScheme name="Office テーマ">

--- a/fig/class_diagram.pptx
+++ b/fig/class_diagram.pptx
@@ -254,7 +254,7 @@
           <a:p>
             <a:fld id="{F33DD510-3AD2-4414-BB4D-1B1B031E6710}" type="datetimeFigureOut">
               <a:rPr kumimoji="1" lang="ja-JP" altLang="en-US" smtClean="0"/>
-              <a:t>2026/2/11</a:t>
+              <a:t>2026/2/12</a:t>
             </a:fld>
             <a:endParaRPr kumimoji="1" lang="ja-JP" altLang="en-US"/>
           </a:p>
@@ -456,7 +456,7 @@
           <a:p>
             <a:fld id="{F33DD510-3AD2-4414-BB4D-1B1B031E6710}" type="datetimeFigureOut">
               <a:rPr kumimoji="1" lang="ja-JP" altLang="en-US" smtClean="0"/>
-              <a:t>2026/2/11</a:t>
+              <a:t>2026/2/12</a:t>
             </a:fld>
             <a:endParaRPr kumimoji="1" lang="ja-JP" altLang="en-US"/>
           </a:p>
@@ -668,7 +668,7 @@
           <a:p>
             <a:fld id="{F33DD510-3AD2-4414-BB4D-1B1B031E6710}" type="datetimeFigureOut">
               <a:rPr kumimoji="1" lang="ja-JP" altLang="en-US" smtClean="0"/>
-              <a:t>2026/2/11</a:t>
+              <a:t>2026/2/12</a:t>
             </a:fld>
             <a:endParaRPr kumimoji="1" lang="ja-JP" altLang="en-US"/>
           </a:p>
@@ -870,7 +870,7 @@
           <a:p>
             <a:fld id="{F33DD510-3AD2-4414-BB4D-1B1B031E6710}" type="datetimeFigureOut">
               <a:rPr kumimoji="1" lang="ja-JP" altLang="en-US" smtClean="0"/>
-              <a:t>2026/2/11</a:t>
+              <a:t>2026/2/12</a:t>
             </a:fld>
             <a:endParaRPr kumimoji="1" lang="ja-JP" altLang="en-US"/>
           </a:p>
@@ -1116,7 +1116,7 @@
           <a:p>
             <a:fld id="{F33DD510-3AD2-4414-BB4D-1B1B031E6710}" type="datetimeFigureOut">
               <a:rPr kumimoji="1" lang="ja-JP" altLang="en-US" smtClean="0"/>
-              <a:t>2026/2/11</a:t>
+              <a:t>2026/2/12</a:t>
             </a:fld>
             <a:endParaRPr kumimoji="1" lang="ja-JP" altLang="en-US"/>
           </a:p>
@@ -1412,7 +1412,7 @@
           <a:p>
             <a:fld id="{F33DD510-3AD2-4414-BB4D-1B1B031E6710}" type="datetimeFigureOut">
               <a:rPr kumimoji="1" lang="ja-JP" altLang="en-US" smtClean="0"/>
-              <a:t>2026/2/11</a:t>
+              <a:t>2026/2/12</a:t>
             </a:fld>
             <a:endParaRPr kumimoji="1" lang="ja-JP" altLang="en-US"/>
           </a:p>
@@ -1843,7 +1843,7 @@
           <a:p>
             <a:fld id="{F33DD510-3AD2-4414-BB4D-1B1B031E6710}" type="datetimeFigureOut">
               <a:rPr kumimoji="1" lang="ja-JP" altLang="en-US" smtClean="0"/>
-              <a:t>2026/2/11</a:t>
+              <a:t>2026/2/12</a:t>
             </a:fld>
             <a:endParaRPr kumimoji="1" lang="ja-JP" altLang="en-US"/>
           </a:p>
@@ -1961,7 +1961,7 @@
           <a:p>
             <a:fld id="{F33DD510-3AD2-4414-BB4D-1B1B031E6710}" type="datetimeFigureOut">
               <a:rPr kumimoji="1" lang="ja-JP" altLang="en-US" smtClean="0"/>
-              <a:t>2026/2/11</a:t>
+              <a:t>2026/2/12</a:t>
             </a:fld>
             <a:endParaRPr kumimoji="1" lang="ja-JP" altLang="en-US"/>
           </a:p>
@@ -2056,7 +2056,7 @@
           <a:p>
             <a:fld id="{F33DD510-3AD2-4414-BB4D-1B1B031E6710}" type="datetimeFigureOut">
               <a:rPr kumimoji="1" lang="ja-JP" altLang="en-US" smtClean="0"/>
-              <a:t>2026/2/11</a:t>
+              <a:t>2026/2/12</a:t>
             </a:fld>
             <a:endParaRPr kumimoji="1" lang="ja-JP" altLang="en-US"/>
           </a:p>
@@ -2365,7 +2365,7 @@
           <a:p>
             <a:fld id="{F33DD510-3AD2-4414-BB4D-1B1B031E6710}" type="datetimeFigureOut">
               <a:rPr kumimoji="1" lang="ja-JP" altLang="en-US" smtClean="0"/>
-              <a:t>2026/2/11</a:t>
+              <a:t>2026/2/12</a:t>
             </a:fld>
             <a:endParaRPr kumimoji="1" lang="ja-JP" altLang="en-US"/>
           </a:p>
@@ -2622,7 +2622,7 @@
           <a:p>
             <a:fld id="{F33DD510-3AD2-4414-BB4D-1B1B031E6710}" type="datetimeFigureOut">
               <a:rPr kumimoji="1" lang="ja-JP" altLang="en-US" smtClean="0"/>
-              <a:t>2026/2/11</a:t>
+              <a:t>2026/2/12</a:t>
             </a:fld>
             <a:endParaRPr kumimoji="1" lang="ja-JP" altLang="en-US"/>
           </a:p>
@@ -2867,7 +2867,7 @@
           <a:p>
             <a:fld id="{F33DD510-3AD2-4414-BB4D-1B1B031E6710}" type="datetimeFigureOut">
               <a:rPr kumimoji="1" lang="ja-JP" altLang="en-US" smtClean="0"/>
-              <a:t>2026/2/11</a:t>
+              <a:t>2026/2/12</a:t>
             </a:fld>
             <a:endParaRPr kumimoji="1" lang="ja-JP" altLang="en-US"/>
           </a:p>
@@ -5489,7 +5489,7 @@
             </a:pPr>
             <a:r>
               <a:rPr lang="ja-JP" altLang="en-US" sz="3600" dirty="0"/>
-              <a:t>　　　　 ：命令、所有</a:t>
+              <a:t>　　　　 ：命令，所有</a:t>
             </a:r>
             <a:endParaRPr lang="en-US" altLang="ja-JP" sz="3600" dirty="0"/>
           </a:p>
